--- a/docs/洲遊幣Lite_員工手冊_一般版_雙語.pptx
+++ b/docs/洲遊幣Lite_員工手冊_一般版_雙語.pptx
@@ -5568,7 +5568,7 @@
                 <a:ea typeface="Microsoft JhengHei" pitchFamily="34" charset="-122"/>
                 <a:cs typeface="Microsoft JhengHei" pitchFamily="34" charset="-120"/>
               </a:rPr>
-              <a:t>🟡</a:t>
+              <a:t>📩</a:t>
             </a:r>
             <a:endParaRPr lang="en-US" sz="1500" dirty="0"/>
           </a:p>
@@ -5607,7 +5607,7 @@
                 <a:ea typeface="Microsoft JhengHei" pitchFamily="34" charset="-122"/>
                 <a:cs typeface="Microsoft JhengHei" pitchFamily="34" charset="-120"/>
               </a:rPr>
-              <a:t>高雄的獎　</a:t>
+              <a:t>有優惠券　</a:t>
             </a:r>
             <a:pPr indent="0" marL="0">
               <a:buNone/>
@@ -5621,7 +5621,7 @@
                 <a:ea typeface="Microsoft JhengHei" pitchFamily="34" charset="-122"/>
                 <a:cs typeface="Microsoft JhengHei" pitchFamily="34" charset="-120"/>
               </a:rPr>
-              <a:t>Kaohsiung</a:t>
+              <a:t>Coupon Issued</a:t>
             </a:r>
             <a:endParaRPr lang="en-US" sz="1400" dirty="0"/>
           </a:p>
@@ -5743,7 +5743,7 @@
                 <a:ea typeface="Microsoft JhengHei" pitchFamily="34" charset="-122"/>
                 <a:cs typeface="Microsoft JhengHei" pitchFamily="34" charset="-120"/>
               </a:rPr>
-              <a:t>🔵</a:t>
+              <a:t>📞</a:t>
             </a:r>
             <a:endParaRPr lang="en-US" sz="1500" dirty="0"/>
           </a:p>
@@ -5782,7 +5782,7 @@
                 <a:ea typeface="Microsoft JhengHei" pitchFamily="34" charset="-122"/>
                 <a:cs typeface="Microsoft JhengHei" pitchFamily="34" charset="-120"/>
               </a:rPr>
-              <a:t>臺北的獎　</a:t>
+              <a:t>沒有券　</a:t>
             </a:r>
             <a:pPr indent="0" marL="0">
               <a:buNone/>
@@ -5796,7 +5796,7 @@
                 <a:ea typeface="Microsoft JhengHei" pitchFamily="34" charset="-122"/>
                 <a:cs typeface="Microsoft JhengHei" pitchFamily="34" charset="-120"/>
               </a:rPr>
-              <a:t>Taipei</a:t>
+              <a:t>Follow-Up</a:t>
             </a:r>
             <a:endParaRPr lang="en-US" sz="1400" dirty="0"/>
           </a:p>
@@ -5838,8 +5838,8 @@
                 <a:ea typeface="Microsoft JhengHei" pitchFamily="34" charset="-122"/>
                 <a:cs typeface="Microsoft JhengHei" pitchFamily="34" charset="-120"/>
               </a:rPr>
-              <a:t>不發券，臺北同仁主動聯繫
-客人沒有券是正常的
+              <a:t>臺北全部＋高雄兩項住宿大獎
+該館同仁主動聯繫，不核銷
 </a:t>
             </a:r>
             <a:pPr indent="0" marL="0">
@@ -5857,7 +5857,7 @@
                 <a:ea typeface="Microsoft JhengHei" pitchFamily="34" charset="-122"/>
                 <a:cs typeface="Microsoft JhengHei" pitchFamily="34" charset="-120"/>
               </a:rPr>
-              <a:t>No coupon — Taipei team follows up</a:t>
+              <a:t>Taipei + 2 KH room prizes — never redeem</a:t>
             </a:r>
             <a:endParaRPr lang="en-US" sz="1050" dirty="0"/>
           </a:p>
@@ -6883,7 +6883,7 @@
                 <a:ea typeface="Microsoft JhengHei" pitchFamily="34" charset="-122"/>
                 <a:cs typeface="Microsoft JhengHei" pitchFamily="34" charset="-120"/>
               </a:rPr>
-              <a:t>⭐ 兩館的獎，領法不一樣</a:t>
+              <a:t>⭐ 兩種領獎方式</a:t>
             </a:r>
             <a:endParaRPr lang="en-US" sz="1350" dirty="0"/>
           </a:p>
@@ -6922,7 +6922,7 @@
                 <a:ea typeface="Microsoft JhengHei" pitchFamily="34" charset="-122"/>
                 <a:cs typeface="Microsoft JhengHei" pitchFamily="34" charset="-120"/>
               </a:rPr>
-              <a:t>Two Hotels, Two Redemption Flows</a:t>
+              <a:t>Two Ways Prizes Are Claimed</a:t>
             </a:r>
             <a:endParaRPr lang="en-US" sz="950" dirty="0"/>
           </a:p>
@@ -7476,7 +7476,7 @@
                 <a:ea typeface="Microsoft JhengHei" pitchFamily="34" charset="-122"/>
                 <a:cs typeface="Microsoft JhengHei" pitchFamily="34" charset="-120"/>
               </a:rPr>
-              <a:t>第 4 章是本次最容易搞錯的部分，請務必看完。
+              <a:t>第 4 章是本次最容易搞錯的部分（領獎方式看獎品、不看飯店），請務必看完。
 </a:t>
             </a:r>
             <a:pPr indent="0" marL="0">
@@ -10569,7 +10569,7 @@
                 <a:ea typeface="Microsoft JhengHei" pitchFamily="34" charset="-122"/>
                 <a:cs typeface="Microsoft JhengHei" pitchFamily="34" charset="-120"/>
               </a:rPr>
-              <a:t>四、⭐ 兩館的獎，領法不一樣</a:t>
+              <a:t>四、⭐ 兩種領獎方式</a:t>
             </a:r>
             <a:endParaRPr lang="en-US" sz="2200" dirty="0"/>
           </a:p>
@@ -10608,7 +10608,7 @@
                 <a:ea typeface="Microsoft JhengHei" pitchFamily="34" charset="-122"/>
                 <a:cs typeface="Microsoft JhengHei" pitchFamily="34" charset="-120"/>
               </a:rPr>
-              <a:t>Two Hotels, Two Redemption Flows　—　最重要的一頁 / The most important page</a:t>
+              <a:t>Two Ways Prizes Are Claimed　—　最重要的一頁 / The most important page</a:t>
             </a:r>
             <a:endParaRPr lang="en-US" sz="1150" dirty="0"/>
           </a:p>
@@ -10714,18 +10714,78 @@
       </p:sp>
       <p:sp>
         <p:nvSpPr>
-          <p:cNvPr id="7" name="Shape 5"/>
-          <p:cNvSpPr/>
-          <p:nvPr/>
-        </p:nvSpPr>
-        <p:spPr>
-          <a:xfrm>
-            <a:off x="502920" y="1234440"/>
-            <a:ext cx="3931920" cy="2651760"/>
+          <p:cNvPr id="7" name="Text 5"/>
+          <p:cNvSpPr/>
+          <p:nvPr/>
+        </p:nvSpPr>
+        <p:spPr>
+          <a:xfrm>
+            <a:off x="640080" y="1170432"/>
+            <a:ext cx="7863840" cy="457200"/>
+          </a:xfrm>
+          <a:prstGeom prst="rect">
+            <a:avLst/>
+          </a:prstGeom>
+          <a:noFill/>
+          <a:ln/>
+        </p:spPr>
+        <p:txBody>
+          <a:bodyPr wrap="square" rtlCol="0" anchor="ctr"/>
+          <a:lstStyle/>
+          <a:p>
+            <a:pPr indent="0" marL="0">
+              <a:lnSpc>
+                <a:spcPts val="1700"/>
+              </a:lnSpc>
+              <a:buNone/>
+            </a:pPr>
+            <a:r>
+              <a:rPr lang="en-US" sz="1250" b="1" dirty="0">
+                <a:solidFill>
+                  <a:srgbClr val="935D08"/>
+                </a:solidFill>
+                <a:latin typeface="Microsoft JhengHei" pitchFamily="34" charset="0"/>
+                <a:ea typeface="Microsoft JhengHei" pitchFamily="34" charset="-122"/>
+                <a:cs typeface="Microsoft JhengHei" pitchFamily="34" charset="-120"/>
+              </a:rPr>
+              <a:t>看【客人手上有沒有優惠券】，不是看哪一家飯店。
+</a:t>
+            </a:r>
+            <a:pPr indent="0" marL="0">
+              <a:lnSpc>
+                <a:spcPts val="1700"/>
+              </a:lnSpc>
+              <a:buNone/>
+            </a:pPr>
+            <a:r>
+              <a:rPr lang="en-US" sz="1000" dirty="0">
+                <a:solidFill>
+                  <a:srgbClr val="6E6A63"/>
+                </a:solidFill>
+                <a:latin typeface="Microsoft JhengHei" pitchFamily="34" charset="0"/>
+                <a:ea typeface="Microsoft JhengHei" pitchFamily="34" charset="-122"/>
+                <a:cs typeface="Microsoft JhengHei" pitchFamily="34" charset="-120"/>
+              </a:rPr>
+              <a:t>What matters is whether the guest has a coupon — not which hotel the prize is from.</a:t>
+            </a:r>
+            <a:endParaRPr lang="en-US" sz="1250" dirty="0"/>
+          </a:p>
+        </p:txBody>
+      </p:sp>
+      <p:sp>
+        <p:nvSpPr>
+          <p:cNvPr id="8" name="Shape 6"/>
+          <p:cNvSpPr/>
+          <p:nvPr/>
+        </p:nvSpPr>
+        <p:spPr>
+          <a:xfrm>
+            <a:off x="502920" y="1691640"/>
+            <a:ext cx="3931920" cy="2286000"/>
           </a:xfrm>
           <a:prstGeom prst="roundRect">
             <a:avLst>
-              <a:gd name="adj" fmla="val 3448"/>
+              <a:gd name="adj" fmla="val 4000"/>
             </a:avLst>
           </a:prstGeom>
           <a:solidFill>
@@ -10741,33 +10801,33 @@
       </p:sp>
       <p:sp>
         <p:nvSpPr>
-          <p:cNvPr id="8" name="Text 6"/>
-          <p:cNvSpPr/>
-          <p:nvPr/>
-        </p:nvSpPr>
-        <p:spPr>
-          <a:xfrm>
-            <a:off x="713232" y="1371600"/>
-            <a:ext cx="3566160" cy="457200"/>
-          </a:xfrm>
-          <a:prstGeom prst="rect">
-            <a:avLst/>
-          </a:prstGeom>
-          <a:noFill/>
-          <a:ln/>
-        </p:spPr>
-        <p:txBody>
-          <a:bodyPr wrap="square" rtlCol="0" anchor="ctr"/>
-          <a:lstStyle/>
-          <a:p>
-            <a:pPr indent="0" marL="0">
-              <a:lnSpc>
-                <a:spcPts val="1500"/>
-              </a:lnSpc>
-              <a:buNone/>
-            </a:pPr>
-            <a:r>
-              <a:rPr lang="en-US" sz="1500" b="1" dirty="0">
+          <p:cNvPr id="9" name="Text 7"/>
+          <p:cNvSpPr/>
+          <p:nvPr/>
+        </p:nvSpPr>
+        <p:spPr>
+          <a:xfrm>
+            <a:off x="713232" y="1810512"/>
+            <a:ext cx="3566160" cy="438912"/>
+          </a:xfrm>
+          <a:prstGeom prst="rect">
+            <a:avLst/>
+          </a:prstGeom>
+          <a:noFill/>
+          <a:ln/>
+        </p:spPr>
+        <p:txBody>
+          <a:bodyPr wrap="square" rtlCol="0" anchor="ctr"/>
+          <a:lstStyle/>
+          <a:p>
+            <a:pPr indent="0" marL="0">
+              <a:lnSpc>
+                <a:spcPts val="1400"/>
+              </a:lnSpc>
+              <a:buNone/>
+            </a:pPr>
+            <a:r>
+              <a:rPr lang="en-US" sz="1400" b="1" dirty="0">
                 <a:solidFill>
                   <a:srgbClr val="7A5B12"/>
                 </a:solidFill>
@@ -10775,17 +10835,17 @@
                 <a:ea typeface="Microsoft JhengHei" pitchFamily="34" charset="-122"/>
                 <a:cs typeface="Microsoft JhengHei" pitchFamily="34" charset="-120"/>
               </a:rPr>
-              <a:t>🟡  高雄洲際酒店的獎
+              <a:t>📩  有優惠券（多數獎項）
 </a:t>
             </a:r>
             <a:pPr indent="0" marL="0">
               <a:lnSpc>
-                <a:spcPts val="1500"/>
-              </a:lnSpc>
-              <a:buNone/>
-            </a:pPr>
-            <a:r>
-              <a:rPr lang="en-US" sz="950" dirty="0">
+                <a:spcPts val="1400"/>
+              </a:lnSpc>
+              <a:buNone/>
+            </a:pPr>
+            <a:r>
+              <a:rPr lang="en-US" sz="900" dirty="0">
                 <a:solidFill>
                   <a:srgbClr val="7A5B12"/>
                 </a:solidFill>
@@ -10793,22 +10853,22 @@
                 <a:ea typeface="Microsoft JhengHei" pitchFamily="34" charset="-122"/>
                 <a:cs typeface="Microsoft JhengHei" pitchFamily="34" charset="-120"/>
               </a:rPr>
-              <a:t>InterContinental Kaohsiung Prizes</a:t>
-            </a:r>
-            <a:endParaRPr lang="en-US" sz="1500" dirty="0"/>
-          </a:p>
-        </p:txBody>
-      </p:sp>
-      <p:sp>
-        <p:nvSpPr>
-          <p:cNvPr id="9" name="Text 7"/>
-          <p:cNvSpPr/>
-          <p:nvPr/>
-        </p:nvSpPr>
-        <p:spPr>
-          <a:xfrm>
-            <a:off x="713232" y="1901952"/>
-            <a:ext cx="3566160" cy="1874520"/>
+              <a:t>Coupon Issued — most prizes</a:t>
+            </a:r>
+            <a:endParaRPr lang="en-US" sz="1400" dirty="0"/>
+          </a:p>
+        </p:txBody>
+      </p:sp>
+      <p:sp>
+        <p:nvSpPr>
+          <p:cNvPr id="10" name="Text 8"/>
+          <p:cNvSpPr/>
+          <p:nvPr/>
+        </p:nvSpPr>
+        <p:spPr>
+          <a:xfrm>
+            <a:off x="713232" y="2286000"/>
+            <a:ext cx="3566160" cy="1600200"/>
           </a:xfrm>
           <a:prstGeom prst="rect">
             <a:avLst/>
@@ -10827,7 +10887,7 @@
               <a:buNone/>
             </a:pPr>
             <a:r>
-              <a:rPr lang="en-US" sz="1150" b="1" dirty="0">
+              <a:rPr lang="en-US" sz="1100" b="1" dirty="0">
                 <a:solidFill>
                   <a:srgbClr val="3D3935"/>
                 </a:solidFill>
@@ -10835,7 +10895,7 @@
                 <a:ea typeface="Microsoft JhengHei" pitchFamily="34" charset="-122"/>
                 <a:cs typeface="Microsoft JhengHei" pitchFamily="34" charset="-120"/>
               </a:rPr>
-              <a:t>優惠券自動發送到客人的 LINE 聊天室
+              <a:t>券在中獎當下自動進客人的 LINE
 </a:t>
             </a:r>
             <a:pPr indent="0" marL="0">
@@ -10845,7 +10905,7 @@
               <a:buNone/>
             </a:pPr>
             <a:r>
-              <a:rPr lang="en-US" sz="900" dirty="0">
+              <a:rPr lang="en-US" sz="850" dirty="0">
                 <a:solidFill>
                   <a:srgbClr val="7A5B12"/>
                 </a:solidFill>
@@ -10853,7 +10913,7 @@
                 <a:ea typeface="Microsoft JhengHei" pitchFamily="34" charset="-122"/>
                 <a:cs typeface="Microsoft JhengHei" pitchFamily="34" charset="-120"/>
               </a:rPr>
-              <a:t>A coupon is delivered to the guest's LINE chat automatically.
+              <a:t>Delivered to their LINE chat automatically
 </a:t>
             </a:r>
             <a:pPr indent="0" marL="0">
@@ -10871,7 +10931,7 @@
                 <a:ea typeface="Microsoft JhengHei" pitchFamily="34" charset="-122"/>
                 <a:cs typeface="Microsoft JhengHei" pitchFamily="34" charset="-120"/>
               </a:rPr>
-              <a:t>▸ 客人自行在 LINE 中點選領取
+              <a:t>▸ 客人自行點選領取（限一次）
 </a:t>
             </a:r>
             <a:pPr indent="0" marL="0">
@@ -10881,7 +10941,7 @@
               <a:buNone/>
             </a:pPr>
             <a:r>
-              <a:rPr lang="en-US" sz="850" dirty="0">
+              <a:rPr lang="en-US" sz="800" dirty="0">
                 <a:solidFill>
                   <a:srgbClr val="7A5B12"/>
                 </a:solidFill>
@@ -10889,7 +10949,7 @@
                 <a:ea typeface="Microsoft JhengHei" pitchFamily="34" charset="-122"/>
                 <a:cs typeface="Microsoft JhengHei" pitchFamily="34" charset="-120"/>
               </a:rPr>
-              <a:t>   The guest claims it themselves in LINE
+              <a:t>   Claimed by the guest, once only
 </a:t>
             </a:r>
             <a:pPr indent="0" marL="0">
@@ -10907,7 +10967,7 @@
                 <a:ea typeface="Microsoft JhengHei" pitchFamily="34" charset="-122"/>
                 <a:cs typeface="Microsoft JhengHei" pitchFamily="34" charset="-120"/>
               </a:rPr>
-              <a:t>▸ 每張券只能領取一次
+              <a:t>▸ 到店出示兌換碼 → 櫃檯核銷
 </a:t>
             </a:r>
             <a:pPr indent="0" marL="0">
@@ -10917,7 +10977,7 @@
               <a:buNone/>
             </a:pPr>
             <a:r>
-              <a:rPr lang="en-US" sz="850" dirty="0">
+              <a:rPr lang="en-US" sz="800" dirty="0">
                 <a:solidFill>
                   <a:srgbClr val="7A5B12"/>
                 </a:solidFill>
@@ -10925,62 +10985,26 @@
                 <a:ea typeface="Microsoft JhengHei" pitchFamily="34" charset="-122"/>
                 <a:cs typeface="Microsoft JhengHei" pitchFamily="34" charset="-120"/>
               </a:rPr>
-              <a:t>   Each coupon can only be claimed once
-</a:t>
-            </a:r>
-            <a:pPr indent="0" marL="0">
-              <a:lnSpc>
-                <a:spcPts val="1300"/>
-              </a:lnSpc>
-              <a:buNone/>
-            </a:pPr>
-            <a:r>
-              <a:rPr lang="en-US" sz="1050" dirty="0">
-                <a:solidFill>
-                  <a:srgbClr val="3D3935"/>
-                </a:solidFill>
-                <a:latin typeface="Microsoft JhengHei" pitchFamily="34" charset="0"/>
-                <a:ea typeface="Microsoft JhengHei" pitchFamily="34" charset="-122"/>
-                <a:cs typeface="Microsoft JhengHei" pitchFamily="34" charset="-120"/>
-              </a:rPr>
-              <a:t>▸ 到店出示兌換碼，櫃檯核銷
-</a:t>
-            </a:r>
-            <a:pPr indent="0" marL="0">
-              <a:lnSpc>
-                <a:spcPts val="1300"/>
-              </a:lnSpc>
-              <a:buNone/>
-            </a:pPr>
-            <a:r>
-              <a:rPr lang="en-US" sz="850" dirty="0">
-                <a:solidFill>
-                  <a:srgbClr val="7A5B12"/>
-                </a:solidFill>
-                <a:latin typeface="Microsoft JhengHei" pitchFamily="34" charset="0"/>
-                <a:ea typeface="Microsoft JhengHei" pitchFamily="34" charset="-122"/>
-                <a:cs typeface="Microsoft JhengHei" pitchFamily="34" charset="-120"/>
-              </a:rPr>
-              <a:t>   Present the code at the counter</a:t>
-            </a:r>
-            <a:endParaRPr lang="en-US" sz="1150" dirty="0"/>
-          </a:p>
-        </p:txBody>
-      </p:sp>
-      <p:sp>
-        <p:nvSpPr>
-          <p:cNvPr id="10" name="Shape 8"/>
-          <p:cNvSpPr/>
-          <p:nvPr/>
-        </p:nvSpPr>
-        <p:spPr>
-          <a:xfrm>
-            <a:off x="4709160" y="1234440"/>
-            <a:ext cx="3931920" cy="2651760"/>
+              <a:t>   Present the code → redeem at counter</a:t>
+            </a:r>
+            <a:endParaRPr lang="en-US" sz="1100" dirty="0"/>
+          </a:p>
+        </p:txBody>
+      </p:sp>
+      <p:sp>
+        <p:nvSpPr>
+          <p:cNvPr id="11" name="Shape 9"/>
+          <p:cNvSpPr/>
+          <p:nvPr/>
+        </p:nvSpPr>
+        <p:spPr>
+          <a:xfrm>
+            <a:off x="4709160" y="1691640"/>
+            <a:ext cx="3931920" cy="2286000"/>
           </a:xfrm>
           <a:prstGeom prst="roundRect">
             <a:avLst>
-              <a:gd name="adj" fmla="val 3448"/>
+              <a:gd name="adj" fmla="val 4000"/>
             </a:avLst>
           </a:prstGeom>
           <a:solidFill>
@@ -10996,33 +11020,33 @@
       </p:sp>
       <p:sp>
         <p:nvSpPr>
-          <p:cNvPr id="11" name="Text 9"/>
-          <p:cNvSpPr/>
-          <p:nvPr/>
-        </p:nvSpPr>
-        <p:spPr>
-          <a:xfrm>
-            <a:off x="4919472" y="1371600"/>
-            <a:ext cx="3566160" cy="457200"/>
-          </a:xfrm>
-          <a:prstGeom prst="rect">
-            <a:avLst/>
-          </a:prstGeom>
-          <a:noFill/>
-          <a:ln/>
-        </p:spPr>
-        <p:txBody>
-          <a:bodyPr wrap="square" rtlCol="0" anchor="ctr"/>
-          <a:lstStyle/>
-          <a:p>
-            <a:pPr indent="0" marL="0">
-              <a:lnSpc>
-                <a:spcPts val="1500"/>
-              </a:lnSpc>
-              <a:buNone/>
-            </a:pPr>
-            <a:r>
-              <a:rPr lang="en-US" sz="1500" b="1" dirty="0">
+          <p:cNvPr id="12" name="Text 10"/>
+          <p:cNvSpPr/>
+          <p:nvPr/>
+        </p:nvSpPr>
+        <p:spPr>
+          <a:xfrm>
+            <a:off x="4919472" y="1810512"/>
+            <a:ext cx="3566160" cy="438912"/>
+          </a:xfrm>
+          <a:prstGeom prst="rect">
+            <a:avLst/>
+          </a:prstGeom>
+          <a:noFill/>
+          <a:ln/>
+        </p:spPr>
+        <p:txBody>
+          <a:bodyPr wrap="square" rtlCol="0" anchor="ctr"/>
+          <a:lstStyle/>
+          <a:p>
+            <a:pPr indent="0" marL="0">
+              <a:lnSpc>
+                <a:spcPts val="1400"/>
+              </a:lnSpc>
+              <a:buNone/>
+            </a:pPr>
+            <a:r>
+              <a:rPr lang="en-US" sz="1400" b="1" dirty="0">
                 <a:solidFill>
                   <a:srgbClr val="35536F"/>
                 </a:solidFill>
@@ -11030,17 +11054,17 @@
                 <a:ea typeface="Microsoft JhengHei" pitchFamily="34" charset="-122"/>
                 <a:cs typeface="Microsoft JhengHei" pitchFamily="34" charset="-120"/>
               </a:rPr>
-              <a:t>🔵  臺北洲際酒店的獎
+              <a:t>📞  沒有券・專人聯繫
 </a:t>
             </a:r>
             <a:pPr indent="0" marL="0">
               <a:lnSpc>
-                <a:spcPts val="1500"/>
-              </a:lnSpc>
-              <a:buNone/>
-            </a:pPr>
-            <a:r>
-              <a:rPr lang="en-US" sz="950" dirty="0">
+                <a:spcPts val="1400"/>
+              </a:lnSpc>
+              <a:buNone/>
+            </a:pPr>
+            <a:r>
+              <a:rPr lang="en-US" sz="900" dirty="0">
                 <a:solidFill>
                   <a:srgbClr val="35536F"/>
                 </a:solidFill>
@@ -11048,22 +11072,22 @@
                 <a:ea typeface="Microsoft JhengHei" pitchFamily="34" charset="-122"/>
                 <a:cs typeface="Microsoft JhengHei" pitchFamily="34" charset="-120"/>
               </a:rPr>
-              <a:t>InterContinental Taipei Prizes</a:t>
-            </a:r>
-            <a:endParaRPr lang="en-US" sz="1500" dirty="0"/>
-          </a:p>
-        </p:txBody>
-      </p:sp>
-      <p:sp>
-        <p:nvSpPr>
-          <p:cNvPr id="12" name="Text 10"/>
-          <p:cNvSpPr/>
-          <p:nvPr/>
-        </p:nvSpPr>
-        <p:spPr>
-          <a:xfrm>
-            <a:off x="4919472" y="1901952"/>
-            <a:ext cx="3566160" cy="1874520"/>
+              <a:t>No Coupon — direct follow-up</a:t>
+            </a:r>
+            <a:endParaRPr lang="en-US" sz="1400" dirty="0"/>
+          </a:p>
+        </p:txBody>
+      </p:sp>
+      <p:sp>
+        <p:nvSpPr>
+          <p:cNvPr id="13" name="Text 11"/>
+          <p:cNvSpPr/>
+          <p:nvPr/>
+        </p:nvSpPr>
+        <p:spPr>
+          <a:xfrm>
+            <a:off x="4919472" y="2286000"/>
+            <a:ext cx="3566160" cy="1600200"/>
           </a:xfrm>
           <a:prstGeom prst="rect">
             <a:avLst/>
@@ -11082,7 +11106,7 @@
               <a:buNone/>
             </a:pPr>
             <a:r>
-              <a:rPr lang="en-US" sz="1150" b="1" dirty="0">
+              <a:rPr lang="en-US" sz="1100" b="1" dirty="0">
                 <a:solidFill>
                   <a:srgbClr val="3D3935"/>
                 </a:solidFill>
@@ -11090,7 +11114,7 @@
                 <a:ea typeface="Microsoft JhengHei" pitchFamily="34" charset="-122"/>
                 <a:cs typeface="Microsoft JhengHei" pitchFamily="34" charset="-120"/>
               </a:rPr>
-              <a:t>不會發送優惠券，改由專人聯繫
+              <a:t>臺北全部獎項 ＋ 高雄的兩項住宿大獎
 </a:t>
             </a:r>
             <a:pPr indent="0" marL="0">
@@ -11100,7 +11124,7 @@
               <a:buNone/>
             </a:pPr>
             <a:r>
-              <a:rPr lang="en-US" sz="900" dirty="0">
+              <a:rPr lang="en-US" sz="850" dirty="0">
                 <a:solidFill>
                   <a:srgbClr val="35536F"/>
                 </a:solidFill>
@@ -11108,7 +11132,7 @@
                 <a:ea typeface="Microsoft JhengHei" pitchFamily="34" charset="-122"/>
                 <a:cs typeface="Microsoft JhengHei" pitchFamily="34" charset="-120"/>
               </a:rPr>
-              <a:t>No coupon is issued; a colleague follows up directly.
+              <a:t>All Taipei prizes + two Kaohsiung room prizes
 </a:t>
             </a:r>
             <a:pPr indent="0" marL="0">
@@ -11136,7 +11160,7 @@
               <a:buNone/>
             </a:pPr>
             <a:r>
-              <a:rPr lang="en-US" sz="850" dirty="0">
+              <a:rPr lang="en-US" sz="800" dirty="0">
                 <a:solidFill>
                   <a:srgbClr val="35536F"/>
                 </a:solidFill>
@@ -11144,7 +11168,7 @@
                 <a:ea typeface="Microsoft JhengHei" pitchFamily="34" charset="-122"/>
                 <a:cs typeface="Microsoft JhengHei" pitchFamily="34" charset="-120"/>
               </a:rPr>
-              <a:t>   Guest submits name, mobile and email
+              <a:t>   Guest submits their contact details
 </a:t>
             </a:r>
             <a:pPr indent="0" marL="0">
@@ -11162,7 +11186,7 @@
                 <a:ea typeface="Microsoft JhengHei" pitchFamily="34" charset="-122"/>
                 <a:cs typeface="Microsoft JhengHei" pitchFamily="34" charset="-120"/>
               </a:rPr>
-              <a:t>▸ 臺北洲際同仁主動聯繫安排
+              <a:t>▸ 該館同仁主動聯繫安排
 </a:t>
             </a:r>
             <a:pPr indent="0" marL="0">
@@ -11172,7 +11196,7 @@
               <a:buNone/>
             </a:pPr>
             <a:r>
-              <a:rPr lang="en-US" sz="850" dirty="0">
+              <a:rPr lang="en-US" sz="800" dirty="0">
                 <a:solidFill>
                   <a:srgbClr val="35536F"/>
                 </a:solidFill>
@@ -11180,62 +11204,26 @@
                 <a:ea typeface="Microsoft JhengHei" pitchFamily="34" charset="-122"/>
                 <a:cs typeface="Microsoft JhengHei" pitchFamily="34" charset="-120"/>
               </a:rPr>
-              <a:t>   The Taipei team contacts them directly
-</a:t>
-            </a:r>
-            <a:pPr indent="0" marL="0">
-              <a:lnSpc>
-                <a:spcPts val="1300"/>
-              </a:lnSpc>
-              <a:buNone/>
-            </a:pPr>
-            <a:r>
-              <a:rPr lang="en-US" sz="1050" dirty="0">
-                <a:solidFill>
-                  <a:srgbClr val="3D3935"/>
-                </a:solidFill>
-                <a:latin typeface="Microsoft JhengHei" pitchFamily="34" charset="0"/>
-                <a:ea typeface="Microsoft JhengHei" pitchFamily="34" charset="-122"/>
-                <a:cs typeface="Microsoft JhengHei" pitchFamily="34" charset="-120"/>
-              </a:rPr>
-              <a:t>▸ 客人手上沒有券，這是正常的
-</a:t>
-            </a:r>
-            <a:pPr indent="0" marL="0">
-              <a:lnSpc>
-                <a:spcPts val="1300"/>
-              </a:lnSpc>
-              <a:buNone/>
-            </a:pPr>
-            <a:r>
-              <a:rPr lang="en-US" sz="850" dirty="0">
-                <a:solidFill>
-                  <a:srgbClr val="35536F"/>
-                </a:solidFill>
-                <a:latin typeface="Microsoft JhengHei" pitchFamily="34" charset="0"/>
-                <a:ea typeface="Microsoft JhengHei" pitchFamily="34" charset="-122"/>
-                <a:cs typeface="Microsoft JhengHei" pitchFamily="34" charset="-120"/>
-              </a:rPr>
-              <a:t>   Having no coupon is expected</a:t>
-            </a:r>
-            <a:endParaRPr lang="en-US" sz="1150" dirty="0"/>
-          </a:p>
-        </p:txBody>
-      </p:sp>
-      <p:sp>
-        <p:nvSpPr>
-          <p:cNvPr id="13" name="Shape 11"/>
-          <p:cNvSpPr/>
-          <p:nvPr/>
-        </p:nvSpPr>
-        <p:spPr>
-          <a:xfrm>
-            <a:off x="502920" y="4041648"/>
-            <a:ext cx="8138160" cy="658368"/>
+              <a:t>   That hotel's team contacts them directly</a:t>
+            </a:r>
+            <a:endParaRPr lang="en-US" sz="1100" dirty="0"/>
+          </a:p>
+        </p:txBody>
+      </p:sp>
+      <p:sp>
+        <p:nvSpPr>
+          <p:cNvPr id="14" name="Shape 12"/>
+          <p:cNvSpPr/>
+          <p:nvPr/>
+        </p:nvSpPr>
+        <p:spPr>
+          <a:xfrm>
+            <a:off x="502920" y="4114800"/>
+            <a:ext cx="8138160" cy="566928"/>
           </a:xfrm>
           <a:prstGeom prst="roundRect">
             <a:avLst>
-              <a:gd name="adj" fmla="val 8333"/>
+              <a:gd name="adj" fmla="val 9677"/>
             </a:avLst>
           </a:prstGeom>
           <a:solidFill>
@@ -11251,14 +11239,14 @@
       </p:sp>
       <p:sp>
         <p:nvSpPr>
-          <p:cNvPr id="14" name="Text 12"/>
-          <p:cNvSpPr/>
-          <p:nvPr/>
-        </p:nvSpPr>
-        <p:spPr>
-          <a:xfrm>
-            <a:off x="649224" y="4087368"/>
-            <a:ext cx="7845552" cy="566928"/>
+          <p:cNvPr id="15" name="Text 13"/>
+          <p:cNvSpPr/>
+          <p:nvPr/>
+        </p:nvSpPr>
+        <p:spPr>
+          <a:xfrm>
+            <a:off x="649224" y="4160520"/>
+            <a:ext cx="7845552" cy="475488"/>
           </a:xfrm>
           <a:prstGeom prst="rect">
             <a:avLst/>
@@ -11302,7 +11290,7 @@
                 <a:ea typeface="Microsoft JhengHei" pitchFamily="34" charset="-122"/>
                 <a:cs typeface="Microsoft JhengHei" pitchFamily="34" charset="-120"/>
               </a:rPr>
-              <a:t>臺北洲際的兌換碼，高雄櫃檯無法核銷。獎品名稱前方會標示「臺北洲際酒店」。
+              <a:t>客人只有兌換碼、LINE 裡沒有優惠券 → 是專人聯繫的獎項，請勿核銷。
 </a:t>
             </a:r>
             <a:pPr indent="0" marL="0">
@@ -11320,7 +11308,7 @@
                 <a:ea typeface="Microsoft JhengHei" pitchFamily="34" charset="-122"/>
                 <a:cs typeface="Microsoft JhengHei" pitchFamily="34" charset="-120"/>
               </a:rPr>
-              <a:t>　　 Taipei redemption codes cannot be processed at Kaohsiung counters. Prize names are prefixed with the hotel name.</a:t>
+              <a:t>　　 If the guest has only a code and no coupon in LINE, it is a follow-up prize — do not redeem.</a:t>
             </a:r>
             <a:endParaRPr lang="en-US" sz="1200" dirty="0"/>
           </a:p>
@@ -11391,7 +11379,7 @@
                 <a:ea typeface="Microsoft JhengHei" pitchFamily="34" charset="-122"/>
                 <a:cs typeface="Microsoft JhengHei" pitchFamily="34" charset="-120"/>
               </a:rPr>
-              <a:t>四之二、為什麼這樣設計</a:t>
+              <a:t>四之二、哪些獎項要專人聯繫</a:t>
             </a:r>
             <a:endParaRPr lang="en-US" sz="2200" dirty="0"/>
           </a:p>
@@ -11430,7 +11418,7 @@
                 <a:ea typeface="Microsoft JhengHei" pitchFamily="34" charset="-122"/>
                 <a:cs typeface="Microsoft JhengHei" pitchFamily="34" charset="-120"/>
               </a:rPr>
-              <a:t>Why the Flows Differ</a:t>
+              <a:t>Which Prizes Require Follow-Up</a:t>
             </a:r>
             <a:endParaRPr lang="en-US" sz="1150" dirty="0"/>
           </a:p>
@@ -11536,86 +11524,26 @@
       </p:sp>
       <p:sp>
         <p:nvSpPr>
-          <p:cNvPr id="7" name="Text 5"/>
-          <p:cNvSpPr/>
-          <p:nvPr/>
-        </p:nvSpPr>
-        <p:spPr>
-          <a:xfrm>
-            <a:off x="640080" y="1280160"/>
-            <a:ext cx="7863840" cy="731520"/>
-          </a:xfrm>
-          <a:prstGeom prst="rect">
-            <a:avLst/>
-          </a:prstGeom>
-          <a:noFill/>
-          <a:ln/>
-        </p:spPr>
-        <p:txBody>
-          <a:bodyPr wrap="square" rtlCol="0" anchor="ctr"/>
-          <a:lstStyle/>
-          <a:p>
-            <a:pPr indent="0" marL="0">
-              <a:lnSpc>
-                <a:spcPts val="1900"/>
-              </a:lnSpc>
-              <a:buNone/>
-            </a:pPr>
-            <a:r>
-              <a:rPr lang="en-US" sz="1300" dirty="0">
-                <a:solidFill>
-                  <a:srgbClr val="3D3935"/>
-                </a:solidFill>
-                <a:latin typeface="Microsoft JhengHei" pitchFamily="34" charset="0"/>
-                <a:ea typeface="Microsoft JhengHei" pitchFamily="34" charset="-122"/>
-                <a:cs typeface="Microsoft JhengHei" pitchFamily="34" charset="-120"/>
-              </a:rPr>
-              <a:t>因為臺北洲際酒店的兌換細則尚未公布，無法在客人中獎當下告知確切的兌換方式。
-</a:t>
-            </a:r>
-            <a:pPr indent="0" marL="0">
-              <a:lnSpc>
-                <a:spcPts val="1900"/>
-              </a:lnSpc>
-              <a:buNone/>
-            </a:pPr>
-            <a:r>
-              <a:rPr lang="en-US" sz="1000" dirty="0">
-                <a:solidFill>
-                  <a:srgbClr val="6E6A63"/>
-                </a:solidFill>
-                <a:latin typeface="Microsoft JhengHei" pitchFamily="34" charset="0"/>
-                <a:ea typeface="Microsoft JhengHei" pitchFamily="34" charset="-122"/>
-                <a:cs typeface="Microsoft JhengHei" pitchFamily="34" charset="-120"/>
-              </a:rPr>
-              <a:t>InterContinental Taipei's redemption terms have not yet been finalised, so exact redemption details cannot be given at the moment of winning.</a:t>
-            </a:r>
-            <a:endParaRPr lang="en-US" sz="1300" dirty="0"/>
-          </a:p>
-        </p:txBody>
-      </p:sp>
-      <p:sp>
-        <p:nvSpPr>
-          <p:cNvPr id="8" name="Shape 6"/>
-          <p:cNvSpPr/>
-          <p:nvPr/>
-        </p:nvSpPr>
-        <p:spPr>
-          <a:xfrm>
-            <a:off x="502920" y="2103120"/>
-            <a:ext cx="8138160" cy="1417320"/>
+          <p:cNvPr id="7" name="Shape 5"/>
+          <p:cNvSpPr/>
+          <p:nvPr/>
+        </p:nvSpPr>
+        <p:spPr>
+          <a:xfrm>
+            <a:off x="502920" y="1188720"/>
+            <a:ext cx="3931920" cy="1371600"/>
           </a:xfrm>
           <a:prstGeom prst="roundRect">
             <a:avLst>
-              <a:gd name="adj" fmla="val 5161"/>
+              <a:gd name="adj" fmla="val 5333"/>
             </a:avLst>
           </a:prstGeom>
           <a:solidFill>
-            <a:srgbClr val="E8F3EC"/>
+            <a:srgbClr val="E7EDF3"/>
           </a:solidFill>
           <a:ln w="12700">
             <a:solidFill>
-              <a:srgbClr val="1F6B47"/>
+              <a:srgbClr val="8FA9C0"/>
             </a:solidFill>
             <a:prstDash val="solid"/>
           </a:ln>
@@ -11623,14 +11551,14 @@
       </p:sp>
       <p:sp>
         <p:nvSpPr>
-          <p:cNvPr id="9" name="Text 7"/>
-          <p:cNvSpPr/>
-          <p:nvPr/>
-        </p:nvSpPr>
-        <p:spPr>
-          <a:xfrm>
-            <a:off x="685800" y="2231136"/>
-            <a:ext cx="7772400" cy="1188720"/>
+          <p:cNvPr id="8" name="Text 6"/>
+          <p:cNvSpPr/>
+          <p:nvPr/>
+        </p:nvSpPr>
+        <p:spPr>
+          <a:xfrm>
+            <a:off x="713232" y="1316736"/>
+            <a:ext cx="3566160" cy="1143000"/>
           </a:xfrm>
           <a:prstGeom prst="rect">
             <a:avLst/>
@@ -11651,13 +11579,13 @@
             <a:r>
               <a:rPr lang="en-US" sz="1300" b="1" dirty="0">
                 <a:solidFill>
-                  <a:srgbClr val="1F6B47"/>
-                </a:solidFill>
-                <a:latin typeface="Microsoft JhengHei" pitchFamily="34" charset="0"/>
-                <a:ea typeface="Microsoft JhengHei" pitchFamily="34" charset="-122"/>
-                <a:cs typeface="Microsoft JhengHei" pitchFamily="34" charset="-120"/>
-              </a:rPr>
-              <a:t>✅  這樣的安排可以清楚區分兩館的中獎者
+                  <a:srgbClr val="35536F"/>
+                </a:solidFill>
+                <a:latin typeface="Microsoft JhengHei" pitchFamily="34" charset="0"/>
+                <a:ea typeface="Microsoft JhengHei" pitchFamily="34" charset="-122"/>
+                <a:cs typeface="Microsoft JhengHei" pitchFamily="34" charset="-120"/>
+              </a:rPr>
+              <a:t>🔵  臺北洲際酒店
 </a:t>
             </a:r>
             <a:pPr indent="0" marL="0">
@@ -11667,15 +11595,15 @@
               <a:buNone/>
             </a:pPr>
             <a:r>
-              <a:rPr lang="en-US" sz="950" dirty="0">
-                <a:solidFill>
-                  <a:srgbClr val="1F6B47"/>
-                </a:solidFill>
-                <a:latin typeface="Microsoft JhengHei" pitchFamily="34" charset="0"/>
-                <a:ea typeface="Microsoft JhengHei" pitchFamily="34" charset="-122"/>
-                <a:cs typeface="Microsoft JhengHei" pitchFamily="34" charset="-120"/>
-              </a:rPr>
-              <a:t>      This cleanly separates winners from the two properties
+              <a:rPr lang="en-US" sz="850" dirty="0">
+                <a:solidFill>
+                  <a:srgbClr val="35536F"/>
+                </a:solidFill>
+                <a:latin typeface="Microsoft JhengHei" pitchFamily="34" charset="0"/>
+                <a:ea typeface="Microsoft JhengHei" pitchFamily="34" charset="-122"/>
+                <a:cs typeface="Microsoft JhengHei" pitchFamily="34" charset="-120"/>
+              </a:rPr>
+              <a:t>InterContinental Taipei
 </a:t>
             </a:r>
             <a:pPr indent="0" marL="0">
@@ -11685,7 +11613,7 @@
               <a:buNone/>
             </a:pPr>
             <a:r>
-              <a:rPr lang="en-US" sz="1150" dirty="0">
+              <a:rPr lang="en-US" sz="1200" b="1" dirty="0">
                 <a:solidFill>
                   <a:srgbClr val="3D3935"/>
                 </a:solidFill>
@@ -11693,7 +11621,7 @@
                 <a:ea typeface="Microsoft JhengHei" pitchFamily="34" charset="-122"/>
                 <a:cs typeface="Microsoft JhengHei" pitchFamily="34" charset="-120"/>
               </a:rPr>
-              <a:t>      高雄的中獎者 → 走「券核銷」流程　　臺北的中獎者 → 走「名單聯繫」流程
+              <a:t>全部獎項
 </a:t>
             </a:r>
             <a:pPr indent="0" marL="0">
@@ -11703,33 +11631,15 @@
               <a:buNone/>
             </a:pPr>
             <a:r>
-              <a:rPr lang="en-US" sz="900" dirty="0">
-                <a:solidFill>
-                  <a:srgbClr val="1F6B47"/>
-                </a:solidFill>
-                <a:latin typeface="Microsoft JhengHei" pitchFamily="34" charset="0"/>
-                <a:ea typeface="Microsoft JhengHei" pitchFamily="34" charset="-122"/>
-                <a:cs typeface="Microsoft JhengHei" pitchFamily="34" charset="-120"/>
-              </a:rPr>
-              <a:t>      Kaohsiung winners go through counter redemption; Taipei winners through direct follow-up.
-</a:t>
-            </a:r>
-            <a:pPr indent="0" marL="0">
-              <a:lnSpc>
-                <a:spcPts val="1400"/>
-              </a:lnSpc>
-              <a:buNone/>
-            </a:pPr>
-            <a:r>
-              <a:rPr lang="en-US" sz="1050" dirty="0">
-                <a:solidFill>
-                  <a:srgbClr val="3D3935"/>
-                </a:solidFill>
-                <a:latin typeface="Microsoft JhengHei" pitchFamily="34" charset="0"/>
-                <a:ea typeface="Microsoft JhengHei" pitchFamily="34" charset="-122"/>
-                <a:cs typeface="Microsoft JhengHei" pitchFamily="34" charset="-120"/>
-              </a:rPr>
-              <a:t>      兩邊不會混淆，也不會發生客人拿臺北的獎到高雄櫃檯、現場卻無從處理的情況。</a:t>
+              <a:rPr lang="en-US" sz="850" dirty="0">
+                <a:solidFill>
+                  <a:srgbClr val="35536F"/>
+                </a:solidFill>
+                <a:latin typeface="Microsoft JhengHei" pitchFamily="34" charset="0"/>
+                <a:ea typeface="Microsoft JhengHei" pitchFamily="34" charset="-122"/>
+                <a:cs typeface="Microsoft JhengHei" pitchFamily="34" charset="-120"/>
+              </a:rPr>
+              <a:t>All prizes — redemption terms not yet finalised</a:t>
             </a:r>
             <a:endParaRPr lang="en-US" sz="1300" dirty="0"/>
           </a:p>
@@ -11737,26 +11647,149 @@
       </p:sp>
       <p:sp>
         <p:nvSpPr>
-          <p:cNvPr id="10" name="Shape 8"/>
-          <p:cNvSpPr/>
-          <p:nvPr/>
-        </p:nvSpPr>
-        <p:spPr>
-          <a:xfrm>
-            <a:off x="502920" y="3703320"/>
-            <a:ext cx="8138160" cy="868680"/>
+          <p:cNvPr id="9" name="Shape 7"/>
+          <p:cNvSpPr/>
+          <p:nvPr/>
+        </p:nvSpPr>
+        <p:spPr>
+          <a:xfrm>
+            <a:off x="4709160" y="1188720"/>
+            <a:ext cx="3931920" cy="1371600"/>
           </a:xfrm>
           <a:prstGeom prst="roundRect">
             <a:avLst>
-              <a:gd name="adj" fmla="val 6316"/>
+              <a:gd name="adj" fmla="val 5333"/>
             </a:avLst>
           </a:prstGeom>
           <a:solidFill>
-            <a:srgbClr val="FBF1DC"/>
+            <a:srgbClr val="F3EADA"/>
+          </a:solidFill>
+          <a:ln w="12700">
+            <a:solidFill>
+              <a:srgbClr val="C9A961"/>
+            </a:solidFill>
+            <a:prstDash val="solid"/>
+          </a:ln>
+        </p:spPr>
+      </p:sp>
+      <p:sp>
+        <p:nvSpPr>
+          <p:cNvPr id="10" name="Text 8"/>
+          <p:cNvSpPr/>
+          <p:nvPr/>
+        </p:nvSpPr>
+        <p:spPr>
+          <a:xfrm>
+            <a:off x="4919472" y="1316736"/>
+            <a:ext cx="3566160" cy="1143000"/>
+          </a:xfrm>
+          <a:prstGeom prst="rect">
+            <a:avLst/>
+          </a:prstGeom>
+          <a:noFill/>
+          <a:ln/>
+        </p:spPr>
+        <p:txBody>
+          <a:bodyPr wrap="square" rtlCol="0" anchor="ctr"/>
+          <a:lstStyle/>
+          <a:p>
+            <a:pPr indent="0" marL="0">
+              <a:lnSpc>
+                <a:spcPts val="1400"/>
+              </a:lnSpc>
+              <a:buNone/>
+            </a:pPr>
+            <a:r>
+              <a:rPr lang="en-US" sz="1300" b="1" dirty="0">
+                <a:solidFill>
+                  <a:srgbClr val="7A5B12"/>
+                </a:solidFill>
+                <a:latin typeface="Microsoft JhengHei" pitchFamily="34" charset="0"/>
+                <a:ea typeface="Microsoft JhengHei" pitchFamily="34" charset="-122"/>
+                <a:cs typeface="Microsoft JhengHei" pitchFamily="34" charset="-120"/>
+              </a:rPr>
+              <a:t>🟡  高雄洲際酒店
+</a:t>
+            </a:r>
+            <a:pPr indent="0" marL="0">
+              <a:lnSpc>
+                <a:spcPts val="1400"/>
+              </a:lnSpc>
+              <a:buNone/>
+            </a:pPr>
+            <a:r>
+              <a:rPr lang="en-US" sz="850" dirty="0">
+                <a:solidFill>
+                  <a:srgbClr val="7A5B12"/>
+                </a:solidFill>
+                <a:latin typeface="Microsoft JhengHei" pitchFamily="34" charset="0"/>
+                <a:ea typeface="Microsoft JhengHei" pitchFamily="34" charset="-122"/>
+                <a:cs typeface="Microsoft JhengHei" pitchFamily="34" charset="-120"/>
+              </a:rPr>
+              <a:t>InterContinental Kaohsiung
+</a:t>
+            </a:r>
+            <a:pPr indent="0" marL="0">
+              <a:lnSpc>
+                <a:spcPts val="1400"/>
+              </a:lnSpc>
+              <a:buNone/>
+            </a:pPr>
+            <a:r>
+              <a:rPr lang="en-US" sz="1200" b="1" dirty="0">
+                <a:solidFill>
+                  <a:srgbClr val="3D3935"/>
+                </a:solidFill>
+                <a:latin typeface="Microsoft JhengHei" pitchFamily="34" charset="0"/>
+                <a:ea typeface="Microsoft JhengHei" pitchFamily="34" charset="-122"/>
+                <a:cs typeface="Microsoft JhengHei" pitchFamily="34" charset="-120"/>
+              </a:rPr>
+              <a:t>只有這兩項住宿大獎
+</a:t>
+            </a:r>
+            <a:pPr indent="0" marL="0">
+              <a:lnSpc>
+                <a:spcPts val="1400"/>
+              </a:lnSpc>
+              <a:buNone/>
+            </a:pPr>
+            <a:r>
+              <a:rPr lang="en-US" sz="850" dirty="0">
+                <a:solidFill>
+                  <a:srgbClr val="7A5B12"/>
+                </a:solidFill>
+                <a:latin typeface="Microsoft JhengHei" pitchFamily="34" charset="0"/>
+                <a:ea typeface="Microsoft JhengHei" pitchFamily="34" charset="-122"/>
+                <a:cs typeface="Microsoft JhengHei" pitchFamily="34" charset="-120"/>
+              </a:rPr>
+              <a:t>Only these two room prizes — the rest issue coupons</a:t>
+            </a:r>
+            <a:endParaRPr lang="en-US" sz="1300" dirty="0"/>
+          </a:p>
+        </p:txBody>
+      </p:sp>
+      <p:sp>
+        <p:nvSpPr>
+          <p:cNvPr id="11" name="Shape 9"/>
+          <p:cNvSpPr/>
+          <p:nvPr/>
+        </p:nvSpPr>
+        <p:spPr>
+          <a:xfrm>
+            <a:off x="502920" y="2697480"/>
+            <a:ext cx="8138160" cy="566928"/>
+          </a:xfrm>
+          <a:prstGeom prst="roundRect">
+            <a:avLst>
+              <a:gd name="adj" fmla="val 8065"/>
+            </a:avLst>
+          </a:prstGeom>
+          <a:solidFill>
+            <a:srgbClr val="FFFDFA"/>
           </a:solidFill>
           <a:ln w="9525">
             <a:solidFill>
-              <a:srgbClr val="9C6212"/>
+              <a:srgbClr val="C9A961"/>
             </a:solidFill>
             <a:prstDash val="solid"/>
           </a:ln>
@@ -11764,14 +11797,266 @@
       </p:sp>
       <p:sp>
         <p:nvSpPr>
-          <p:cNvPr id="11" name="Text 9"/>
-          <p:cNvSpPr/>
-          <p:nvPr/>
-        </p:nvSpPr>
-        <p:spPr>
-          <a:xfrm>
-            <a:off x="649224" y="3749040"/>
-            <a:ext cx="7845552" cy="777240"/>
+          <p:cNvPr id="12" name="Text 10"/>
+          <p:cNvSpPr/>
+          <p:nvPr/>
+        </p:nvSpPr>
+        <p:spPr>
+          <a:xfrm>
+            <a:off x="685800" y="2752344"/>
+            <a:ext cx="365760" cy="457200"/>
+          </a:xfrm>
+          <a:prstGeom prst="rect">
+            <a:avLst/>
+          </a:prstGeom>
+          <a:noFill/>
+          <a:ln/>
+        </p:spPr>
+        <p:txBody>
+          <a:bodyPr wrap="square" rtlCol="0" anchor="ctr"/>
+          <a:lstStyle/>
+          <a:p>
+            <a:pPr indent="0" marL="0">
+              <a:buNone/>
+            </a:pPr>
+            <a:r>
+              <a:rPr lang="en-US" sz="1300" dirty="0">
+                <a:solidFill>
+                  <a:srgbClr val="000000"/>
+                </a:solidFill>
+                <a:latin typeface="Microsoft JhengHei" pitchFamily="34" charset="0"/>
+                <a:ea typeface="Microsoft JhengHei" pitchFamily="34" charset="-122"/>
+                <a:cs typeface="Microsoft JhengHei" pitchFamily="34" charset="-120"/>
+              </a:rPr>
+              <a:t>🏨</a:t>
+            </a:r>
+            <a:endParaRPr lang="en-US" sz="1300" dirty="0"/>
+          </a:p>
+        </p:txBody>
+      </p:sp>
+      <p:sp>
+        <p:nvSpPr>
+          <p:cNvPr id="13" name="Text 11"/>
+          <p:cNvSpPr/>
+          <p:nvPr/>
+        </p:nvSpPr>
+        <p:spPr>
+          <a:xfrm>
+            <a:off x="1097280" y="2743200"/>
+            <a:ext cx="7360920" cy="475488"/>
+          </a:xfrm>
+          <a:prstGeom prst="rect">
+            <a:avLst/>
+          </a:prstGeom>
+          <a:noFill/>
+          <a:ln/>
+        </p:spPr>
+        <p:txBody>
+          <a:bodyPr wrap="square" rtlCol="0" anchor="ctr"/>
+          <a:lstStyle/>
+          <a:p>
+            <a:pPr indent="0" marL="0">
+              <a:lnSpc>
+                <a:spcPts val="1300"/>
+              </a:lnSpc>
+              <a:buNone/>
+            </a:pPr>
+            <a:r>
+              <a:rPr lang="en-US" sz="1150" b="1" dirty="0">
+                <a:solidFill>
+                  <a:srgbClr val="3D3935"/>
+                </a:solidFill>
+                <a:latin typeface="Microsoft JhengHei" pitchFamily="34" charset="0"/>
+                <a:ea typeface="Microsoft JhengHei" pitchFamily="34" charset="-122"/>
+                <a:cs typeface="Microsoft JhengHei" pitchFamily="34" charset="-120"/>
+              </a:rPr>
+              <a:t>高雄洲際酒店 港灣海景開放式套房 住宿一晚（含雙人早餐）
+</a:t>
+            </a:r>
+            <a:pPr indent="0" marL="0">
+              <a:lnSpc>
+                <a:spcPts val="1300"/>
+              </a:lnSpc>
+              <a:buNone/>
+            </a:pPr>
+            <a:r>
+              <a:rPr lang="en-US" sz="850" dirty="0">
+                <a:solidFill>
+                  <a:srgbClr val="6E6A63"/>
+                </a:solidFill>
+                <a:latin typeface="Microsoft JhengHei" pitchFamily="34" charset="0"/>
+                <a:ea typeface="Microsoft JhengHei" pitchFamily="34" charset="-122"/>
+                <a:cs typeface="Microsoft JhengHei" pitchFamily="34" charset="-120"/>
+              </a:rPr>
+              <a:t>Harbour View Studio Suite — one night with breakfast for two</a:t>
+            </a:r>
+            <a:endParaRPr lang="en-US" sz="1150" dirty="0"/>
+          </a:p>
+        </p:txBody>
+      </p:sp>
+      <p:sp>
+        <p:nvSpPr>
+          <p:cNvPr id="14" name="Shape 12"/>
+          <p:cNvSpPr/>
+          <p:nvPr/>
+        </p:nvSpPr>
+        <p:spPr>
+          <a:xfrm>
+            <a:off x="502920" y="3355848"/>
+            <a:ext cx="8138160" cy="566928"/>
+          </a:xfrm>
+          <a:prstGeom prst="roundRect">
+            <a:avLst>
+              <a:gd name="adj" fmla="val 8065"/>
+            </a:avLst>
+          </a:prstGeom>
+          <a:solidFill>
+            <a:srgbClr val="FFFDFA"/>
+          </a:solidFill>
+          <a:ln w="9525">
+            <a:solidFill>
+              <a:srgbClr val="C9A961"/>
+            </a:solidFill>
+            <a:prstDash val="solid"/>
+          </a:ln>
+        </p:spPr>
+      </p:sp>
+      <p:sp>
+        <p:nvSpPr>
+          <p:cNvPr id="15" name="Text 13"/>
+          <p:cNvSpPr/>
+          <p:nvPr/>
+        </p:nvSpPr>
+        <p:spPr>
+          <a:xfrm>
+            <a:off x="685800" y="3410712"/>
+            <a:ext cx="365760" cy="457200"/>
+          </a:xfrm>
+          <a:prstGeom prst="rect">
+            <a:avLst/>
+          </a:prstGeom>
+          <a:noFill/>
+          <a:ln/>
+        </p:spPr>
+        <p:txBody>
+          <a:bodyPr wrap="square" rtlCol="0" anchor="ctr"/>
+          <a:lstStyle/>
+          <a:p>
+            <a:pPr indent="0" marL="0">
+              <a:buNone/>
+            </a:pPr>
+            <a:r>
+              <a:rPr lang="en-US" sz="1300" dirty="0">
+                <a:solidFill>
+                  <a:srgbClr val="000000"/>
+                </a:solidFill>
+                <a:latin typeface="Microsoft JhengHei" pitchFamily="34" charset="0"/>
+                <a:ea typeface="Microsoft JhengHei" pitchFamily="34" charset="-122"/>
+                <a:cs typeface="Microsoft JhengHei" pitchFamily="34" charset="-120"/>
+              </a:rPr>
+              <a:t>🏨</a:t>
+            </a:r>
+            <a:endParaRPr lang="en-US" sz="1300" dirty="0"/>
+          </a:p>
+        </p:txBody>
+      </p:sp>
+      <p:sp>
+        <p:nvSpPr>
+          <p:cNvPr id="16" name="Text 14"/>
+          <p:cNvSpPr/>
+          <p:nvPr/>
+        </p:nvSpPr>
+        <p:spPr>
+          <a:xfrm>
+            <a:off x="1097280" y="3401568"/>
+            <a:ext cx="7360920" cy="475488"/>
+          </a:xfrm>
+          <a:prstGeom prst="rect">
+            <a:avLst/>
+          </a:prstGeom>
+          <a:noFill/>
+          <a:ln/>
+        </p:spPr>
+        <p:txBody>
+          <a:bodyPr wrap="square" rtlCol="0" anchor="ctr"/>
+          <a:lstStyle/>
+          <a:p>
+            <a:pPr indent="0" marL="0">
+              <a:lnSpc>
+                <a:spcPts val="1300"/>
+              </a:lnSpc>
+              <a:buNone/>
+            </a:pPr>
+            <a:r>
+              <a:rPr lang="en-US" sz="1150" b="1" dirty="0">
+                <a:solidFill>
+                  <a:srgbClr val="3D3935"/>
+                </a:solidFill>
+                <a:latin typeface="Microsoft JhengHei" pitchFamily="34" charset="0"/>
+                <a:ea typeface="Microsoft JhengHei" pitchFamily="34" charset="-122"/>
+                <a:cs typeface="Microsoft JhengHei" pitchFamily="34" charset="-120"/>
+              </a:rPr>
+              <a:t>高雄洲際酒店 豪華經典房 住宿一晚（含雙人早餐）
+</a:t>
+            </a:r>
+            <a:pPr indent="0" marL="0">
+              <a:lnSpc>
+                <a:spcPts val="1300"/>
+              </a:lnSpc>
+              <a:buNone/>
+            </a:pPr>
+            <a:r>
+              <a:rPr lang="en-US" sz="850" dirty="0">
+                <a:solidFill>
+                  <a:srgbClr val="6E6A63"/>
+                </a:solidFill>
+                <a:latin typeface="Microsoft JhengHei" pitchFamily="34" charset="0"/>
+                <a:ea typeface="Microsoft JhengHei" pitchFamily="34" charset="-122"/>
+                <a:cs typeface="Microsoft JhengHei" pitchFamily="34" charset="-120"/>
+              </a:rPr>
+              <a:t>Deluxe Classic Room — one night with breakfast for two</a:t>
+            </a:r>
+            <a:endParaRPr lang="en-US" sz="1150" dirty="0"/>
+          </a:p>
+        </p:txBody>
+      </p:sp>
+      <p:sp>
+        <p:nvSpPr>
+          <p:cNvPr id="17" name="Shape 15"/>
+          <p:cNvSpPr/>
+          <p:nvPr/>
+        </p:nvSpPr>
+        <p:spPr>
+          <a:xfrm>
+            <a:off x="502920" y="4069080"/>
+            <a:ext cx="8138160" cy="658368"/>
+          </a:xfrm>
+          <a:prstGeom prst="roundRect">
+            <a:avLst>
+              <a:gd name="adj" fmla="val 8333"/>
+            </a:avLst>
+          </a:prstGeom>
+          <a:solidFill>
+            <a:srgbClr val="F4ECE7"/>
+          </a:solidFill>
+          <a:ln w="9525">
+            <a:solidFill>
+              <a:srgbClr val="935D08"/>
+            </a:solidFill>
+            <a:prstDash val="solid"/>
+          </a:ln>
+        </p:spPr>
+      </p:sp>
+      <p:sp>
+        <p:nvSpPr>
+          <p:cNvPr id="18" name="Text 16"/>
+          <p:cNvSpPr/>
+          <p:nvPr/>
+        </p:nvSpPr>
+        <p:spPr>
+          <a:xfrm>
+            <a:off x="649224" y="4114800"/>
+            <a:ext cx="7845552" cy="566928"/>
           </a:xfrm>
           <a:prstGeom prst="rect">
             <a:avLst/>
@@ -11792,13 +12077,13 @@
             <a:r>
               <a:rPr lang="en-US" sz="1200" dirty="0">
                 <a:solidFill>
-                  <a:srgbClr val="9C6212"/>
-                </a:solidFill>
-                <a:latin typeface="Microsoft JhengHei" pitchFamily="34" charset="0"/>
-                <a:ea typeface="Microsoft JhengHei" pitchFamily="34" charset="-122"/>
-                <a:cs typeface="Microsoft JhengHei" pitchFamily="34" charset="-120"/>
-              </a:rPr>
-              <a:t>ℹ️  </a:t>
+                  <a:srgbClr val="935D08"/>
+                </a:solidFill>
+                <a:latin typeface="Microsoft JhengHei" pitchFamily="34" charset="0"/>
+                <a:ea typeface="Microsoft JhengHei" pitchFamily="34" charset="-122"/>
+                <a:cs typeface="Microsoft JhengHei" pitchFamily="34" charset="-120"/>
+              </a:rPr>
+              <a:t>🛏  </a:t>
             </a:r>
             <a:pPr indent="0" marL="0">
               <a:lnSpc>
@@ -11809,13 +12094,13 @@
             <a:r>
               <a:rPr lang="en-US" sz="1150" b="1" dirty="0">
                 <a:solidFill>
-                  <a:srgbClr val="9C6212"/>
-                </a:solidFill>
-                <a:latin typeface="Microsoft JhengHei" pitchFamily="34" charset="0"/>
-                <a:ea typeface="Microsoft JhengHei" pitchFamily="34" charset="-122"/>
-                <a:cs typeface="Microsoft JhengHei" pitchFamily="34" charset="-120"/>
-              </a:rPr>
-              <a:t>客人若反映「抽到臺北的獎卻沒收到券」，這是正常的，並非系統異常，可安心向客人說明。
+                  <a:srgbClr val="935D08"/>
+                </a:solidFill>
+                <a:latin typeface="Microsoft JhengHei" pitchFamily="34" charset="0"/>
+                <a:ea typeface="Microsoft JhengHei" pitchFamily="34" charset="-122"/>
+                <a:cs typeface="Microsoft JhengHei" pitchFamily="34" charset="-120"/>
+              </a:rPr>
+              <a:t>住宿券要安排入住日期與房型，不是拿張券到櫃檯就能換，所以由飯店的人主動聯繫。
 </a:t>
             </a:r>
             <a:pPr indent="0" marL="0">
@@ -11827,13 +12112,13 @@
             <a:r>
               <a:rPr lang="en-US" sz="950" dirty="0">
                 <a:solidFill>
-                  <a:srgbClr val="9C6212"/>
-                </a:solidFill>
-                <a:latin typeface="Microsoft JhengHei" pitchFamily="34" charset="0"/>
-                <a:ea typeface="Microsoft JhengHei" pitchFamily="34" charset="-122"/>
-                <a:cs typeface="Microsoft JhengHei" pitchFamily="34" charset="-120"/>
-              </a:rPr>
-              <a:t>　　 If a guest says they won a Taipei prize but received no coupon, this is expected behaviour — not a system error. You can reassure them with confidence.</a:t>
+                  <a:srgbClr val="935D08"/>
+                </a:solidFill>
+                <a:latin typeface="Microsoft JhengHei" pitchFamily="34" charset="0"/>
+                <a:ea typeface="Microsoft JhengHei" pitchFamily="34" charset="-122"/>
+                <a:cs typeface="Microsoft JhengHei" pitchFamily="34" charset="-120"/>
+              </a:rPr>
+              <a:t>　　 Room stays require arranging dates and room types, so the hotel contacts the guest directly.</a:t>
             </a:r>
             <a:endParaRPr lang="en-US" sz="1200" dirty="0"/>
           </a:p>
@@ -12276,7 +12561,7 @@
                 <a:ea typeface="Microsoft JhengHei" pitchFamily="34" charset="-122"/>
                 <a:cs typeface="Microsoft JhengHei" pitchFamily="34" charset="-120"/>
               </a:rPr>
-              <a:t>確認獎品名稱是「高雄洲際酒店 ○○○」</a:t>
+              <a:t>沒有優惠券、只有兌換碼 → 是專人聯繫的獎項，不核銷</a:t>
             </a:r>
             <a:endParaRPr lang="en-US" sz="1300" dirty="0"/>
           </a:p>
@@ -12315,7 +12600,7 @@
                 <a:ea typeface="Microsoft JhengHei" pitchFamily="34" charset="-122"/>
                 <a:cs typeface="Microsoft JhengHei" pitchFamily="34" charset="-120"/>
               </a:rPr>
-              <a:t>Confirm the prize is prefixed with InterContinental Kaohsiung</a:t>
+              <a:t>A code with no coupon means it is a follow-up prize — do not redeem</a:t>
             </a:r>
             <a:endParaRPr lang="en-US" sz="950" dirty="0"/>
           </a:p>
@@ -12779,7 +13064,7 @@
                 <a:ea typeface="Microsoft JhengHei" pitchFamily="34" charset="-122"/>
                 <a:cs typeface="Microsoft JhengHei" pitchFamily="34" charset="-120"/>
               </a:rPr>
-              <a:t>獎品名稱是「臺北洲際酒店」→ 不核銷。
+              <a:t>臺北的獎、或高雄的住宿大獎 → 一律不核銷。
 </a:t>
             </a:r>
             <a:pPr indent="0" marL="0">
@@ -12797,7 +13082,7 @@
                 <a:ea typeface="Microsoft JhengHei" pitchFamily="34" charset="-122"/>
                 <a:cs typeface="Microsoft JhengHei" pitchFamily="34" charset="-120"/>
               </a:rPr>
-              <a:t>　　 If the prize is a Taipei one, do not redeem. Tell the guest a colleague will contact them.</a:t>
+              <a:t>　　 Taipei prizes and Kaohsiung room stays are never redeemed at the counter.</a:t>
             </a:r>
             <a:endParaRPr lang="en-US" sz="1200" dirty="0"/>
           </a:p>
@@ -13419,7 +13704,7 @@
                 <a:ea typeface="Microsoft JhengHei" pitchFamily="34" charset="-122"/>
                 <a:cs typeface="Microsoft JhengHei" pitchFamily="34" charset="-120"/>
               </a:rPr>
-              <a:t>我抽到臺北洲際的獎，怎麼都沒有券？
+              <a:t>我中獎了，怎麼都沒有券？
 </a:t>
             </a:r>
             <a:pPr indent="0" marL="0">
@@ -13437,7 +13722,7 @@
                 <a:ea typeface="Microsoft JhengHei" pitchFamily="34" charset="-122"/>
                 <a:cs typeface="Microsoft JhengHei" pitchFamily="34" charset="-120"/>
               </a:rPr>
-              <a:t>　  I won a Taipei prize but there's no coupon.</a:t>
+              <a:t>　  I won a prize, but there's no coupon.</a:t>
             </a:r>
             <a:endParaRPr lang="en-US" sz="1100" dirty="0"/>
           </a:p>
@@ -13479,7 +13764,7 @@
                 <a:ea typeface="Microsoft JhengHei" pitchFamily="34" charset="-122"/>
                 <a:cs typeface="Microsoft JhengHei" pitchFamily="34" charset="-120"/>
               </a:rPr>
-              <a:t>臺北洲際的獎項由臺北的同仁直接與您聯繫安排，所以不會發送優惠券。只要您已留下聯絡資料，我們會盡快與您聯繫。
+              <a:t>部分獎項（臺北的全部獎項，以及高雄的兩項住宿大獎）由飯店同仁直接與您聯繫安排，所以不會發送優惠券。只要您已留下聯絡資料，我們會盡快與您聯繫。
 </a:t>
             </a:r>
             <a:pPr indent="0" marL="0">
@@ -13497,7 +13782,7 @@
                 <a:ea typeface="Microsoft JhengHei" pitchFamily="34" charset="-122"/>
                 <a:cs typeface="Microsoft JhengHei" pitchFamily="34" charset="-120"/>
               </a:rPr>
-              <a:t>Taipei prizes are arranged directly by our Taipei colleagues, so no coupon is issued. We'll be in touch shortly.</a:t>
+              <a:t>Some prizes — all Taipei prizes and two Kaohsiung room stays — are arranged directly by our colleagues, so no coupon is issued. We'll be in touch shortly.</a:t>
             </a:r>
             <a:endParaRPr lang="en-US" sz="1050" dirty="0"/>
           </a:p>

--- a/docs/洲遊幣Lite_員工手冊_一般版_雙語.pptx
+++ b/docs/洲遊幣Lite_員工手冊_一般版_雙語.pptx
@@ -4,6 +4,9 @@
   <p:sldMasterIdLst>
     <p:sldMasterId id="2147483648" r:id="rId1"/>
   </p:sldMasterIdLst>
+  <p:notesMasterIdLst>
+    <p:notesMasterId r:id="rId16"/>
+  </p:notesMasterIdLst>
   <p:sldIdLst>
     <p:sldId id="256" r:id="rId2"/>
     <p:sldId id="257" r:id="rId3"/>
@@ -20,10 +23,7 @@
     <p:sldId id="268" r:id="rId14"/>
     <p:sldId id="269" r:id="rId15"/>
   </p:sldIdLst>
-  <p:notesMasterIdLst>
-    <p:notesMasterId r:id="rId16"/>
-  </p:notesMasterIdLst>
-  <p:sldSz cx="9144000" cy="5143500"/>
+  <p:sldSz cx="9144000" cy="5143500" type="screen16x9"/>
   <p:notesSz cx="5143500" cy="9144000"/>
   <p:defaultTextStyle>
     <a:lvl1pPr marL="0" algn="l" defTabSz="914400" rtl="0" eaLnBrk="1" latinLnBrk="0" hangingPunct="1">
@@ -117,6 +117,11 @@
       </a:defRPr>
     </a:lvl9pPr>
   </p:defaultTextStyle>
+  <p:extLst>
+    <p:ext uri="{EFAFB233-063F-42B5-8137-9DF3F51BA10A}">
+      <p15:sldGuideLst xmlns:p15="http://schemas.microsoft.com/office/powerpoint/2012/main"/>
+    </p:ext>
+  </p:extLst>
 </p:presentation>
 </file>
 
@@ -142,234 +147,10 @@
           <a:chExt cx="0" cy="0"/>
         </a:xfrm>
       </p:grpSpPr>
-      <p:sp>
-        <p:nvSpPr>
-          <p:cNvPr id="2" name="Header Placeholder 1"/>
-          <p:cNvSpPr>
-            <a:spLocks noGrp="1"/>
-          </p:cNvSpPr>
-          <p:nvPr>
-            <p:ph type="hdr" sz="quarter"/>
-          </p:nvPr>
-        </p:nvSpPr>
-        <p:spPr>
-          <a:xfrm>
-            <a:off x="0" y="0"/>
-            <a:ext cx="2971800" cy="458788"/>
-          </a:xfrm>
-          <a:prstGeom prst="rect">
-            <a:avLst/>
-          </a:prstGeom>
-        </p:spPr>
-        <p:txBody>
-          <a:bodyPr vert="horz" lIns="91440" tIns="45720" rIns="91440" bIns="45720" rtlCol="0"/>
-          <a:lstStyle>
-            <a:lvl1pPr algn="l">
-              <a:defRPr sz="1200"/>
-            </a:lvl1pPr>
-          </a:lstStyle>
-          <a:p>
-            <a:endParaRPr lang="en-US"/>
-          </a:p>
-        </p:txBody>
-      </p:sp>
-      <p:sp>
-        <p:nvSpPr>
-          <p:cNvPr id="3" name="Date Placeholder 2"/>
-          <p:cNvSpPr>
-            <a:spLocks noGrp="1"/>
-          </p:cNvSpPr>
-          <p:nvPr>
-            <p:ph type="dt" idx="1"/>
-          </p:nvPr>
-        </p:nvSpPr>
-        <p:spPr>
-          <a:xfrm>
-            <a:off x="3884613" y="0"/>
-            <a:ext cx="2971800" cy="458788"/>
-          </a:xfrm>
-          <a:prstGeom prst="rect">
-            <a:avLst/>
-          </a:prstGeom>
-        </p:spPr>
-        <p:txBody>
-          <a:bodyPr vert="horz" lIns="91440" tIns="45720" rIns="91440" bIns="45720" rtlCol="0"/>
-          <a:lstStyle>
-            <a:lvl1pPr algn="r">
-              <a:defRPr sz="1200"/>
-            </a:lvl1pPr>
-          </a:lstStyle>
-          <a:p>
-            <a:fld id="{5282F153-3F37-0F45-9E97-73ACFA13230C}" type="datetimeFigureOut">
-              <a:rPr lang="en-US"/>
-              <a:t>7/23/19</a:t>
-            </a:fld>
-            <a:endParaRPr lang="en-US"/>
-          </a:p>
-        </p:txBody>
-      </p:sp>
-      <p:sp>
-        <p:nvSpPr>
-          <p:cNvPr id="4" name="Slide Image Placeholder 3"/>
-          <p:cNvSpPr>
-            <a:spLocks noGrp="1" noRot="1" noChangeAspect="1"/>
-          </p:cNvSpPr>
-          <p:nvPr>
-            <p:ph type="sldImg" idx="2"/>
-          </p:nvPr>
-        </p:nvSpPr>
-        <p:spPr>
-          <a:xfrm>
-            <a:off x="685800" y="1143000"/>
-            <a:ext cx="5486400" cy="3086100"/>
-          </a:xfrm>
-          <a:prstGeom prst="rect">
-            <a:avLst/>
-          </a:prstGeom>
-          <a:noFill/>
-          <a:ln w="12700">
-            <a:solidFill>
-              <a:prstClr val="black"/>
-            </a:solidFill>
-          </a:ln>
-        </p:spPr>
-        <p:txBody>
-          <a:bodyPr vert="horz" lIns="91440" tIns="45720" rIns="91440" bIns="45720" rtlCol="0" anchor="ctr"/>
-          <a:lstStyle/>
-          <a:p>
-            <a:endParaRPr lang="en-US"/>
-          </a:p>
-        </p:txBody>
-      </p:sp>
-      <p:sp>
-        <p:nvSpPr>
-          <p:cNvPr id="5" name="Notes Placeholder 4"/>
-          <p:cNvSpPr>
-            <a:spLocks noGrp="1"/>
-          </p:cNvSpPr>
-          <p:nvPr>
-            <p:ph type="body" sz="quarter" idx="3"/>
-          </p:nvPr>
-        </p:nvSpPr>
-        <p:spPr>
-          <a:xfrm>
-            <a:off x="685800" y="4400550"/>
-            <a:ext cx="5486400" cy="3600450"/>
-          </a:xfrm>
-          <a:prstGeom prst="rect">
-            <a:avLst/>
-          </a:prstGeom>
-        </p:spPr>
-        <p:txBody>
-          <a:bodyPr vert="horz" lIns="91440" tIns="45720" rIns="91440" bIns="45720" rtlCol="0"/>
-          <a:lstStyle/>
-          <a:p>
-            <a:pPr lvl="0"/>
-            <a:r>
-              <a:rPr lang="en-US"/>
-              <a:t>Click to edit Master text styles</a:t>
-            </a:r>
-          </a:p>
-          <a:p>
-            <a:pPr lvl="1"/>
-            <a:r>
-              <a:rPr lang="en-US"/>
-              <a:t>Second level</a:t>
-            </a:r>
-          </a:p>
-          <a:p>
-            <a:pPr lvl="2"/>
-            <a:r>
-              <a:rPr lang="en-US"/>
-              <a:t>Third level</a:t>
-            </a:r>
-          </a:p>
-          <a:p>
-            <a:pPr lvl="3"/>
-            <a:r>
-              <a:rPr lang="en-US"/>
-              <a:t>Fourth level</a:t>
-            </a:r>
-          </a:p>
-          <a:p>
-            <a:pPr lvl="4"/>
-            <a:r>
-              <a:rPr lang="en-US"/>
-              <a:t>Fifth level</a:t>
-            </a:r>
-          </a:p>
-        </p:txBody>
-      </p:sp>
-      <p:sp>
-        <p:nvSpPr>
-          <p:cNvPr id="6" name="Footer Placeholder 5"/>
-          <p:cNvSpPr>
-            <a:spLocks noGrp="1"/>
-          </p:cNvSpPr>
-          <p:nvPr>
-            <p:ph type="ftr" sz="quarter" idx="4"/>
-          </p:nvPr>
-        </p:nvSpPr>
-        <p:spPr>
-          <a:xfrm>
-            <a:off x="0" y="8685213"/>
-            <a:ext cx="2971800" cy="458787"/>
-          </a:xfrm>
-          <a:prstGeom prst="rect">
-            <a:avLst/>
-          </a:prstGeom>
-        </p:spPr>
-        <p:txBody>
-          <a:bodyPr vert="horz" lIns="91440" tIns="45720" rIns="91440" bIns="45720" rtlCol="0" anchor="b"/>
-          <a:lstStyle>
-            <a:lvl1pPr algn="l">
-              <a:defRPr sz="1200"/>
-            </a:lvl1pPr>
-          </a:lstStyle>
-          <a:p>
-            <a:endParaRPr lang="en-US"/>
-          </a:p>
-        </p:txBody>
-      </p:sp>
-      <p:sp>
-        <p:nvSpPr>
-          <p:cNvPr id="7" name="Slide Number Placeholder 6"/>
-          <p:cNvSpPr>
-            <a:spLocks noGrp="1"/>
-          </p:cNvSpPr>
-          <p:nvPr>
-            <p:ph type="sldNum" sz="quarter" idx="5"/>
-          </p:nvPr>
-        </p:nvSpPr>
-        <p:spPr>
-          <a:xfrm>
-            <a:off x="3884613" y="8685213"/>
-            <a:ext cx="2971800" cy="458787"/>
-          </a:xfrm>
-          <a:prstGeom prst="rect">
-            <a:avLst/>
-          </a:prstGeom>
-        </p:spPr>
-        <p:txBody>
-          <a:bodyPr vert="horz" lIns="91440" tIns="45720" rIns="91440" bIns="45720" rtlCol="0" anchor="b"/>
-          <a:lstStyle>
-            <a:lvl1pPr algn="r">
-              <a:defRPr sz="1200"/>
-            </a:lvl1pPr>
-          </a:lstStyle>
-          <a:p>
-            <a:fld id="{CE5E9CC1-C706-0F49-92D6-E571CC5EEA8F}" type="slidenum">
-              <a:rPr lang="en-US"/>
-              <a:t>‹#›</a:t>
-            </a:fld>
-            <a:endParaRPr lang="en-US"/>
-          </a:p>
-        </p:txBody>
-      </p:sp>
     </p:spTree>
     <p:extLst>
       <p:ext uri="{BB962C8B-B14F-4D97-AF65-F5344CB8AC3E}">
-        <p14:creationId xmlns:p14="http://schemas.microsoft.com/office/powerpoint/2010/main" val="1024086991"/>
+        <p14:creationId xmlns:p14="http://schemas.microsoft.com/office/powerpoint/2010/main" val="601306080"/>
       </p:ext>
     </p:extLst>
   </p:cSld>
@@ -513,10 +294,6 @@
           <a:bodyPr/>
           <a:lstStyle/>
           <a:p>
-            <a:r>
-              <a:rPr lang="en-US" dirty="0"/>
-              <a:t/>
-            </a:r>
             <a:endParaRPr lang="en-US" dirty="0"/>
           </a:p>
         </p:txBody>
@@ -601,10 +378,6 @@
           <a:bodyPr/>
           <a:lstStyle/>
           <a:p>
-            <a:r>
-              <a:rPr lang="en-US" dirty="0"/>
-              <a:t/>
-            </a:r>
             <a:endParaRPr lang="en-US" dirty="0"/>
           </a:p>
         </p:txBody>
@@ -689,10 +462,6 @@
           <a:bodyPr/>
           <a:lstStyle/>
           <a:p>
-            <a:r>
-              <a:rPr lang="en-US" dirty="0"/>
-              <a:t/>
-            </a:r>
             <a:endParaRPr lang="en-US" dirty="0"/>
           </a:p>
         </p:txBody>
@@ -777,10 +546,6 @@
           <a:bodyPr/>
           <a:lstStyle/>
           <a:p>
-            <a:r>
-              <a:rPr lang="en-US" dirty="0"/>
-              <a:t/>
-            </a:r>
             <a:endParaRPr lang="en-US" dirty="0"/>
           </a:p>
         </p:txBody>
@@ -865,10 +630,6 @@
           <a:bodyPr/>
           <a:lstStyle/>
           <a:p>
-            <a:r>
-              <a:rPr lang="en-US" dirty="0"/>
-              <a:t/>
-            </a:r>
             <a:endParaRPr lang="en-US" dirty="0"/>
           </a:p>
         </p:txBody>
@@ -953,10 +714,6 @@
           <a:bodyPr/>
           <a:lstStyle/>
           <a:p>
-            <a:r>
-              <a:rPr lang="en-US" dirty="0"/>
-              <a:t/>
-            </a:r>
             <a:endParaRPr lang="en-US" dirty="0"/>
           </a:p>
         </p:txBody>
@@ -1041,10 +798,6 @@
           <a:bodyPr/>
           <a:lstStyle/>
           <a:p>
-            <a:r>
-              <a:rPr lang="en-US" dirty="0"/>
-              <a:t/>
-            </a:r>
             <a:endParaRPr lang="en-US" dirty="0"/>
           </a:p>
         </p:txBody>
@@ -1129,10 +882,6 @@
           <a:bodyPr/>
           <a:lstStyle/>
           <a:p>
-            <a:r>
-              <a:rPr lang="en-US" dirty="0"/>
-              <a:t/>
-            </a:r>
             <a:endParaRPr lang="en-US" dirty="0"/>
           </a:p>
         </p:txBody>
@@ -1217,10 +966,6 @@
           <a:bodyPr/>
           <a:lstStyle/>
           <a:p>
-            <a:r>
-              <a:rPr lang="en-US" dirty="0"/>
-              <a:t/>
-            </a:r>
             <a:endParaRPr lang="en-US" dirty="0"/>
           </a:p>
         </p:txBody>
@@ -1305,10 +1050,6 @@
           <a:bodyPr/>
           <a:lstStyle/>
           <a:p>
-            <a:r>
-              <a:rPr lang="en-US" dirty="0"/>
-              <a:t/>
-            </a:r>
             <a:endParaRPr lang="en-US" dirty="0"/>
           </a:p>
         </p:txBody>
@@ -1393,10 +1134,6 @@
           <a:bodyPr/>
           <a:lstStyle/>
           <a:p>
-            <a:r>
-              <a:rPr lang="en-US" dirty="0"/>
-              <a:t/>
-            </a:r>
             <a:endParaRPr lang="en-US" dirty="0"/>
           </a:p>
         </p:txBody>
@@ -1481,10 +1218,6 @@
           <a:bodyPr/>
           <a:lstStyle/>
           <a:p>
-            <a:r>
-              <a:rPr lang="en-US" dirty="0"/>
-              <a:t/>
-            </a:r>
             <a:endParaRPr lang="en-US" dirty="0"/>
           </a:p>
         </p:txBody>
@@ -1569,10 +1302,6 @@
           <a:bodyPr/>
           <a:lstStyle/>
           <a:p>
-            <a:r>
-              <a:rPr lang="en-US" dirty="0"/>
-              <a:t/>
-            </a:r>
             <a:endParaRPr lang="en-US" dirty="0"/>
           </a:p>
         </p:txBody>
@@ -1657,10 +1386,6 @@
           <a:bodyPr/>
           <a:lstStyle/>
           <a:p>
-            <a:r>
-              <a:rPr lang="en-US" dirty="0"/>
-              <a:t/>
-            </a:r>
             <a:endParaRPr lang="en-US" dirty="0"/>
           </a:p>
         </p:txBody>
@@ -1734,6 +1459,11 @@
 <file path=ppt/slideMasters/slideMaster1.xml><?xml version="1.0" encoding="utf-8"?>
 <p:sldMaster xmlns:a="http://schemas.openxmlformats.org/drawingml/2006/main" xmlns:r="http://schemas.openxmlformats.org/officeDocument/2006/relationships" xmlns:p="http://schemas.openxmlformats.org/presentationml/2006/main">
   <p:cSld>
+    <p:bg>
+      <p:bgRef idx="1001">
+        <a:schemeClr val="bg1"/>
+      </p:bgRef>
+    </p:bg>
     <p:spTree>
       <p:nvGrpSpPr>
         <p:cNvPr id="1" name=""/>
@@ -2016,6 +1746,7 @@
         <a:solidFill>
           <a:srgbClr val="2B2620"/>
         </a:solidFill>
+        <a:effectLst/>
       </p:bgPr>
     </p:bg>
     <p:spTree>
@@ -2073,11 +1804,11 @@
           <a:bodyPr wrap="square" rtlCol="0" anchor="ctr"/>
           <a:lstStyle/>
           <a:p>
-            <a:pPr indent="0" marL="0">
-              <a:buNone/>
-            </a:pPr>
-            <a:r>
-              <a:rPr lang="en-US" sz="1150" spc="200" kern="0" dirty="0">
+            <a:pPr marL="0" indent="0">
+              <a:buNone/>
+            </a:pPr>
+            <a:r>
+              <a:rPr lang="en-US" sz="1150" kern="0" spc="200" dirty="0">
                 <a:solidFill>
                   <a:srgbClr val="B8923E"/>
                 </a:solidFill>
@@ -2112,7 +1843,7 @@
           <a:bodyPr wrap="square" rtlCol="0" anchor="ctr"/>
           <a:lstStyle/>
           <a:p>
-            <a:pPr indent="0" marL="0">
+            <a:pPr marL="0" indent="0">
               <a:buNone/>
             </a:pPr>
             <a:r>
@@ -2151,7 +1882,7 @@
           <a:bodyPr wrap="square" rtlCol="0" anchor="ctr"/>
           <a:lstStyle/>
           <a:p>
-            <a:pPr indent="0" marL="0">
+            <a:pPr marL="0" indent="0">
               <a:buNone/>
             </a:pPr>
             <a:r>
@@ -2210,7 +1941,7 @@
           <a:bodyPr wrap="square" rtlCol="0" anchor="ctr"/>
           <a:lstStyle/>
           <a:p>
-            <a:pPr indent="0" marL="0">
+            <a:pPr marL="0" indent="0">
               <a:buNone/>
             </a:pPr>
             <a:r>
@@ -2249,7 +1980,7 @@
           <a:bodyPr wrap="square" rtlCol="0" anchor="ctr"/>
           <a:lstStyle/>
           <a:p>
-            <a:pPr indent="0" marL="0">
+            <a:pPr marL="0" indent="0">
               <a:buNone/>
             </a:pPr>
             <a:r>
@@ -2288,7 +2019,7 @@
           <a:bodyPr wrap="square" rtlCol="0" anchor="ctr"/>
           <a:lstStyle/>
           <a:p>
-            <a:pPr indent="0" marL="0">
+            <a:pPr marL="0" indent="0">
               <a:lnSpc>
                 <a:spcPts val="1400"/>
               </a:lnSpc>
@@ -2306,12 +2037,6 @@
               <a:t>櫃檯 · 餐廳外場 · 客服 · 行銷執行
 </a:t>
             </a:r>
-            <a:pPr indent="0" marL="0">
-              <a:lnSpc>
-                <a:spcPts val="1400"/>
-              </a:lnSpc>
-              <a:buNone/>
-            </a:pPr>
             <a:r>
               <a:rPr lang="en-US" sz="950" dirty="0">
                 <a:solidFill>
@@ -2348,7 +2073,7 @@
           <a:bodyPr wrap="square" rtlCol="0" anchor="ctr"/>
           <a:lstStyle/>
           <a:p>
-            <a:pPr indent="0" marL="0">
+            <a:pPr marL="0" indent="0">
               <a:buNone/>
             </a:pPr>
             <a:r>
@@ -2382,6 +2107,7 @@
         <a:solidFill>
           <a:srgbClr val="FAF8F6"/>
         </a:solidFill>
+        <a:effectLst/>
       </p:bgPr>
     </p:bg>
     <p:spTree>
@@ -2419,7 +2145,7 @@
           <a:bodyPr wrap="square" rtlCol="0" anchor="ctr"/>
           <a:lstStyle/>
           <a:p>
-            <a:pPr indent="0" marL="0">
+            <a:pPr marL="0" indent="0">
               <a:buNone/>
             </a:pPr>
             <a:r>
@@ -2458,7 +2184,7 @@
           <a:bodyPr wrap="square" rtlCol="0" anchor="ctr"/>
           <a:lstStyle/>
           <a:p>
-            <a:pPr indent="0" marL="0">
+            <a:pPr marL="0" indent="0">
               <a:buNone/>
             </a:pPr>
             <a:r>
@@ -2517,7 +2243,7 @@
           <a:bodyPr wrap="square" rtlCol="0" anchor="ctr"/>
           <a:lstStyle/>
           <a:p>
-            <a:pPr algn="r" indent="0" marL="0">
+            <a:pPr marL="0" indent="0" algn="r">
               <a:buNone/>
             </a:pPr>
             <a:r>
@@ -2556,7 +2282,7 @@
           <a:bodyPr wrap="square" rtlCol="0" anchor="ctr"/>
           <a:lstStyle/>
           <a:p>
-            <a:pPr indent="0" marL="0">
+            <a:pPr marL="0" indent="0">
               <a:buNone/>
             </a:pPr>
             <a:r>
@@ -2622,7 +2348,7 @@
           <a:bodyPr wrap="square" rtlCol="0" anchor="ctr"/>
           <a:lstStyle/>
           <a:p>
-            <a:pPr indent="0" marL="0">
+            <a:pPr marL="0" indent="0">
               <a:lnSpc>
                 <a:spcPts val="1300"/>
               </a:lnSpc>
@@ -2639,73 +2365,61 @@
               </a:rPr>
               <a:t>Q  </a:t>
             </a:r>
-            <a:pPr indent="0" marL="0">
+            <a:r>
+              <a:rPr lang="en-US" sz="1200" b="1" dirty="0">
+                <a:solidFill>
+                  <a:srgbClr val="935D08"/>
+                </a:solidFill>
+                <a:latin typeface="Microsoft JhengHei" pitchFamily="34" charset="0"/>
+                <a:ea typeface="Microsoft JhengHei" pitchFamily="34" charset="-122"/>
+                <a:cs typeface="Microsoft JhengHei" pitchFamily="34" charset="-120"/>
+              </a:rPr>
+              <a:t>我還沒留聯絡資料，要怎麼補？
+</a:t>
+            </a:r>
+            <a:r>
+              <a:rPr lang="en-US" sz="900" dirty="0">
+                <a:solidFill>
+                  <a:srgbClr val="6E6A63"/>
+                </a:solidFill>
+                <a:latin typeface="Microsoft JhengHei" pitchFamily="34" charset="0"/>
+                <a:ea typeface="Microsoft JhengHei" pitchFamily="34" charset="-122"/>
+                <a:cs typeface="Microsoft JhengHei" pitchFamily="34" charset="-120"/>
+              </a:rPr>
+              <a:t>　  I haven't submitted my contact details yet.</a:t>
+            </a:r>
+            <a:endParaRPr lang="en-US" sz="1100" dirty="0"/>
+          </a:p>
+        </p:txBody>
+      </p:sp>
+      <p:sp>
+        <p:nvSpPr>
+          <p:cNvPr id="9" name="Text 7"/>
+          <p:cNvSpPr/>
+          <p:nvPr/>
+        </p:nvSpPr>
+        <p:spPr>
+          <a:xfrm>
+            <a:off x="685800" y="1755648"/>
+            <a:ext cx="7772400" cy="548640"/>
+          </a:xfrm>
+          <a:prstGeom prst="rect">
+            <a:avLst/>
+          </a:prstGeom>
+          <a:noFill/>
+          <a:ln/>
+        </p:spPr>
+        <p:txBody>
+          <a:bodyPr wrap="square" rtlCol="0" anchor="ctr"/>
+          <a:lstStyle/>
+          <a:p>
+            <a:pPr marL="0" indent="0">
               <a:lnSpc>
                 <a:spcPts val="1300"/>
               </a:lnSpc>
               <a:buNone/>
             </a:pPr>
             <a:r>
-              <a:rPr lang="en-US" sz="1200" b="1" dirty="0">
-                <a:solidFill>
-                  <a:srgbClr val="935D08"/>
-                </a:solidFill>
-                <a:latin typeface="Microsoft JhengHei" pitchFamily="34" charset="0"/>
-                <a:ea typeface="Microsoft JhengHei" pitchFamily="34" charset="-122"/>
-                <a:cs typeface="Microsoft JhengHei" pitchFamily="34" charset="-120"/>
-              </a:rPr>
-              <a:t>我還沒留聯絡資料，要怎麼補？
-</a:t>
-            </a:r>
-            <a:pPr indent="0" marL="0">
-              <a:lnSpc>
-                <a:spcPts val="1300"/>
-              </a:lnSpc>
-              <a:buNone/>
-            </a:pPr>
-            <a:r>
-              <a:rPr lang="en-US" sz="900" dirty="0">
-                <a:solidFill>
-                  <a:srgbClr val="6E6A63"/>
-                </a:solidFill>
-                <a:latin typeface="Microsoft JhengHei" pitchFamily="34" charset="0"/>
-                <a:ea typeface="Microsoft JhengHei" pitchFamily="34" charset="-122"/>
-                <a:cs typeface="Microsoft JhengHei" pitchFamily="34" charset="-120"/>
-              </a:rPr>
-              <a:t>　  I haven't submitted my contact details yet.</a:t>
-            </a:r>
-            <a:endParaRPr lang="en-US" sz="1100" dirty="0"/>
-          </a:p>
-        </p:txBody>
-      </p:sp>
-      <p:sp>
-        <p:nvSpPr>
-          <p:cNvPr id="9" name="Text 7"/>
-          <p:cNvSpPr/>
-          <p:nvPr/>
-        </p:nvSpPr>
-        <p:spPr>
-          <a:xfrm>
-            <a:off x="685800" y="1755648"/>
-            <a:ext cx="7772400" cy="548640"/>
-          </a:xfrm>
-          <a:prstGeom prst="rect">
-            <a:avLst/>
-          </a:prstGeom>
-          <a:noFill/>
-          <a:ln/>
-        </p:spPr>
-        <p:txBody>
-          <a:bodyPr wrap="square" rtlCol="0" anchor="ctr"/>
-          <a:lstStyle/>
-          <a:p>
-            <a:pPr indent="0" marL="0">
-              <a:lnSpc>
-                <a:spcPts val="1300"/>
-              </a:lnSpc>
-              <a:buNone/>
-            </a:pPr>
-            <a:r>
               <a:rPr lang="en-US" sz="1050" dirty="0">
                 <a:solidFill>
                   <a:srgbClr val="3D3935"/>
@@ -2717,12 +2431,6 @@
               <a:t>請再打開一次活動頁面，系統會自動提醒您填寫。
 </a:t>
             </a:r>
-            <a:pPr indent="0" marL="0">
-              <a:lnSpc>
-                <a:spcPts val="1300"/>
-              </a:lnSpc>
-              <a:buNone/>
-            </a:pPr>
             <a:r>
               <a:rPr lang="en-US" sz="900" dirty="0">
                 <a:solidFill>
@@ -2786,7 +2494,7 @@
           <a:bodyPr wrap="square" rtlCol="0" anchor="ctr"/>
           <a:lstStyle/>
           <a:p>
-            <a:pPr indent="0" marL="0">
+            <a:pPr marL="0" indent="0">
               <a:lnSpc>
                 <a:spcPts val="1300"/>
               </a:lnSpc>
@@ -2803,73 +2511,61 @@
               </a:rPr>
               <a:t>Q  </a:t>
             </a:r>
-            <a:pPr indent="0" marL="0">
+            <a:r>
+              <a:rPr lang="en-US" sz="1200" b="1" dirty="0">
+                <a:solidFill>
+                  <a:srgbClr val="935D08"/>
+                </a:solidFill>
+                <a:latin typeface="Microsoft JhengHei" pitchFamily="34" charset="0"/>
+                <a:ea typeface="Microsoft JhengHei" pitchFamily="34" charset="-122"/>
+                <a:cs typeface="Microsoft JhengHei" pitchFamily="34" charset="-120"/>
+              </a:rPr>
+              <a:t>為什麼我抽到「銘謝惠顧」？
+</a:t>
+            </a:r>
+            <a:r>
+              <a:rPr lang="en-US" sz="900" dirty="0">
+                <a:solidFill>
+                  <a:srgbClr val="6E6A63"/>
+                </a:solidFill>
+                <a:latin typeface="Microsoft JhengHei" pitchFamily="34" charset="0"/>
+                <a:ea typeface="Microsoft JhengHei" pitchFamily="34" charset="-122"/>
+                <a:cs typeface="Microsoft JhengHei" pitchFamily="34" charset="-120"/>
+              </a:rPr>
+              <a:t>　  Why did I get "no prize this time"?</a:t>
+            </a:r>
+            <a:endParaRPr lang="en-US" sz="1100" dirty="0"/>
+          </a:p>
+        </p:txBody>
+      </p:sp>
+      <p:sp>
+        <p:nvSpPr>
+          <p:cNvPr id="12" name="Text 10"/>
+          <p:cNvSpPr/>
+          <p:nvPr/>
+        </p:nvSpPr>
+        <p:spPr>
+          <a:xfrm>
+            <a:off x="685800" y="3081528"/>
+            <a:ext cx="7772400" cy="548640"/>
+          </a:xfrm>
+          <a:prstGeom prst="rect">
+            <a:avLst/>
+          </a:prstGeom>
+          <a:noFill/>
+          <a:ln/>
+        </p:spPr>
+        <p:txBody>
+          <a:bodyPr wrap="square" rtlCol="0" anchor="ctr"/>
+          <a:lstStyle/>
+          <a:p>
+            <a:pPr marL="0" indent="0">
               <a:lnSpc>
                 <a:spcPts val="1300"/>
               </a:lnSpc>
               <a:buNone/>
             </a:pPr>
             <a:r>
-              <a:rPr lang="en-US" sz="1200" b="1" dirty="0">
-                <a:solidFill>
-                  <a:srgbClr val="935D08"/>
-                </a:solidFill>
-                <a:latin typeface="Microsoft JhengHei" pitchFamily="34" charset="0"/>
-                <a:ea typeface="Microsoft JhengHei" pitchFamily="34" charset="-122"/>
-                <a:cs typeface="Microsoft JhengHei" pitchFamily="34" charset="-120"/>
-              </a:rPr>
-              <a:t>為什麼我抽到「銘謝惠顧」？
-</a:t>
-            </a:r>
-            <a:pPr indent="0" marL="0">
-              <a:lnSpc>
-                <a:spcPts val="1300"/>
-              </a:lnSpc>
-              <a:buNone/>
-            </a:pPr>
-            <a:r>
-              <a:rPr lang="en-US" sz="900" dirty="0">
-                <a:solidFill>
-                  <a:srgbClr val="6E6A63"/>
-                </a:solidFill>
-                <a:latin typeface="Microsoft JhengHei" pitchFamily="34" charset="0"/>
-                <a:ea typeface="Microsoft JhengHei" pitchFamily="34" charset="-122"/>
-                <a:cs typeface="Microsoft JhengHei" pitchFamily="34" charset="-120"/>
-              </a:rPr>
-              <a:t>　  Why did I get "no prize this time"?</a:t>
-            </a:r>
-            <a:endParaRPr lang="en-US" sz="1100" dirty="0"/>
-          </a:p>
-        </p:txBody>
-      </p:sp>
-      <p:sp>
-        <p:nvSpPr>
-          <p:cNvPr id="12" name="Text 10"/>
-          <p:cNvSpPr/>
-          <p:nvPr/>
-        </p:nvSpPr>
-        <p:spPr>
-          <a:xfrm>
-            <a:off x="685800" y="3081528"/>
-            <a:ext cx="7772400" cy="548640"/>
-          </a:xfrm>
-          <a:prstGeom prst="rect">
-            <a:avLst/>
-          </a:prstGeom>
-          <a:noFill/>
-          <a:ln/>
-        </p:spPr>
-        <p:txBody>
-          <a:bodyPr wrap="square" rtlCol="0" anchor="ctr"/>
-          <a:lstStyle/>
-          <a:p>
-            <a:pPr indent="0" marL="0">
-              <a:lnSpc>
-                <a:spcPts val="1300"/>
-              </a:lnSpc>
-              <a:buNone/>
-            </a:pPr>
-            <a:r>
               <a:rPr lang="en-US" sz="1050" dirty="0">
                 <a:solidFill>
                   <a:srgbClr val="3D3935"/>
@@ -2881,12 +2577,6 @@
               <a:t>該等級的獎品目前已全部送出。您的洲遊幣沒有被扣除，可以改抽其他等級。
 </a:t>
             </a:r>
-            <a:pPr indent="0" marL="0">
-              <a:lnSpc>
-                <a:spcPts val="1300"/>
-              </a:lnSpc>
-              <a:buNone/>
-            </a:pPr>
             <a:r>
               <a:rPr lang="en-US" sz="900" dirty="0">
                 <a:solidFill>
@@ -2950,7 +2640,7 @@
           <a:bodyPr wrap="square" rtlCol="0" anchor="ctr"/>
           <a:lstStyle/>
           <a:p>
-            <a:pPr indent="0" marL="0">
+            <a:pPr marL="0" indent="0">
               <a:lnSpc>
                 <a:spcPts val="1500"/>
               </a:lnSpc>
@@ -2967,12 +2657,6 @@
               </a:rPr>
               <a:t>💬  </a:t>
             </a:r>
-            <a:pPr indent="0" marL="0">
-              <a:lnSpc>
-                <a:spcPts val="1500"/>
-              </a:lnSpc>
-              <a:buNone/>
-            </a:pPr>
             <a:r>
               <a:rPr lang="en-US" sz="1150" b="1" dirty="0">
                 <a:solidFill>
@@ -2985,12 +2669,6 @@
               <a:t>「洲遊幣沒有被扣除」這句一定要講 —— 客人最在意的是有沒有白花。
 </a:t>
             </a:r>
-            <a:pPr indent="0" marL="0">
-              <a:lnSpc>
-                <a:spcPts val="1500"/>
-              </a:lnSpc>
-              <a:buNone/>
-            </a:pPr>
             <a:r>
               <a:rPr lang="en-US" sz="950" dirty="0">
                 <a:solidFill>
@@ -3022,6 +2700,7 @@
         <a:solidFill>
           <a:srgbClr val="FAF8F6"/>
         </a:solidFill>
+        <a:effectLst/>
       </p:bgPr>
     </p:bg>
     <p:spTree>
@@ -3059,7 +2738,7 @@
           <a:bodyPr wrap="square" rtlCol="0" anchor="ctr"/>
           <a:lstStyle/>
           <a:p>
-            <a:pPr indent="0" marL="0">
+            <a:pPr marL="0" indent="0">
               <a:buNone/>
             </a:pPr>
             <a:r>
@@ -3098,7 +2777,7 @@
           <a:bodyPr wrap="square" rtlCol="0" anchor="ctr"/>
           <a:lstStyle/>
           <a:p>
-            <a:pPr indent="0" marL="0">
+            <a:pPr marL="0" indent="0">
               <a:buNone/>
             </a:pPr>
             <a:r>
@@ -3157,7 +2836,7 @@
           <a:bodyPr wrap="square" rtlCol="0" anchor="ctr"/>
           <a:lstStyle/>
           <a:p>
-            <a:pPr algn="r" indent="0" marL="0">
+            <a:pPr marL="0" indent="0" algn="r">
               <a:buNone/>
             </a:pPr>
             <a:r>
@@ -3196,7 +2875,7 @@
           <a:bodyPr wrap="square" rtlCol="0" anchor="ctr"/>
           <a:lstStyle/>
           <a:p>
-            <a:pPr indent="0" marL="0">
+            <a:pPr marL="0" indent="0">
               <a:buNone/>
             </a:pPr>
             <a:r>
@@ -3262,7 +2941,7 @@
           <a:bodyPr wrap="square" rtlCol="0" anchor="ctr"/>
           <a:lstStyle/>
           <a:p>
-            <a:pPr indent="0" marL="0">
+            <a:pPr marL="0" indent="0">
               <a:lnSpc>
                 <a:spcPts val="1300"/>
               </a:lnSpc>
@@ -3279,73 +2958,61 @@
               </a:rPr>
               <a:t>Q  </a:t>
             </a:r>
-            <a:pPr indent="0" marL="0">
+            <a:r>
+              <a:rPr lang="en-US" sz="1200" b="1" dirty="0">
+                <a:solidFill>
+                  <a:srgbClr val="935D08"/>
+                </a:solidFill>
+                <a:latin typeface="Microsoft JhengHei" pitchFamily="34" charset="0"/>
+                <a:ea typeface="Microsoft JhengHei" pitchFamily="34" charset="-122"/>
+                <a:cs typeface="Microsoft JhengHei" pitchFamily="34" charset="-120"/>
+              </a:rPr>
+              <a:t>可以指定要抽哪個獎嗎？中獎率多少？
+</a:t>
+            </a:r>
+            <a:r>
+              <a:rPr lang="en-US" sz="900" dirty="0">
+                <a:solidFill>
+                  <a:srgbClr val="6E6A63"/>
+                </a:solidFill>
+                <a:latin typeface="Microsoft JhengHei" pitchFamily="34" charset="0"/>
+                <a:ea typeface="Microsoft JhengHei" pitchFamily="34" charset="-122"/>
+                <a:cs typeface="Microsoft JhengHei" pitchFamily="34" charset="-120"/>
+              </a:rPr>
+              <a:t>　  Can I choose my prize? What are the odds?</a:t>
+            </a:r>
+            <a:endParaRPr lang="en-US" sz="1100" dirty="0"/>
+          </a:p>
+        </p:txBody>
+      </p:sp>
+      <p:sp>
+        <p:nvSpPr>
+          <p:cNvPr id="9" name="Text 7"/>
+          <p:cNvSpPr/>
+          <p:nvPr/>
+        </p:nvSpPr>
+        <p:spPr>
+          <a:xfrm>
+            <a:off x="685800" y="1755648"/>
+            <a:ext cx="7772400" cy="548640"/>
+          </a:xfrm>
+          <a:prstGeom prst="rect">
+            <a:avLst/>
+          </a:prstGeom>
+          <a:noFill/>
+          <a:ln/>
+        </p:spPr>
+        <p:txBody>
+          <a:bodyPr wrap="square" rtlCol="0" anchor="ctr"/>
+          <a:lstStyle/>
+          <a:p>
+            <a:pPr marL="0" indent="0">
               <a:lnSpc>
                 <a:spcPts val="1300"/>
               </a:lnSpc>
               <a:buNone/>
             </a:pPr>
             <a:r>
-              <a:rPr lang="en-US" sz="1200" b="1" dirty="0">
-                <a:solidFill>
-                  <a:srgbClr val="935D08"/>
-                </a:solidFill>
-                <a:latin typeface="Microsoft JhengHei" pitchFamily="34" charset="0"/>
-                <a:ea typeface="Microsoft JhengHei" pitchFamily="34" charset="-122"/>
-                <a:cs typeface="Microsoft JhengHei" pitchFamily="34" charset="-120"/>
-              </a:rPr>
-              <a:t>可以指定要抽哪個獎嗎？中獎率多少？
-</a:t>
-            </a:r>
-            <a:pPr indent="0" marL="0">
-              <a:lnSpc>
-                <a:spcPts val="1300"/>
-              </a:lnSpc>
-              <a:buNone/>
-            </a:pPr>
-            <a:r>
-              <a:rPr lang="en-US" sz="900" dirty="0">
-                <a:solidFill>
-                  <a:srgbClr val="6E6A63"/>
-                </a:solidFill>
-                <a:latin typeface="Microsoft JhengHei" pitchFamily="34" charset="0"/>
-                <a:ea typeface="Microsoft JhengHei" pitchFamily="34" charset="-122"/>
-                <a:cs typeface="Microsoft JhengHei" pitchFamily="34" charset="-120"/>
-              </a:rPr>
-              <a:t>　  Can I choose my prize? What are the odds?</a:t>
-            </a:r>
-            <a:endParaRPr lang="en-US" sz="1100" dirty="0"/>
-          </a:p>
-        </p:txBody>
-      </p:sp>
-      <p:sp>
-        <p:nvSpPr>
-          <p:cNvPr id="9" name="Text 7"/>
-          <p:cNvSpPr/>
-          <p:nvPr/>
-        </p:nvSpPr>
-        <p:spPr>
-          <a:xfrm>
-            <a:off x="685800" y="1755648"/>
-            <a:ext cx="7772400" cy="548640"/>
-          </a:xfrm>
-          <a:prstGeom prst="rect">
-            <a:avLst/>
-          </a:prstGeom>
-          <a:noFill/>
-          <a:ln/>
-        </p:spPr>
-        <p:txBody>
-          <a:bodyPr wrap="square" rtlCol="0" anchor="ctr"/>
-          <a:lstStyle/>
-          <a:p>
-            <a:pPr indent="0" marL="0">
-              <a:lnSpc>
-                <a:spcPts val="1300"/>
-              </a:lnSpc>
-              <a:buNone/>
-            </a:pPr>
-            <a:r>
               <a:rPr lang="en-US" sz="1050" dirty="0">
                 <a:solidFill>
                   <a:srgbClr val="3D3935"/>
@@ -3357,12 +3024,6 @@
               <a:t>抽獎結果由系統隨機產生，無法指定。詳細規則請參考活動頁面的「活動規則」。
 </a:t>
             </a:r>
-            <a:pPr indent="0" marL="0">
-              <a:lnSpc>
-                <a:spcPts val="1300"/>
-              </a:lnSpc>
-              <a:buNone/>
-            </a:pPr>
             <a:r>
               <a:rPr lang="en-US" sz="900" dirty="0">
                 <a:solidFill>
@@ -3426,7 +3087,7 @@
           <a:bodyPr wrap="square" rtlCol="0" anchor="ctr"/>
           <a:lstStyle/>
           <a:p>
-            <a:pPr indent="0" marL="0">
+            <a:pPr marL="0" indent="0">
               <a:lnSpc>
                 <a:spcPts val="1300"/>
               </a:lnSpc>
@@ -3443,73 +3104,61 @@
               </a:rPr>
               <a:t>Q  </a:t>
             </a:r>
-            <a:pPr indent="0" marL="0">
+            <a:r>
+              <a:rPr lang="en-US" sz="1200" b="1" dirty="0">
+                <a:solidFill>
+                  <a:srgbClr val="935D08"/>
+                </a:solidFill>
+                <a:latin typeface="Microsoft JhengHei" pitchFamily="34" charset="0"/>
+                <a:ea typeface="Microsoft JhengHei" pitchFamily="34" charset="-122"/>
+                <a:cs typeface="Microsoft JhengHei" pitchFamily="34" charset="-120"/>
+              </a:rPr>
+              <a:t>獎品可以折換現金或轉讓嗎？
+</a:t>
+            </a:r>
+            <a:r>
+              <a:rPr lang="en-US" sz="900" dirty="0">
+                <a:solidFill>
+                  <a:srgbClr val="6E6A63"/>
+                </a:solidFill>
+                <a:latin typeface="Microsoft JhengHei" pitchFamily="34" charset="0"/>
+                <a:ea typeface="Microsoft JhengHei" pitchFamily="34" charset="-122"/>
+                <a:cs typeface="Microsoft JhengHei" pitchFamily="34" charset="-120"/>
+              </a:rPr>
+              <a:t>　  Can the prize be exchanged for cash or transferred?</a:t>
+            </a:r>
+            <a:endParaRPr lang="en-US" sz="1100" dirty="0"/>
+          </a:p>
+        </p:txBody>
+      </p:sp>
+      <p:sp>
+        <p:nvSpPr>
+          <p:cNvPr id="12" name="Text 10"/>
+          <p:cNvSpPr/>
+          <p:nvPr/>
+        </p:nvSpPr>
+        <p:spPr>
+          <a:xfrm>
+            <a:off x="685800" y="3081528"/>
+            <a:ext cx="7772400" cy="548640"/>
+          </a:xfrm>
+          <a:prstGeom prst="rect">
+            <a:avLst/>
+          </a:prstGeom>
+          <a:noFill/>
+          <a:ln/>
+        </p:spPr>
+        <p:txBody>
+          <a:bodyPr wrap="square" rtlCol="0" anchor="ctr"/>
+          <a:lstStyle/>
+          <a:p>
+            <a:pPr marL="0" indent="0">
               <a:lnSpc>
                 <a:spcPts val="1300"/>
               </a:lnSpc>
               <a:buNone/>
             </a:pPr>
             <a:r>
-              <a:rPr lang="en-US" sz="1200" b="1" dirty="0">
-                <a:solidFill>
-                  <a:srgbClr val="935D08"/>
-                </a:solidFill>
-                <a:latin typeface="Microsoft JhengHei" pitchFamily="34" charset="0"/>
-                <a:ea typeface="Microsoft JhengHei" pitchFamily="34" charset="-122"/>
-                <a:cs typeface="Microsoft JhengHei" pitchFamily="34" charset="-120"/>
-              </a:rPr>
-              <a:t>獎品可以折換現金或轉讓嗎？
-</a:t>
-            </a:r>
-            <a:pPr indent="0" marL="0">
-              <a:lnSpc>
-                <a:spcPts val="1300"/>
-              </a:lnSpc>
-              <a:buNone/>
-            </a:pPr>
-            <a:r>
-              <a:rPr lang="en-US" sz="900" dirty="0">
-                <a:solidFill>
-                  <a:srgbClr val="6E6A63"/>
-                </a:solidFill>
-                <a:latin typeface="Microsoft JhengHei" pitchFamily="34" charset="0"/>
-                <a:ea typeface="Microsoft JhengHei" pitchFamily="34" charset="-122"/>
-                <a:cs typeface="Microsoft JhengHei" pitchFamily="34" charset="-120"/>
-              </a:rPr>
-              <a:t>　  Can the prize be exchanged for cash or transferred?</a:t>
-            </a:r>
-            <a:endParaRPr lang="en-US" sz="1100" dirty="0"/>
-          </a:p>
-        </p:txBody>
-      </p:sp>
-      <p:sp>
-        <p:nvSpPr>
-          <p:cNvPr id="12" name="Text 10"/>
-          <p:cNvSpPr/>
-          <p:nvPr/>
-        </p:nvSpPr>
-        <p:spPr>
-          <a:xfrm>
-            <a:off x="685800" y="3081528"/>
-            <a:ext cx="7772400" cy="548640"/>
-          </a:xfrm>
-          <a:prstGeom prst="rect">
-            <a:avLst/>
-          </a:prstGeom>
-          <a:noFill/>
-          <a:ln/>
-        </p:spPr>
-        <p:txBody>
-          <a:bodyPr wrap="square" rtlCol="0" anchor="ctr"/>
-          <a:lstStyle/>
-          <a:p>
-            <a:pPr indent="0" marL="0">
-              <a:lnSpc>
-                <a:spcPts val="1300"/>
-              </a:lnSpc>
-              <a:buNone/>
-            </a:pPr>
-            <a:r>
               <a:rPr lang="en-US" sz="1050" dirty="0">
                 <a:solidFill>
                   <a:srgbClr val="3D3935"/>
@@ -3521,12 +3170,6 @@
               <a:t>依活動規則，獎項不得折換現金、找零或轉讓。
 </a:t>
             </a:r>
-            <a:pPr indent="0" marL="0">
-              <a:lnSpc>
-                <a:spcPts val="1300"/>
-              </a:lnSpc>
-              <a:buNone/>
-            </a:pPr>
             <a:r>
               <a:rPr lang="en-US" sz="900" dirty="0">
                 <a:solidFill>
@@ -3590,7 +3233,7 @@
           <a:bodyPr wrap="square" rtlCol="0" anchor="ctr"/>
           <a:lstStyle/>
           <a:p>
-            <a:pPr indent="0" marL="0">
+            <a:pPr marL="0" indent="0">
               <a:lnSpc>
                 <a:spcPts val="1500"/>
               </a:lnSpc>
@@ -3607,12 +3250,6 @@
               </a:rPr>
               <a:t>🚫  </a:t>
             </a:r>
-            <a:pPr indent="0" marL="0">
-              <a:lnSpc>
-                <a:spcPts val="1500"/>
-              </a:lnSpc>
-              <a:buNone/>
-            </a:pPr>
             <a:r>
               <a:rPr lang="en-US" sz="1150" b="1" dirty="0">
                 <a:solidFill>
@@ -3625,12 +3262,6 @@
               <a:t>客人追問中獎率時，請勿透露任何數字 —— 一律回「由系統隨機產生」。
 </a:t>
             </a:r>
-            <a:pPr indent="0" marL="0">
-              <a:lnSpc>
-                <a:spcPts val="1500"/>
-              </a:lnSpc>
-              <a:buNone/>
-            </a:pPr>
             <a:r>
               <a:rPr lang="en-US" sz="950" dirty="0">
                 <a:solidFill>
@@ -3662,6 +3293,7 @@
         <a:solidFill>
           <a:srgbClr val="FAF8F6"/>
         </a:solidFill>
+        <a:effectLst/>
       </p:bgPr>
     </p:bg>
     <p:spTree>
@@ -3699,7 +3331,7 @@
           <a:bodyPr wrap="square" rtlCol="0" anchor="ctr"/>
           <a:lstStyle/>
           <a:p>
-            <a:pPr indent="0" marL="0">
+            <a:pPr marL="0" indent="0">
               <a:buNone/>
             </a:pPr>
             <a:r>
@@ -3738,7 +3370,7 @@
           <a:bodyPr wrap="square" rtlCol="0" anchor="ctr"/>
           <a:lstStyle/>
           <a:p>
-            <a:pPr indent="0" marL="0">
+            <a:pPr marL="0" indent="0">
               <a:buNone/>
             </a:pPr>
             <a:r>
@@ -3797,7 +3429,7 @@
           <a:bodyPr wrap="square" rtlCol="0" anchor="ctr"/>
           <a:lstStyle/>
           <a:p>
-            <a:pPr algn="r" indent="0" marL="0">
+            <a:pPr marL="0" indent="0" algn="r">
               <a:buNone/>
             </a:pPr>
             <a:r>
@@ -3836,7 +3468,7 @@
           <a:bodyPr wrap="square" rtlCol="0" anchor="ctr"/>
           <a:lstStyle/>
           <a:p>
-            <a:pPr indent="0" marL="0">
+            <a:pPr marL="0" indent="0">
               <a:buNone/>
             </a:pPr>
             <a:r>
@@ -3897,7 +3529,7 @@
           <a:bodyPr wrap="square" rtlCol="0" anchor="ctr"/>
           <a:lstStyle/>
           <a:p>
-            <a:pPr indent="0" marL="0">
+            <a:pPr marL="0" indent="0">
               <a:lnSpc>
                 <a:spcPts val="1300"/>
               </a:lnSpc>
@@ -3915,12 +3547,6 @@
               <a:t>✕  各獎項的中獎機率
 </a:t>
             </a:r>
-            <a:pPr indent="0" marL="0">
-              <a:lnSpc>
-                <a:spcPts val="1300"/>
-              </a:lnSpc>
-              <a:buNone/>
-            </a:pPr>
             <a:r>
               <a:rPr lang="en-US" sz="850" dirty="0">
                 <a:solidFill>
@@ -3957,7 +3583,7 @@
           <a:bodyPr wrap="square" rtlCol="0" anchor="ctr"/>
           <a:lstStyle/>
           <a:p>
-            <a:pPr indent="0" marL="0">
+            <a:pPr marL="0" indent="0">
               <a:buNone/>
             </a:pPr>
             <a:r>
@@ -4018,7 +3644,7 @@
           <a:bodyPr wrap="square" rtlCol="0" anchor="ctr"/>
           <a:lstStyle/>
           <a:p>
-            <a:pPr indent="0" marL="0">
+            <a:pPr marL="0" indent="0">
               <a:lnSpc>
                 <a:spcPts val="1300"/>
               </a:lnSpc>
@@ -4036,12 +3662,6 @@
               <a:t>✕  每個獎品還剩幾份／已發出幾份
 </a:t>
             </a:r>
-            <a:pPr indent="0" marL="0">
-              <a:lnSpc>
-                <a:spcPts val="1300"/>
-              </a:lnSpc>
-              <a:buNone/>
-            </a:pPr>
             <a:r>
               <a:rPr lang="en-US" sz="850" dirty="0">
                 <a:solidFill>
@@ -4078,7 +3698,7 @@
           <a:bodyPr wrap="square" rtlCol="0" anchor="ctr"/>
           <a:lstStyle/>
           <a:p>
-            <a:pPr indent="0" marL="0">
+            <a:pPr marL="0" indent="0">
               <a:buNone/>
             </a:pPr>
             <a:r>
@@ -4139,7 +3759,7 @@
           <a:bodyPr wrap="square" rtlCol="0" anchor="ctr"/>
           <a:lstStyle/>
           <a:p>
-            <a:pPr indent="0" marL="0">
+            <a:pPr marL="0" indent="0">
               <a:lnSpc>
                 <a:spcPts val="1300"/>
               </a:lnSpc>
@@ -4157,12 +3777,6 @@
               <a:t>✕  內部管理系統的存在或操作方式
 </a:t>
             </a:r>
-            <a:pPr indent="0" marL="0">
-              <a:lnSpc>
-                <a:spcPts val="1300"/>
-              </a:lnSpc>
-              <a:buNone/>
-            </a:pPr>
             <a:r>
               <a:rPr lang="en-US" sz="850" dirty="0">
                 <a:solidFill>
@@ -4199,7 +3813,7 @@
           <a:bodyPr wrap="square" rtlCol="0" anchor="ctr"/>
           <a:lstStyle/>
           <a:p>
-            <a:pPr indent="0" marL="0">
+            <a:pPr marL="0" indent="0">
               <a:buNone/>
             </a:pPr>
             <a:r>
@@ -4260,7 +3874,7 @@
           <a:bodyPr wrap="square" rtlCol="0" anchor="ctr"/>
           <a:lstStyle/>
           <a:p>
-            <a:pPr indent="0" marL="0">
+            <a:pPr marL="0" indent="0">
               <a:lnSpc>
                 <a:spcPts val="1300"/>
               </a:lnSpc>
@@ -4278,12 +3892,6 @@
               <a:t>✕  其他中獎者的姓名／電話／中獎內容
 </a:t>
             </a:r>
-            <a:pPr indent="0" marL="0">
-              <a:lnSpc>
-                <a:spcPts val="1300"/>
-              </a:lnSpc>
-              <a:buNone/>
-            </a:pPr>
             <a:r>
               <a:rPr lang="en-US" sz="850" dirty="0">
                 <a:solidFill>
@@ -4320,7 +3928,7 @@
           <a:bodyPr wrap="square" rtlCol="0" anchor="ctr"/>
           <a:lstStyle/>
           <a:p>
-            <a:pPr indent="0" marL="0">
+            <a:pPr marL="0" indent="0">
               <a:buNone/>
             </a:pPr>
             <a:r>
@@ -4381,7 +3989,7 @@
           <a:bodyPr wrap="square" rtlCol="0" anchor="ctr"/>
           <a:lstStyle/>
           <a:p>
-            <a:pPr indent="0" marL="0">
+            <a:pPr marL="0" indent="0">
               <a:lnSpc>
                 <a:spcPts val="1300"/>
               </a:lnSpc>
@@ -4399,12 +4007,6 @@
               <a:t>✕  對兌換方式或日期做個人承諾
 </a:t>
             </a:r>
-            <a:pPr indent="0" marL="0">
-              <a:lnSpc>
-                <a:spcPts val="1300"/>
-              </a:lnSpc>
-              <a:buNone/>
-            </a:pPr>
             <a:r>
               <a:rPr lang="en-US" sz="850" dirty="0">
                 <a:solidFill>
@@ -4441,7 +4043,7 @@
           <a:bodyPr wrap="square" rtlCol="0" anchor="ctr"/>
           <a:lstStyle/>
           <a:p>
-            <a:pPr indent="0" marL="0">
+            <a:pPr marL="0" indent="0">
               <a:buNone/>
             </a:pPr>
             <a:r>
@@ -4507,7 +4109,7 @@
           <a:bodyPr wrap="square" rtlCol="0" anchor="ctr"/>
           <a:lstStyle/>
           <a:p>
-            <a:pPr indent="0" marL="0">
+            <a:pPr marL="0" indent="0">
               <a:lnSpc>
                 <a:spcPts val="1500"/>
               </a:lnSpc>
@@ -4524,12 +4126,6 @@
               </a:rPr>
               <a:t>🙋  </a:t>
             </a:r>
-            <a:pPr indent="0" marL="0">
-              <a:lnSpc>
-                <a:spcPts val="1500"/>
-              </a:lnSpc>
-              <a:buNone/>
-            </a:pPr>
             <a:r>
               <a:rPr lang="en-US" sz="1150" b="1" dirty="0">
                 <a:solidFill>
@@ -4542,12 +4138,6 @@
               <a:t>遇到無法回答或客人情緒不佳時，請轉給主管處理，不要自行承諾。
 </a:t>
             </a:r>
-            <a:pPr indent="0" marL="0">
-              <a:lnSpc>
-                <a:spcPts val="1500"/>
-              </a:lnSpc>
-              <a:buNone/>
-            </a:pPr>
             <a:r>
               <a:rPr lang="en-US" sz="950" dirty="0">
                 <a:solidFill>
@@ -4579,6 +4169,7 @@
         <a:solidFill>
           <a:srgbClr val="FAF8F6"/>
         </a:solidFill>
+        <a:effectLst/>
       </p:bgPr>
     </p:bg>
     <p:spTree>
@@ -4616,7 +4207,7 @@
           <a:bodyPr wrap="square" rtlCol="0" anchor="ctr"/>
           <a:lstStyle/>
           <a:p>
-            <a:pPr indent="0" marL="0">
+            <a:pPr marL="0" indent="0">
               <a:buNone/>
             </a:pPr>
             <a:r>
@@ -4655,7 +4246,7 @@
           <a:bodyPr wrap="square" rtlCol="0" anchor="ctr"/>
           <a:lstStyle/>
           <a:p>
-            <a:pPr indent="0" marL="0">
+            <a:pPr marL="0" indent="0">
               <a:buNone/>
             </a:pPr>
             <a:r>
@@ -4714,7 +4305,7 @@
           <a:bodyPr wrap="square" rtlCol="0" anchor="ctr"/>
           <a:lstStyle/>
           <a:p>
-            <a:pPr algn="r" indent="0" marL="0">
+            <a:pPr marL="0" indent="0" algn="r">
               <a:buNone/>
             </a:pPr>
             <a:r>
@@ -4753,7 +4344,7 @@
           <a:bodyPr wrap="square" rtlCol="0" anchor="ctr"/>
           <a:lstStyle/>
           <a:p>
-            <a:pPr indent="0" marL="0">
+            <a:pPr marL="0" indent="0">
               <a:buNone/>
             </a:pPr>
             <a:r>
@@ -4797,6 +4388,13 @@
             <a:prstDash val="solid"/>
           </a:ln>
         </p:spPr>
+        <p:txBody>
+          <a:bodyPr/>
+          <a:lstStyle/>
+          <a:p>
+            <a:endParaRPr lang="zh-TW" altLang="en-US"/>
+          </a:p>
+        </p:txBody>
       </p:sp>
       <p:sp>
         <p:nvSpPr>
@@ -4819,7 +4417,7 @@
           <a:bodyPr wrap="square" rtlCol="0" anchor="ctr"/>
           <a:lstStyle/>
           <a:p>
-            <a:pPr indent="0" marL="0">
+            <a:pPr marL="0" indent="0">
               <a:buNone/>
             </a:pPr>
             <a:r>
@@ -4858,7 +4456,7 @@
           <a:bodyPr wrap="square" rtlCol="0" anchor="ctr"/>
           <a:lstStyle/>
           <a:p>
-            <a:pPr indent="0" marL="0">
+            <a:pPr marL="0" indent="0">
               <a:lnSpc>
                 <a:spcPts val="1300"/>
               </a:lnSpc>
@@ -4876,12 +4474,6 @@
               <a:t>客人說沒收到券，且在 LINE 對話中確實找不到
 </a:t>
             </a:r>
-            <a:pPr indent="0" marL="0">
-              <a:lnSpc>
-                <a:spcPts val="1300"/>
-              </a:lnSpc>
-              <a:buNone/>
-            </a:pPr>
             <a:r>
               <a:rPr lang="en-US" sz="850" dirty="0">
                 <a:solidFill>
@@ -4923,6 +4515,13 @@
             <a:prstDash val="solid"/>
           </a:ln>
         </p:spPr>
+        <p:txBody>
+          <a:bodyPr/>
+          <a:lstStyle/>
+          <a:p>
+            <a:endParaRPr lang="zh-TW" altLang="en-US"/>
+          </a:p>
+        </p:txBody>
       </p:sp>
       <p:sp>
         <p:nvSpPr>
@@ -4945,7 +4544,7 @@
           <a:bodyPr wrap="square" rtlCol="0" anchor="ctr"/>
           <a:lstStyle/>
           <a:p>
-            <a:pPr indent="0" marL="0">
+            <a:pPr marL="0" indent="0">
               <a:buNone/>
             </a:pPr>
             <a:r>
@@ -4984,7 +4583,7 @@
           <a:bodyPr wrap="square" rtlCol="0" anchor="ctr"/>
           <a:lstStyle/>
           <a:p>
-            <a:pPr indent="0" marL="0">
+            <a:pPr marL="0" indent="0">
               <a:lnSpc>
                 <a:spcPts val="1300"/>
               </a:lnSpc>
@@ -5002,12 +4601,6 @@
               <a:t>客人的兌換碼查不到，或狀態異常
 </a:t>
             </a:r>
-            <a:pPr indent="0" marL="0">
-              <a:lnSpc>
-                <a:spcPts val="1300"/>
-              </a:lnSpc>
-              <a:buNone/>
-            </a:pPr>
             <a:r>
               <a:rPr lang="en-US" sz="850" dirty="0">
                 <a:solidFill>
@@ -5049,6 +4642,13 @@
             <a:prstDash val="solid"/>
           </a:ln>
         </p:spPr>
+        <p:txBody>
+          <a:bodyPr/>
+          <a:lstStyle/>
+          <a:p>
+            <a:endParaRPr lang="zh-TW" altLang="en-US"/>
+          </a:p>
+        </p:txBody>
       </p:sp>
       <p:sp>
         <p:nvSpPr>
@@ -5071,7 +4671,7 @@
           <a:bodyPr wrap="square" rtlCol="0" anchor="ctr"/>
           <a:lstStyle/>
           <a:p>
-            <a:pPr indent="0" marL="0">
+            <a:pPr marL="0" indent="0">
               <a:buNone/>
             </a:pPr>
             <a:r>
@@ -5110,7 +4710,7 @@
           <a:bodyPr wrap="square" rtlCol="0" anchor="ctr"/>
           <a:lstStyle/>
           <a:p>
-            <a:pPr indent="0" marL="0">
+            <a:pPr marL="0" indent="0">
               <a:lnSpc>
                 <a:spcPts val="1300"/>
               </a:lnSpc>
@@ -5128,12 +4728,6 @@
               <a:t>客人拿臺北洲際的兌換碼到高雄要求核銷
 </a:t>
             </a:r>
-            <a:pPr indent="0" marL="0">
-              <a:lnSpc>
-                <a:spcPts val="1300"/>
-              </a:lnSpc>
-              <a:buNone/>
-            </a:pPr>
             <a:r>
               <a:rPr lang="en-US" sz="850" dirty="0">
                 <a:solidFill>
@@ -5197,7 +4791,7 @@
           <a:bodyPr wrap="square" rtlCol="0" anchor="ctr"/>
           <a:lstStyle/>
           <a:p>
-            <a:pPr indent="0" marL="0">
+            <a:pPr marL="0" indent="0">
               <a:buNone/>
             </a:pPr>
             <a:r>
@@ -5236,7 +4830,7 @@
           <a:bodyPr wrap="square" rtlCol="0" anchor="ctr"/>
           <a:lstStyle/>
           <a:p>
-            <a:pPr indent="0" marL="0">
+            <a:pPr marL="0" indent="0">
               <a:lnSpc>
                 <a:spcPts val="1300"/>
               </a:lnSpc>
@@ -5254,12 +4848,6 @@
               <a:t>客人對中獎結果或活動規則提出申訴
 </a:t>
             </a:r>
-            <a:pPr indent="0" marL="0">
-              <a:lnSpc>
-                <a:spcPts val="1300"/>
-              </a:lnSpc>
-              <a:buNone/>
-            </a:pPr>
             <a:r>
               <a:rPr lang="en-US" sz="850" dirty="0">
                 <a:solidFill>
@@ -5301,6 +4889,13 @@
             <a:prstDash val="solid"/>
           </a:ln>
         </p:spPr>
+        <p:txBody>
+          <a:bodyPr/>
+          <a:lstStyle/>
+          <a:p>
+            <a:endParaRPr lang="zh-TW" altLang="en-US"/>
+          </a:p>
+        </p:txBody>
       </p:sp>
       <p:sp>
         <p:nvSpPr>
@@ -5323,7 +4918,7 @@
           <a:bodyPr wrap="square" rtlCol="0" anchor="ctr"/>
           <a:lstStyle/>
           <a:p>
-            <a:pPr indent="0" marL="0">
+            <a:pPr marL="0" indent="0">
               <a:buNone/>
             </a:pPr>
             <a:r>
@@ -5362,7 +4957,7 @@
           <a:bodyPr wrap="square" rtlCol="0" anchor="ctr"/>
           <a:lstStyle/>
           <a:p>
-            <a:pPr indent="0" marL="0">
+            <a:pPr marL="0" indent="0">
               <a:lnSpc>
                 <a:spcPts val="1300"/>
               </a:lnSpc>
@@ -5380,12 +4975,6 @@
               <a:t>同一位客人短時間內出現大量中獎紀錄
 </a:t>
             </a:r>
-            <a:pPr indent="0" marL="0">
-              <a:lnSpc>
-                <a:spcPts val="1300"/>
-              </a:lnSpc>
-              <a:buNone/>
-            </a:pPr>
             <a:r>
               <a:rPr lang="en-US" sz="850" dirty="0">
                 <a:solidFill>
@@ -5417,6 +5006,7 @@
         <a:solidFill>
           <a:srgbClr val="2B2620"/>
         </a:solidFill>
+        <a:effectLst/>
       </p:bgPr>
     </p:bg>
     <p:spTree>
@@ -5454,7 +5044,7 @@
           <a:bodyPr wrap="square" rtlCol="0" anchor="ctr"/>
           <a:lstStyle/>
           <a:p>
-            <a:pPr indent="0" marL="0">
+            <a:pPr marL="0" indent="0">
               <a:lnSpc>
                 <a:spcPts val="2200"/>
               </a:lnSpc>
@@ -5472,12 +5062,6 @@
               <a:t>一頁速查卡
 </a:t>
             </a:r>
-            <a:pPr indent="0" marL="0">
-              <a:lnSpc>
-                <a:spcPts val="2200"/>
-              </a:lnSpc>
-              <a:buNone/>
-            </a:pPr>
             <a:r>
               <a:rPr lang="en-US" sz="1150" dirty="0">
                 <a:solidFill>
@@ -5556,7 +5140,7 @@
           <a:bodyPr wrap="square" rtlCol="0" anchor="ctr"/>
           <a:lstStyle/>
           <a:p>
-            <a:pPr indent="0" marL="0">
+            <a:pPr marL="0" indent="0">
               <a:buNone/>
             </a:pPr>
             <a:r>
@@ -5595,7 +5179,7 @@
           <a:bodyPr wrap="square" rtlCol="0" anchor="ctr"/>
           <a:lstStyle/>
           <a:p>
-            <a:pPr indent="0" marL="0">
+            <a:pPr marL="0" indent="0">
               <a:buNone/>
             </a:pPr>
             <a:r>
@@ -5609,9 +5193,6 @@
               </a:rPr>
               <a:t>有優惠券　</a:t>
             </a:r>
-            <a:pPr indent="0" marL="0">
-              <a:buNone/>
-            </a:pPr>
             <a:r>
               <a:rPr lang="en-US" sz="900" dirty="0">
                 <a:solidFill>
@@ -5648,7 +5229,7 @@
           <a:bodyPr wrap="square" rtlCol="0" anchor="ctr"/>
           <a:lstStyle/>
           <a:p>
-            <a:pPr indent="0" marL="0">
+            <a:pPr marL="0" indent="0">
               <a:lnSpc>
                 <a:spcPts val="1400"/>
               </a:lnSpc>
@@ -5667,12 +5248,6 @@
 出示兌換碼 → 櫃檯核銷
 </a:t>
             </a:r>
-            <a:pPr indent="0" marL="0">
-              <a:lnSpc>
-                <a:spcPts val="1400"/>
-              </a:lnSpc>
-              <a:buNone/>
-            </a:pPr>
             <a:r>
               <a:rPr lang="en-US" sz="850" dirty="0">
                 <a:solidFill>
@@ -5731,7 +5306,7 @@
           <a:bodyPr wrap="square" rtlCol="0" anchor="ctr"/>
           <a:lstStyle/>
           <a:p>
-            <a:pPr indent="0" marL="0">
+            <a:pPr marL="0" indent="0">
               <a:buNone/>
             </a:pPr>
             <a:r>
@@ -5770,7 +5345,7 @@
           <a:bodyPr wrap="square" rtlCol="0" anchor="ctr"/>
           <a:lstStyle/>
           <a:p>
-            <a:pPr indent="0" marL="0">
+            <a:pPr marL="0" indent="0">
               <a:buNone/>
             </a:pPr>
             <a:r>
@@ -5784,9 +5359,6 @@
               </a:rPr>
               <a:t>沒有券　</a:t>
             </a:r>
-            <a:pPr indent="0" marL="0">
-              <a:buNone/>
-            </a:pPr>
             <a:r>
               <a:rPr lang="en-US" sz="900" dirty="0">
                 <a:solidFill>
@@ -5823,7 +5395,7 @@
           <a:bodyPr wrap="square" rtlCol="0" anchor="ctr"/>
           <a:lstStyle/>
           <a:p>
-            <a:pPr indent="0" marL="0">
+            <a:pPr marL="0" indent="0">
               <a:lnSpc>
                 <a:spcPts val="1400"/>
               </a:lnSpc>
@@ -5842,12 +5414,6 @@
 該館同仁主動聯繫，不核銷
 </a:t>
             </a:r>
-            <a:pPr indent="0" marL="0">
-              <a:lnSpc>
-                <a:spcPts val="1400"/>
-              </a:lnSpc>
-              <a:buNone/>
-            </a:pPr>
             <a:r>
               <a:rPr lang="en-US" sz="850" dirty="0">
                 <a:solidFill>
@@ -5906,7 +5472,7 @@
           <a:bodyPr wrap="square" rtlCol="0" anchor="ctr"/>
           <a:lstStyle/>
           <a:p>
-            <a:pPr indent="0" marL="0">
+            <a:pPr marL="0" indent="0">
               <a:buNone/>
             </a:pPr>
             <a:r>
@@ -5945,7 +5511,7 @@
           <a:bodyPr wrap="square" rtlCol="0" anchor="ctr"/>
           <a:lstStyle/>
           <a:p>
-            <a:pPr indent="0" marL="0">
+            <a:pPr marL="0" indent="0">
               <a:buNone/>
             </a:pPr>
             <a:r>
@@ -5959,9 +5525,6 @@
               </a:rPr>
               <a:t>絕不能說　</a:t>
             </a:r>
-            <a:pPr indent="0" marL="0">
-              <a:buNone/>
-            </a:pPr>
             <a:r>
               <a:rPr lang="en-US" sz="900" dirty="0">
                 <a:solidFill>
@@ -5998,7 +5561,7 @@
           <a:bodyPr wrap="square" rtlCol="0" anchor="ctr"/>
           <a:lstStyle/>
           <a:p>
-            <a:pPr indent="0" marL="0">
+            <a:pPr marL="0" indent="0">
               <a:lnSpc>
                 <a:spcPts val="1400"/>
               </a:lnSpc>
@@ -6017,12 +5580,6 @@
 其他客人的資料
 </a:t>
             </a:r>
-            <a:pPr indent="0" marL="0">
-              <a:lnSpc>
-                <a:spcPts val="1400"/>
-              </a:lnSpc>
-              <a:buNone/>
-            </a:pPr>
             <a:r>
               <a:rPr lang="en-US" sz="850" dirty="0">
                 <a:solidFill>
@@ -6081,7 +5638,7 @@
           <a:bodyPr wrap="square" rtlCol="0" anchor="ctr"/>
           <a:lstStyle/>
           <a:p>
-            <a:pPr indent="0" marL="0">
+            <a:pPr marL="0" indent="0">
               <a:buNone/>
             </a:pPr>
             <a:r>
@@ -6120,7 +5677,7 @@
           <a:bodyPr wrap="square" rtlCol="0" anchor="ctr"/>
           <a:lstStyle/>
           <a:p>
-            <a:pPr indent="0" marL="0">
+            <a:pPr marL="0" indent="0">
               <a:buNone/>
             </a:pPr>
             <a:r>
@@ -6134,9 +5691,6 @@
               </a:rPr>
               <a:t>不確定就轉單　</a:t>
             </a:r>
-            <a:pPr indent="0" marL="0">
-              <a:buNone/>
-            </a:pPr>
             <a:r>
               <a:rPr lang="en-US" sz="900" dirty="0">
                 <a:solidFill>
@@ -6173,7 +5727,7 @@
           <a:bodyPr wrap="square" rtlCol="0" anchor="ctr"/>
           <a:lstStyle/>
           <a:p>
-            <a:pPr indent="0" marL="0">
+            <a:pPr marL="0" indent="0">
               <a:lnSpc>
                 <a:spcPts val="1400"/>
               </a:lnSpc>
@@ -6192,12 +5746,6 @@
 一切以活動頁公告為準
 </a:t>
             </a:r>
-            <a:pPr indent="0" marL="0">
-              <a:lnSpc>
-                <a:spcPts val="1400"/>
-              </a:lnSpc>
-              <a:buNone/>
-            </a:pPr>
             <a:r>
               <a:rPr lang="en-US" sz="850" dirty="0">
                 <a:solidFill>
@@ -6234,7 +5782,7 @@
           <a:bodyPr wrap="square" rtlCol="0" anchor="ctr"/>
           <a:lstStyle/>
           <a:p>
-            <a:pPr algn="ctr" indent="0" marL="0">
+            <a:pPr marL="0" indent="0" algn="ctr">
               <a:buNone/>
             </a:pPr>
             <a:r>
@@ -6268,6 +5816,7 @@
         <a:solidFill>
           <a:srgbClr val="FAF8F6"/>
         </a:solidFill>
+        <a:effectLst/>
       </p:bgPr>
     </p:bg>
     <p:spTree>
@@ -6305,7 +5854,7 @@
           <a:bodyPr wrap="square" rtlCol="0" anchor="ctr"/>
           <a:lstStyle/>
           <a:p>
-            <a:pPr indent="0" marL="0">
+            <a:pPr marL="0" indent="0">
               <a:buNone/>
             </a:pPr>
             <a:r>
@@ -6344,7 +5893,7 @@
           <a:bodyPr wrap="square" rtlCol="0" anchor="ctr"/>
           <a:lstStyle/>
           <a:p>
-            <a:pPr indent="0" marL="0">
+            <a:pPr marL="0" indent="0">
               <a:buNone/>
             </a:pPr>
             <a:r>
@@ -6403,7 +5952,7 @@
           <a:bodyPr wrap="square" rtlCol="0" anchor="ctr"/>
           <a:lstStyle/>
           <a:p>
-            <a:pPr algn="r" indent="0" marL="0">
+            <a:pPr marL="0" indent="0" algn="r">
               <a:buNone/>
             </a:pPr>
             <a:r>
@@ -6442,7 +5991,7 @@
           <a:bodyPr wrap="square" rtlCol="0" anchor="ctr"/>
           <a:lstStyle/>
           <a:p>
-            <a:pPr indent="0" marL="0">
+            <a:pPr marL="0" indent="0">
               <a:buNone/>
             </a:pPr>
             <a:r>
@@ -6481,7 +6030,7 @@
           <a:bodyPr wrap="square" rtlCol="0" anchor="ctr"/>
           <a:lstStyle/>
           <a:p>
-            <a:pPr indent="0" marL="0">
+            <a:pPr marL="0" indent="0">
               <a:buNone/>
             </a:pPr>
             <a:r>
@@ -6520,7 +6069,7 @@
           <a:bodyPr wrap="square" rtlCol="0" anchor="ctr"/>
           <a:lstStyle/>
           <a:p>
-            <a:pPr indent="0" marL="0">
+            <a:pPr marL="0" indent="0">
               <a:buNone/>
             </a:pPr>
             <a:r>
@@ -6559,7 +6108,7 @@
           <a:bodyPr wrap="square" rtlCol="0" anchor="ctr"/>
           <a:lstStyle/>
           <a:p>
-            <a:pPr indent="0" marL="0">
+            <a:pPr marL="0" indent="0">
               <a:buNone/>
             </a:pPr>
             <a:r>
@@ -6598,7 +6147,7 @@
           <a:bodyPr wrap="square" rtlCol="0" anchor="ctr"/>
           <a:lstStyle/>
           <a:p>
-            <a:pPr indent="0" marL="0">
+            <a:pPr marL="0" indent="0">
               <a:buNone/>
             </a:pPr>
             <a:r>
@@ -6637,7 +6186,7 @@
           <a:bodyPr wrap="square" rtlCol="0" anchor="ctr"/>
           <a:lstStyle/>
           <a:p>
-            <a:pPr indent="0" marL="0">
+            <a:pPr marL="0" indent="0">
               <a:buNone/>
             </a:pPr>
             <a:r>
@@ -6676,7 +6225,7 @@
           <a:bodyPr wrap="square" rtlCol="0" anchor="ctr"/>
           <a:lstStyle/>
           <a:p>
-            <a:pPr indent="0" marL="0">
+            <a:pPr marL="0" indent="0">
               <a:buNone/>
             </a:pPr>
             <a:r>
@@ -6715,7 +6264,7 @@
           <a:bodyPr wrap="square" rtlCol="0" anchor="ctr"/>
           <a:lstStyle/>
           <a:p>
-            <a:pPr indent="0" marL="0">
+            <a:pPr marL="0" indent="0">
               <a:buNone/>
             </a:pPr>
             <a:r>
@@ -6754,7 +6303,7 @@
           <a:bodyPr wrap="square" rtlCol="0" anchor="ctr"/>
           <a:lstStyle/>
           <a:p>
-            <a:pPr indent="0" marL="0">
+            <a:pPr marL="0" indent="0">
               <a:buNone/>
             </a:pPr>
             <a:r>
@@ -6793,7 +6342,7 @@
           <a:bodyPr wrap="square" rtlCol="0" anchor="ctr"/>
           <a:lstStyle/>
           <a:p>
-            <a:pPr indent="0" marL="0">
+            <a:pPr marL="0" indent="0">
               <a:buNone/>
             </a:pPr>
             <a:r>
@@ -6832,7 +6381,7 @@
           <a:bodyPr wrap="square" rtlCol="0" anchor="ctr"/>
           <a:lstStyle/>
           <a:p>
-            <a:pPr indent="0" marL="0">
+            <a:pPr marL="0" indent="0">
               <a:buNone/>
             </a:pPr>
             <a:r>
@@ -6871,7 +6420,7 @@
           <a:bodyPr wrap="square" rtlCol="0" anchor="ctr"/>
           <a:lstStyle/>
           <a:p>
-            <a:pPr indent="0" marL="0">
+            <a:pPr marL="0" indent="0">
               <a:buNone/>
             </a:pPr>
             <a:r>
@@ -6910,7 +6459,7 @@
           <a:bodyPr wrap="square" rtlCol="0" anchor="ctr"/>
           <a:lstStyle/>
           <a:p>
-            <a:pPr indent="0" marL="0">
+            <a:pPr marL="0" indent="0">
               <a:buNone/>
             </a:pPr>
             <a:r>
@@ -6949,7 +6498,7 @@
           <a:bodyPr wrap="square" rtlCol="0" anchor="ctr"/>
           <a:lstStyle/>
           <a:p>
-            <a:pPr indent="0" marL="0">
+            <a:pPr marL="0" indent="0">
               <a:buNone/>
             </a:pPr>
             <a:r>
@@ -6988,7 +6537,7 @@
           <a:bodyPr wrap="square" rtlCol="0" anchor="ctr"/>
           <a:lstStyle/>
           <a:p>
-            <a:pPr indent="0" marL="0">
+            <a:pPr marL="0" indent="0">
               <a:buNone/>
             </a:pPr>
             <a:r>
@@ -7027,7 +6576,7 @@
           <a:bodyPr wrap="square" rtlCol="0" anchor="ctr"/>
           <a:lstStyle/>
           <a:p>
-            <a:pPr indent="0" marL="0">
+            <a:pPr marL="0" indent="0">
               <a:buNone/>
             </a:pPr>
             <a:r>
@@ -7066,7 +6615,7 @@
           <a:bodyPr wrap="square" rtlCol="0" anchor="ctr"/>
           <a:lstStyle/>
           <a:p>
-            <a:pPr indent="0" marL="0">
+            <a:pPr marL="0" indent="0">
               <a:buNone/>
             </a:pPr>
             <a:r>
@@ -7105,7 +6654,7 @@
           <a:bodyPr wrap="square" rtlCol="0" anchor="ctr"/>
           <a:lstStyle/>
           <a:p>
-            <a:pPr indent="0" marL="0">
+            <a:pPr marL="0" indent="0">
               <a:buNone/>
             </a:pPr>
             <a:r>
@@ -7144,7 +6693,7 @@
           <a:bodyPr wrap="square" rtlCol="0" anchor="ctr"/>
           <a:lstStyle/>
           <a:p>
-            <a:pPr indent="0" marL="0">
+            <a:pPr marL="0" indent="0">
               <a:buNone/>
             </a:pPr>
             <a:r>
@@ -7183,7 +6732,7 @@
           <a:bodyPr wrap="square" rtlCol="0" anchor="ctr"/>
           <a:lstStyle/>
           <a:p>
-            <a:pPr indent="0" marL="0">
+            <a:pPr marL="0" indent="0">
               <a:buNone/>
             </a:pPr>
             <a:r>
@@ -7222,7 +6771,7 @@
           <a:bodyPr wrap="square" rtlCol="0" anchor="ctr"/>
           <a:lstStyle/>
           <a:p>
-            <a:pPr indent="0" marL="0">
+            <a:pPr marL="0" indent="0">
               <a:buNone/>
             </a:pPr>
             <a:r>
@@ -7261,7 +6810,7 @@
           <a:bodyPr wrap="square" rtlCol="0" anchor="ctr"/>
           <a:lstStyle/>
           <a:p>
-            <a:pPr indent="0" marL="0">
+            <a:pPr marL="0" indent="0">
               <a:buNone/>
             </a:pPr>
             <a:r>
@@ -7300,7 +6849,7 @@
           <a:bodyPr wrap="square" rtlCol="0" anchor="ctr"/>
           <a:lstStyle/>
           <a:p>
-            <a:pPr indent="0" marL="0">
+            <a:pPr marL="0" indent="0">
               <a:buNone/>
             </a:pPr>
             <a:r>
@@ -7339,7 +6888,7 @@
           <a:bodyPr wrap="square" rtlCol="0" anchor="ctr"/>
           <a:lstStyle/>
           <a:p>
-            <a:pPr indent="0" marL="0">
+            <a:pPr marL="0" indent="0">
               <a:buNone/>
             </a:pPr>
             <a:r>
@@ -7378,7 +6927,7 @@
           <a:bodyPr wrap="square" rtlCol="0" anchor="ctr"/>
           <a:lstStyle/>
           <a:p>
-            <a:pPr indent="0" marL="0">
+            <a:pPr marL="0" indent="0">
               <a:buNone/>
             </a:pPr>
             <a:r>
@@ -7444,7 +6993,7 @@
           <a:bodyPr wrap="square" rtlCol="0" anchor="ctr"/>
           <a:lstStyle/>
           <a:p>
-            <a:pPr indent="0" marL="0">
+            <a:pPr marL="0" indent="0">
               <a:lnSpc>
                 <a:spcPts val="1500"/>
               </a:lnSpc>
@@ -7461,12 +7010,6 @@
               </a:rPr>
               <a:t>📖  </a:t>
             </a:r>
-            <a:pPr indent="0" marL="0">
-              <a:lnSpc>
-                <a:spcPts val="1500"/>
-              </a:lnSpc>
-              <a:buNone/>
-            </a:pPr>
             <a:r>
               <a:rPr lang="en-US" sz="1150" b="1" dirty="0">
                 <a:solidFill>
@@ -7479,12 +7022,6 @@
               <a:t>第 4 章是本次最容易搞錯的部分（領獎方式看獎品、不看飯店），請務必看完。
 </a:t>
             </a:r>
-            <a:pPr indent="0" marL="0">
-              <a:lnSpc>
-                <a:spcPts val="1500"/>
-              </a:lnSpc>
-              <a:buNone/>
-            </a:pPr>
             <a:r>
               <a:rPr lang="en-US" sz="950" dirty="0">
                 <a:solidFill>
@@ -7516,6 +7053,7 @@
         <a:solidFill>
           <a:srgbClr val="FAF8F6"/>
         </a:solidFill>
+        <a:effectLst/>
       </p:bgPr>
     </p:bg>
     <p:spTree>
@@ -7553,7 +7091,7 @@
           <a:bodyPr wrap="square" rtlCol="0" anchor="ctr"/>
           <a:lstStyle/>
           <a:p>
-            <a:pPr indent="0" marL="0">
+            <a:pPr marL="0" indent="0">
               <a:buNone/>
             </a:pPr>
             <a:r>
@@ -7592,7 +7130,7 @@
           <a:bodyPr wrap="square" rtlCol="0" anchor="ctr"/>
           <a:lstStyle/>
           <a:p>
-            <a:pPr indent="0" marL="0">
+            <a:pPr marL="0" indent="0">
               <a:buNone/>
             </a:pPr>
             <a:r>
@@ -7651,7 +7189,7 @@
           <a:bodyPr wrap="square" rtlCol="0" anchor="ctr"/>
           <a:lstStyle/>
           <a:p>
-            <a:pPr algn="r" indent="0" marL="0">
+            <a:pPr marL="0" indent="0" algn="r">
               <a:buNone/>
             </a:pPr>
             <a:r>
@@ -7690,7 +7228,7 @@
           <a:bodyPr wrap="square" rtlCol="0" anchor="ctr"/>
           <a:lstStyle/>
           <a:p>
-            <a:pPr indent="0" marL="0">
+            <a:pPr marL="0" indent="0">
               <a:buNone/>
             </a:pPr>
             <a:r>
@@ -7729,7 +7267,7 @@
           <a:bodyPr wrap="square" rtlCol="0" anchor="ctr"/>
           <a:lstStyle/>
           <a:p>
-            <a:pPr indent="0" marL="0">
+            <a:pPr marL="0" indent="0">
               <a:lnSpc>
                 <a:spcPts val="1900"/>
               </a:lnSpc>
@@ -7747,12 +7285,6 @@
               <a:t>「洲遊幣 Lite」是臺北洲際酒店與高雄洲際酒店合辦的中秋線上抽獎遊戲。
 </a:t>
             </a:r>
-            <a:pPr indent="0" marL="0">
-              <a:lnSpc>
-                <a:spcPts val="1900"/>
-              </a:lnSpc>
-              <a:buNone/>
-            </a:pPr>
             <a:r>
               <a:rPr lang="en-US" sz="1000" dirty="0">
                 <a:solidFill>
@@ -7816,7 +7348,7 @@
           <a:bodyPr wrap="square" rtlCol="0" anchor="ctr"/>
           <a:lstStyle/>
           <a:p>
-            <a:pPr indent="0" marL="0">
+            <a:pPr marL="0" indent="0">
               <a:buNone/>
             </a:pPr>
             <a:r>
@@ -7855,7 +7387,7 @@
           <a:bodyPr wrap="square" rtlCol="0" anchor="ctr"/>
           <a:lstStyle/>
           <a:p>
-            <a:pPr indent="0" marL="0">
+            <a:pPr marL="0" indent="0">
               <a:buNone/>
             </a:pPr>
             <a:r>
@@ -7894,7 +7426,7 @@
           <a:bodyPr wrap="square" rtlCol="0" anchor="ctr"/>
           <a:lstStyle/>
           <a:p>
-            <a:pPr indent="0" marL="0">
+            <a:pPr marL="0" indent="0">
               <a:buNone/>
             </a:pPr>
             <a:r>
@@ -7933,7 +7465,7 @@
           <a:bodyPr wrap="square" rtlCol="0" anchor="ctr"/>
           <a:lstStyle/>
           <a:p>
-            <a:pPr indent="0" marL="0">
+            <a:pPr marL="0" indent="0">
               <a:buNone/>
             </a:pPr>
             <a:r>
@@ -7972,7 +7504,7 @@
           <a:bodyPr wrap="square" rtlCol="0" anchor="ctr"/>
           <a:lstStyle/>
           <a:p>
-            <a:pPr indent="0" marL="0">
+            <a:pPr marL="0" indent="0">
               <a:buNone/>
             </a:pPr>
             <a:r>
@@ -8038,7 +7570,7 @@
           <a:bodyPr wrap="square" rtlCol="0" anchor="ctr"/>
           <a:lstStyle/>
           <a:p>
-            <a:pPr indent="0" marL="0">
+            <a:pPr marL="0" indent="0">
               <a:buNone/>
             </a:pPr>
             <a:r>
@@ -8077,7 +7609,7 @@
           <a:bodyPr wrap="square" rtlCol="0" anchor="ctr"/>
           <a:lstStyle/>
           <a:p>
-            <a:pPr indent="0" marL="0">
+            <a:pPr marL="0" indent="0">
               <a:buNone/>
             </a:pPr>
             <a:r>
@@ -8116,7 +7648,7 @@
           <a:bodyPr wrap="square" rtlCol="0" anchor="ctr"/>
           <a:lstStyle/>
           <a:p>
-            <a:pPr indent="0" marL="0">
+            <a:pPr marL="0" indent="0">
               <a:buNone/>
             </a:pPr>
             <a:r>
@@ -8155,7 +7687,7 @@
           <a:bodyPr wrap="square" rtlCol="0" anchor="ctr"/>
           <a:lstStyle/>
           <a:p>
-            <a:pPr indent="0" marL="0">
+            <a:pPr marL="0" indent="0">
               <a:buNone/>
             </a:pPr>
             <a:r>
@@ -8194,7 +7726,7 @@
           <a:bodyPr wrap="square" rtlCol="0" anchor="ctr"/>
           <a:lstStyle/>
           <a:p>
-            <a:pPr indent="0" marL="0">
+            <a:pPr marL="0" indent="0">
               <a:buNone/>
             </a:pPr>
             <a:r>
@@ -8260,7 +7792,7 @@
           <a:bodyPr wrap="square" rtlCol="0" anchor="ctr"/>
           <a:lstStyle/>
           <a:p>
-            <a:pPr indent="0" marL="0">
+            <a:pPr marL="0" indent="0">
               <a:buNone/>
             </a:pPr>
             <a:r>
@@ -8299,7 +7831,7 @@
           <a:bodyPr wrap="square" rtlCol="0" anchor="ctr"/>
           <a:lstStyle/>
           <a:p>
-            <a:pPr indent="0" marL="0">
+            <a:pPr marL="0" indent="0">
               <a:buNone/>
             </a:pPr>
             <a:r>
@@ -8338,7 +7870,7 @@
           <a:bodyPr wrap="square" rtlCol="0" anchor="ctr"/>
           <a:lstStyle/>
           <a:p>
-            <a:pPr indent="0" marL="0">
+            <a:pPr marL="0" indent="0">
               <a:buNone/>
             </a:pPr>
             <a:r>
@@ -8377,7 +7909,7 @@
           <a:bodyPr wrap="square" rtlCol="0" anchor="ctr"/>
           <a:lstStyle/>
           <a:p>
-            <a:pPr indent="0" marL="0">
+            <a:pPr marL="0" indent="0">
               <a:buNone/>
             </a:pPr>
             <a:r>
@@ -8416,7 +7948,7 @@
           <a:bodyPr wrap="square" rtlCol="0" anchor="ctr"/>
           <a:lstStyle/>
           <a:p>
-            <a:pPr indent="0" marL="0">
+            <a:pPr marL="0" indent="0">
               <a:buNone/>
             </a:pPr>
             <a:r>
@@ -8482,7 +8014,7 @@
           <a:bodyPr wrap="square" rtlCol="0" anchor="ctr"/>
           <a:lstStyle/>
           <a:p>
-            <a:pPr indent="0" marL="0">
+            <a:pPr marL="0" indent="0">
               <a:lnSpc>
                 <a:spcPts val="1500"/>
               </a:lnSpc>
@@ -8499,12 +8031,6 @@
               </a:rPr>
               <a:t>🥮  </a:t>
             </a:r>
-            <a:pPr indent="0" marL="0">
-              <a:lnSpc>
-                <a:spcPts val="1500"/>
-              </a:lnSpc>
-              <a:buNone/>
-            </a:pPr>
             <a:r>
               <a:rPr lang="en-US" sz="1150" b="1" dirty="0">
                 <a:solidFill>
@@ -8517,12 +8043,6 @@
               <a:t>客人是掃描月餅禮盒內附的 QR Code 進入活動。
 </a:t>
             </a:r>
-            <a:pPr indent="0" marL="0">
-              <a:lnSpc>
-                <a:spcPts val="1500"/>
-              </a:lnSpc>
-              <a:buNone/>
-            </a:pPr>
             <a:r>
               <a:rPr lang="en-US" sz="950" dirty="0">
                 <a:solidFill>
@@ -8554,6 +8074,7 @@
         <a:solidFill>
           <a:srgbClr val="FAF8F6"/>
         </a:solidFill>
+        <a:effectLst/>
       </p:bgPr>
     </p:bg>
     <p:spTree>
@@ -8591,7 +8112,7 @@
           <a:bodyPr wrap="square" rtlCol="0" anchor="ctr"/>
           <a:lstStyle/>
           <a:p>
-            <a:pPr indent="0" marL="0">
+            <a:pPr marL="0" indent="0">
               <a:buNone/>
             </a:pPr>
             <a:r>
@@ -8630,7 +8151,7 @@
           <a:bodyPr wrap="square" rtlCol="0" anchor="ctr"/>
           <a:lstStyle/>
           <a:p>
-            <a:pPr indent="0" marL="0">
+            <a:pPr marL="0" indent="0">
               <a:buNone/>
             </a:pPr>
             <a:r>
@@ -8689,7 +8210,7 @@
           <a:bodyPr wrap="square" rtlCol="0" anchor="ctr"/>
           <a:lstStyle/>
           <a:p>
-            <a:pPr algn="r" indent="0" marL="0">
+            <a:pPr marL="0" indent="0" algn="r">
               <a:buNone/>
             </a:pPr>
             <a:r>
@@ -8728,7 +8249,7 @@
           <a:bodyPr wrap="square" rtlCol="0" anchor="ctr"/>
           <a:lstStyle/>
           <a:p>
-            <a:pPr indent="0" marL="0">
+            <a:pPr marL="0" indent="0">
               <a:buNone/>
             </a:pPr>
             <a:r>
@@ -8787,7 +8308,7 @@
           <a:bodyPr wrap="square" rtlCol="0" anchor="ctr"/>
           <a:lstStyle/>
           <a:p>
-            <a:pPr algn="ctr" indent="0" marL="0">
+            <a:pPr marL="0" indent="0" algn="ctr">
               <a:buNone/>
             </a:pPr>
             <a:r>
@@ -8826,7 +8347,7 @@
           <a:bodyPr wrap="square" rtlCol="0" anchor="ctr"/>
           <a:lstStyle/>
           <a:p>
-            <a:pPr indent="0" marL="0">
+            <a:pPr marL="0" indent="0">
               <a:buNone/>
             </a:pPr>
             <a:r>
@@ -8865,7 +8386,7 @@
           <a:bodyPr wrap="square" rtlCol="0" anchor="ctr"/>
           <a:lstStyle/>
           <a:p>
-            <a:pPr indent="0" marL="0">
+            <a:pPr marL="0" indent="0">
               <a:buNone/>
             </a:pPr>
             <a:r>
@@ -8924,7 +8445,7 @@
           <a:bodyPr wrap="square" rtlCol="0" anchor="ctr"/>
           <a:lstStyle/>
           <a:p>
-            <a:pPr algn="ctr" indent="0" marL="0">
+            <a:pPr marL="0" indent="0" algn="ctr">
               <a:buNone/>
             </a:pPr>
             <a:r>
@@ -8963,7 +8484,7 @@
           <a:bodyPr wrap="square" rtlCol="0" anchor="ctr"/>
           <a:lstStyle/>
           <a:p>
-            <a:pPr indent="0" marL="0">
+            <a:pPr marL="0" indent="0">
               <a:buNone/>
             </a:pPr>
             <a:r>
@@ -9002,7 +8523,7 @@
           <a:bodyPr wrap="square" rtlCol="0" anchor="ctr"/>
           <a:lstStyle/>
           <a:p>
-            <a:pPr indent="0" marL="0">
+            <a:pPr marL="0" indent="0">
               <a:buNone/>
             </a:pPr>
             <a:r>
@@ -9061,7 +8582,7 @@
           <a:bodyPr wrap="square" rtlCol="0" anchor="ctr"/>
           <a:lstStyle/>
           <a:p>
-            <a:pPr algn="ctr" indent="0" marL="0">
+            <a:pPr marL="0" indent="0" algn="ctr">
               <a:buNone/>
             </a:pPr>
             <a:r>
@@ -9100,7 +8621,7 @@
           <a:bodyPr wrap="square" rtlCol="0" anchor="ctr"/>
           <a:lstStyle/>
           <a:p>
-            <a:pPr indent="0" marL="0">
+            <a:pPr marL="0" indent="0">
               <a:buNone/>
             </a:pPr>
             <a:r>
@@ -9139,7 +8660,7 @@
           <a:bodyPr wrap="square" rtlCol="0" anchor="ctr"/>
           <a:lstStyle/>
           <a:p>
-            <a:pPr indent="0" marL="0">
+            <a:pPr marL="0" indent="0">
               <a:buNone/>
             </a:pPr>
             <a:r>
@@ -9198,7 +8719,7 @@
           <a:bodyPr wrap="square" rtlCol="0" anchor="ctr"/>
           <a:lstStyle/>
           <a:p>
-            <a:pPr algn="ctr" indent="0" marL="0">
+            <a:pPr marL="0" indent="0" algn="ctr">
               <a:buNone/>
             </a:pPr>
             <a:r>
@@ -9237,7 +8758,7 @@
           <a:bodyPr wrap="square" rtlCol="0" anchor="ctr"/>
           <a:lstStyle/>
           <a:p>
-            <a:pPr indent="0" marL="0">
+            <a:pPr marL="0" indent="0">
               <a:buNone/>
             </a:pPr>
             <a:r>
@@ -9276,7 +8797,7 @@
           <a:bodyPr wrap="square" rtlCol="0" anchor="ctr"/>
           <a:lstStyle/>
           <a:p>
-            <a:pPr indent="0" marL="0">
+            <a:pPr marL="0" indent="0">
               <a:buNone/>
             </a:pPr>
             <a:r>
@@ -9342,7 +8863,7 @@
           <a:bodyPr wrap="square" rtlCol="0" anchor="ctr"/>
           <a:lstStyle/>
           <a:p>
-            <a:pPr indent="0" marL="0">
+            <a:pPr marL="0" indent="0">
               <a:lnSpc>
                 <a:spcPts val="1500"/>
               </a:lnSpc>
@@ -9359,12 +8880,6 @@
               </a:rPr>
               <a:t>❓  </a:t>
             </a:r>
-            <a:pPr indent="0" marL="0">
-              <a:lnSpc>
-                <a:spcPts val="1500"/>
-              </a:lnSpc>
-              <a:buNone/>
-            </a:pPr>
             <a:r>
               <a:rPr lang="en-US" sz="1150" b="1" dirty="0">
                 <a:solidFill>
@@ -9377,12 +8892,6 @@
               <a:t>為什麼一定要加好友？
 </a:t>
             </a:r>
-            <a:pPr indent="0" marL="0">
-              <a:lnSpc>
-                <a:spcPts val="1500"/>
-              </a:lnSpc>
-              <a:buNone/>
-            </a:pPr>
             <a:r>
               <a:rPr lang="en-US" sz="950" dirty="0">
                 <a:solidFill>
@@ -9446,7 +8955,7 @@
           <a:bodyPr wrap="square" rtlCol="0" anchor="ctr"/>
           <a:lstStyle/>
           <a:p>
-            <a:pPr indent="0" marL="0">
+            <a:pPr marL="0" indent="0">
               <a:lnSpc>
                 <a:spcPts val="1500"/>
               </a:lnSpc>
@@ -9463,12 +8972,6 @@
               </a:rPr>
               <a:t>🙅  </a:t>
             </a:r>
-            <a:pPr indent="0" marL="0">
-              <a:lnSpc>
-                <a:spcPts val="1500"/>
-              </a:lnSpc>
-              <a:buNone/>
-            </a:pPr>
             <a:r>
               <a:rPr lang="en-US" sz="1150" b="1" dirty="0">
                 <a:solidFill>
@@ -9481,12 +8984,6 @@
               <a:t>請勿私下轉發活動連結給客人。
 </a:t>
             </a:r>
-            <a:pPr indent="0" marL="0">
-              <a:lnSpc>
-                <a:spcPts val="1500"/>
-              </a:lnSpc>
-              <a:buNone/>
-            </a:pPr>
             <a:r>
               <a:rPr lang="en-US" sz="950" dirty="0">
                 <a:solidFill>
@@ -9518,6 +9015,7 @@
         <a:solidFill>
           <a:srgbClr val="FAF8F6"/>
         </a:solidFill>
+        <a:effectLst/>
       </p:bgPr>
     </p:bg>
     <p:spTree>
@@ -9555,7 +9053,7 @@
           <a:bodyPr wrap="square" rtlCol="0" anchor="ctr"/>
           <a:lstStyle/>
           <a:p>
-            <a:pPr indent="0" marL="0">
+            <a:pPr marL="0" indent="0">
               <a:buNone/>
             </a:pPr>
             <a:r>
@@ -9594,7 +9092,7 @@
           <a:bodyPr wrap="square" rtlCol="0" anchor="ctr"/>
           <a:lstStyle/>
           <a:p>
-            <a:pPr indent="0" marL="0">
+            <a:pPr marL="0" indent="0">
               <a:buNone/>
             </a:pPr>
             <a:r>
@@ -9653,7 +9151,7 @@
           <a:bodyPr wrap="square" rtlCol="0" anchor="ctr"/>
           <a:lstStyle/>
           <a:p>
-            <a:pPr algn="r" indent="0" marL="0">
+            <a:pPr marL="0" indent="0" algn="r">
               <a:buNone/>
             </a:pPr>
             <a:r>
@@ -9692,7 +9190,7 @@
           <a:bodyPr wrap="square" rtlCol="0" anchor="ctr"/>
           <a:lstStyle/>
           <a:p>
-            <a:pPr indent="0" marL="0">
+            <a:pPr marL="0" indent="0">
               <a:buNone/>
             </a:pPr>
             <a:r>
@@ -9731,7 +9229,7 @@
           <a:bodyPr wrap="square" rtlCol="0" anchor="ctr"/>
           <a:lstStyle/>
           <a:p>
-            <a:pPr indent="0" marL="0">
+            <a:pPr marL="0" indent="0">
               <a:lnSpc>
                 <a:spcPts val="1900"/>
               </a:lnSpc>
@@ -9749,12 +9247,6 @@
               <a:t>完成任務 → 獲得洲遊幣 → 投幣抽獎
 </a:t>
             </a:r>
-            <a:pPr indent="0" marL="0">
-              <a:lnSpc>
-                <a:spcPts val="1900"/>
-              </a:lnSpc>
-              <a:buNone/>
-            </a:pPr>
             <a:r>
               <a:rPr lang="en-US" sz="1000" dirty="0">
                 <a:solidFill>
@@ -9818,7 +9310,7 @@
           <a:bodyPr wrap="square" rtlCol="0" anchor="ctr"/>
           <a:lstStyle/>
           <a:p>
-            <a:pPr indent="0" marL="0">
+            <a:pPr marL="0" indent="0">
               <a:lnSpc>
                 <a:spcPts val="1300"/>
               </a:lnSpc>
@@ -9836,12 +9328,6 @@
               <a:t>可以做的任務
 </a:t>
             </a:r>
-            <a:pPr indent="0" marL="0">
-              <a:lnSpc>
-                <a:spcPts val="1300"/>
-              </a:lnSpc>
-              <a:buNone/>
-            </a:pPr>
             <a:r>
               <a:rPr lang="en-US" sz="850" dirty="0">
                 <a:solidFill>
@@ -9878,7 +9364,7 @@
           <a:bodyPr wrap="square" rtlCol="0" anchor="ctr"/>
           <a:lstStyle/>
           <a:p>
-            <a:pPr indent="0" marL="0">
+            <a:pPr marL="0" indent="0">
               <a:lnSpc>
                 <a:spcPts val="1700"/>
               </a:lnSpc>
@@ -9894,78 +9380,10 @@
                 <a:cs typeface="Microsoft JhengHei" pitchFamily="34" charset="-120"/>
               </a:rPr>
               <a:t>▸ 追蹤 高雄洲際 Instagram / Facebook
-</a:t>
-            </a:r>
-            <a:pPr indent="0" marL="0">
-              <a:lnSpc>
-                <a:spcPts val="1700"/>
-              </a:lnSpc>
-              <a:buNone/>
-            </a:pPr>
-            <a:r>
-              <a:rPr lang="en-US" sz="1050" dirty="0">
-                <a:solidFill>
-                  <a:srgbClr val="3D3935"/>
-                </a:solidFill>
-                <a:latin typeface="Microsoft JhengHei" pitchFamily="34" charset="0"/>
-                <a:ea typeface="Microsoft JhengHei" pitchFamily="34" charset="-122"/>
-                <a:cs typeface="Microsoft JhengHei" pitchFamily="34" charset="-120"/>
-              </a:rPr>
-              <a:t>▸ 追蹤 臺北洲際 Instagram / Facebook
-</a:t>
-            </a:r>
-            <a:pPr indent="0" marL="0">
-              <a:lnSpc>
-                <a:spcPts val="1700"/>
-              </a:lnSpc>
-              <a:buNone/>
-            </a:pPr>
-            <a:r>
-              <a:rPr lang="en-US" sz="1050" dirty="0">
-                <a:solidFill>
-                  <a:srgbClr val="3D3935"/>
-                </a:solidFill>
-                <a:latin typeface="Microsoft JhengHei" pitchFamily="34" charset="0"/>
-                <a:ea typeface="Microsoft JhengHei" pitchFamily="34" charset="-122"/>
-                <a:cs typeface="Microsoft JhengHei" pitchFamily="34" charset="-120"/>
-              </a:rPr>
-              <a:t>▸ 追蹤 高雄洲際「食遇」Instagram / Facebook
-</a:t>
-            </a:r>
-            <a:pPr indent="0" marL="0">
-              <a:lnSpc>
-                <a:spcPts val="1700"/>
-              </a:lnSpc>
-              <a:buNone/>
-            </a:pPr>
-            <a:r>
-              <a:rPr lang="en-US" sz="1050" dirty="0">
-                <a:solidFill>
-                  <a:srgbClr val="3D3935"/>
-                </a:solidFill>
-                <a:latin typeface="Microsoft JhengHei" pitchFamily="34" charset="0"/>
-                <a:ea typeface="Microsoft JhengHei" pitchFamily="34" charset="-122"/>
-                <a:cs typeface="Microsoft JhengHei" pitchFamily="34" charset="-120"/>
-              </a:rPr>
-              <a:t>▸ 分享活動給好友
-</a:t>
-            </a:r>
-            <a:pPr indent="0" marL="0">
-              <a:lnSpc>
-                <a:spcPts val="1700"/>
-              </a:lnSpc>
-              <a:buNone/>
-            </a:pPr>
-            <a:r>
-              <a:rPr lang="en-US" sz="1050" dirty="0">
-                <a:solidFill>
-                  <a:srgbClr val="3D3935"/>
-                </a:solidFill>
-                <a:latin typeface="Microsoft JhengHei" pitchFamily="34" charset="0"/>
-                <a:ea typeface="Microsoft JhengHei" pitchFamily="34" charset="-122"/>
-                <a:cs typeface="Microsoft JhengHei" pitchFamily="34" charset="-120"/>
-              </a:rPr>
-              <a:t>▸ 填寫個人資料</a:t>
+▸ 追蹤 臺北洲際 Instagram / Facebook
+▸ 追蹤 高雄洲際「食遇」Instagram / Facebook
+▸ 分享活動給好友
+▸ 填寫個人資料</a:t>
             </a:r>
             <a:endParaRPr lang="en-US" sz="1050" dirty="0"/>
           </a:p>
@@ -10019,7 +9437,7 @@
           <a:bodyPr wrap="square" rtlCol="0" anchor="ctr"/>
           <a:lstStyle/>
           <a:p>
-            <a:pPr indent="0" marL="0">
+            <a:pPr marL="0" indent="0">
               <a:lnSpc>
                 <a:spcPts val="1300"/>
               </a:lnSpc>
@@ -10037,12 +9455,6 @@
               <a:t>投幣抽獎
 </a:t>
             </a:r>
-            <a:pPr indent="0" marL="0">
-              <a:lnSpc>
-                <a:spcPts val="1300"/>
-              </a:lnSpc>
-              <a:buNone/>
-            </a:pPr>
             <a:r>
               <a:rPr lang="en-US" sz="850" dirty="0">
                 <a:solidFill>
@@ -10079,7 +9491,7 @@
           <a:bodyPr wrap="square" rtlCol="0" anchor="ctr"/>
           <a:lstStyle/>
           <a:p>
-            <a:pPr indent="0" marL="0">
+            <a:pPr marL="0" indent="0">
               <a:buNone/>
             </a:pPr>
             <a:r>
@@ -10093,9 +9505,6 @@
               </a:rPr>
               <a:t>三等獎　</a:t>
             </a:r>
-            <a:pPr indent="0" marL="0">
-              <a:buNone/>
-            </a:pPr>
             <a:r>
               <a:rPr lang="en-US" sz="850" dirty="0">
                 <a:solidFill>
@@ -10154,7 +9563,7 @@
           <a:bodyPr wrap="square" rtlCol="0" anchor="ctr"/>
           <a:lstStyle/>
           <a:p>
-            <a:pPr algn="ctr" indent="0" marL="0">
+            <a:pPr marL="0" indent="0" algn="ctr">
               <a:buNone/>
             </a:pPr>
             <a:r>
@@ -10193,7 +9602,7 @@
           <a:bodyPr wrap="square" rtlCol="0" anchor="ctr"/>
           <a:lstStyle/>
           <a:p>
-            <a:pPr indent="0" marL="0">
+            <a:pPr marL="0" indent="0">
               <a:buNone/>
             </a:pPr>
             <a:r>
@@ -10207,9 +9616,6 @@
               </a:rPr>
               <a:t>二等獎　</a:t>
             </a:r>
-            <a:pPr indent="0" marL="0">
-              <a:buNone/>
-            </a:pPr>
             <a:r>
               <a:rPr lang="en-US" sz="850" dirty="0">
                 <a:solidFill>
@@ -10268,7 +9674,7 @@
           <a:bodyPr wrap="square" rtlCol="0" anchor="ctr"/>
           <a:lstStyle/>
           <a:p>
-            <a:pPr algn="ctr" indent="0" marL="0">
+            <a:pPr marL="0" indent="0" algn="ctr">
               <a:buNone/>
             </a:pPr>
             <a:r>
@@ -10307,7 +9713,7 @@
           <a:bodyPr wrap="square" rtlCol="0" anchor="ctr"/>
           <a:lstStyle/>
           <a:p>
-            <a:pPr indent="0" marL="0">
+            <a:pPr marL="0" indent="0">
               <a:buNone/>
             </a:pPr>
             <a:r>
@@ -10321,9 +9727,6 @@
               </a:rPr>
               <a:t>一等獎　</a:t>
             </a:r>
-            <a:pPr indent="0" marL="0">
-              <a:buNone/>
-            </a:pPr>
             <a:r>
               <a:rPr lang="en-US" sz="850" dirty="0">
                 <a:solidFill>
@@ -10382,7 +9785,7 @@
           <a:bodyPr wrap="square" rtlCol="0" anchor="ctr"/>
           <a:lstStyle/>
           <a:p>
-            <a:pPr algn="ctr" indent="0" marL="0">
+            <a:pPr marL="0" indent="0" algn="ctr">
               <a:buNone/>
             </a:pPr>
             <a:r>
@@ -10448,7 +9851,7 @@
           <a:bodyPr wrap="square" rtlCol="0" anchor="ctr"/>
           <a:lstStyle/>
           <a:p>
-            <a:pPr indent="0" marL="0">
+            <a:pPr marL="0" indent="0">
               <a:lnSpc>
                 <a:spcPts val="1500"/>
               </a:lnSpc>
@@ -10465,12 +9868,6 @@
               </a:rPr>
               <a:t>🎡  </a:t>
             </a:r>
-            <a:pPr indent="0" marL="0">
-              <a:lnSpc>
-                <a:spcPts val="1500"/>
-              </a:lnSpc>
-              <a:buNone/>
-            </a:pPr>
             <a:r>
               <a:rPr lang="en-US" sz="1150" b="1" dirty="0">
                 <a:solidFill>
@@ -10483,12 +9880,6 @@
               <a:t>轉盤上同時有兩家飯店的獎品，客人抽到哪一家的獎是隨機的。
 </a:t>
             </a:r>
-            <a:pPr indent="0" marL="0">
-              <a:lnSpc>
-                <a:spcPts val="1500"/>
-              </a:lnSpc>
-              <a:buNone/>
-            </a:pPr>
             <a:r>
               <a:rPr lang="en-US" sz="950" dirty="0">
                 <a:solidFill>
@@ -10520,6 +9911,7 @@
         <a:solidFill>
           <a:srgbClr val="FAF8F6"/>
         </a:solidFill>
+        <a:effectLst/>
       </p:bgPr>
     </p:bg>
     <p:spTree>
@@ -10557,7 +9949,7 @@
           <a:bodyPr wrap="square" rtlCol="0" anchor="ctr"/>
           <a:lstStyle/>
           <a:p>
-            <a:pPr indent="0" marL="0">
+            <a:pPr marL="0" indent="0">
               <a:buNone/>
             </a:pPr>
             <a:r>
@@ -10596,7 +9988,7 @@
           <a:bodyPr wrap="square" rtlCol="0" anchor="ctr"/>
           <a:lstStyle/>
           <a:p>
-            <a:pPr indent="0" marL="0">
+            <a:pPr marL="0" indent="0">
               <a:buNone/>
             </a:pPr>
             <a:r>
@@ -10655,7 +10047,7 @@
           <a:bodyPr wrap="square" rtlCol="0" anchor="ctr"/>
           <a:lstStyle/>
           <a:p>
-            <a:pPr algn="r" indent="0" marL="0">
+            <a:pPr marL="0" indent="0" algn="r">
               <a:buNone/>
             </a:pPr>
             <a:r>
@@ -10694,7 +10086,7 @@
           <a:bodyPr wrap="square" rtlCol="0" anchor="ctr"/>
           <a:lstStyle/>
           <a:p>
-            <a:pPr indent="0" marL="0">
+            <a:pPr marL="0" indent="0">
               <a:buNone/>
             </a:pPr>
             <a:r>
@@ -10733,7 +10125,7 @@
           <a:bodyPr wrap="square" rtlCol="0" anchor="ctr"/>
           <a:lstStyle/>
           <a:p>
-            <a:pPr indent="0" marL="0">
+            <a:pPr marL="0" indent="0">
               <a:lnSpc>
                 <a:spcPts val="1700"/>
               </a:lnSpc>
@@ -10751,12 +10143,6 @@
               <a:t>看【客人手上有沒有優惠券】，不是看哪一家飯店。
 </a:t>
             </a:r>
-            <a:pPr indent="0" marL="0">
-              <a:lnSpc>
-                <a:spcPts val="1700"/>
-              </a:lnSpc>
-              <a:buNone/>
-            </a:pPr>
             <a:r>
               <a:rPr lang="en-US" sz="1000" dirty="0">
                 <a:solidFill>
@@ -10798,6 +10184,13 @@
             <a:prstDash val="solid"/>
           </a:ln>
         </p:spPr>
+        <p:txBody>
+          <a:bodyPr/>
+          <a:lstStyle/>
+          <a:p>
+            <a:endParaRPr lang="zh-TW" altLang="en-US"/>
+          </a:p>
+        </p:txBody>
       </p:sp>
       <p:sp>
         <p:nvSpPr>
@@ -10820,7 +10213,7 @@
           <a:bodyPr wrap="square" rtlCol="0" anchor="ctr"/>
           <a:lstStyle/>
           <a:p>
-            <a:pPr indent="0" marL="0">
+            <a:pPr marL="0" indent="0">
               <a:lnSpc>
                 <a:spcPts val="1400"/>
               </a:lnSpc>
@@ -10838,12 +10231,6 @@
               <a:t>📩  有優惠券（多數獎項）
 </a:t>
             </a:r>
-            <a:pPr indent="0" marL="0">
-              <a:lnSpc>
-                <a:spcPts val="1400"/>
-              </a:lnSpc>
-              <a:buNone/>
-            </a:pPr>
             <a:r>
               <a:rPr lang="en-US" sz="900" dirty="0">
                 <a:solidFill>
@@ -10880,7 +10267,7 @@
           <a:bodyPr wrap="square" rtlCol="0" anchor="ctr"/>
           <a:lstStyle/>
           <a:p>
-            <a:pPr indent="0" marL="0">
+            <a:pPr marL="0" indent="0">
               <a:lnSpc>
                 <a:spcPts val="1300"/>
               </a:lnSpc>
@@ -10898,12 +10285,6 @@
               <a:t>券在中獎當下自動進客人的 LINE
 </a:t>
             </a:r>
-            <a:pPr indent="0" marL="0">
-              <a:lnSpc>
-                <a:spcPts val="1300"/>
-              </a:lnSpc>
-              <a:buNone/>
-            </a:pPr>
             <a:r>
               <a:rPr lang="en-US" sz="850" dirty="0">
                 <a:solidFill>
@@ -10916,12 +10297,6 @@
               <a:t>Delivered to their LINE chat automatically
 </a:t>
             </a:r>
-            <a:pPr indent="0" marL="0">
-              <a:lnSpc>
-                <a:spcPts val="1300"/>
-              </a:lnSpc>
-              <a:buNone/>
-            </a:pPr>
             <a:r>
               <a:rPr lang="en-US" sz="1050" dirty="0">
                 <a:solidFill>
@@ -10934,12 +10309,6 @@
               <a:t>▸ 客人自行點選領取（限一次）
 </a:t>
             </a:r>
-            <a:pPr indent="0" marL="0">
-              <a:lnSpc>
-                <a:spcPts val="1300"/>
-              </a:lnSpc>
-              <a:buNone/>
-            </a:pPr>
             <a:r>
               <a:rPr lang="en-US" sz="800" dirty="0">
                 <a:solidFill>
@@ -10952,12 +10321,6 @@
               <a:t>   Claimed by the guest, once only
 </a:t>
             </a:r>
-            <a:pPr indent="0" marL="0">
-              <a:lnSpc>
-                <a:spcPts val="1300"/>
-              </a:lnSpc>
-              <a:buNone/>
-            </a:pPr>
             <a:r>
               <a:rPr lang="en-US" sz="1050" dirty="0">
                 <a:solidFill>
@@ -10970,12 +10333,6 @@
               <a:t>▸ 到店出示兌換碼 → 櫃檯核銷
 </a:t>
             </a:r>
-            <a:pPr indent="0" marL="0">
-              <a:lnSpc>
-                <a:spcPts val="1300"/>
-              </a:lnSpc>
-              <a:buNone/>
-            </a:pPr>
             <a:r>
               <a:rPr lang="en-US" sz="800" dirty="0">
                 <a:solidFill>
@@ -11017,6 +10374,13 @@
             <a:prstDash val="solid"/>
           </a:ln>
         </p:spPr>
+        <p:txBody>
+          <a:bodyPr/>
+          <a:lstStyle/>
+          <a:p>
+            <a:endParaRPr lang="zh-TW" altLang="en-US"/>
+          </a:p>
+        </p:txBody>
       </p:sp>
       <p:sp>
         <p:nvSpPr>
@@ -11039,7 +10403,7 @@
           <a:bodyPr wrap="square" rtlCol="0" anchor="ctr"/>
           <a:lstStyle/>
           <a:p>
-            <a:pPr indent="0" marL="0">
+            <a:pPr marL="0" indent="0">
               <a:lnSpc>
                 <a:spcPts val="1400"/>
               </a:lnSpc>
@@ -11057,12 +10421,6 @@
               <a:t>📞  沒有券・專人聯繫
 </a:t>
             </a:r>
-            <a:pPr indent="0" marL="0">
-              <a:lnSpc>
-                <a:spcPts val="1400"/>
-              </a:lnSpc>
-              <a:buNone/>
-            </a:pPr>
             <a:r>
               <a:rPr lang="en-US" sz="900" dirty="0">
                 <a:solidFill>
@@ -11099,7 +10457,7 @@
           <a:bodyPr wrap="square" rtlCol="0" anchor="ctr"/>
           <a:lstStyle/>
           <a:p>
-            <a:pPr indent="0" marL="0">
+            <a:pPr marL="0" indent="0">
               <a:lnSpc>
                 <a:spcPts val="1300"/>
               </a:lnSpc>
@@ -11117,12 +10475,6 @@
               <a:t>臺北全部獎項 ＋ 高雄的兩項住宿大獎
 </a:t>
             </a:r>
-            <a:pPr indent="0" marL="0">
-              <a:lnSpc>
-                <a:spcPts val="1300"/>
-              </a:lnSpc>
-              <a:buNone/>
-            </a:pPr>
             <a:r>
               <a:rPr lang="en-US" sz="850" dirty="0">
                 <a:solidFill>
@@ -11135,12 +10487,6 @@
               <a:t>All Taipei prizes + two Kaohsiung room prizes
 </a:t>
             </a:r>
-            <a:pPr indent="0" marL="0">
-              <a:lnSpc>
-                <a:spcPts val="1300"/>
-              </a:lnSpc>
-              <a:buNone/>
-            </a:pPr>
             <a:r>
               <a:rPr lang="en-US" sz="1050" dirty="0">
                 <a:solidFill>
@@ -11153,12 +10499,6 @@
               <a:t>▸ 畫面請客人留姓名／手機／Email
 </a:t>
             </a:r>
-            <a:pPr indent="0" marL="0">
-              <a:lnSpc>
-                <a:spcPts val="1300"/>
-              </a:lnSpc>
-              <a:buNone/>
-            </a:pPr>
             <a:r>
               <a:rPr lang="en-US" sz="800" dirty="0">
                 <a:solidFill>
@@ -11171,12 +10511,6 @@
               <a:t>   Guest submits their contact details
 </a:t>
             </a:r>
-            <a:pPr indent="0" marL="0">
-              <a:lnSpc>
-                <a:spcPts val="1300"/>
-              </a:lnSpc>
-              <a:buNone/>
-            </a:pPr>
             <a:r>
               <a:rPr lang="en-US" sz="1050" dirty="0">
                 <a:solidFill>
@@ -11189,12 +10523,6 @@
               <a:t>▸ 該館同仁主動聯繫安排
 </a:t>
             </a:r>
-            <a:pPr indent="0" marL="0">
-              <a:lnSpc>
-                <a:spcPts val="1300"/>
-              </a:lnSpc>
-              <a:buNone/>
-            </a:pPr>
             <a:r>
               <a:rPr lang="en-US" sz="800" dirty="0">
                 <a:solidFill>
@@ -11236,6 +10564,13 @@
             <a:prstDash val="solid"/>
           </a:ln>
         </p:spPr>
+        <p:txBody>
+          <a:bodyPr/>
+          <a:lstStyle/>
+          <a:p>
+            <a:endParaRPr lang="zh-TW" altLang="en-US"/>
+          </a:p>
+        </p:txBody>
       </p:sp>
       <p:sp>
         <p:nvSpPr>
@@ -11258,7 +10593,7 @@
           <a:bodyPr wrap="square" rtlCol="0" anchor="ctr"/>
           <a:lstStyle/>
           <a:p>
-            <a:pPr indent="0" marL="0">
+            <a:pPr marL="0" indent="0">
               <a:lnSpc>
                 <a:spcPts val="1500"/>
               </a:lnSpc>
@@ -11275,12 +10610,6 @@
               </a:rPr>
               <a:t>🚫  </a:t>
             </a:r>
-            <a:pPr indent="0" marL="0">
-              <a:lnSpc>
-                <a:spcPts val="1500"/>
-              </a:lnSpc>
-              <a:buNone/>
-            </a:pPr>
             <a:r>
               <a:rPr lang="en-US" sz="1150" b="1" dirty="0">
                 <a:solidFill>
@@ -11293,12 +10622,6 @@
               <a:t>客人只有兌換碼、LINE 裡沒有優惠券 → 是專人聯繫的獎項，請勿核銷。
 </a:t>
             </a:r>
-            <a:pPr indent="0" marL="0">
-              <a:lnSpc>
-                <a:spcPts val="1500"/>
-              </a:lnSpc>
-              <a:buNone/>
-            </a:pPr>
             <a:r>
               <a:rPr lang="en-US" sz="950" dirty="0">
                 <a:solidFill>
@@ -11330,6 +10653,7 @@
         <a:solidFill>
           <a:srgbClr val="FAF8F6"/>
         </a:solidFill>
+        <a:effectLst/>
       </p:bgPr>
     </p:bg>
     <p:spTree>
@@ -11367,7 +10691,7 @@
           <a:bodyPr wrap="square" rtlCol="0" anchor="ctr"/>
           <a:lstStyle/>
           <a:p>
-            <a:pPr indent="0" marL="0">
+            <a:pPr marL="0" indent="0">
               <a:buNone/>
             </a:pPr>
             <a:r>
@@ -11406,7 +10730,7 @@
           <a:bodyPr wrap="square" rtlCol="0" anchor="ctr"/>
           <a:lstStyle/>
           <a:p>
-            <a:pPr indent="0" marL="0">
+            <a:pPr marL="0" indent="0">
               <a:buNone/>
             </a:pPr>
             <a:r>
@@ -11465,7 +10789,7 @@
           <a:bodyPr wrap="square" rtlCol="0" anchor="ctr"/>
           <a:lstStyle/>
           <a:p>
-            <a:pPr algn="r" indent="0" marL="0">
+            <a:pPr marL="0" indent="0" algn="r">
               <a:buNone/>
             </a:pPr>
             <a:r>
@@ -11504,7 +10828,7 @@
           <a:bodyPr wrap="square" rtlCol="0" anchor="ctr"/>
           <a:lstStyle/>
           <a:p>
-            <a:pPr indent="0" marL="0">
+            <a:pPr marL="0" indent="0">
               <a:buNone/>
             </a:pPr>
             <a:r>
@@ -11548,6 +10872,13 @@
             <a:prstDash val="solid"/>
           </a:ln>
         </p:spPr>
+        <p:txBody>
+          <a:bodyPr/>
+          <a:lstStyle/>
+          <a:p>
+            <a:endParaRPr lang="zh-TW" altLang="en-US"/>
+          </a:p>
+        </p:txBody>
       </p:sp>
       <p:sp>
         <p:nvSpPr>
@@ -11570,7 +10901,7 @@
           <a:bodyPr wrap="square" rtlCol="0" anchor="ctr"/>
           <a:lstStyle/>
           <a:p>
-            <a:pPr indent="0" marL="0">
+            <a:pPr marL="0" indent="0">
               <a:lnSpc>
                 <a:spcPts val="1400"/>
               </a:lnSpc>
@@ -11588,12 +10919,6 @@
               <a:t>🔵  臺北洲際酒店
 </a:t>
             </a:r>
-            <a:pPr indent="0" marL="0">
-              <a:lnSpc>
-                <a:spcPts val="1400"/>
-              </a:lnSpc>
-              <a:buNone/>
-            </a:pPr>
             <a:r>
               <a:rPr lang="en-US" sz="850" dirty="0">
                 <a:solidFill>
@@ -11606,12 +10931,6 @@
               <a:t>InterContinental Taipei
 </a:t>
             </a:r>
-            <a:pPr indent="0" marL="0">
-              <a:lnSpc>
-                <a:spcPts val="1400"/>
-              </a:lnSpc>
-              <a:buNone/>
-            </a:pPr>
             <a:r>
               <a:rPr lang="en-US" sz="1200" b="1" dirty="0">
                 <a:solidFill>
@@ -11624,12 +10943,6 @@
               <a:t>全部獎項
 </a:t>
             </a:r>
-            <a:pPr indent="0" marL="0">
-              <a:lnSpc>
-                <a:spcPts val="1400"/>
-              </a:lnSpc>
-              <a:buNone/>
-            </a:pPr>
             <a:r>
               <a:rPr lang="en-US" sz="850" dirty="0">
                 <a:solidFill>
@@ -11671,6 +10984,13 @@
             <a:prstDash val="solid"/>
           </a:ln>
         </p:spPr>
+        <p:txBody>
+          <a:bodyPr/>
+          <a:lstStyle/>
+          <a:p>
+            <a:endParaRPr lang="zh-TW" altLang="en-US"/>
+          </a:p>
+        </p:txBody>
       </p:sp>
       <p:sp>
         <p:nvSpPr>
@@ -11693,7 +11013,7 @@
           <a:bodyPr wrap="square" rtlCol="0" anchor="ctr"/>
           <a:lstStyle/>
           <a:p>
-            <a:pPr indent="0" marL="0">
+            <a:pPr marL="0" indent="0">
               <a:lnSpc>
                 <a:spcPts val="1400"/>
               </a:lnSpc>
@@ -11711,12 +11031,6 @@
               <a:t>🟡  高雄洲際酒店
 </a:t>
             </a:r>
-            <a:pPr indent="0" marL="0">
-              <a:lnSpc>
-                <a:spcPts val="1400"/>
-              </a:lnSpc>
-              <a:buNone/>
-            </a:pPr>
             <a:r>
               <a:rPr lang="en-US" sz="850" dirty="0">
                 <a:solidFill>
@@ -11729,12 +11043,6 @@
               <a:t>InterContinental Kaohsiung
 </a:t>
             </a:r>
-            <a:pPr indent="0" marL="0">
-              <a:lnSpc>
-                <a:spcPts val="1400"/>
-              </a:lnSpc>
-              <a:buNone/>
-            </a:pPr>
             <a:r>
               <a:rPr lang="en-US" sz="1200" b="1" dirty="0">
                 <a:solidFill>
@@ -11747,12 +11055,6 @@
               <a:t>只有這兩項住宿大獎
 </a:t>
             </a:r>
-            <a:pPr indent="0" marL="0">
-              <a:lnSpc>
-                <a:spcPts val="1400"/>
-              </a:lnSpc>
-              <a:buNone/>
-            </a:pPr>
             <a:r>
               <a:rPr lang="en-US" sz="850" dirty="0">
                 <a:solidFill>
@@ -11794,6 +11096,13 @@
             <a:prstDash val="solid"/>
           </a:ln>
         </p:spPr>
+        <p:txBody>
+          <a:bodyPr/>
+          <a:lstStyle/>
+          <a:p>
+            <a:endParaRPr lang="zh-TW" altLang="en-US"/>
+          </a:p>
+        </p:txBody>
       </p:sp>
       <p:sp>
         <p:nvSpPr>
@@ -11816,7 +11125,7 @@
           <a:bodyPr wrap="square" rtlCol="0" anchor="ctr"/>
           <a:lstStyle/>
           <a:p>
-            <a:pPr indent="0" marL="0">
+            <a:pPr marL="0" indent="0">
               <a:buNone/>
             </a:pPr>
             <a:r>
@@ -11855,7 +11164,7 @@
           <a:bodyPr wrap="square" rtlCol="0" anchor="ctr"/>
           <a:lstStyle/>
           <a:p>
-            <a:pPr indent="0" marL="0">
+            <a:pPr marL="0" indent="0">
               <a:lnSpc>
                 <a:spcPts val="1300"/>
               </a:lnSpc>
@@ -11873,12 +11182,6 @@
               <a:t>高雄洲際酒店 港灣海景開放式套房 住宿一晚（含雙人早餐）
 </a:t>
             </a:r>
-            <a:pPr indent="0" marL="0">
-              <a:lnSpc>
-                <a:spcPts val="1300"/>
-              </a:lnSpc>
-              <a:buNone/>
-            </a:pPr>
             <a:r>
               <a:rPr lang="en-US" sz="850" dirty="0">
                 <a:solidFill>
@@ -11942,7 +11245,7 @@
           <a:bodyPr wrap="square" rtlCol="0" anchor="ctr"/>
           <a:lstStyle/>
           <a:p>
-            <a:pPr indent="0" marL="0">
+            <a:pPr marL="0" indent="0">
               <a:buNone/>
             </a:pPr>
             <a:r>
@@ -11981,7 +11284,7 @@
           <a:bodyPr wrap="square" rtlCol="0" anchor="ctr"/>
           <a:lstStyle/>
           <a:p>
-            <a:pPr indent="0" marL="0">
+            <a:pPr marL="0" indent="0">
               <a:lnSpc>
                 <a:spcPts val="1300"/>
               </a:lnSpc>
@@ -11999,12 +11302,6 @@
               <a:t>高雄洲際酒店 豪華經典房 住宿一晚（含雙人早餐）
 </a:t>
             </a:r>
-            <a:pPr indent="0" marL="0">
-              <a:lnSpc>
-                <a:spcPts val="1300"/>
-              </a:lnSpc>
-              <a:buNone/>
-            </a:pPr>
             <a:r>
               <a:rPr lang="en-US" sz="850" dirty="0">
                 <a:solidFill>
@@ -12068,7 +11365,7 @@
           <a:bodyPr wrap="square" rtlCol="0" anchor="ctr"/>
           <a:lstStyle/>
           <a:p>
-            <a:pPr indent="0" marL="0">
+            <a:pPr marL="0" indent="0">
               <a:lnSpc>
                 <a:spcPts val="1500"/>
               </a:lnSpc>
@@ -12085,12 +11382,6 @@
               </a:rPr>
               <a:t>🛏  </a:t>
             </a:r>
-            <a:pPr indent="0" marL="0">
-              <a:lnSpc>
-                <a:spcPts val="1500"/>
-              </a:lnSpc>
-              <a:buNone/>
-            </a:pPr>
             <a:r>
               <a:rPr lang="en-US" sz="1150" b="1" dirty="0">
                 <a:solidFill>
@@ -12103,12 +11394,6 @@
               <a:t>住宿券要安排入住日期與房型，不是拿張券到櫃檯就能換，所以由飯店的人主動聯繫。
 </a:t>
             </a:r>
-            <a:pPr indent="0" marL="0">
-              <a:lnSpc>
-                <a:spcPts val="1500"/>
-              </a:lnSpc>
-              <a:buNone/>
-            </a:pPr>
             <a:r>
               <a:rPr lang="en-US" sz="950" dirty="0">
                 <a:solidFill>
@@ -12140,6 +11425,7 @@
         <a:solidFill>
           <a:srgbClr val="FAF8F6"/>
         </a:solidFill>
+        <a:effectLst/>
       </p:bgPr>
     </p:bg>
     <p:spTree>
@@ -12177,7 +11463,7 @@
           <a:bodyPr wrap="square" rtlCol="0" anchor="ctr"/>
           <a:lstStyle/>
           <a:p>
-            <a:pPr indent="0" marL="0">
+            <a:pPr marL="0" indent="0">
               <a:buNone/>
             </a:pPr>
             <a:r>
@@ -12216,7 +11502,7 @@
           <a:bodyPr wrap="square" rtlCol="0" anchor="ctr"/>
           <a:lstStyle/>
           <a:p>
-            <a:pPr indent="0" marL="0">
+            <a:pPr marL="0" indent="0">
               <a:buNone/>
             </a:pPr>
             <a:r>
@@ -12275,7 +11561,7 @@
           <a:bodyPr wrap="square" rtlCol="0" anchor="ctr"/>
           <a:lstStyle/>
           <a:p>
-            <a:pPr algn="r" indent="0" marL="0">
+            <a:pPr marL="0" indent="0" algn="r">
               <a:buNone/>
             </a:pPr>
             <a:r>
@@ -12314,7 +11600,7 @@
           <a:bodyPr wrap="square" rtlCol="0" anchor="ctr"/>
           <a:lstStyle/>
           <a:p>
-            <a:pPr indent="0" marL="0">
+            <a:pPr marL="0" indent="0">
               <a:buNone/>
             </a:pPr>
             <a:r>
@@ -12373,7 +11659,7 @@
           <a:bodyPr wrap="square" rtlCol="0" anchor="ctr"/>
           <a:lstStyle/>
           <a:p>
-            <a:pPr algn="ctr" indent="0" marL="0">
+            <a:pPr marL="0" indent="0" algn="ctr">
               <a:buNone/>
             </a:pPr>
             <a:r>
@@ -12412,7 +11698,7 @@
           <a:bodyPr wrap="square" rtlCol="0" anchor="ctr"/>
           <a:lstStyle/>
           <a:p>
-            <a:pPr indent="0" marL="0">
+            <a:pPr marL="0" indent="0">
               <a:buNone/>
             </a:pPr>
             <a:r>
@@ -12451,7 +11737,7 @@
           <a:bodyPr wrap="square" rtlCol="0" anchor="ctr"/>
           <a:lstStyle/>
           <a:p>
-            <a:pPr indent="0" marL="0">
+            <a:pPr marL="0" indent="0">
               <a:buNone/>
             </a:pPr>
             <a:r>
@@ -12510,7 +11796,7 @@
           <a:bodyPr wrap="square" rtlCol="0" anchor="ctr"/>
           <a:lstStyle/>
           <a:p>
-            <a:pPr algn="ctr" indent="0" marL="0">
+            <a:pPr marL="0" indent="0" algn="ctr">
               <a:buNone/>
             </a:pPr>
             <a:r>
@@ -12549,7 +11835,7 @@
           <a:bodyPr wrap="square" rtlCol="0" anchor="ctr"/>
           <a:lstStyle/>
           <a:p>
-            <a:pPr indent="0" marL="0">
+            <a:pPr marL="0" indent="0">
               <a:buNone/>
             </a:pPr>
             <a:r>
@@ -12588,7 +11874,7 @@
           <a:bodyPr wrap="square" rtlCol="0" anchor="ctr"/>
           <a:lstStyle/>
           <a:p>
-            <a:pPr indent="0" marL="0">
+            <a:pPr marL="0" indent="0">
               <a:buNone/>
             </a:pPr>
             <a:r>
@@ -12647,7 +11933,7 @@
           <a:bodyPr wrap="square" rtlCol="0" anchor="ctr"/>
           <a:lstStyle/>
           <a:p>
-            <a:pPr algn="ctr" indent="0" marL="0">
+            <a:pPr marL="0" indent="0" algn="ctr">
               <a:buNone/>
             </a:pPr>
             <a:r>
@@ -12686,7 +11972,7 @@
           <a:bodyPr wrap="square" rtlCol="0" anchor="ctr"/>
           <a:lstStyle/>
           <a:p>
-            <a:pPr indent="0" marL="0">
+            <a:pPr marL="0" indent="0">
               <a:buNone/>
             </a:pPr>
             <a:r>
@@ -12725,7 +12011,7 @@
           <a:bodyPr wrap="square" rtlCol="0" anchor="ctr"/>
           <a:lstStyle/>
           <a:p>
-            <a:pPr indent="0" marL="0">
+            <a:pPr marL="0" indent="0">
               <a:buNone/>
             </a:pPr>
             <a:r>
@@ -12784,7 +12070,7 @@
           <a:bodyPr wrap="square" rtlCol="0" anchor="ctr"/>
           <a:lstStyle/>
           <a:p>
-            <a:pPr algn="ctr" indent="0" marL="0">
+            <a:pPr marL="0" indent="0" algn="ctr">
               <a:buNone/>
             </a:pPr>
             <a:r>
@@ -12823,7 +12109,7 @@
           <a:bodyPr wrap="square" rtlCol="0" anchor="ctr"/>
           <a:lstStyle/>
           <a:p>
-            <a:pPr indent="0" marL="0">
+            <a:pPr marL="0" indent="0">
               <a:buNone/>
             </a:pPr>
             <a:r>
@@ -12862,7 +12148,7 @@
           <a:bodyPr wrap="square" rtlCol="0" anchor="ctr"/>
           <a:lstStyle/>
           <a:p>
-            <a:pPr indent="0" marL="0">
+            <a:pPr marL="0" indent="0">
               <a:buNone/>
             </a:pPr>
             <a:r>
@@ -12928,7 +12214,7 @@
           <a:bodyPr wrap="square" rtlCol="0" anchor="ctr"/>
           <a:lstStyle/>
           <a:p>
-            <a:pPr indent="0" marL="0">
+            <a:pPr marL="0" indent="0">
               <a:lnSpc>
                 <a:spcPts val="1500"/>
               </a:lnSpc>
@@ -12945,12 +12231,6 @@
               </a:rPr>
               <a:t>🤔  </a:t>
             </a:r>
-            <a:pPr indent="0" marL="0">
-              <a:lnSpc>
-                <a:spcPts val="1500"/>
-              </a:lnSpc>
-              <a:buNone/>
-            </a:pPr>
             <a:r>
               <a:rPr lang="en-US" sz="1150" b="1" dirty="0">
                 <a:solidFill>
@@ -12963,12 +12243,6 @@
               <a:t>無法確認時，不要自行判斷。
 </a:t>
             </a:r>
-            <a:pPr indent="0" marL="0">
-              <a:lnSpc>
-                <a:spcPts val="1500"/>
-              </a:lnSpc>
-              <a:buNone/>
-            </a:pPr>
             <a:r>
               <a:rPr lang="en-US" sz="950" dirty="0">
                 <a:solidFill>
@@ -13032,7 +12306,7 @@
           <a:bodyPr wrap="square" rtlCol="0" anchor="ctr"/>
           <a:lstStyle/>
           <a:p>
-            <a:pPr indent="0" marL="0">
+            <a:pPr marL="0" indent="0">
               <a:lnSpc>
                 <a:spcPts val="1500"/>
               </a:lnSpc>
@@ -13049,12 +12323,6 @@
               </a:rPr>
               <a:t>🚫  </a:t>
             </a:r>
-            <a:pPr indent="0" marL="0">
-              <a:lnSpc>
-                <a:spcPts val="1500"/>
-              </a:lnSpc>
-              <a:buNone/>
-            </a:pPr>
             <a:r>
               <a:rPr lang="en-US" sz="1150" b="1" dirty="0">
                 <a:solidFill>
@@ -13067,12 +12335,6 @@
               <a:t>臺北的獎、或高雄的住宿大獎 → 一律不核銷。
 </a:t>
             </a:r>
-            <a:pPr indent="0" marL="0">
-              <a:lnSpc>
-                <a:spcPts val="1500"/>
-              </a:lnSpc>
-              <a:buNone/>
-            </a:pPr>
             <a:r>
               <a:rPr lang="en-US" sz="950" dirty="0">
                 <a:solidFill>
@@ -13104,6 +12366,7 @@
         <a:solidFill>
           <a:srgbClr val="FAF8F6"/>
         </a:solidFill>
+        <a:effectLst/>
       </p:bgPr>
     </p:bg>
     <p:spTree>
@@ -13141,7 +12404,7 @@
           <a:bodyPr wrap="square" rtlCol="0" anchor="ctr"/>
           <a:lstStyle/>
           <a:p>
-            <a:pPr indent="0" marL="0">
+            <a:pPr marL="0" indent="0">
               <a:buNone/>
             </a:pPr>
             <a:r>
@@ -13180,7 +12443,7 @@
           <a:bodyPr wrap="square" rtlCol="0" anchor="ctr"/>
           <a:lstStyle/>
           <a:p>
-            <a:pPr indent="0" marL="0">
+            <a:pPr marL="0" indent="0">
               <a:buNone/>
             </a:pPr>
             <a:r>
@@ -13239,7 +12502,7 @@
           <a:bodyPr wrap="square" rtlCol="0" anchor="ctr"/>
           <a:lstStyle/>
           <a:p>
-            <a:pPr algn="r" indent="0" marL="0">
+            <a:pPr marL="0" indent="0" algn="r">
               <a:buNone/>
             </a:pPr>
             <a:r>
@@ -13278,7 +12541,7 @@
           <a:bodyPr wrap="square" rtlCol="0" anchor="ctr"/>
           <a:lstStyle/>
           <a:p>
-            <a:pPr indent="0" marL="0">
+            <a:pPr marL="0" indent="0">
               <a:buNone/>
             </a:pPr>
             <a:r>
@@ -13344,7 +12607,7 @@
           <a:bodyPr wrap="square" rtlCol="0" anchor="ctr"/>
           <a:lstStyle/>
           <a:p>
-            <a:pPr indent="0" marL="0">
+            <a:pPr marL="0" indent="0">
               <a:lnSpc>
                 <a:spcPts val="1300"/>
               </a:lnSpc>
@@ -13361,73 +12624,61 @@
               </a:rPr>
               <a:t>Q  </a:t>
             </a:r>
-            <a:pPr indent="0" marL="0">
+            <a:r>
+              <a:rPr lang="en-US" sz="1200" b="1" dirty="0">
+                <a:solidFill>
+                  <a:srgbClr val="935D08"/>
+                </a:solidFill>
+                <a:latin typeface="Microsoft JhengHei" pitchFamily="34" charset="0"/>
+                <a:ea typeface="Microsoft JhengHei" pitchFamily="34" charset="-122"/>
+                <a:cs typeface="Microsoft JhengHei" pitchFamily="34" charset="-120"/>
+              </a:rPr>
+              <a:t>我沒有收到優惠券？
+</a:t>
+            </a:r>
+            <a:r>
+              <a:rPr lang="en-US" sz="900" dirty="0">
+                <a:solidFill>
+                  <a:srgbClr val="6E6A63"/>
+                </a:solidFill>
+                <a:latin typeface="Microsoft JhengHei" pitchFamily="34" charset="0"/>
+                <a:ea typeface="Microsoft JhengHei" pitchFamily="34" charset="-122"/>
+                <a:cs typeface="Microsoft JhengHei" pitchFamily="34" charset="-120"/>
+              </a:rPr>
+              <a:t>　  I didn't receive my coupon.</a:t>
+            </a:r>
+            <a:endParaRPr lang="en-US" sz="1100" dirty="0"/>
+          </a:p>
+        </p:txBody>
+      </p:sp>
+      <p:sp>
+        <p:nvSpPr>
+          <p:cNvPr id="9" name="Text 7"/>
+          <p:cNvSpPr/>
+          <p:nvPr/>
+        </p:nvSpPr>
+        <p:spPr>
+          <a:xfrm>
+            <a:off x="685800" y="1682496"/>
+            <a:ext cx="7772400" cy="603504"/>
+          </a:xfrm>
+          <a:prstGeom prst="rect">
+            <a:avLst/>
+          </a:prstGeom>
+          <a:noFill/>
+          <a:ln/>
+        </p:spPr>
+        <p:txBody>
+          <a:bodyPr wrap="square" rtlCol="0" anchor="ctr"/>
+          <a:lstStyle/>
+          <a:p>
+            <a:pPr marL="0" indent="0">
               <a:lnSpc>
                 <a:spcPts val="1300"/>
               </a:lnSpc>
               <a:buNone/>
             </a:pPr>
             <a:r>
-              <a:rPr lang="en-US" sz="1200" b="1" dirty="0">
-                <a:solidFill>
-                  <a:srgbClr val="935D08"/>
-                </a:solidFill>
-                <a:latin typeface="Microsoft JhengHei" pitchFamily="34" charset="0"/>
-                <a:ea typeface="Microsoft JhengHei" pitchFamily="34" charset="-122"/>
-                <a:cs typeface="Microsoft JhengHei" pitchFamily="34" charset="-120"/>
-              </a:rPr>
-              <a:t>我沒有收到優惠券？
-</a:t>
-            </a:r>
-            <a:pPr indent="0" marL="0">
-              <a:lnSpc>
-                <a:spcPts val="1300"/>
-              </a:lnSpc>
-              <a:buNone/>
-            </a:pPr>
-            <a:r>
-              <a:rPr lang="en-US" sz="900" dirty="0">
-                <a:solidFill>
-                  <a:srgbClr val="6E6A63"/>
-                </a:solidFill>
-                <a:latin typeface="Microsoft JhengHei" pitchFamily="34" charset="0"/>
-                <a:ea typeface="Microsoft JhengHei" pitchFamily="34" charset="-122"/>
-                <a:cs typeface="Microsoft JhengHei" pitchFamily="34" charset="-120"/>
-              </a:rPr>
-              <a:t>　  I didn't receive my coupon.</a:t>
-            </a:r>
-            <a:endParaRPr lang="en-US" sz="1100" dirty="0"/>
-          </a:p>
-        </p:txBody>
-      </p:sp>
-      <p:sp>
-        <p:nvSpPr>
-          <p:cNvPr id="9" name="Text 7"/>
-          <p:cNvSpPr/>
-          <p:nvPr/>
-        </p:nvSpPr>
-        <p:spPr>
-          <a:xfrm>
-            <a:off x="685800" y="1682496"/>
-            <a:ext cx="7772400" cy="603504"/>
-          </a:xfrm>
-          <a:prstGeom prst="rect">
-            <a:avLst/>
-          </a:prstGeom>
-          <a:noFill/>
-          <a:ln/>
-        </p:spPr>
-        <p:txBody>
-          <a:bodyPr wrap="square" rtlCol="0" anchor="ctr"/>
-          <a:lstStyle/>
-          <a:p>
-            <a:pPr indent="0" marL="0">
-              <a:lnSpc>
-                <a:spcPts val="1300"/>
-              </a:lnSpc>
-              <a:buNone/>
-            </a:pPr>
-            <a:r>
               <a:rPr lang="en-US" sz="1050" dirty="0">
                 <a:solidFill>
                   <a:srgbClr val="3D3935"/>
@@ -13439,12 +12690,6 @@
               <a:t>請打開高雄洲際酒店的 LINE 對話往上找，優惠券是以訊息形式發送的。若真的找不到，我幫您回報，會有同仁協助處理。
 </a:t>
             </a:r>
-            <a:pPr indent="0" marL="0">
-              <a:lnSpc>
-                <a:spcPts val="1300"/>
-              </a:lnSpc>
-              <a:buNone/>
-            </a:pPr>
             <a:r>
               <a:rPr lang="en-US" sz="900" dirty="0">
                 <a:solidFill>
@@ -13508,7 +12753,7 @@
           <a:bodyPr wrap="square" rtlCol="0" anchor="ctr"/>
           <a:lstStyle/>
           <a:p>
-            <a:pPr indent="0" marL="0">
+            <a:pPr marL="0" indent="0">
               <a:lnSpc>
                 <a:spcPts val="1300"/>
               </a:lnSpc>
@@ -13525,73 +12770,61 @@
               </a:rPr>
               <a:t>Q  </a:t>
             </a:r>
-            <a:pPr indent="0" marL="0">
+            <a:r>
+              <a:rPr lang="en-US" sz="1200" b="1" dirty="0">
+                <a:solidFill>
+                  <a:srgbClr val="935D08"/>
+                </a:solidFill>
+                <a:latin typeface="Microsoft JhengHei" pitchFamily="34" charset="0"/>
+                <a:ea typeface="Microsoft JhengHei" pitchFamily="34" charset="-122"/>
+                <a:cs typeface="Microsoft JhengHei" pitchFamily="34" charset="-120"/>
+              </a:rPr>
+              <a:t>券的連結點了，顯示「已使用過」？
+</a:t>
+            </a:r>
+            <a:r>
+              <a:rPr lang="en-US" sz="900" dirty="0">
+                <a:solidFill>
+                  <a:srgbClr val="6E6A63"/>
+                </a:solidFill>
+                <a:latin typeface="Microsoft JhengHei" pitchFamily="34" charset="0"/>
+                <a:ea typeface="Microsoft JhengHei" pitchFamily="34" charset="-122"/>
+                <a:cs typeface="Microsoft JhengHei" pitchFamily="34" charset="-120"/>
+              </a:rPr>
+              <a:t>　  The coupon link says it has already been used.</a:t>
+            </a:r>
+            <a:endParaRPr lang="en-US" sz="1100" dirty="0"/>
+          </a:p>
+        </p:txBody>
+      </p:sp>
+      <p:sp>
+        <p:nvSpPr>
+          <p:cNvPr id="12" name="Text 10"/>
+          <p:cNvSpPr/>
+          <p:nvPr/>
+        </p:nvSpPr>
+        <p:spPr>
+          <a:xfrm>
+            <a:off x="685800" y="3017520"/>
+            <a:ext cx="7772400" cy="384048"/>
+          </a:xfrm>
+          <a:prstGeom prst="rect">
+            <a:avLst/>
+          </a:prstGeom>
+          <a:noFill/>
+          <a:ln/>
+        </p:spPr>
+        <p:txBody>
+          <a:bodyPr wrap="square" rtlCol="0" anchor="ctr"/>
+          <a:lstStyle/>
+          <a:p>
+            <a:pPr marL="0" indent="0">
               <a:lnSpc>
                 <a:spcPts val="1300"/>
               </a:lnSpc>
               <a:buNone/>
             </a:pPr>
             <a:r>
-              <a:rPr lang="en-US" sz="1200" b="1" dirty="0">
-                <a:solidFill>
-                  <a:srgbClr val="935D08"/>
-                </a:solidFill>
-                <a:latin typeface="Microsoft JhengHei" pitchFamily="34" charset="0"/>
-                <a:ea typeface="Microsoft JhengHei" pitchFamily="34" charset="-122"/>
-                <a:cs typeface="Microsoft JhengHei" pitchFamily="34" charset="-120"/>
-              </a:rPr>
-              <a:t>券的連結點了，顯示「已使用過」？
-</a:t>
-            </a:r>
-            <a:pPr indent="0" marL="0">
-              <a:lnSpc>
-                <a:spcPts val="1300"/>
-              </a:lnSpc>
-              <a:buNone/>
-            </a:pPr>
-            <a:r>
-              <a:rPr lang="en-US" sz="900" dirty="0">
-                <a:solidFill>
-                  <a:srgbClr val="6E6A63"/>
-                </a:solidFill>
-                <a:latin typeface="Microsoft JhengHei" pitchFamily="34" charset="0"/>
-                <a:ea typeface="Microsoft JhengHei" pitchFamily="34" charset="-122"/>
-                <a:cs typeface="Microsoft JhengHei" pitchFamily="34" charset="-120"/>
-              </a:rPr>
-              <a:t>　  The coupon link says it has already been used.</a:t>
-            </a:r>
-            <a:endParaRPr lang="en-US" sz="1100" dirty="0"/>
-          </a:p>
-        </p:txBody>
-      </p:sp>
-      <p:sp>
-        <p:nvSpPr>
-          <p:cNvPr id="12" name="Text 10"/>
-          <p:cNvSpPr/>
-          <p:nvPr/>
-        </p:nvSpPr>
-        <p:spPr>
-          <a:xfrm>
-            <a:off x="685800" y="3017520"/>
-            <a:ext cx="7772400" cy="384048"/>
-          </a:xfrm>
-          <a:prstGeom prst="rect">
-            <a:avLst/>
-          </a:prstGeom>
-          <a:noFill/>
-          <a:ln/>
-        </p:spPr>
-        <p:txBody>
-          <a:bodyPr wrap="square" rtlCol="0" anchor="ctr"/>
-          <a:lstStyle/>
-          <a:p>
-            <a:pPr indent="0" marL="0">
-              <a:lnSpc>
-                <a:spcPts val="1300"/>
-              </a:lnSpc>
-              <a:buNone/>
-            </a:pPr>
-            <a:r>
               <a:rPr lang="en-US" sz="1050" dirty="0">
                 <a:solidFill>
                   <a:srgbClr val="3D3935"/>
@@ -13603,12 +12836,6 @@
               <a:t>每張券只能領取一次。如果您確定沒有領過，我幫您回報查詢。
 </a:t>
             </a:r>
-            <a:pPr indent="0" marL="0">
-              <a:lnSpc>
-                <a:spcPts val="1300"/>
-              </a:lnSpc>
-              <a:buNone/>
-            </a:pPr>
             <a:r>
               <a:rPr lang="en-US" sz="900" dirty="0">
                 <a:solidFill>
@@ -13672,7 +12899,7 @@
           <a:bodyPr wrap="square" rtlCol="0" anchor="ctr"/>
           <a:lstStyle/>
           <a:p>
-            <a:pPr indent="0" marL="0">
+            <a:pPr marL="0" indent="0">
               <a:lnSpc>
                 <a:spcPts val="1300"/>
               </a:lnSpc>
@@ -13689,73 +12916,61 @@
               </a:rPr>
               <a:t>Q  </a:t>
             </a:r>
-            <a:pPr indent="0" marL="0">
+            <a:r>
+              <a:rPr lang="en-US" sz="1200" b="1" dirty="0">
+                <a:solidFill>
+                  <a:srgbClr val="935D08"/>
+                </a:solidFill>
+                <a:latin typeface="Microsoft JhengHei" pitchFamily="34" charset="0"/>
+                <a:ea typeface="Microsoft JhengHei" pitchFamily="34" charset="-122"/>
+                <a:cs typeface="Microsoft JhengHei" pitchFamily="34" charset="-120"/>
+              </a:rPr>
+              <a:t>我中獎了，怎麼都沒有券？
+</a:t>
+            </a:r>
+            <a:r>
+              <a:rPr lang="en-US" sz="900" dirty="0">
+                <a:solidFill>
+                  <a:srgbClr val="6E6A63"/>
+                </a:solidFill>
+                <a:latin typeface="Microsoft JhengHei" pitchFamily="34" charset="0"/>
+                <a:ea typeface="Microsoft JhengHei" pitchFamily="34" charset="-122"/>
+                <a:cs typeface="Microsoft JhengHei" pitchFamily="34" charset="-120"/>
+              </a:rPr>
+              <a:t>　  I won a prize, but there's no coupon.</a:t>
+            </a:r>
+            <a:endParaRPr lang="en-US" sz="1100" dirty="0"/>
+          </a:p>
+        </p:txBody>
+      </p:sp>
+      <p:sp>
+        <p:nvSpPr>
+          <p:cNvPr id="15" name="Text 13"/>
+          <p:cNvSpPr/>
+          <p:nvPr/>
+        </p:nvSpPr>
+        <p:spPr>
+          <a:xfrm>
+            <a:off x="685800" y="4133088"/>
+            <a:ext cx="7772400" cy="438912"/>
+          </a:xfrm>
+          <a:prstGeom prst="rect">
+            <a:avLst/>
+          </a:prstGeom>
+          <a:noFill/>
+          <a:ln/>
+        </p:spPr>
+        <p:txBody>
+          <a:bodyPr wrap="square" rtlCol="0" anchor="ctr"/>
+          <a:lstStyle/>
+          <a:p>
+            <a:pPr marL="0" indent="0">
               <a:lnSpc>
                 <a:spcPts val="1300"/>
               </a:lnSpc>
               <a:buNone/>
             </a:pPr>
             <a:r>
-              <a:rPr lang="en-US" sz="1200" b="1" dirty="0">
-                <a:solidFill>
-                  <a:srgbClr val="935D08"/>
-                </a:solidFill>
-                <a:latin typeface="Microsoft JhengHei" pitchFamily="34" charset="0"/>
-                <a:ea typeface="Microsoft JhengHei" pitchFamily="34" charset="-122"/>
-                <a:cs typeface="Microsoft JhengHei" pitchFamily="34" charset="-120"/>
-              </a:rPr>
-              <a:t>我中獎了，怎麼都沒有券？
-</a:t>
-            </a:r>
-            <a:pPr indent="0" marL="0">
-              <a:lnSpc>
-                <a:spcPts val="1300"/>
-              </a:lnSpc>
-              <a:buNone/>
-            </a:pPr>
-            <a:r>
-              <a:rPr lang="en-US" sz="900" dirty="0">
-                <a:solidFill>
-                  <a:srgbClr val="6E6A63"/>
-                </a:solidFill>
-                <a:latin typeface="Microsoft JhengHei" pitchFamily="34" charset="0"/>
-                <a:ea typeface="Microsoft JhengHei" pitchFamily="34" charset="-122"/>
-                <a:cs typeface="Microsoft JhengHei" pitchFamily="34" charset="-120"/>
-              </a:rPr>
-              <a:t>　  I won a prize, but there's no coupon.</a:t>
-            </a:r>
-            <a:endParaRPr lang="en-US" sz="1100" dirty="0"/>
-          </a:p>
-        </p:txBody>
-      </p:sp>
-      <p:sp>
-        <p:nvSpPr>
-          <p:cNvPr id="15" name="Text 13"/>
-          <p:cNvSpPr/>
-          <p:nvPr/>
-        </p:nvSpPr>
-        <p:spPr>
-          <a:xfrm>
-            <a:off x="685800" y="4133088"/>
-            <a:ext cx="7772400" cy="438912"/>
-          </a:xfrm>
-          <a:prstGeom prst="rect">
-            <a:avLst/>
-          </a:prstGeom>
-          <a:noFill/>
-          <a:ln/>
-        </p:spPr>
-        <p:txBody>
-          <a:bodyPr wrap="square" rtlCol="0" anchor="ctr"/>
-          <a:lstStyle/>
-          <a:p>
-            <a:pPr indent="0" marL="0">
-              <a:lnSpc>
-                <a:spcPts val="1300"/>
-              </a:lnSpc>
-              <a:buNone/>
-            </a:pPr>
-            <a:r>
               <a:rPr lang="en-US" sz="1050" dirty="0">
                 <a:solidFill>
                   <a:srgbClr val="3D3935"/>
@@ -13767,12 +12982,6 @@
               <a:t>部分獎項（臺北的全部獎項，以及高雄的兩項住宿大獎）由飯店同仁直接與您聯繫安排，所以不會發送優惠券。只要您已留下聯絡資料，我們會盡快與您聯繫。
 </a:t>
             </a:r>
-            <a:pPr indent="0" marL="0">
-              <a:lnSpc>
-                <a:spcPts val="1300"/>
-              </a:lnSpc>
-              <a:buNone/>
-            </a:pPr>
             <a:r>
               <a:rPr lang="en-US" sz="900" dirty="0">
                 <a:solidFill>
@@ -14089,4 +13298,319 @@
     </a:ext>
   </a:extLst>
 </a:theme>
+</file>
+
+<file path=ppt/theme/theme2.xml><?xml version="1.0" encoding="utf-8"?>
+<a:theme xmlns:a="http://schemas.openxmlformats.org/drawingml/2006/main" name="Office 佈景主題">
+  <a:themeElements>
+    <a:clrScheme name="Office">
+      <a:dk1>
+        <a:sysClr val="windowText" lastClr="000000"/>
+      </a:dk1>
+      <a:lt1>
+        <a:sysClr val="window" lastClr="FFFFFF"/>
+      </a:lt1>
+      <a:dk2>
+        <a:srgbClr val="0E2841"/>
+      </a:dk2>
+      <a:lt2>
+        <a:srgbClr val="E8E8E8"/>
+      </a:lt2>
+      <a:accent1>
+        <a:srgbClr val="156082"/>
+      </a:accent1>
+      <a:accent2>
+        <a:srgbClr val="E97132"/>
+      </a:accent2>
+      <a:accent3>
+        <a:srgbClr val="196B24"/>
+      </a:accent3>
+      <a:accent4>
+        <a:srgbClr val="0F9ED5"/>
+      </a:accent4>
+      <a:accent5>
+        <a:srgbClr val="A02B93"/>
+      </a:accent5>
+      <a:accent6>
+        <a:srgbClr val="4EA72E"/>
+      </a:accent6>
+      <a:hlink>
+        <a:srgbClr val="467886"/>
+      </a:hlink>
+      <a:folHlink>
+        <a:srgbClr val="96607D"/>
+      </a:folHlink>
+    </a:clrScheme>
+    <a:fontScheme name="Office">
+      <a:majorFont>
+        <a:latin typeface="Aptos Display" panose="02110004020202020204"/>
+        <a:ea typeface=""/>
+        <a:cs typeface=""/>
+        <a:font script="Jpan" typeface="游ゴシック Light"/>
+        <a:font script="Hang" typeface="맑은 고딕"/>
+        <a:font script="Hans" typeface="等线 Light"/>
+        <a:font script="Hant" typeface="新細明體"/>
+        <a:font script="Arab" typeface="Times New Roman"/>
+        <a:font script="Hebr" typeface="Times New Roman"/>
+        <a:font script="Thai" typeface="Angsana New"/>
+        <a:font script="Ethi" typeface="Nyala"/>
+        <a:font script="Beng" typeface="Vrinda"/>
+        <a:font script="Gujr" typeface="Shruti"/>
+        <a:font script="Khmr" typeface="MoolBoran"/>
+        <a:font script="Knda" typeface="Tunga"/>
+        <a:font script="Guru" typeface="Raavi"/>
+        <a:font script="Cans" typeface="Euphemia"/>
+        <a:font script="Cher" typeface="Plantagenet Cherokee"/>
+        <a:font script="Yiii" typeface="Microsoft Yi Baiti"/>
+        <a:font script="Tibt" typeface="Microsoft Himalaya"/>
+        <a:font script="Thaa" typeface="MV Boli"/>
+        <a:font script="Deva" typeface="Mangal"/>
+        <a:font script="Telu" typeface="Gautami"/>
+        <a:font script="Taml" typeface="Latha"/>
+        <a:font script="Syrc" typeface="Estrangelo Edessa"/>
+        <a:font script="Orya" typeface="Kalinga"/>
+        <a:font script="Mlym" typeface="Kartika"/>
+        <a:font script="Laoo" typeface="DokChampa"/>
+        <a:font script="Sinh" typeface="Iskoola Pota"/>
+        <a:font script="Mong" typeface="Mongolian Baiti"/>
+        <a:font script="Viet" typeface="Times New Roman"/>
+        <a:font script="Uigh" typeface="Microsoft Uighur"/>
+        <a:font script="Geor" typeface="Sylfaen"/>
+        <a:font script="Armn" typeface="Arial"/>
+        <a:font script="Bugi" typeface="Leelawadee UI"/>
+        <a:font script="Bopo" typeface="Microsoft JhengHei"/>
+        <a:font script="Java" typeface="Javanese Text"/>
+        <a:font script="Lisu" typeface="Segoe UI"/>
+        <a:font script="Mymr" typeface="Myanmar Text"/>
+        <a:font script="Nkoo" typeface="Ebrima"/>
+        <a:font script="Olck" typeface="Nirmala UI"/>
+        <a:font script="Osma" typeface="Ebrima"/>
+        <a:font script="Phag" typeface="Phagspa"/>
+        <a:font script="Syrn" typeface="Estrangelo Edessa"/>
+        <a:font script="Syrj" typeface="Estrangelo Edessa"/>
+        <a:font script="Syre" typeface="Estrangelo Edessa"/>
+        <a:font script="Sora" typeface="Nirmala UI"/>
+        <a:font script="Tale" typeface="Microsoft Tai Le"/>
+        <a:font script="Talu" typeface="Microsoft New Tai Lue"/>
+        <a:font script="Tfng" typeface="Ebrima"/>
+      </a:majorFont>
+      <a:minorFont>
+        <a:latin typeface="Aptos" panose="02110004020202020204"/>
+        <a:ea typeface=""/>
+        <a:cs typeface=""/>
+        <a:font script="Jpan" typeface="游ゴシック"/>
+        <a:font script="Hang" typeface="맑은 고딕"/>
+        <a:font script="Hans" typeface="等线"/>
+        <a:font script="Hant" typeface="新細明體"/>
+        <a:font script="Arab" typeface="Arial"/>
+        <a:font script="Hebr" typeface="Arial"/>
+        <a:font script="Thai" typeface="Cordia New"/>
+        <a:font script="Ethi" typeface="Nyala"/>
+        <a:font script="Beng" typeface="Vrinda"/>
+        <a:font script="Gujr" typeface="Shruti"/>
+        <a:font script="Khmr" typeface="DaunPenh"/>
+        <a:font script="Knda" typeface="Tunga"/>
+        <a:font script="Guru" typeface="Raavi"/>
+        <a:font script="Cans" typeface="Euphemia"/>
+        <a:font script="Cher" typeface="Plantagenet Cherokee"/>
+        <a:font script="Yiii" typeface="Microsoft Yi Baiti"/>
+        <a:font script="Tibt" typeface="Microsoft Himalaya"/>
+        <a:font script="Thaa" typeface="MV Boli"/>
+        <a:font script="Deva" typeface="Mangal"/>
+        <a:font script="Telu" typeface="Gautami"/>
+        <a:font script="Taml" typeface="Latha"/>
+        <a:font script="Syrc" typeface="Estrangelo Edessa"/>
+        <a:font script="Orya" typeface="Kalinga"/>
+        <a:font script="Mlym" typeface="Kartika"/>
+        <a:font script="Laoo" typeface="DokChampa"/>
+        <a:font script="Sinh" typeface="Iskoola Pota"/>
+        <a:font script="Mong" typeface="Mongolian Baiti"/>
+        <a:font script="Viet" typeface="Arial"/>
+        <a:font script="Uigh" typeface="Microsoft Uighur"/>
+        <a:font script="Geor" typeface="Sylfaen"/>
+        <a:font script="Armn" typeface="Arial"/>
+        <a:font script="Bugi" typeface="Leelawadee UI"/>
+        <a:font script="Bopo" typeface="Microsoft JhengHei"/>
+        <a:font script="Java" typeface="Javanese Text"/>
+        <a:font script="Lisu" typeface="Segoe UI"/>
+        <a:font script="Mymr" typeface="Myanmar Text"/>
+        <a:font script="Nkoo" typeface="Ebrima"/>
+        <a:font script="Olck" typeface="Nirmala UI"/>
+        <a:font script="Osma" typeface="Ebrima"/>
+        <a:font script="Phag" typeface="Phagspa"/>
+        <a:font script="Syrn" typeface="Estrangelo Edessa"/>
+        <a:font script="Syrj" typeface="Estrangelo Edessa"/>
+        <a:font script="Syre" typeface="Estrangelo Edessa"/>
+        <a:font script="Sora" typeface="Nirmala UI"/>
+        <a:font script="Tale" typeface="Microsoft Tai Le"/>
+        <a:font script="Talu" typeface="Microsoft New Tai Lue"/>
+        <a:font script="Tfng" typeface="Ebrima"/>
+      </a:minorFont>
+    </a:fontScheme>
+    <a:fmtScheme name="Office">
+      <a:fillStyleLst>
+        <a:solidFill>
+          <a:schemeClr val="phClr"/>
+        </a:solidFill>
+        <a:gradFill rotWithShape="1">
+          <a:gsLst>
+            <a:gs pos="0">
+              <a:schemeClr val="phClr">
+                <a:lumMod val="110000"/>
+                <a:satMod val="105000"/>
+                <a:tint val="67000"/>
+              </a:schemeClr>
+            </a:gs>
+            <a:gs pos="50000">
+              <a:schemeClr val="phClr">
+                <a:lumMod val="105000"/>
+                <a:satMod val="103000"/>
+                <a:tint val="73000"/>
+              </a:schemeClr>
+            </a:gs>
+            <a:gs pos="100000">
+              <a:schemeClr val="phClr">
+                <a:lumMod val="105000"/>
+                <a:satMod val="109000"/>
+                <a:tint val="81000"/>
+              </a:schemeClr>
+            </a:gs>
+          </a:gsLst>
+          <a:lin ang="5400000" scaled="0"/>
+        </a:gradFill>
+        <a:gradFill rotWithShape="1">
+          <a:gsLst>
+            <a:gs pos="0">
+              <a:schemeClr val="phClr">
+                <a:satMod val="103000"/>
+                <a:lumMod val="102000"/>
+                <a:tint val="94000"/>
+              </a:schemeClr>
+            </a:gs>
+            <a:gs pos="50000">
+              <a:schemeClr val="phClr">
+                <a:satMod val="110000"/>
+                <a:lumMod val="100000"/>
+                <a:shade val="100000"/>
+              </a:schemeClr>
+            </a:gs>
+            <a:gs pos="100000">
+              <a:schemeClr val="phClr">
+                <a:lumMod val="99000"/>
+                <a:satMod val="120000"/>
+                <a:shade val="78000"/>
+              </a:schemeClr>
+            </a:gs>
+          </a:gsLst>
+          <a:lin ang="5400000" scaled="0"/>
+        </a:gradFill>
+      </a:fillStyleLst>
+      <a:lnStyleLst>
+        <a:ln w="12700" cap="flat" cmpd="sng" algn="ctr">
+          <a:solidFill>
+            <a:schemeClr val="phClr"/>
+          </a:solidFill>
+          <a:prstDash val="solid"/>
+          <a:miter lim="800000"/>
+        </a:ln>
+        <a:ln w="19050" cap="flat" cmpd="sng" algn="ctr">
+          <a:solidFill>
+            <a:schemeClr val="phClr"/>
+          </a:solidFill>
+          <a:prstDash val="solid"/>
+          <a:miter lim="800000"/>
+        </a:ln>
+        <a:ln w="25400" cap="flat" cmpd="sng" algn="ctr">
+          <a:solidFill>
+            <a:schemeClr val="phClr"/>
+          </a:solidFill>
+          <a:prstDash val="solid"/>
+          <a:miter lim="800000"/>
+        </a:ln>
+      </a:lnStyleLst>
+      <a:effectStyleLst>
+        <a:effectStyle>
+          <a:effectLst/>
+        </a:effectStyle>
+        <a:effectStyle>
+          <a:effectLst/>
+        </a:effectStyle>
+        <a:effectStyle>
+          <a:effectLst>
+            <a:outerShdw blurRad="57150" dist="19050" dir="5400000" algn="ctr" rotWithShape="0">
+              <a:srgbClr val="000000">
+                <a:alpha val="63000"/>
+              </a:srgbClr>
+            </a:outerShdw>
+          </a:effectLst>
+        </a:effectStyle>
+      </a:effectStyleLst>
+      <a:bgFillStyleLst>
+        <a:solidFill>
+          <a:schemeClr val="phClr"/>
+        </a:solidFill>
+        <a:solidFill>
+          <a:schemeClr val="phClr">
+            <a:tint val="95000"/>
+            <a:satMod val="170000"/>
+          </a:schemeClr>
+        </a:solidFill>
+        <a:gradFill rotWithShape="1">
+          <a:gsLst>
+            <a:gs pos="0">
+              <a:schemeClr val="phClr">
+                <a:tint val="93000"/>
+                <a:satMod val="150000"/>
+                <a:shade val="98000"/>
+                <a:lumMod val="102000"/>
+              </a:schemeClr>
+            </a:gs>
+            <a:gs pos="50000">
+              <a:schemeClr val="phClr">
+                <a:tint val="98000"/>
+                <a:satMod val="130000"/>
+                <a:shade val="90000"/>
+                <a:lumMod val="103000"/>
+              </a:schemeClr>
+            </a:gs>
+            <a:gs pos="100000">
+              <a:schemeClr val="phClr">
+                <a:shade val="63000"/>
+                <a:satMod val="120000"/>
+              </a:schemeClr>
+            </a:gs>
+          </a:gsLst>
+          <a:lin ang="5400000" scaled="0"/>
+        </a:gradFill>
+      </a:bgFillStyleLst>
+    </a:fmtScheme>
+  </a:themeElements>
+  <a:objectDefaults>
+    <a:lnDef>
+      <a:spPr/>
+      <a:bodyPr/>
+      <a:lstStyle/>
+      <a:style>
+        <a:lnRef idx="2">
+          <a:schemeClr val="accent1"/>
+        </a:lnRef>
+        <a:fillRef idx="0">
+          <a:schemeClr val="accent1"/>
+        </a:fillRef>
+        <a:effectRef idx="1">
+          <a:schemeClr val="accent1"/>
+        </a:effectRef>
+        <a:fontRef idx="minor">
+          <a:schemeClr val="tx1"/>
+        </a:fontRef>
+      </a:style>
+    </a:lnDef>
+  </a:objectDefaults>
+  <a:extraClrSchemeLst/>
+  <a:extLst>
+    <a:ext uri="{05A4C25C-085E-4340-85A3-A5531E510DB2}">
+      <thm15:themeFamily xmlns:thm15="http://schemas.microsoft.com/office/thememl/2012/main" name="Office Theme" id="{2E142A2C-CD16-42D6-873A-C26D2A0506FA}" vid="{1BDDFF52-6CD6-40A5-AB3C-68EB2F1E4D0A}"/>
+    </a:ext>
+  </a:extLst>
+</a:theme>
 </file>
--- a/docs/洲遊幣Lite_員工手冊_一般版_雙語.pptx
+++ b/docs/洲遊幣Lite_員工手冊_一般版_雙語.pptx
@@ -4,9 +4,6 @@
   <p:sldMasterIdLst>
     <p:sldMasterId id="2147483648" r:id="rId1"/>
   </p:sldMasterIdLst>
-  <p:notesMasterIdLst>
-    <p:notesMasterId r:id="rId16"/>
-  </p:notesMasterIdLst>
   <p:sldIdLst>
     <p:sldId id="256" r:id="rId2"/>
     <p:sldId id="257" r:id="rId3"/>
@@ -22,8 +19,12 @@
     <p:sldId id="267" r:id="rId13"/>
     <p:sldId id="268" r:id="rId14"/>
     <p:sldId id="269" r:id="rId15"/>
+    <p:sldId id="270" r:id="rId16"/>
   </p:sldIdLst>
-  <p:sldSz cx="9144000" cy="5143500" type="screen16x9"/>
+  <p:notesMasterIdLst>
+    <p:notesMasterId r:id="rId17"/>
+  </p:notesMasterIdLst>
+  <p:sldSz cx="9144000" cy="5143500"/>
   <p:notesSz cx="5143500" cy="9144000"/>
   <p:defaultTextStyle>
     <a:lvl1pPr marL="0" algn="l" defTabSz="914400" rtl="0" eaLnBrk="1" latinLnBrk="0" hangingPunct="1">
@@ -117,11 +118,6 @@
       </a:defRPr>
     </a:lvl9pPr>
   </p:defaultTextStyle>
-  <p:extLst>
-    <p:ext uri="{EFAFB233-063F-42B5-8137-9DF3F51BA10A}">
-      <p15:sldGuideLst xmlns:p15="http://schemas.microsoft.com/office/powerpoint/2012/main"/>
-    </p:ext>
-  </p:extLst>
 </p:presentation>
 </file>
 
@@ -147,10 +143,234 @@
           <a:chExt cx="0" cy="0"/>
         </a:xfrm>
       </p:grpSpPr>
+      <p:sp>
+        <p:nvSpPr>
+          <p:cNvPr id="2" name="Header Placeholder 1"/>
+          <p:cNvSpPr>
+            <a:spLocks noGrp="1"/>
+          </p:cNvSpPr>
+          <p:nvPr>
+            <p:ph type="hdr" sz="quarter"/>
+          </p:nvPr>
+        </p:nvSpPr>
+        <p:spPr>
+          <a:xfrm>
+            <a:off x="0" y="0"/>
+            <a:ext cx="2971800" cy="458788"/>
+          </a:xfrm>
+          <a:prstGeom prst="rect">
+            <a:avLst/>
+          </a:prstGeom>
+        </p:spPr>
+        <p:txBody>
+          <a:bodyPr vert="horz" lIns="91440" tIns="45720" rIns="91440" bIns="45720" rtlCol="0"/>
+          <a:lstStyle>
+            <a:lvl1pPr algn="l">
+              <a:defRPr sz="1200"/>
+            </a:lvl1pPr>
+          </a:lstStyle>
+          <a:p>
+            <a:endParaRPr lang="en-US"/>
+          </a:p>
+        </p:txBody>
+      </p:sp>
+      <p:sp>
+        <p:nvSpPr>
+          <p:cNvPr id="3" name="Date Placeholder 2"/>
+          <p:cNvSpPr>
+            <a:spLocks noGrp="1"/>
+          </p:cNvSpPr>
+          <p:nvPr>
+            <p:ph type="dt" idx="1"/>
+          </p:nvPr>
+        </p:nvSpPr>
+        <p:spPr>
+          <a:xfrm>
+            <a:off x="3884613" y="0"/>
+            <a:ext cx="2971800" cy="458788"/>
+          </a:xfrm>
+          <a:prstGeom prst="rect">
+            <a:avLst/>
+          </a:prstGeom>
+        </p:spPr>
+        <p:txBody>
+          <a:bodyPr vert="horz" lIns="91440" tIns="45720" rIns="91440" bIns="45720" rtlCol="0"/>
+          <a:lstStyle>
+            <a:lvl1pPr algn="r">
+              <a:defRPr sz="1200"/>
+            </a:lvl1pPr>
+          </a:lstStyle>
+          <a:p>
+            <a:fld id="{5282F153-3F37-0F45-9E97-73ACFA13230C}" type="datetimeFigureOut">
+              <a:rPr lang="en-US"/>
+              <a:t>7/23/19</a:t>
+            </a:fld>
+            <a:endParaRPr lang="en-US"/>
+          </a:p>
+        </p:txBody>
+      </p:sp>
+      <p:sp>
+        <p:nvSpPr>
+          <p:cNvPr id="4" name="Slide Image Placeholder 3"/>
+          <p:cNvSpPr>
+            <a:spLocks noGrp="1" noRot="1" noChangeAspect="1"/>
+          </p:cNvSpPr>
+          <p:nvPr>
+            <p:ph type="sldImg" idx="2"/>
+          </p:nvPr>
+        </p:nvSpPr>
+        <p:spPr>
+          <a:xfrm>
+            <a:off x="685800" y="1143000"/>
+            <a:ext cx="5486400" cy="3086100"/>
+          </a:xfrm>
+          <a:prstGeom prst="rect">
+            <a:avLst/>
+          </a:prstGeom>
+          <a:noFill/>
+          <a:ln w="12700">
+            <a:solidFill>
+              <a:prstClr val="black"/>
+            </a:solidFill>
+          </a:ln>
+        </p:spPr>
+        <p:txBody>
+          <a:bodyPr vert="horz" lIns="91440" tIns="45720" rIns="91440" bIns="45720" rtlCol="0" anchor="ctr"/>
+          <a:lstStyle/>
+          <a:p>
+            <a:endParaRPr lang="en-US"/>
+          </a:p>
+        </p:txBody>
+      </p:sp>
+      <p:sp>
+        <p:nvSpPr>
+          <p:cNvPr id="5" name="Notes Placeholder 4"/>
+          <p:cNvSpPr>
+            <a:spLocks noGrp="1"/>
+          </p:cNvSpPr>
+          <p:nvPr>
+            <p:ph type="body" sz="quarter" idx="3"/>
+          </p:nvPr>
+        </p:nvSpPr>
+        <p:spPr>
+          <a:xfrm>
+            <a:off x="685800" y="4400550"/>
+            <a:ext cx="5486400" cy="3600450"/>
+          </a:xfrm>
+          <a:prstGeom prst="rect">
+            <a:avLst/>
+          </a:prstGeom>
+        </p:spPr>
+        <p:txBody>
+          <a:bodyPr vert="horz" lIns="91440" tIns="45720" rIns="91440" bIns="45720" rtlCol="0"/>
+          <a:lstStyle/>
+          <a:p>
+            <a:pPr lvl="0"/>
+            <a:r>
+              <a:rPr lang="en-US"/>
+              <a:t>Click to edit Master text styles</a:t>
+            </a:r>
+          </a:p>
+          <a:p>
+            <a:pPr lvl="1"/>
+            <a:r>
+              <a:rPr lang="en-US"/>
+              <a:t>Second level</a:t>
+            </a:r>
+          </a:p>
+          <a:p>
+            <a:pPr lvl="2"/>
+            <a:r>
+              <a:rPr lang="en-US"/>
+              <a:t>Third level</a:t>
+            </a:r>
+          </a:p>
+          <a:p>
+            <a:pPr lvl="3"/>
+            <a:r>
+              <a:rPr lang="en-US"/>
+              <a:t>Fourth level</a:t>
+            </a:r>
+          </a:p>
+          <a:p>
+            <a:pPr lvl="4"/>
+            <a:r>
+              <a:rPr lang="en-US"/>
+              <a:t>Fifth level</a:t>
+            </a:r>
+          </a:p>
+        </p:txBody>
+      </p:sp>
+      <p:sp>
+        <p:nvSpPr>
+          <p:cNvPr id="6" name="Footer Placeholder 5"/>
+          <p:cNvSpPr>
+            <a:spLocks noGrp="1"/>
+          </p:cNvSpPr>
+          <p:nvPr>
+            <p:ph type="ftr" sz="quarter" idx="4"/>
+          </p:nvPr>
+        </p:nvSpPr>
+        <p:spPr>
+          <a:xfrm>
+            <a:off x="0" y="8685213"/>
+            <a:ext cx="2971800" cy="458787"/>
+          </a:xfrm>
+          <a:prstGeom prst="rect">
+            <a:avLst/>
+          </a:prstGeom>
+        </p:spPr>
+        <p:txBody>
+          <a:bodyPr vert="horz" lIns="91440" tIns="45720" rIns="91440" bIns="45720" rtlCol="0" anchor="b"/>
+          <a:lstStyle>
+            <a:lvl1pPr algn="l">
+              <a:defRPr sz="1200"/>
+            </a:lvl1pPr>
+          </a:lstStyle>
+          <a:p>
+            <a:endParaRPr lang="en-US"/>
+          </a:p>
+        </p:txBody>
+      </p:sp>
+      <p:sp>
+        <p:nvSpPr>
+          <p:cNvPr id="7" name="Slide Number Placeholder 6"/>
+          <p:cNvSpPr>
+            <a:spLocks noGrp="1"/>
+          </p:cNvSpPr>
+          <p:nvPr>
+            <p:ph type="sldNum" sz="quarter" idx="5"/>
+          </p:nvPr>
+        </p:nvSpPr>
+        <p:spPr>
+          <a:xfrm>
+            <a:off x="3884613" y="8685213"/>
+            <a:ext cx="2971800" cy="458787"/>
+          </a:xfrm>
+          <a:prstGeom prst="rect">
+            <a:avLst/>
+          </a:prstGeom>
+        </p:spPr>
+        <p:txBody>
+          <a:bodyPr vert="horz" lIns="91440" tIns="45720" rIns="91440" bIns="45720" rtlCol="0" anchor="b"/>
+          <a:lstStyle>
+            <a:lvl1pPr algn="r">
+              <a:defRPr sz="1200"/>
+            </a:lvl1pPr>
+          </a:lstStyle>
+          <a:p>
+            <a:fld id="{CE5E9CC1-C706-0F49-92D6-E571CC5EEA8F}" type="slidenum">
+              <a:rPr lang="en-US"/>
+              <a:t>‹#›</a:t>
+            </a:fld>
+            <a:endParaRPr lang="en-US"/>
+          </a:p>
+        </p:txBody>
+      </p:sp>
     </p:spTree>
     <p:extLst>
       <p:ext uri="{BB962C8B-B14F-4D97-AF65-F5344CB8AC3E}">
-        <p14:creationId xmlns:p14="http://schemas.microsoft.com/office/powerpoint/2010/main" val="601306080"/>
+        <p14:creationId xmlns:p14="http://schemas.microsoft.com/office/powerpoint/2010/main" val="1024086991"/>
       </p:ext>
     </p:extLst>
   </p:cSld>
@@ -294,6 +514,10 @@
           <a:bodyPr/>
           <a:lstStyle/>
           <a:p>
+            <a:r>
+              <a:rPr lang="en-US" dirty="0"/>
+              <a:t/>
+            </a:r>
             <a:endParaRPr lang="en-US" dirty="0"/>
           </a:p>
         </p:txBody>
@@ -378,6 +602,10 @@
           <a:bodyPr/>
           <a:lstStyle/>
           <a:p>
+            <a:r>
+              <a:rPr lang="en-US" dirty="0"/>
+              <a:t/>
+            </a:r>
             <a:endParaRPr lang="en-US" dirty="0"/>
           </a:p>
         </p:txBody>
@@ -462,6 +690,10 @@
           <a:bodyPr/>
           <a:lstStyle/>
           <a:p>
+            <a:r>
+              <a:rPr lang="en-US" dirty="0"/>
+              <a:t/>
+            </a:r>
             <a:endParaRPr lang="en-US" dirty="0"/>
           </a:p>
         </p:txBody>
@@ -546,6 +778,10 @@
           <a:bodyPr/>
           <a:lstStyle/>
           <a:p>
+            <a:r>
+              <a:rPr lang="en-US" dirty="0"/>
+              <a:t/>
+            </a:r>
             <a:endParaRPr lang="en-US" dirty="0"/>
           </a:p>
         </p:txBody>
@@ -630,6 +866,10 @@
           <a:bodyPr/>
           <a:lstStyle/>
           <a:p>
+            <a:r>
+              <a:rPr lang="en-US" dirty="0"/>
+              <a:t/>
+            </a:r>
             <a:endParaRPr lang="en-US" dirty="0"/>
           </a:p>
         </p:txBody>
@@ -714,6 +954,10 @@
           <a:bodyPr/>
           <a:lstStyle/>
           <a:p>
+            <a:r>
+              <a:rPr lang="en-US" dirty="0"/>
+              <a:t/>
+            </a:r>
             <a:endParaRPr lang="en-US" dirty="0"/>
           </a:p>
         </p:txBody>
@@ -736,6 +980,94 @@
             <a:fld id="{F7021451-1387-4CA6-816F-3879F97B5CBC}" type="slidenum">
               <a:rPr lang="en-US"/>
               <a:t>14</a:t>
+            </a:fld>
+            <a:endParaRPr lang="en-US"/>
+          </a:p>
+        </p:txBody>
+      </p:sp>
+    </p:spTree>
+    <p:extLst>
+      <p:ext uri="{BB962C8B-B14F-4D97-AF65-F5344CB8AC3E}">
+        <p14:creationId xmlns:p14="http://schemas.microsoft.com/office/powerpoint/2010/main" val="1024086991"/>
+      </p:ext>
+    </p:extLst>
+  </p:cSld>
+  <p:clrMapOvr>
+    <a:masterClrMapping/>
+  </p:clrMapOvr>
+</p:notes>
+</file>
+
+<file path=ppt/notesSlides/notesSlide15.xml><?xml version="1.0" encoding="utf-8"?>
+<p:notes xmlns:a="http://schemas.openxmlformats.org/drawingml/2006/main" xmlns:r="http://schemas.openxmlformats.org/officeDocument/2006/relationships" xmlns:p="http://schemas.openxmlformats.org/presentationml/2006/main">
+  <p:cSld>
+    <p:spTree>
+      <p:nvGrpSpPr>
+        <p:cNvPr id="1" name=""/>
+        <p:cNvGrpSpPr/>
+        <p:nvPr/>
+      </p:nvGrpSpPr>
+      <p:grpSpPr>
+        <a:xfrm>
+          <a:off x="0" y="0"/>
+          <a:ext cx="0" cy="0"/>
+          <a:chOff x="0" y="0"/>
+          <a:chExt cx="0" cy="0"/>
+        </a:xfrm>
+      </p:grpSpPr>
+      <p:sp>
+        <p:nvSpPr>
+          <p:cNvPr id="2" name="Slide Image Placeholder 1"/>
+          <p:cNvSpPr>
+            <a:spLocks noGrp="1" noRot="1" noChangeAspect="1"/>
+          </p:cNvSpPr>
+          <p:nvPr>
+            <p:ph type="sldImg"/>
+          </p:nvPr>
+        </p:nvSpPr>
+        <p:spPr/>
+      </p:sp>
+      <p:sp>
+        <p:nvSpPr>
+          <p:cNvPr id="3" name="Notes Placeholder 2"/>
+          <p:cNvSpPr>
+            <a:spLocks noGrp="1"/>
+          </p:cNvSpPr>
+          <p:nvPr>
+            <p:ph type="body" idx="1"/>
+          </p:nvPr>
+        </p:nvSpPr>
+        <p:spPr/>
+        <p:txBody>
+          <a:bodyPr/>
+          <a:lstStyle/>
+          <a:p>
+            <a:r>
+              <a:rPr lang="en-US" dirty="0"/>
+              <a:t/>
+            </a:r>
+            <a:endParaRPr lang="en-US" dirty="0"/>
+          </a:p>
+        </p:txBody>
+      </p:sp>
+      <p:sp>
+        <p:nvSpPr>
+          <p:cNvPr id="4" name="Slide Number Placeholder 3"/>
+          <p:cNvSpPr>
+            <a:spLocks noGrp="1"/>
+          </p:cNvSpPr>
+          <p:nvPr>
+            <p:ph type="sldNum" sz="quarter" idx="10"/>
+          </p:nvPr>
+        </p:nvSpPr>
+        <p:spPr/>
+        <p:txBody>
+          <a:bodyPr/>
+          <a:lstStyle/>
+          <a:p>
+            <a:fld id="{F7021451-1387-4CA6-816F-3879F97B5CBC}" type="slidenum">
+              <a:rPr lang="en-US"/>
+              <a:t>15</a:t>
             </a:fld>
             <a:endParaRPr lang="en-US"/>
           </a:p>
@@ -798,6 +1130,10 @@
           <a:bodyPr/>
           <a:lstStyle/>
           <a:p>
+            <a:r>
+              <a:rPr lang="en-US" dirty="0"/>
+              <a:t/>
+            </a:r>
             <a:endParaRPr lang="en-US" dirty="0"/>
           </a:p>
         </p:txBody>
@@ -882,6 +1218,10 @@
           <a:bodyPr/>
           <a:lstStyle/>
           <a:p>
+            <a:r>
+              <a:rPr lang="en-US" dirty="0"/>
+              <a:t/>
+            </a:r>
             <a:endParaRPr lang="en-US" dirty="0"/>
           </a:p>
         </p:txBody>
@@ -966,6 +1306,10 @@
           <a:bodyPr/>
           <a:lstStyle/>
           <a:p>
+            <a:r>
+              <a:rPr lang="en-US" dirty="0"/>
+              <a:t/>
+            </a:r>
             <a:endParaRPr lang="en-US" dirty="0"/>
           </a:p>
         </p:txBody>
@@ -1050,6 +1394,10 @@
           <a:bodyPr/>
           <a:lstStyle/>
           <a:p>
+            <a:r>
+              <a:rPr lang="en-US" dirty="0"/>
+              <a:t/>
+            </a:r>
             <a:endParaRPr lang="en-US" dirty="0"/>
           </a:p>
         </p:txBody>
@@ -1134,6 +1482,10 @@
           <a:bodyPr/>
           <a:lstStyle/>
           <a:p>
+            <a:r>
+              <a:rPr lang="en-US" dirty="0"/>
+              <a:t/>
+            </a:r>
             <a:endParaRPr lang="en-US" dirty="0"/>
           </a:p>
         </p:txBody>
@@ -1218,6 +1570,10 @@
           <a:bodyPr/>
           <a:lstStyle/>
           <a:p>
+            <a:r>
+              <a:rPr lang="en-US" dirty="0"/>
+              <a:t/>
+            </a:r>
             <a:endParaRPr lang="en-US" dirty="0"/>
           </a:p>
         </p:txBody>
@@ -1302,6 +1658,10 @@
           <a:bodyPr/>
           <a:lstStyle/>
           <a:p>
+            <a:r>
+              <a:rPr lang="en-US" dirty="0"/>
+              <a:t/>
+            </a:r>
             <a:endParaRPr lang="en-US" dirty="0"/>
           </a:p>
         </p:txBody>
@@ -1386,6 +1746,10 @@
           <a:bodyPr/>
           <a:lstStyle/>
           <a:p>
+            <a:r>
+              <a:rPr lang="en-US" dirty="0"/>
+              <a:t/>
+            </a:r>
             <a:endParaRPr lang="en-US" dirty="0"/>
           </a:p>
         </p:txBody>
@@ -1459,11 +1823,6 @@
 <file path=ppt/slideMasters/slideMaster1.xml><?xml version="1.0" encoding="utf-8"?>
 <p:sldMaster xmlns:a="http://schemas.openxmlformats.org/drawingml/2006/main" xmlns:r="http://schemas.openxmlformats.org/officeDocument/2006/relationships" xmlns:p="http://schemas.openxmlformats.org/presentationml/2006/main">
   <p:cSld>
-    <p:bg>
-      <p:bgRef idx="1001">
-        <a:schemeClr val="bg1"/>
-      </p:bgRef>
-    </p:bg>
     <p:spTree>
       <p:nvGrpSpPr>
         <p:cNvPr id="1" name=""/>
@@ -1746,7 +2105,6 @@
         <a:solidFill>
           <a:srgbClr val="2B2620"/>
         </a:solidFill>
-        <a:effectLst/>
       </p:bgPr>
     </p:bg>
     <p:spTree>
@@ -1804,11 +2162,11 @@
           <a:bodyPr wrap="square" rtlCol="0" anchor="ctr"/>
           <a:lstStyle/>
           <a:p>
-            <a:pPr marL="0" indent="0">
-              <a:buNone/>
-            </a:pPr>
-            <a:r>
-              <a:rPr lang="en-US" sz="1150" kern="0" spc="200" dirty="0">
+            <a:pPr indent="0" marL="0">
+              <a:buNone/>
+            </a:pPr>
+            <a:r>
+              <a:rPr lang="en-US" sz="1150" spc="200" kern="0" dirty="0">
                 <a:solidFill>
                   <a:srgbClr val="B8923E"/>
                 </a:solidFill>
@@ -1843,7 +2201,7 @@
           <a:bodyPr wrap="square" rtlCol="0" anchor="ctr"/>
           <a:lstStyle/>
           <a:p>
-            <a:pPr marL="0" indent="0">
+            <a:pPr indent="0" marL="0">
               <a:buNone/>
             </a:pPr>
             <a:r>
@@ -1882,7 +2240,7 @@
           <a:bodyPr wrap="square" rtlCol="0" anchor="ctr"/>
           <a:lstStyle/>
           <a:p>
-            <a:pPr marL="0" indent="0">
+            <a:pPr indent="0" marL="0">
               <a:buNone/>
             </a:pPr>
             <a:r>
@@ -1941,7 +2299,7 @@
           <a:bodyPr wrap="square" rtlCol="0" anchor="ctr"/>
           <a:lstStyle/>
           <a:p>
-            <a:pPr marL="0" indent="0">
+            <a:pPr indent="0" marL="0">
               <a:buNone/>
             </a:pPr>
             <a:r>
@@ -1980,7 +2338,7 @@
           <a:bodyPr wrap="square" rtlCol="0" anchor="ctr"/>
           <a:lstStyle/>
           <a:p>
-            <a:pPr marL="0" indent="0">
+            <a:pPr indent="0" marL="0">
               <a:buNone/>
             </a:pPr>
             <a:r>
@@ -2019,7 +2377,7 @@
           <a:bodyPr wrap="square" rtlCol="0" anchor="ctr"/>
           <a:lstStyle/>
           <a:p>
-            <a:pPr marL="0" indent="0">
+            <a:pPr indent="0" marL="0">
               <a:lnSpc>
                 <a:spcPts val="1400"/>
               </a:lnSpc>
@@ -2037,6 +2395,12 @@
               <a:t>櫃檯 · 餐廳外場 · 客服 · 行銷執行
 </a:t>
             </a:r>
+            <a:pPr indent="0" marL="0">
+              <a:lnSpc>
+                <a:spcPts val="1400"/>
+              </a:lnSpc>
+              <a:buNone/>
+            </a:pPr>
             <a:r>
               <a:rPr lang="en-US" sz="950" dirty="0">
                 <a:solidFill>
@@ -2073,7 +2437,7 @@
           <a:bodyPr wrap="square" rtlCol="0" anchor="ctr"/>
           <a:lstStyle/>
           <a:p>
-            <a:pPr marL="0" indent="0">
+            <a:pPr indent="0" marL="0">
               <a:buNone/>
             </a:pPr>
             <a:r>
@@ -2107,7 +2471,6 @@
         <a:solidFill>
           <a:srgbClr val="FAF8F6"/>
         </a:solidFill>
-        <a:effectLst/>
       </p:bgPr>
     </p:bg>
     <p:spTree>
@@ -2145,7 +2508,7 @@
           <a:bodyPr wrap="square" rtlCol="0" anchor="ctr"/>
           <a:lstStyle/>
           <a:p>
-            <a:pPr marL="0" indent="0">
+            <a:pPr indent="0" marL="0">
               <a:buNone/>
             </a:pPr>
             <a:r>
@@ -2157,7 +2520,7 @@
                 <a:ea typeface="Microsoft JhengHei" pitchFamily="34" charset="-122"/>
                 <a:cs typeface="Microsoft JhengHei" pitchFamily="34" charset="-120"/>
               </a:rPr>
-              <a:t>六、常見問題與標準回答（2/3）</a:t>
+              <a:t>七、常見問題與標準回答（1/3）</a:t>
             </a:r>
             <a:endParaRPr lang="en-US" sz="2200" dirty="0"/>
           </a:p>
@@ -2184,7 +2547,7 @@
           <a:bodyPr wrap="square" rtlCol="0" anchor="ctr"/>
           <a:lstStyle/>
           <a:p>
-            <a:pPr marL="0" indent="0">
+            <a:pPr indent="0" marL="0">
               <a:buNone/>
             </a:pPr>
             <a:r>
@@ -2196,7 +2559,7 @@
                 <a:ea typeface="Microsoft JhengHei" pitchFamily="34" charset="-122"/>
                 <a:cs typeface="Microsoft JhengHei" pitchFamily="34" charset="-120"/>
               </a:rPr>
-              <a:t>FAQ &amp; Suggested Replies (2 of 3)</a:t>
+              <a:t>FAQ &amp; Suggested Replies (1 of 3)</a:t>
             </a:r>
             <a:endParaRPr lang="en-US" sz="1150" dirty="0"/>
           </a:p>
@@ -2243,7 +2606,7 @@
           <a:bodyPr wrap="square" rtlCol="0" anchor="ctr"/>
           <a:lstStyle/>
           <a:p>
-            <a:pPr marL="0" indent="0" algn="r">
+            <a:pPr algn="r" indent="0" marL="0">
               <a:buNone/>
             </a:pPr>
             <a:r>
@@ -2282,7 +2645,7 @@
           <a:bodyPr wrap="square" rtlCol="0" anchor="ctr"/>
           <a:lstStyle/>
           <a:p>
-            <a:pPr marL="0" indent="0">
+            <a:pPr indent="0" marL="0">
               <a:buNone/>
             </a:pPr>
             <a:r>
@@ -2308,12 +2671,12 @@
         </p:nvSpPr>
         <p:spPr>
           <a:xfrm>
-            <a:off x="502920" y="1188720"/>
-            <a:ext cx="8138160" cy="1188720"/>
+            <a:off x="502920" y="1115568"/>
+            <a:ext cx="8138160" cy="1243584"/>
           </a:xfrm>
           <a:prstGeom prst="roundRect">
             <a:avLst>
-              <a:gd name="adj" fmla="val 4615"/>
+              <a:gd name="adj" fmla="val 4412"/>
             </a:avLst>
           </a:prstGeom>
           <a:solidFill>
@@ -2335,7 +2698,7 @@
         </p:nvSpPr>
         <p:spPr>
           <a:xfrm>
-            <a:off x="685800" y="1261872"/>
+            <a:off x="685800" y="1188720"/>
             <a:ext cx="7772400" cy="457200"/>
           </a:xfrm>
           <a:prstGeom prst="rect">
@@ -2348,7 +2711,7 @@
           <a:bodyPr wrap="square" rtlCol="0" anchor="ctr"/>
           <a:lstStyle/>
           <a:p>
-            <a:pPr marL="0" indent="0">
+            <a:pPr indent="0" marL="0">
               <a:lnSpc>
                 <a:spcPts val="1300"/>
               </a:lnSpc>
@@ -2365,6 +2728,12 @@
               </a:rPr>
               <a:t>Q  </a:t>
             </a:r>
+            <a:pPr indent="0" marL="0">
+              <a:lnSpc>
+                <a:spcPts val="1300"/>
+              </a:lnSpc>
+              <a:buNone/>
+            </a:pPr>
             <a:r>
               <a:rPr lang="en-US" sz="1200" b="1" dirty="0">
                 <a:solidFill>
@@ -2374,9 +2743,15 @@
                 <a:ea typeface="Microsoft JhengHei" pitchFamily="34" charset="-122"/>
                 <a:cs typeface="Microsoft JhengHei" pitchFamily="34" charset="-120"/>
               </a:rPr>
-              <a:t>我還沒留聯絡資料，要怎麼補？
+              <a:t>我沒有收到優惠券？
 </a:t>
             </a:r>
+            <a:pPr indent="0" marL="0">
+              <a:lnSpc>
+                <a:spcPts val="1300"/>
+              </a:lnSpc>
+              <a:buNone/>
+            </a:pPr>
             <a:r>
               <a:rPr lang="en-US" sz="900" dirty="0">
                 <a:solidFill>
@@ -2386,7 +2761,7 @@
                 <a:ea typeface="Microsoft JhengHei" pitchFamily="34" charset="-122"/>
                 <a:cs typeface="Microsoft JhengHei" pitchFamily="34" charset="-120"/>
               </a:rPr>
-              <a:t>　  I haven't submitted my contact details yet.</a:t>
+              <a:t>　  I didn't receive my coupon.</a:t>
             </a:r>
             <a:endParaRPr lang="en-US" sz="1100" dirty="0"/>
           </a:p>
@@ -2400,20 +2775,20 @@
         </p:nvSpPr>
         <p:spPr>
           <a:xfrm>
-            <a:off x="685800" y="1755648"/>
-            <a:ext cx="7772400" cy="548640"/>
-          </a:xfrm>
-          <a:prstGeom prst="rect">
-            <a:avLst/>
-          </a:prstGeom>
-          <a:noFill/>
-          <a:ln/>
-        </p:spPr>
-        <p:txBody>
-          <a:bodyPr wrap="square" rtlCol="0" anchor="ctr"/>
-          <a:lstStyle/>
-          <a:p>
-            <a:pPr marL="0" indent="0">
+            <a:off x="685800" y="1682496"/>
+            <a:ext cx="7772400" cy="603504"/>
+          </a:xfrm>
+          <a:prstGeom prst="rect">
+            <a:avLst/>
+          </a:prstGeom>
+          <a:noFill/>
+          <a:ln/>
+        </p:spPr>
+        <p:txBody>
+          <a:bodyPr wrap="square" rtlCol="0" anchor="ctr"/>
+          <a:lstStyle/>
+          <a:p>
+            <a:pPr indent="0" marL="0">
               <a:lnSpc>
                 <a:spcPts val="1300"/>
               </a:lnSpc>
@@ -2428,9 +2803,15 @@
                 <a:ea typeface="Microsoft JhengHei" pitchFamily="34" charset="-122"/>
                 <a:cs typeface="Microsoft JhengHei" pitchFamily="34" charset="-120"/>
               </a:rPr>
-              <a:t>請再打開一次活動頁面，系統會自動提醒您填寫。
+              <a:t>請打開高雄洲際酒店的 LINE 對話往上找，優惠券是以訊息形式發送的。若真的找不到，我幫您回報，會有同仁協助處理。
 </a:t>
             </a:r>
+            <a:pPr indent="0" marL="0">
+              <a:lnSpc>
+                <a:spcPts val="1300"/>
+              </a:lnSpc>
+              <a:buNone/>
+            </a:pPr>
             <a:r>
               <a:rPr lang="en-US" sz="900" dirty="0">
                 <a:solidFill>
@@ -2440,7 +2821,7 @@
                 <a:ea typeface="Microsoft JhengHei" pitchFamily="34" charset="-122"/>
                 <a:cs typeface="Microsoft JhengHei" pitchFamily="34" charset="-120"/>
               </a:rPr>
-              <a:t>Please reopen the campaign page — the system will prompt you again automatically.</a:t>
+              <a:t>Please scroll up in your LINE chat with InterContinental Kaohsiung — the coupon is sent as a message. If you still can't find it, I'll report it for assistance.</a:t>
             </a:r>
             <a:endParaRPr lang="en-US" sz="1050" dirty="0"/>
           </a:p>
@@ -2454,12 +2835,12 @@
         </p:nvSpPr>
         <p:spPr>
           <a:xfrm>
-            <a:off x="502920" y="2514600"/>
-            <a:ext cx="8138160" cy="1188720"/>
+            <a:off x="502920" y="2450592"/>
+            <a:ext cx="8138160" cy="1024128"/>
           </a:xfrm>
           <a:prstGeom prst="roundRect">
             <a:avLst>
-              <a:gd name="adj" fmla="val 4615"/>
+              <a:gd name="adj" fmla="val 5357"/>
             </a:avLst>
           </a:prstGeom>
           <a:solidFill>
@@ -2481,7 +2862,7 @@
         </p:nvSpPr>
         <p:spPr>
           <a:xfrm>
-            <a:off x="685800" y="2587752"/>
+            <a:off x="685800" y="2523744"/>
             <a:ext cx="7772400" cy="457200"/>
           </a:xfrm>
           <a:prstGeom prst="rect">
@@ -2494,7 +2875,7 @@
           <a:bodyPr wrap="square" rtlCol="0" anchor="ctr"/>
           <a:lstStyle/>
           <a:p>
-            <a:pPr marL="0" indent="0">
+            <a:pPr indent="0" marL="0">
               <a:lnSpc>
                 <a:spcPts val="1300"/>
               </a:lnSpc>
@@ -2511,6 +2892,12 @@
               </a:rPr>
               <a:t>Q  </a:t>
             </a:r>
+            <a:pPr indent="0" marL="0">
+              <a:lnSpc>
+                <a:spcPts val="1300"/>
+              </a:lnSpc>
+              <a:buNone/>
+            </a:pPr>
             <a:r>
               <a:rPr lang="en-US" sz="1200" b="1" dirty="0">
                 <a:solidFill>
@@ -2520,9 +2907,15 @@
                 <a:ea typeface="Microsoft JhengHei" pitchFamily="34" charset="-122"/>
                 <a:cs typeface="Microsoft JhengHei" pitchFamily="34" charset="-120"/>
               </a:rPr>
-              <a:t>為什麼我抽到「銘謝惠顧」？
+              <a:t>券的連結點了，顯示「已使用過」？
 </a:t>
             </a:r>
+            <a:pPr indent="0" marL="0">
+              <a:lnSpc>
+                <a:spcPts val="1300"/>
+              </a:lnSpc>
+              <a:buNone/>
+            </a:pPr>
             <a:r>
               <a:rPr lang="en-US" sz="900" dirty="0">
                 <a:solidFill>
@@ -2532,7 +2925,7 @@
                 <a:ea typeface="Microsoft JhengHei" pitchFamily="34" charset="-122"/>
                 <a:cs typeface="Microsoft JhengHei" pitchFamily="34" charset="-120"/>
               </a:rPr>
-              <a:t>　  Why did I get "no prize this time"?</a:t>
+              <a:t>　  The coupon link says it has already been used.</a:t>
             </a:r>
             <a:endParaRPr lang="en-US" sz="1100" dirty="0"/>
           </a:p>
@@ -2546,20 +2939,20 @@
         </p:nvSpPr>
         <p:spPr>
           <a:xfrm>
-            <a:off x="685800" y="3081528"/>
-            <a:ext cx="7772400" cy="548640"/>
-          </a:xfrm>
-          <a:prstGeom prst="rect">
-            <a:avLst/>
-          </a:prstGeom>
-          <a:noFill/>
-          <a:ln/>
-        </p:spPr>
-        <p:txBody>
-          <a:bodyPr wrap="square" rtlCol="0" anchor="ctr"/>
-          <a:lstStyle/>
-          <a:p>
-            <a:pPr marL="0" indent="0">
+            <a:off x="685800" y="3017520"/>
+            <a:ext cx="7772400" cy="384048"/>
+          </a:xfrm>
+          <a:prstGeom prst="rect">
+            <a:avLst/>
+          </a:prstGeom>
+          <a:noFill/>
+          <a:ln/>
+        </p:spPr>
+        <p:txBody>
+          <a:bodyPr wrap="square" rtlCol="0" anchor="ctr"/>
+          <a:lstStyle/>
+          <a:p>
+            <a:pPr indent="0" marL="0">
               <a:lnSpc>
                 <a:spcPts val="1300"/>
               </a:lnSpc>
@@ -2574,9 +2967,15 @@
                 <a:ea typeface="Microsoft JhengHei" pitchFamily="34" charset="-122"/>
                 <a:cs typeface="Microsoft JhengHei" pitchFamily="34" charset="-120"/>
               </a:rPr>
-              <a:t>該等級的獎品目前已全部送出。您的洲遊幣沒有被扣除，可以改抽其他等級。
+              <a:t>每張券只能領取一次。如果您確定沒有領過，我幫您回報查詢。
 </a:t>
             </a:r>
+            <a:pPr indent="0" marL="0">
+              <a:lnSpc>
+                <a:spcPts val="1300"/>
+              </a:lnSpc>
+              <a:buNone/>
+            </a:pPr>
             <a:r>
               <a:rPr lang="en-US" sz="900" dirty="0">
                 <a:solidFill>
@@ -2586,7 +2985,7 @@
                 <a:ea typeface="Microsoft JhengHei" pitchFamily="34" charset="-122"/>
                 <a:cs typeface="Microsoft JhengHei" pitchFamily="34" charset="-120"/>
               </a:rPr>
-              <a:t>All prizes at that tier have been given out. Your InterCoins were not deducted — you're welcome to try another tier.</a:t>
+              <a:t>Each coupon can only be claimed once. If you're sure you haven't claimed it, I'll report it for verification.</a:t>
             </a:r>
             <a:endParaRPr lang="en-US" sz="1050" dirty="0"/>
           </a:p>
@@ -2600,20 +2999,20 @@
         </p:nvSpPr>
         <p:spPr>
           <a:xfrm>
-            <a:off x="502920" y="3977640"/>
-            <a:ext cx="8138160" cy="640080"/>
+            <a:off x="502920" y="3566160"/>
+            <a:ext cx="8138160" cy="1078992"/>
           </a:xfrm>
           <a:prstGeom prst="roundRect">
             <a:avLst>
-              <a:gd name="adj" fmla="val 8571"/>
+              <a:gd name="adj" fmla="val 5085"/>
             </a:avLst>
           </a:prstGeom>
           <a:solidFill>
-            <a:srgbClr val="E8F3EC"/>
+            <a:srgbClr val="FFFDFA"/>
           </a:solidFill>
           <a:ln w="9525">
             <a:solidFill>
-              <a:srgbClr val="1F6B47"/>
+              <a:srgbClr val="DAD9D6"/>
             </a:solidFill>
             <a:prstDash val="solid"/>
           </a:ln>
@@ -2627,60 +3026,132 @@
         </p:nvSpPr>
         <p:spPr>
           <a:xfrm>
-            <a:off x="649224" y="4023360"/>
-            <a:ext cx="7845552" cy="548640"/>
-          </a:xfrm>
-          <a:prstGeom prst="rect">
-            <a:avLst/>
-          </a:prstGeom>
-          <a:noFill/>
-          <a:ln/>
-        </p:spPr>
-        <p:txBody>
-          <a:bodyPr wrap="square" rtlCol="0" anchor="ctr"/>
-          <a:lstStyle/>
-          <a:p>
-            <a:pPr marL="0" indent="0">
-              <a:lnSpc>
-                <a:spcPts val="1500"/>
-              </a:lnSpc>
-              <a:buNone/>
-            </a:pPr>
-            <a:r>
-              <a:rPr lang="en-US" sz="1200" dirty="0">
-                <a:solidFill>
-                  <a:srgbClr val="1F6B47"/>
-                </a:solidFill>
-                <a:latin typeface="Microsoft JhengHei" pitchFamily="34" charset="0"/>
-                <a:ea typeface="Microsoft JhengHei" pitchFamily="34" charset="-122"/>
-                <a:cs typeface="Microsoft JhengHei" pitchFamily="34" charset="-120"/>
-              </a:rPr>
-              <a:t>💬  </a:t>
-            </a:r>
-            <a:r>
-              <a:rPr lang="en-US" sz="1150" b="1" dirty="0">
-                <a:solidFill>
-                  <a:srgbClr val="1F6B47"/>
-                </a:solidFill>
-                <a:latin typeface="Microsoft JhengHei" pitchFamily="34" charset="0"/>
-                <a:ea typeface="Microsoft JhengHei" pitchFamily="34" charset="-122"/>
-                <a:cs typeface="Microsoft JhengHei" pitchFamily="34" charset="-120"/>
-              </a:rPr>
-              <a:t>「洲遊幣沒有被扣除」這句一定要講 —— 客人最在意的是有沒有白花。
+            <a:off x="685800" y="3639312"/>
+            <a:ext cx="7772400" cy="457200"/>
+          </a:xfrm>
+          <a:prstGeom prst="rect">
+            <a:avLst/>
+          </a:prstGeom>
+          <a:noFill/>
+          <a:ln/>
+        </p:spPr>
+        <p:txBody>
+          <a:bodyPr wrap="square" rtlCol="0" anchor="ctr"/>
+          <a:lstStyle/>
+          <a:p>
+            <a:pPr indent="0" marL="0">
+              <a:lnSpc>
+                <a:spcPts val="1300"/>
+              </a:lnSpc>
+              <a:buNone/>
+            </a:pPr>
+            <a:r>
+              <a:rPr lang="en-US" sz="1100" b="1" dirty="0">
+                <a:solidFill>
+                  <a:srgbClr val="B8923E"/>
+                </a:solidFill>
+                <a:latin typeface="Microsoft JhengHei" pitchFamily="34" charset="0"/>
+                <a:ea typeface="Microsoft JhengHei" pitchFamily="34" charset="-122"/>
+                <a:cs typeface="Microsoft JhengHei" pitchFamily="34" charset="-120"/>
+              </a:rPr>
+              <a:t>Q  </a:t>
+            </a:r>
+            <a:pPr indent="0" marL="0">
+              <a:lnSpc>
+                <a:spcPts val="1300"/>
+              </a:lnSpc>
+              <a:buNone/>
+            </a:pPr>
+            <a:r>
+              <a:rPr lang="en-US" sz="1200" b="1" dirty="0">
+                <a:solidFill>
+                  <a:srgbClr val="935D08"/>
+                </a:solidFill>
+                <a:latin typeface="Microsoft JhengHei" pitchFamily="34" charset="0"/>
+                <a:ea typeface="Microsoft JhengHei" pitchFamily="34" charset="-122"/>
+                <a:cs typeface="Microsoft JhengHei" pitchFamily="34" charset="-120"/>
+              </a:rPr>
+              <a:t>我中獎了，怎麼都沒有券？
 </a:t>
             </a:r>
-            <a:r>
-              <a:rPr lang="en-US" sz="950" dirty="0">
-                <a:solidFill>
-                  <a:srgbClr val="1F6B47"/>
-                </a:solidFill>
-                <a:latin typeface="Microsoft JhengHei" pitchFamily="34" charset="0"/>
-                <a:ea typeface="Microsoft JhengHei" pitchFamily="34" charset="-122"/>
-                <a:cs typeface="Microsoft JhengHei" pitchFamily="34" charset="-120"/>
-              </a:rPr>
-              <a:t>　　 Always mention that no coins were deducted — that is the guest's main concern.</a:t>
-            </a:r>
-            <a:endParaRPr lang="en-US" sz="1200" dirty="0"/>
+            <a:pPr indent="0" marL="0">
+              <a:lnSpc>
+                <a:spcPts val="1300"/>
+              </a:lnSpc>
+              <a:buNone/>
+            </a:pPr>
+            <a:r>
+              <a:rPr lang="en-US" sz="900" dirty="0">
+                <a:solidFill>
+                  <a:srgbClr val="6E6A63"/>
+                </a:solidFill>
+                <a:latin typeface="Microsoft JhengHei" pitchFamily="34" charset="0"/>
+                <a:ea typeface="Microsoft JhengHei" pitchFamily="34" charset="-122"/>
+                <a:cs typeface="Microsoft JhengHei" pitchFamily="34" charset="-120"/>
+              </a:rPr>
+              <a:t>　  I won a prize, but there's no coupon.</a:t>
+            </a:r>
+            <a:endParaRPr lang="en-US" sz="1100" dirty="0"/>
+          </a:p>
+        </p:txBody>
+      </p:sp>
+      <p:sp>
+        <p:nvSpPr>
+          <p:cNvPr id="15" name="Text 13"/>
+          <p:cNvSpPr/>
+          <p:nvPr/>
+        </p:nvSpPr>
+        <p:spPr>
+          <a:xfrm>
+            <a:off x="685800" y="4133088"/>
+            <a:ext cx="7772400" cy="438912"/>
+          </a:xfrm>
+          <a:prstGeom prst="rect">
+            <a:avLst/>
+          </a:prstGeom>
+          <a:noFill/>
+          <a:ln/>
+        </p:spPr>
+        <p:txBody>
+          <a:bodyPr wrap="square" rtlCol="0" anchor="ctr"/>
+          <a:lstStyle/>
+          <a:p>
+            <a:pPr indent="0" marL="0">
+              <a:lnSpc>
+                <a:spcPts val="1300"/>
+              </a:lnSpc>
+              <a:buNone/>
+            </a:pPr>
+            <a:r>
+              <a:rPr lang="en-US" sz="1050" dirty="0">
+                <a:solidFill>
+                  <a:srgbClr val="3D3935"/>
+                </a:solidFill>
+                <a:latin typeface="Microsoft JhengHei" pitchFamily="34" charset="0"/>
+                <a:ea typeface="Microsoft JhengHei" pitchFamily="34" charset="-122"/>
+                <a:cs typeface="Microsoft JhengHei" pitchFamily="34" charset="-120"/>
+              </a:rPr>
+              <a:t>住宿類與臺北的獎項由飯店同仁直接與您聯繫安排，所以不會發送優惠券。若是其他獎品卻沒收到券，我幫您回報，同仁會協助處理。
+</a:t>
+            </a:r>
+            <a:pPr indent="0" marL="0">
+              <a:lnSpc>
+                <a:spcPts val="1300"/>
+              </a:lnSpc>
+              <a:buNone/>
+            </a:pPr>
+            <a:r>
+              <a:rPr lang="en-US" sz="900" dirty="0">
+                <a:solidFill>
+                  <a:srgbClr val="6E6A63"/>
+                </a:solidFill>
+                <a:latin typeface="Microsoft JhengHei" pitchFamily="34" charset="0"/>
+                <a:ea typeface="Microsoft JhengHei" pitchFamily="34" charset="-122"/>
+                <a:cs typeface="Microsoft JhengHei" pitchFamily="34" charset="-120"/>
+              </a:rPr>
+              <a:t>Room stays and Taipei prizes are arranged directly by our colleagues, so no coupon is issued. For any other prize, I'll report it and a colleague will assist.</a:t>
+            </a:r>
+            <a:endParaRPr lang="en-US" sz="1050" dirty="0"/>
           </a:p>
         </p:txBody>
       </p:sp>
@@ -2700,7 +3171,6 @@
         <a:solidFill>
           <a:srgbClr val="FAF8F6"/>
         </a:solidFill>
-        <a:effectLst/>
       </p:bgPr>
     </p:bg>
     <p:spTree>
@@ -2738,7 +3208,7 @@
           <a:bodyPr wrap="square" rtlCol="0" anchor="ctr"/>
           <a:lstStyle/>
           <a:p>
-            <a:pPr marL="0" indent="0">
+            <a:pPr indent="0" marL="0">
               <a:buNone/>
             </a:pPr>
             <a:r>
@@ -2750,7 +3220,7 @@
                 <a:ea typeface="Microsoft JhengHei" pitchFamily="34" charset="-122"/>
                 <a:cs typeface="Microsoft JhengHei" pitchFamily="34" charset="-120"/>
               </a:rPr>
-              <a:t>六、常見問題與標準回答（3/3）</a:t>
+              <a:t>七、常見問題與標準回答（2/3）</a:t>
             </a:r>
             <a:endParaRPr lang="en-US" sz="2200" dirty="0"/>
           </a:p>
@@ -2777,7 +3247,7 @@
           <a:bodyPr wrap="square" rtlCol="0" anchor="ctr"/>
           <a:lstStyle/>
           <a:p>
-            <a:pPr marL="0" indent="0">
+            <a:pPr indent="0" marL="0">
               <a:buNone/>
             </a:pPr>
             <a:r>
@@ -2789,7 +3259,7 @@
                 <a:ea typeface="Microsoft JhengHei" pitchFamily="34" charset="-122"/>
                 <a:cs typeface="Microsoft JhengHei" pitchFamily="34" charset="-120"/>
               </a:rPr>
-              <a:t>FAQ &amp; Suggested Replies (3 of 3)</a:t>
+              <a:t>FAQ &amp; Suggested Replies (2 of 3)</a:t>
             </a:r>
             <a:endParaRPr lang="en-US" sz="1150" dirty="0"/>
           </a:p>
@@ -2836,7 +3306,7 @@
           <a:bodyPr wrap="square" rtlCol="0" anchor="ctr"/>
           <a:lstStyle/>
           <a:p>
-            <a:pPr marL="0" indent="0" algn="r">
+            <a:pPr algn="r" indent="0" marL="0">
               <a:buNone/>
             </a:pPr>
             <a:r>
@@ -2875,7 +3345,7 @@
           <a:bodyPr wrap="square" rtlCol="0" anchor="ctr"/>
           <a:lstStyle/>
           <a:p>
-            <a:pPr marL="0" indent="0">
+            <a:pPr indent="0" marL="0">
               <a:buNone/>
             </a:pPr>
             <a:r>
@@ -2941,7 +3411,7 @@
           <a:bodyPr wrap="square" rtlCol="0" anchor="ctr"/>
           <a:lstStyle/>
           <a:p>
-            <a:pPr marL="0" indent="0">
+            <a:pPr indent="0" marL="0">
               <a:lnSpc>
                 <a:spcPts val="1300"/>
               </a:lnSpc>
@@ -2958,6 +3428,12 @@
               </a:rPr>
               <a:t>Q  </a:t>
             </a:r>
+            <a:pPr indent="0" marL="0">
+              <a:lnSpc>
+                <a:spcPts val="1300"/>
+              </a:lnSpc>
+              <a:buNone/>
+            </a:pPr>
             <a:r>
               <a:rPr lang="en-US" sz="1200" b="1" dirty="0">
                 <a:solidFill>
@@ -2967,9 +3443,15 @@
                 <a:ea typeface="Microsoft JhengHei" pitchFamily="34" charset="-122"/>
                 <a:cs typeface="Microsoft JhengHei" pitchFamily="34" charset="-120"/>
               </a:rPr>
-              <a:t>可以指定要抽哪個獎嗎？中獎率多少？
+              <a:t>我還沒留聯絡資料，要怎麼補？
 </a:t>
             </a:r>
+            <a:pPr indent="0" marL="0">
+              <a:lnSpc>
+                <a:spcPts val="1300"/>
+              </a:lnSpc>
+              <a:buNone/>
+            </a:pPr>
             <a:r>
               <a:rPr lang="en-US" sz="900" dirty="0">
                 <a:solidFill>
@@ -2979,7 +3461,7 @@
                 <a:ea typeface="Microsoft JhengHei" pitchFamily="34" charset="-122"/>
                 <a:cs typeface="Microsoft JhengHei" pitchFamily="34" charset="-120"/>
               </a:rPr>
-              <a:t>　  Can I choose my prize? What are the odds?</a:t>
+              <a:t>　  I haven't submitted my contact details yet.</a:t>
             </a:r>
             <a:endParaRPr lang="en-US" sz="1100" dirty="0"/>
           </a:p>
@@ -3006,7 +3488,7 @@
           <a:bodyPr wrap="square" rtlCol="0" anchor="ctr"/>
           <a:lstStyle/>
           <a:p>
-            <a:pPr marL="0" indent="0">
+            <a:pPr indent="0" marL="0">
               <a:lnSpc>
                 <a:spcPts val="1300"/>
               </a:lnSpc>
@@ -3021,9 +3503,15 @@
                 <a:ea typeface="Microsoft JhengHei" pitchFamily="34" charset="-122"/>
                 <a:cs typeface="Microsoft JhengHei" pitchFamily="34" charset="-120"/>
               </a:rPr>
-              <a:t>抽獎結果由系統隨機產生，無法指定。詳細規則請參考活動頁面的「活動規則」。
+              <a:t>請再打開一次活動頁面，系統會自動提醒您填寫。
 </a:t>
             </a:r>
+            <a:pPr indent="0" marL="0">
+              <a:lnSpc>
+                <a:spcPts val="1300"/>
+              </a:lnSpc>
+              <a:buNone/>
+            </a:pPr>
             <a:r>
               <a:rPr lang="en-US" sz="900" dirty="0">
                 <a:solidFill>
@@ -3033,7 +3521,7 @@
                 <a:ea typeface="Microsoft JhengHei" pitchFamily="34" charset="-122"/>
                 <a:cs typeface="Microsoft JhengHei" pitchFamily="34" charset="-120"/>
               </a:rPr>
-              <a:t>Results are generated randomly and cannot be selected. Full terms are available under "Campaign Rules" on the activity page.</a:t>
+              <a:t>Please reopen the campaign page — the system will prompt you again automatically.</a:t>
             </a:r>
             <a:endParaRPr lang="en-US" sz="1050" dirty="0"/>
           </a:p>
@@ -3087,7 +3575,7 @@
           <a:bodyPr wrap="square" rtlCol="0" anchor="ctr"/>
           <a:lstStyle/>
           <a:p>
-            <a:pPr marL="0" indent="0">
+            <a:pPr indent="0" marL="0">
               <a:lnSpc>
                 <a:spcPts val="1300"/>
               </a:lnSpc>
@@ -3104,6 +3592,12 @@
               </a:rPr>
               <a:t>Q  </a:t>
             </a:r>
+            <a:pPr indent="0" marL="0">
+              <a:lnSpc>
+                <a:spcPts val="1300"/>
+              </a:lnSpc>
+              <a:buNone/>
+            </a:pPr>
             <a:r>
               <a:rPr lang="en-US" sz="1200" b="1" dirty="0">
                 <a:solidFill>
@@ -3113,9 +3607,15 @@
                 <a:ea typeface="Microsoft JhengHei" pitchFamily="34" charset="-122"/>
                 <a:cs typeface="Microsoft JhengHei" pitchFamily="34" charset="-120"/>
               </a:rPr>
-              <a:t>獎品可以折換現金或轉讓嗎？
+              <a:t>我抽到「銘謝惠顧」，洲遊幣還被扣掉了？
 </a:t>
             </a:r>
+            <a:pPr indent="0" marL="0">
+              <a:lnSpc>
+                <a:spcPts val="1300"/>
+              </a:lnSpc>
+              <a:buNone/>
+            </a:pPr>
             <a:r>
               <a:rPr lang="en-US" sz="900" dirty="0">
                 <a:solidFill>
@@ -3125,7 +3625,7 @@
                 <a:ea typeface="Microsoft JhengHei" pitchFamily="34" charset="-122"/>
                 <a:cs typeface="Microsoft JhengHei" pitchFamily="34" charset="-120"/>
               </a:rPr>
-              <a:t>　  Can the prize be exchanged for cash or transferred?</a:t>
+              <a:t>　  I got nothing, and my coins were still deducted?</a:t>
             </a:r>
             <a:endParaRPr lang="en-US" sz="1100" dirty="0"/>
           </a:p>
@@ -3152,7 +3652,7 @@
           <a:bodyPr wrap="square" rtlCol="0" anchor="ctr"/>
           <a:lstStyle/>
           <a:p>
-            <a:pPr marL="0" indent="0">
+            <a:pPr indent="0" marL="0">
               <a:lnSpc>
                 <a:spcPts val="1300"/>
               </a:lnSpc>
@@ -3167,9 +3667,15 @@
                 <a:ea typeface="Microsoft JhengHei" pitchFamily="34" charset="-122"/>
                 <a:cs typeface="Microsoft JhengHei" pitchFamily="34" charset="-120"/>
               </a:rPr>
-              <a:t>依活動規則，獎項不得折換現金、找零或轉讓。
+              <a:t>抽獎每一次都會扣除洲遊幣，沒有中獎也一樣。建議您改抽三等獎，目前三等獎一定會中獎。
 </a:t>
             </a:r>
+            <a:pPr indent="0" marL="0">
+              <a:lnSpc>
+                <a:spcPts val="1300"/>
+              </a:lnSpc>
+              <a:buNone/>
+            </a:pPr>
             <a:r>
               <a:rPr lang="en-US" sz="900" dirty="0">
                 <a:solidFill>
@@ -3179,7 +3685,7 @@
                 <a:ea typeface="Microsoft JhengHei" pitchFamily="34" charset="-122"/>
                 <a:cs typeface="Microsoft JhengHei" pitchFamily="34" charset="-120"/>
               </a:rPr>
-              <a:t>Under the campaign terms, prizes cannot be exchanged for cash, given as change, or transferred.</a:t>
+              <a:t>Coins are deducted on every spin, whether or not a prize is won. We suggest trying the Third Prize tier — it currently always awards a prize.</a:t>
             </a:r>
             <a:endParaRPr lang="en-US" sz="1050" dirty="0"/>
           </a:p>
@@ -3202,11 +3708,11 @@
             </a:avLst>
           </a:prstGeom>
           <a:solidFill>
-            <a:srgbClr val="FBEDED"/>
+            <a:srgbClr val="FBF1DC"/>
           </a:solidFill>
           <a:ln w="9525">
             <a:solidFill>
-              <a:srgbClr val="9A3B3B"/>
+              <a:srgbClr val="9C6212"/>
             </a:solidFill>
             <a:prstDash val="solid"/>
           </a:ln>
@@ -3233,7 +3739,7 @@
           <a:bodyPr wrap="square" rtlCol="0" anchor="ctr"/>
           <a:lstStyle/>
           <a:p>
-            <a:pPr marL="0" indent="0">
+            <a:pPr indent="0" marL="0">
               <a:lnSpc>
                 <a:spcPts val="1500"/>
               </a:lnSpc>
@@ -3242,36 +3748,48 @@
             <a:r>
               <a:rPr lang="en-US" sz="1200" dirty="0">
                 <a:solidFill>
-                  <a:srgbClr val="9A3B3B"/>
-                </a:solidFill>
-                <a:latin typeface="Microsoft JhengHei" pitchFamily="34" charset="0"/>
-                <a:ea typeface="Microsoft JhengHei" pitchFamily="34" charset="-122"/>
-                <a:cs typeface="Microsoft JhengHei" pitchFamily="34" charset="-120"/>
-              </a:rPr>
-              <a:t>🚫  </a:t>
-            </a:r>
+                  <a:srgbClr val="9C6212"/>
+                </a:solidFill>
+                <a:latin typeface="Microsoft JhengHei" pitchFamily="34" charset="0"/>
+                <a:ea typeface="Microsoft JhengHei" pitchFamily="34" charset="-122"/>
+                <a:cs typeface="Microsoft JhengHei" pitchFamily="34" charset="-120"/>
+              </a:rPr>
+              <a:t>💬  </a:t>
+            </a:r>
+            <a:pPr indent="0" marL="0">
+              <a:lnSpc>
+                <a:spcPts val="1500"/>
+              </a:lnSpc>
+              <a:buNone/>
+            </a:pPr>
             <a:r>
               <a:rPr lang="en-US" sz="1150" b="1" dirty="0">
                 <a:solidFill>
-                  <a:srgbClr val="9A3B3B"/>
-                </a:solidFill>
-                <a:latin typeface="Microsoft JhengHei" pitchFamily="34" charset="0"/>
-                <a:ea typeface="Microsoft JhengHei" pitchFamily="34" charset="-122"/>
-                <a:cs typeface="Microsoft JhengHei" pitchFamily="34" charset="-120"/>
-              </a:rPr>
-              <a:t>客人追問中獎率時，請勿透露任何數字 —— 一律回「由系統隨機產生」。
+                  <a:srgbClr val="9C6212"/>
+                </a:solidFill>
+                <a:latin typeface="Microsoft JhengHei" pitchFamily="34" charset="0"/>
+                <a:ea typeface="Microsoft JhengHei" pitchFamily="34" charset="-122"/>
+                <a:cs typeface="Microsoft JhengHei" pitchFamily="34" charset="-120"/>
+              </a:rPr>
+              <a:t>不要說「不會扣」——  現在確實會扣。請直接引導客人改抽三等獎。
 </a:t>
             </a:r>
+            <a:pPr indent="0" marL="0">
+              <a:lnSpc>
+                <a:spcPts val="1500"/>
+              </a:lnSpc>
+              <a:buNone/>
+            </a:pPr>
             <a:r>
               <a:rPr lang="en-US" sz="950" dirty="0">
                 <a:solidFill>
-                  <a:srgbClr val="9A3B3B"/>
-                </a:solidFill>
-                <a:latin typeface="Microsoft JhengHei" pitchFamily="34" charset="0"/>
-                <a:ea typeface="Microsoft JhengHei" pitchFamily="34" charset="-122"/>
-                <a:cs typeface="Microsoft JhengHei" pitchFamily="34" charset="-120"/>
-              </a:rPr>
-              <a:t>　　 If pressed on the odds, never share numbers — always answer that results are randomly generated.</a:t>
+                  <a:srgbClr val="9C6212"/>
+                </a:solidFill>
+                <a:latin typeface="Microsoft JhengHei" pitchFamily="34" charset="0"/>
+                <a:ea typeface="Microsoft JhengHei" pitchFamily="34" charset="-122"/>
+                <a:cs typeface="Microsoft JhengHei" pitchFamily="34" charset="-120"/>
+              </a:rPr>
+              <a:t>　　 Never say coins are not deducted — they are. Redirect the guest to the Third Prize tier instead.</a:t>
             </a:r>
             <a:endParaRPr lang="en-US" sz="1200" dirty="0"/>
           </a:p>
@@ -3293,7 +3811,6 @@
         <a:solidFill>
           <a:srgbClr val="FAF8F6"/>
         </a:solidFill>
-        <a:effectLst/>
       </p:bgPr>
     </p:bg>
     <p:spTree>
@@ -3331,7 +3848,7 @@
           <a:bodyPr wrap="square" rtlCol="0" anchor="ctr"/>
           <a:lstStyle/>
           <a:p>
-            <a:pPr marL="0" indent="0">
+            <a:pPr indent="0" marL="0">
               <a:buNone/>
             </a:pPr>
             <a:r>
@@ -3343,7 +3860,7 @@
                 <a:ea typeface="Microsoft JhengHei" pitchFamily="34" charset="-122"/>
                 <a:cs typeface="Microsoft JhengHei" pitchFamily="34" charset="-120"/>
               </a:rPr>
-              <a:t>七、不可以對客人說的事</a:t>
+              <a:t>七、常見問題與標準回答（3/3）</a:t>
             </a:r>
             <a:endParaRPr lang="en-US" sz="2200" dirty="0"/>
           </a:p>
@@ -3370,7 +3887,7 @@
           <a:bodyPr wrap="square" rtlCol="0" anchor="ctr"/>
           <a:lstStyle/>
           <a:p>
-            <a:pPr marL="0" indent="0">
+            <a:pPr indent="0" marL="0">
               <a:buNone/>
             </a:pPr>
             <a:r>
@@ -3382,7 +3899,7 @@
                 <a:ea typeface="Microsoft JhengHei" pitchFamily="34" charset="-122"/>
                 <a:cs typeface="Microsoft JhengHei" pitchFamily="34" charset="-120"/>
               </a:rPr>
-              <a:t>What Not to Disclose to Guests</a:t>
+              <a:t>FAQ &amp; Suggested Replies (3 of 3)</a:t>
             </a:r>
             <a:endParaRPr lang="en-US" sz="1150" dirty="0"/>
           </a:p>
@@ -3429,7 +3946,7 @@
           <a:bodyPr wrap="square" rtlCol="0" anchor="ctr"/>
           <a:lstStyle/>
           <a:p>
-            <a:pPr marL="0" indent="0" algn="r">
+            <a:pPr algn="r" indent="0" marL="0">
               <a:buNone/>
             </a:pPr>
             <a:r>
@@ -3468,7 +3985,7 @@
           <a:bodyPr wrap="square" rtlCol="0" anchor="ctr"/>
           <a:lstStyle/>
           <a:p>
-            <a:pPr marL="0" indent="0">
+            <a:pPr indent="0" marL="0">
               <a:buNone/>
             </a:pPr>
             <a:r>
@@ -3495,594 +4012,347 @@
         <p:spPr>
           <a:xfrm>
             <a:off x="502920" y="1188720"/>
-            <a:ext cx="8138160" cy="548640"/>
+            <a:ext cx="8138160" cy="1188720"/>
           </a:xfrm>
           <a:prstGeom prst="roundRect">
             <a:avLst>
-              <a:gd name="adj" fmla="val 8333"/>
+              <a:gd name="adj" fmla="val 4615"/>
+            </a:avLst>
+          </a:prstGeom>
+          <a:solidFill>
+            <a:srgbClr val="FFFDFA"/>
+          </a:solidFill>
+          <a:ln w="9525">
+            <a:solidFill>
+              <a:srgbClr val="DAD9D6"/>
+            </a:solidFill>
+            <a:prstDash val="solid"/>
+          </a:ln>
+        </p:spPr>
+      </p:sp>
+      <p:sp>
+        <p:nvSpPr>
+          <p:cNvPr id="8" name="Text 6"/>
+          <p:cNvSpPr/>
+          <p:nvPr/>
+        </p:nvSpPr>
+        <p:spPr>
+          <a:xfrm>
+            <a:off x="685800" y="1261872"/>
+            <a:ext cx="7772400" cy="457200"/>
+          </a:xfrm>
+          <a:prstGeom prst="rect">
+            <a:avLst/>
+          </a:prstGeom>
+          <a:noFill/>
+          <a:ln/>
+        </p:spPr>
+        <p:txBody>
+          <a:bodyPr wrap="square" rtlCol="0" anchor="ctr"/>
+          <a:lstStyle/>
+          <a:p>
+            <a:pPr indent="0" marL="0">
+              <a:lnSpc>
+                <a:spcPts val="1300"/>
+              </a:lnSpc>
+              <a:buNone/>
+            </a:pPr>
+            <a:r>
+              <a:rPr lang="en-US" sz="1100" b="1" dirty="0">
+                <a:solidFill>
+                  <a:srgbClr val="B8923E"/>
+                </a:solidFill>
+                <a:latin typeface="Microsoft JhengHei" pitchFamily="34" charset="0"/>
+                <a:ea typeface="Microsoft JhengHei" pitchFamily="34" charset="-122"/>
+                <a:cs typeface="Microsoft JhengHei" pitchFamily="34" charset="-120"/>
+              </a:rPr>
+              <a:t>Q  </a:t>
+            </a:r>
+            <a:pPr indent="0" marL="0">
+              <a:lnSpc>
+                <a:spcPts val="1300"/>
+              </a:lnSpc>
+              <a:buNone/>
+            </a:pPr>
+            <a:r>
+              <a:rPr lang="en-US" sz="1200" b="1" dirty="0">
+                <a:solidFill>
+                  <a:srgbClr val="935D08"/>
+                </a:solidFill>
+                <a:latin typeface="Microsoft JhengHei" pitchFamily="34" charset="0"/>
+                <a:ea typeface="Microsoft JhengHei" pitchFamily="34" charset="-122"/>
+                <a:cs typeface="Microsoft JhengHei" pitchFamily="34" charset="-120"/>
+              </a:rPr>
+              <a:t>可以指定要抽哪個獎嗎？中獎率多少？
+</a:t>
+            </a:r>
+            <a:pPr indent="0" marL="0">
+              <a:lnSpc>
+                <a:spcPts val="1300"/>
+              </a:lnSpc>
+              <a:buNone/>
+            </a:pPr>
+            <a:r>
+              <a:rPr lang="en-US" sz="900" dirty="0">
+                <a:solidFill>
+                  <a:srgbClr val="6E6A63"/>
+                </a:solidFill>
+                <a:latin typeface="Microsoft JhengHei" pitchFamily="34" charset="0"/>
+                <a:ea typeface="Microsoft JhengHei" pitchFamily="34" charset="-122"/>
+                <a:cs typeface="Microsoft JhengHei" pitchFamily="34" charset="-120"/>
+              </a:rPr>
+              <a:t>　  Can I choose my prize? What are the odds?</a:t>
+            </a:r>
+            <a:endParaRPr lang="en-US" sz="1100" dirty="0"/>
+          </a:p>
+        </p:txBody>
+      </p:sp>
+      <p:sp>
+        <p:nvSpPr>
+          <p:cNvPr id="9" name="Text 7"/>
+          <p:cNvSpPr/>
+          <p:nvPr/>
+        </p:nvSpPr>
+        <p:spPr>
+          <a:xfrm>
+            <a:off x="685800" y="1755648"/>
+            <a:ext cx="7772400" cy="548640"/>
+          </a:xfrm>
+          <a:prstGeom prst="rect">
+            <a:avLst/>
+          </a:prstGeom>
+          <a:noFill/>
+          <a:ln/>
+        </p:spPr>
+        <p:txBody>
+          <a:bodyPr wrap="square" rtlCol="0" anchor="ctr"/>
+          <a:lstStyle/>
+          <a:p>
+            <a:pPr indent="0" marL="0">
+              <a:lnSpc>
+                <a:spcPts val="1300"/>
+              </a:lnSpc>
+              <a:buNone/>
+            </a:pPr>
+            <a:r>
+              <a:rPr lang="en-US" sz="1050" dirty="0">
+                <a:solidFill>
+                  <a:srgbClr val="3D3935"/>
+                </a:solidFill>
+                <a:latin typeface="Microsoft JhengHei" pitchFamily="34" charset="0"/>
+                <a:ea typeface="Microsoft JhengHei" pitchFamily="34" charset="-122"/>
+                <a:cs typeface="Microsoft JhengHei" pitchFamily="34" charset="-120"/>
+              </a:rPr>
+              <a:t>抽獎結果由系統隨機產生，無法指定。詳細規則請參考活動頁面的「活動規則」。
+</a:t>
+            </a:r>
+            <a:pPr indent="0" marL="0">
+              <a:lnSpc>
+                <a:spcPts val="1300"/>
+              </a:lnSpc>
+              <a:buNone/>
+            </a:pPr>
+            <a:r>
+              <a:rPr lang="en-US" sz="900" dirty="0">
+                <a:solidFill>
+                  <a:srgbClr val="6E6A63"/>
+                </a:solidFill>
+                <a:latin typeface="Microsoft JhengHei" pitchFamily="34" charset="0"/>
+                <a:ea typeface="Microsoft JhengHei" pitchFamily="34" charset="-122"/>
+                <a:cs typeface="Microsoft JhengHei" pitchFamily="34" charset="-120"/>
+              </a:rPr>
+              <a:t>Results are generated randomly and cannot be selected. Full terms are available under "Campaign Rules" on the activity page.</a:t>
+            </a:r>
+            <a:endParaRPr lang="en-US" sz="1050" dirty="0"/>
+          </a:p>
+        </p:txBody>
+      </p:sp>
+      <p:sp>
+        <p:nvSpPr>
+          <p:cNvPr id="10" name="Shape 8"/>
+          <p:cNvSpPr/>
+          <p:nvPr/>
+        </p:nvSpPr>
+        <p:spPr>
+          <a:xfrm>
+            <a:off x="502920" y="2514600"/>
+            <a:ext cx="8138160" cy="1188720"/>
+          </a:xfrm>
+          <a:prstGeom prst="roundRect">
+            <a:avLst>
+              <a:gd name="adj" fmla="val 4615"/>
+            </a:avLst>
+          </a:prstGeom>
+          <a:solidFill>
+            <a:srgbClr val="FFFDFA"/>
+          </a:solidFill>
+          <a:ln w="9525">
+            <a:solidFill>
+              <a:srgbClr val="DAD9D6"/>
+            </a:solidFill>
+            <a:prstDash val="solid"/>
+          </a:ln>
+        </p:spPr>
+      </p:sp>
+      <p:sp>
+        <p:nvSpPr>
+          <p:cNvPr id="11" name="Text 9"/>
+          <p:cNvSpPr/>
+          <p:nvPr/>
+        </p:nvSpPr>
+        <p:spPr>
+          <a:xfrm>
+            <a:off x="685800" y="2587752"/>
+            <a:ext cx="7772400" cy="457200"/>
+          </a:xfrm>
+          <a:prstGeom prst="rect">
+            <a:avLst/>
+          </a:prstGeom>
+          <a:noFill/>
+          <a:ln/>
+        </p:spPr>
+        <p:txBody>
+          <a:bodyPr wrap="square" rtlCol="0" anchor="ctr"/>
+          <a:lstStyle/>
+          <a:p>
+            <a:pPr indent="0" marL="0">
+              <a:lnSpc>
+                <a:spcPts val="1300"/>
+              </a:lnSpc>
+              <a:buNone/>
+            </a:pPr>
+            <a:r>
+              <a:rPr lang="en-US" sz="1100" b="1" dirty="0">
+                <a:solidFill>
+                  <a:srgbClr val="B8923E"/>
+                </a:solidFill>
+                <a:latin typeface="Microsoft JhengHei" pitchFamily="34" charset="0"/>
+                <a:ea typeface="Microsoft JhengHei" pitchFamily="34" charset="-122"/>
+                <a:cs typeface="Microsoft JhengHei" pitchFamily="34" charset="-120"/>
+              </a:rPr>
+              <a:t>Q  </a:t>
+            </a:r>
+            <a:pPr indent="0" marL="0">
+              <a:lnSpc>
+                <a:spcPts val="1300"/>
+              </a:lnSpc>
+              <a:buNone/>
+            </a:pPr>
+            <a:r>
+              <a:rPr lang="en-US" sz="1200" b="1" dirty="0">
+                <a:solidFill>
+                  <a:srgbClr val="935D08"/>
+                </a:solidFill>
+                <a:latin typeface="Microsoft JhengHei" pitchFamily="34" charset="0"/>
+                <a:ea typeface="Microsoft JhengHei" pitchFamily="34" charset="-122"/>
+                <a:cs typeface="Microsoft JhengHei" pitchFamily="34" charset="-120"/>
+              </a:rPr>
+              <a:t>獎品可以折換現金或轉讓嗎？
+</a:t>
+            </a:r>
+            <a:pPr indent="0" marL="0">
+              <a:lnSpc>
+                <a:spcPts val="1300"/>
+              </a:lnSpc>
+              <a:buNone/>
+            </a:pPr>
+            <a:r>
+              <a:rPr lang="en-US" sz="900" dirty="0">
+                <a:solidFill>
+                  <a:srgbClr val="6E6A63"/>
+                </a:solidFill>
+                <a:latin typeface="Microsoft JhengHei" pitchFamily="34" charset="0"/>
+                <a:ea typeface="Microsoft JhengHei" pitchFamily="34" charset="-122"/>
+                <a:cs typeface="Microsoft JhengHei" pitchFamily="34" charset="-120"/>
+              </a:rPr>
+              <a:t>　  Can the prize be exchanged for cash or transferred?</a:t>
+            </a:r>
+            <a:endParaRPr lang="en-US" sz="1100" dirty="0"/>
+          </a:p>
+        </p:txBody>
+      </p:sp>
+      <p:sp>
+        <p:nvSpPr>
+          <p:cNvPr id="12" name="Text 10"/>
+          <p:cNvSpPr/>
+          <p:nvPr/>
+        </p:nvSpPr>
+        <p:spPr>
+          <a:xfrm>
+            <a:off x="685800" y="3081528"/>
+            <a:ext cx="7772400" cy="548640"/>
+          </a:xfrm>
+          <a:prstGeom prst="rect">
+            <a:avLst/>
+          </a:prstGeom>
+          <a:noFill/>
+          <a:ln/>
+        </p:spPr>
+        <p:txBody>
+          <a:bodyPr wrap="square" rtlCol="0" anchor="ctr"/>
+          <a:lstStyle/>
+          <a:p>
+            <a:pPr indent="0" marL="0">
+              <a:lnSpc>
+                <a:spcPts val="1300"/>
+              </a:lnSpc>
+              <a:buNone/>
+            </a:pPr>
+            <a:r>
+              <a:rPr lang="en-US" sz="1050" dirty="0">
+                <a:solidFill>
+                  <a:srgbClr val="3D3935"/>
+                </a:solidFill>
+                <a:latin typeface="Microsoft JhengHei" pitchFamily="34" charset="0"/>
+                <a:ea typeface="Microsoft JhengHei" pitchFamily="34" charset="-122"/>
+                <a:cs typeface="Microsoft JhengHei" pitchFamily="34" charset="-120"/>
+              </a:rPr>
+              <a:t>依活動規則，獎項不得折換現金、找零或轉讓。
+</a:t>
+            </a:r>
+            <a:pPr indent="0" marL="0">
+              <a:lnSpc>
+                <a:spcPts val="1300"/>
+              </a:lnSpc>
+              <a:buNone/>
+            </a:pPr>
+            <a:r>
+              <a:rPr lang="en-US" sz="900" dirty="0">
+                <a:solidFill>
+                  <a:srgbClr val="6E6A63"/>
+                </a:solidFill>
+                <a:latin typeface="Microsoft JhengHei" pitchFamily="34" charset="0"/>
+                <a:ea typeface="Microsoft JhengHei" pitchFamily="34" charset="-122"/>
+                <a:cs typeface="Microsoft JhengHei" pitchFamily="34" charset="-120"/>
+              </a:rPr>
+              <a:t>Under the campaign terms, prizes cannot be exchanged for cash, given as change, or transferred.</a:t>
+            </a:r>
+            <a:endParaRPr lang="en-US" sz="1050" dirty="0"/>
+          </a:p>
+        </p:txBody>
+      </p:sp>
+      <p:sp>
+        <p:nvSpPr>
+          <p:cNvPr id="13" name="Shape 11"/>
+          <p:cNvSpPr/>
+          <p:nvPr/>
+        </p:nvSpPr>
+        <p:spPr>
+          <a:xfrm>
+            <a:off x="502920" y="3977640"/>
+            <a:ext cx="8138160" cy="640080"/>
+          </a:xfrm>
+          <a:prstGeom prst="roundRect">
+            <a:avLst>
+              <a:gd name="adj" fmla="val 8571"/>
             </a:avLst>
           </a:prstGeom>
           <a:solidFill>
             <a:srgbClr val="FBEDED"/>
           </a:solidFill>
-          <a:ln/>
-        </p:spPr>
-      </p:sp>
-      <p:sp>
-        <p:nvSpPr>
-          <p:cNvPr id="8" name="Text 6"/>
-          <p:cNvSpPr/>
-          <p:nvPr/>
-        </p:nvSpPr>
-        <p:spPr>
-          <a:xfrm>
-            <a:off x="685800" y="1225296"/>
-            <a:ext cx="4663440" cy="475488"/>
-          </a:xfrm>
-          <a:prstGeom prst="rect">
-            <a:avLst/>
-          </a:prstGeom>
-          <a:noFill/>
-          <a:ln/>
-        </p:spPr>
-        <p:txBody>
-          <a:bodyPr wrap="square" rtlCol="0" anchor="ctr"/>
-          <a:lstStyle/>
-          <a:p>
-            <a:pPr marL="0" indent="0">
-              <a:lnSpc>
-                <a:spcPts val="1300"/>
-              </a:lnSpc>
-              <a:buNone/>
-            </a:pPr>
-            <a:r>
-              <a:rPr lang="en-US" sz="1150" b="1" dirty="0">
-                <a:solidFill>
-                  <a:srgbClr val="9A3B3B"/>
-                </a:solidFill>
-                <a:latin typeface="Microsoft JhengHei" pitchFamily="34" charset="0"/>
-                <a:ea typeface="Microsoft JhengHei" pitchFamily="34" charset="-122"/>
-                <a:cs typeface="Microsoft JhengHei" pitchFamily="34" charset="-120"/>
-              </a:rPr>
-              <a:t>✕  各獎項的中獎機率
-</a:t>
-            </a:r>
-            <a:r>
-              <a:rPr lang="en-US" sz="850" dirty="0">
-                <a:solidFill>
-                  <a:srgbClr val="9A3B3B"/>
-                </a:solidFill>
-                <a:latin typeface="Microsoft JhengHei" pitchFamily="34" charset="0"/>
-                <a:ea typeface="Microsoft JhengHei" pitchFamily="34" charset="-122"/>
-                <a:cs typeface="Microsoft JhengHei" pitchFamily="34" charset="-120"/>
-              </a:rPr>
-              <a:t>　  Prize win probabilities</a:t>
-            </a:r>
-            <a:endParaRPr lang="en-US" sz="1150" dirty="0"/>
-          </a:p>
-        </p:txBody>
-      </p:sp>
-      <p:sp>
-        <p:nvSpPr>
-          <p:cNvPr id="9" name="Text 7"/>
-          <p:cNvSpPr/>
-          <p:nvPr/>
-        </p:nvSpPr>
-        <p:spPr>
-          <a:xfrm>
-            <a:off x="5440680" y="1225296"/>
-            <a:ext cx="3063240" cy="475488"/>
-          </a:xfrm>
-          <a:prstGeom prst="rect">
-            <a:avLst/>
-          </a:prstGeom>
-          <a:noFill/>
-          <a:ln/>
-        </p:spPr>
-        <p:txBody>
-          <a:bodyPr wrap="square" rtlCol="0" anchor="ctr"/>
-          <a:lstStyle/>
-          <a:p>
-            <a:pPr marL="0" indent="0">
-              <a:buNone/>
-            </a:pPr>
-            <a:r>
-              <a:rPr lang="en-US" sz="950" dirty="0">
-                <a:solidFill>
-                  <a:srgbClr val="3D3935"/>
-                </a:solidFill>
-                <a:latin typeface="Microsoft JhengHei" pitchFamily="34" charset="0"/>
-                <a:ea typeface="Microsoft JhengHei" pitchFamily="34" charset="-122"/>
-                <a:cs typeface="Microsoft JhengHei" pitchFamily="34" charset="-120"/>
-              </a:rPr>
-              <a:t>屬內部設定，公開會引發爭議與質疑</a:t>
-            </a:r>
-            <a:endParaRPr lang="en-US" sz="950" dirty="0"/>
-          </a:p>
-        </p:txBody>
-      </p:sp>
-      <p:sp>
-        <p:nvSpPr>
-          <p:cNvPr id="10" name="Shape 8"/>
-          <p:cNvSpPr/>
-          <p:nvPr/>
-        </p:nvSpPr>
-        <p:spPr>
-          <a:xfrm>
-            <a:off x="502920" y="1810512"/>
-            <a:ext cx="8138160" cy="548640"/>
-          </a:xfrm>
-          <a:prstGeom prst="roundRect">
-            <a:avLst>
-              <a:gd name="adj" fmla="val 8333"/>
-            </a:avLst>
-          </a:prstGeom>
-          <a:solidFill>
-            <a:srgbClr val="FBEDED"/>
-          </a:solidFill>
-          <a:ln/>
-        </p:spPr>
-      </p:sp>
-      <p:sp>
-        <p:nvSpPr>
-          <p:cNvPr id="11" name="Text 9"/>
-          <p:cNvSpPr/>
-          <p:nvPr/>
-        </p:nvSpPr>
-        <p:spPr>
-          <a:xfrm>
-            <a:off x="685800" y="1847088"/>
-            <a:ext cx="4663440" cy="475488"/>
-          </a:xfrm>
-          <a:prstGeom prst="rect">
-            <a:avLst/>
-          </a:prstGeom>
-          <a:noFill/>
-          <a:ln/>
-        </p:spPr>
-        <p:txBody>
-          <a:bodyPr wrap="square" rtlCol="0" anchor="ctr"/>
-          <a:lstStyle/>
-          <a:p>
-            <a:pPr marL="0" indent="0">
-              <a:lnSpc>
-                <a:spcPts val="1300"/>
-              </a:lnSpc>
-              <a:buNone/>
-            </a:pPr>
-            <a:r>
-              <a:rPr lang="en-US" sz="1150" b="1" dirty="0">
-                <a:solidFill>
-                  <a:srgbClr val="9A3B3B"/>
-                </a:solidFill>
-                <a:latin typeface="Microsoft JhengHei" pitchFamily="34" charset="0"/>
-                <a:ea typeface="Microsoft JhengHei" pitchFamily="34" charset="-122"/>
-                <a:cs typeface="Microsoft JhengHei" pitchFamily="34" charset="-120"/>
-              </a:rPr>
-              <a:t>✕  每個獎品還剩幾份／已發出幾份
-</a:t>
-            </a:r>
-            <a:r>
-              <a:rPr lang="en-US" sz="850" dirty="0">
-                <a:solidFill>
-                  <a:srgbClr val="9A3B3B"/>
-                </a:solidFill>
-                <a:latin typeface="Microsoft JhengHei" pitchFamily="34" charset="0"/>
-                <a:ea typeface="Microsoft JhengHei" pitchFamily="34" charset="-122"/>
-                <a:cs typeface="Microsoft JhengHei" pitchFamily="34" charset="-120"/>
-              </a:rPr>
-              <a:t>　  Remaining or issued prize quantities</a:t>
-            </a:r>
-            <a:endParaRPr lang="en-US" sz="1150" dirty="0"/>
-          </a:p>
-        </p:txBody>
-      </p:sp>
-      <p:sp>
-        <p:nvSpPr>
-          <p:cNvPr id="12" name="Text 10"/>
-          <p:cNvSpPr/>
-          <p:nvPr/>
-        </p:nvSpPr>
-        <p:spPr>
-          <a:xfrm>
-            <a:off x="5440680" y="1847088"/>
-            <a:ext cx="3063240" cy="475488"/>
-          </a:xfrm>
-          <a:prstGeom prst="rect">
-            <a:avLst/>
-          </a:prstGeom>
-          <a:noFill/>
-          <a:ln/>
-        </p:spPr>
-        <p:txBody>
-          <a:bodyPr wrap="square" rtlCol="0" anchor="ctr"/>
-          <a:lstStyle/>
-          <a:p>
-            <a:pPr marL="0" indent="0">
-              <a:buNone/>
-            </a:pPr>
-            <a:r>
-              <a:rPr lang="en-US" sz="950" dirty="0">
-                <a:solidFill>
-                  <a:srgbClr val="3D3935"/>
-                </a:solidFill>
-                <a:latin typeface="Microsoft JhengHei" pitchFamily="34" charset="0"/>
-                <a:ea typeface="Microsoft JhengHei" pitchFamily="34" charset="-122"/>
-                <a:cs typeface="Microsoft JhengHei" pitchFamily="34" charset="-120"/>
-              </a:rPr>
-              <a:t>同上，也可能被人為衝量</a:t>
-            </a:r>
-            <a:endParaRPr lang="en-US" sz="950" dirty="0"/>
-          </a:p>
-        </p:txBody>
-      </p:sp>
-      <p:sp>
-        <p:nvSpPr>
-          <p:cNvPr id="13" name="Shape 11"/>
-          <p:cNvSpPr/>
-          <p:nvPr/>
-        </p:nvSpPr>
-        <p:spPr>
-          <a:xfrm>
-            <a:off x="502920" y="2432304"/>
-            <a:ext cx="8138160" cy="548640"/>
-          </a:xfrm>
-          <a:prstGeom prst="roundRect">
-            <a:avLst>
-              <a:gd name="adj" fmla="val 8333"/>
-            </a:avLst>
-          </a:prstGeom>
-          <a:solidFill>
-            <a:srgbClr val="FBEDED"/>
-          </a:solidFill>
-          <a:ln/>
-        </p:spPr>
-      </p:sp>
-      <p:sp>
-        <p:nvSpPr>
-          <p:cNvPr id="14" name="Text 12"/>
-          <p:cNvSpPr/>
-          <p:nvPr/>
-        </p:nvSpPr>
-        <p:spPr>
-          <a:xfrm>
-            <a:off x="685800" y="2468880"/>
-            <a:ext cx="4663440" cy="475488"/>
-          </a:xfrm>
-          <a:prstGeom prst="rect">
-            <a:avLst/>
-          </a:prstGeom>
-          <a:noFill/>
-          <a:ln/>
-        </p:spPr>
-        <p:txBody>
-          <a:bodyPr wrap="square" rtlCol="0" anchor="ctr"/>
-          <a:lstStyle/>
-          <a:p>
-            <a:pPr marL="0" indent="0">
-              <a:lnSpc>
-                <a:spcPts val="1300"/>
-              </a:lnSpc>
-              <a:buNone/>
-            </a:pPr>
-            <a:r>
-              <a:rPr lang="en-US" sz="1150" b="1" dirty="0">
-                <a:solidFill>
-                  <a:srgbClr val="9A3B3B"/>
-                </a:solidFill>
-                <a:latin typeface="Microsoft JhengHei" pitchFamily="34" charset="0"/>
-                <a:ea typeface="Microsoft JhengHei" pitchFamily="34" charset="-122"/>
-                <a:cs typeface="Microsoft JhengHei" pitchFamily="34" charset="-120"/>
-              </a:rPr>
-              <a:t>✕  內部管理系統的存在或操作方式
-</a:t>
-            </a:r>
-            <a:r>
-              <a:rPr lang="en-US" sz="850" dirty="0">
-                <a:solidFill>
-                  <a:srgbClr val="9A3B3B"/>
-                </a:solidFill>
-                <a:latin typeface="Microsoft JhengHei" pitchFamily="34" charset="0"/>
-                <a:ea typeface="Microsoft JhengHei" pitchFamily="34" charset="-122"/>
-                <a:cs typeface="Microsoft JhengHei" pitchFamily="34" charset="-120"/>
-              </a:rPr>
-              <a:t>　  The existence or use of internal admin systems</a:t>
-            </a:r>
-            <a:endParaRPr lang="en-US" sz="1150" dirty="0"/>
-          </a:p>
-        </p:txBody>
-      </p:sp>
-      <p:sp>
-        <p:nvSpPr>
-          <p:cNvPr id="15" name="Text 13"/>
-          <p:cNvSpPr/>
-          <p:nvPr/>
-        </p:nvSpPr>
-        <p:spPr>
-          <a:xfrm>
-            <a:off x="5440680" y="2468880"/>
-            <a:ext cx="3063240" cy="475488"/>
-          </a:xfrm>
-          <a:prstGeom prst="rect">
-            <a:avLst/>
-          </a:prstGeom>
-          <a:noFill/>
-          <a:ln/>
-        </p:spPr>
-        <p:txBody>
-          <a:bodyPr wrap="square" rtlCol="0" anchor="ctr"/>
-          <a:lstStyle/>
-          <a:p>
-            <a:pPr marL="0" indent="0">
-              <a:buNone/>
-            </a:pPr>
-            <a:r>
-              <a:rPr lang="en-US" sz="950" dirty="0">
-                <a:solidFill>
-                  <a:srgbClr val="3D3935"/>
-                </a:solidFill>
-                <a:latin typeface="Microsoft JhengHei" pitchFamily="34" charset="0"/>
-                <a:ea typeface="Microsoft JhengHei" pitchFamily="34" charset="-122"/>
-                <a:cs typeface="Microsoft JhengHei" pitchFamily="34" charset="-120"/>
-              </a:rPr>
-              <a:t>非對外資訊</a:t>
-            </a:r>
-            <a:endParaRPr lang="en-US" sz="950" dirty="0"/>
-          </a:p>
-        </p:txBody>
-      </p:sp>
-      <p:sp>
-        <p:nvSpPr>
-          <p:cNvPr id="16" name="Shape 14"/>
-          <p:cNvSpPr/>
-          <p:nvPr/>
-        </p:nvSpPr>
-        <p:spPr>
-          <a:xfrm>
-            <a:off x="502920" y="3054096"/>
-            <a:ext cx="8138160" cy="548640"/>
-          </a:xfrm>
-          <a:prstGeom prst="roundRect">
-            <a:avLst>
-              <a:gd name="adj" fmla="val 8333"/>
-            </a:avLst>
-          </a:prstGeom>
-          <a:solidFill>
-            <a:srgbClr val="FBEDED"/>
-          </a:solidFill>
-          <a:ln/>
-        </p:spPr>
-      </p:sp>
-      <p:sp>
-        <p:nvSpPr>
-          <p:cNvPr id="17" name="Text 15"/>
-          <p:cNvSpPr/>
-          <p:nvPr/>
-        </p:nvSpPr>
-        <p:spPr>
-          <a:xfrm>
-            <a:off x="685800" y="3090672"/>
-            <a:ext cx="4663440" cy="475488"/>
-          </a:xfrm>
-          <a:prstGeom prst="rect">
-            <a:avLst/>
-          </a:prstGeom>
-          <a:noFill/>
-          <a:ln/>
-        </p:spPr>
-        <p:txBody>
-          <a:bodyPr wrap="square" rtlCol="0" anchor="ctr"/>
-          <a:lstStyle/>
-          <a:p>
-            <a:pPr marL="0" indent="0">
-              <a:lnSpc>
-                <a:spcPts val="1300"/>
-              </a:lnSpc>
-              <a:buNone/>
-            </a:pPr>
-            <a:r>
-              <a:rPr lang="en-US" sz="1150" b="1" dirty="0">
-                <a:solidFill>
-                  <a:srgbClr val="9A3B3B"/>
-                </a:solidFill>
-                <a:latin typeface="Microsoft JhengHei" pitchFamily="34" charset="0"/>
-                <a:ea typeface="Microsoft JhengHei" pitchFamily="34" charset="-122"/>
-                <a:cs typeface="Microsoft JhengHei" pitchFamily="34" charset="-120"/>
-              </a:rPr>
-              <a:t>✕  其他中獎者的姓名／電話／中獎內容
-</a:t>
-            </a:r>
-            <a:r>
-              <a:rPr lang="en-US" sz="850" dirty="0">
-                <a:solidFill>
-                  <a:srgbClr val="9A3B3B"/>
-                </a:solidFill>
-                <a:latin typeface="Microsoft JhengHei" pitchFamily="34" charset="0"/>
-                <a:ea typeface="Microsoft JhengHei" pitchFamily="34" charset="-122"/>
-                <a:cs typeface="Microsoft JhengHei" pitchFamily="34" charset="-120"/>
-              </a:rPr>
-              <a:t>　  Other winners' names, numbers or prizes</a:t>
-            </a:r>
-            <a:endParaRPr lang="en-US" sz="1150" dirty="0"/>
-          </a:p>
-        </p:txBody>
-      </p:sp>
-      <p:sp>
-        <p:nvSpPr>
-          <p:cNvPr id="18" name="Text 16"/>
-          <p:cNvSpPr/>
-          <p:nvPr/>
-        </p:nvSpPr>
-        <p:spPr>
-          <a:xfrm>
-            <a:off x="5440680" y="3090672"/>
-            <a:ext cx="3063240" cy="475488"/>
-          </a:xfrm>
-          <a:prstGeom prst="rect">
-            <a:avLst/>
-          </a:prstGeom>
-          <a:noFill/>
-          <a:ln/>
-        </p:spPr>
-        <p:txBody>
-          <a:bodyPr wrap="square" rtlCol="0" anchor="ctr"/>
-          <a:lstStyle/>
-          <a:p>
-            <a:pPr marL="0" indent="0">
-              <a:buNone/>
-            </a:pPr>
-            <a:r>
-              <a:rPr lang="en-US" sz="950" dirty="0">
-                <a:solidFill>
-                  <a:srgbClr val="3D3935"/>
-                </a:solidFill>
-                <a:latin typeface="Microsoft JhengHei" pitchFamily="34" charset="0"/>
-                <a:ea typeface="Microsoft JhengHei" pitchFamily="34" charset="-122"/>
-                <a:cs typeface="Microsoft JhengHei" pitchFamily="34" charset="-120"/>
-              </a:rPr>
-              <a:t>個人資料，涉及法律責任</a:t>
-            </a:r>
-            <a:endParaRPr lang="en-US" sz="950" dirty="0"/>
-          </a:p>
-        </p:txBody>
-      </p:sp>
-      <p:sp>
-        <p:nvSpPr>
-          <p:cNvPr id="19" name="Shape 17"/>
-          <p:cNvSpPr/>
-          <p:nvPr/>
-        </p:nvSpPr>
-        <p:spPr>
-          <a:xfrm>
-            <a:off x="502920" y="3675888"/>
-            <a:ext cx="8138160" cy="548640"/>
-          </a:xfrm>
-          <a:prstGeom prst="roundRect">
-            <a:avLst>
-              <a:gd name="adj" fmla="val 8333"/>
-            </a:avLst>
-          </a:prstGeom>
-          <a:solidFill>
-            <a:srgbClr val="FBEDED"/>
-          </a:solidFill>
-          <a:ln/>
-        </p:spPr>
-      </p:sp>
-      <p:sp>
-        <p:nvSpPr>
-          <p:cNvPr id="20" name="Text 18"/>
-          <p:cNvSpPr/>
-          <p:nvPr/>
-        </p:nvSpPr>
-        <p:spPr>
-          <a:xfrm>
-            <a:off x="685800" y="3712464"/>
-            <a:ext cx="4663440" cy="475488"/>
-          </a:xfrm>
-          <a:prstGeom prst="rect">
-            <a:avLst/>
-          </a:prstGeom>
-          <a:noFill/>
-          <a:ln/>
-        </p:spPr>
-        <p:txBody>
-          <a:bodyPr wrap="square" rtlCol="0" anchor="ctr"/>
-          <a:lstStyle/>
-          <a:p>
-            <a:pPr marL="0" indent="0">
-              <a:lnSpc>
-                <a:spcPts val="1300"/>
-              </a:lnSpc>
-              <a:buNone/>
-            </a:pPr>
-            <a:r>
-              <a:rPr lang="en-US" sz="1150" b="1" dirty="0">
-                <a:solidFill>
-                  <a:srgbClr val="9A3B3B"/>
-                </a:solidFill>
-                <a:latin typeface="Microsoft JhengHei" pitchFamily="34" charset="0"/>
-                <a:ea typeface="Microsoft JhengHei" pitchFamily="34" charset="-122"/>
-                <a:cs typeface="Microsoft JhengHei" pitchFamily="34" charset="-120"/>
-              </a:rPr>
-              <a:t>✕  對兌換方式或日期做個人承諾
-</a:t>
-            </a:r>
-            <a:r>
-              <a:rPr lang="en-US" sz="850" dirty="0">
-                <a:solidFill>
-                  <a:srgbClr val="9A3B3B"/>
-                </a:solidFill>
-                <a:latin typeface="Microsoft JhengHei" pitchFamily="34" charset="0"/>
-                <a:ea typeface="Microsoft JhengHei" pitchFamily="34" charset="-122"/>
-                <a:cs typeface="Microsoft JhengHei" pitchFamily="34" charset="-120"/>
-              </a:rPr>
-              <a:t>　  Personal promises about redemption terms or dates</a:t>
-            </a:r>
-            <a:endParaRPr lang="en-US" sz="1150" dirty="0"/>
-          </a:p>
-        </p:txBody>
-      </p:sp>
-      <p:sp>
-        <p:nvSpPr>
-          <p:cNvPr id="21" name="Text 19"/>
-          <p:cNvSpPr/>
-          <p:nvPr/>
-        </p:nvSpPr>
-        <p:spPr>
-          <a:xfrm>
-            <a:off x="5440680" y="3712464"/>
-            <a:ext cx="3063240" cy="475488"/>
-          </a:xfrm>
-          <a:prstGeom prst="rect">
-            <a:avLst/>
-          </a:prstGeom>
-          <a:noFill/>
-          <a:ln/>
-        </p:spPr>
-        <p:txBody>
-          <a:bodyPr wrap="square" rtlCol="0" anchor="ctr"/>
-          <a:lstStyle/>
-          <a:p>
-            <a:pPr marL="0" indent="0">
-              <a:buNone/>
-            </a:pPr>
-            <a:r>
-              <a:rPr lang="en-US" sz="950" dirty="0">
-                <a:solidFill>
-                  <a:srgbClr val="3D3935"/>
-                </a:solidFill>
-                <a:latin typeface="Microsoft JhengHei" pitchFamily="34" charset="0"/>
-                <a:ea typeface="Microsoft JhengHei" pitchFamily="34" charset="-122"/>
-                <a:cs typeface="Microsoft JhengHei" pitchFamily="34" charset="-120"/>
-              </a:rPr>
-              <a:t>一切以活動頁公告與券面規則為準</a:t>
-            </a:r>
-            <a:endParaRPr lang="en-US" sz="950" dirty="0"/>
-          </a:p>
-        </p:txBody>
-      </p:sp>
-      <p:sp>
-        <p:nvSpPr>
-          <p:cNvPr id="22" name="Shape 20"/>
-          <p:cNvSpPr/>
-          <p:nvPr/>
-        </p:nvSpPr>
-        <p:spPr>
-          <a:xfrm>
-            <a:off x="502920" y="4370832"/>
-            <a:ext cx="8138160" cy="530352"/>
-          </a:xfrm>
-          <a:prstGeom prst="roundRect">
-            <a:avLst>
-              <a:gd name="adj" fmla="val 10345"/>
-            </a:avLst>
-          </a:prstGeom>
-          <a:solidFill>
-            <a:srgbClr val="FBF1DC"/>
-          </a:solidFill>
           <a:ln w="9525">
             <a:solidFill>
-              <a:srgbClr val="9C6212"/>
+              <a:srgbClr val="9A3B3B"/>
             </a:solidFill>
             <a:prstDash val="solid"/>
           </a:ln>
@@ -4090,26 +4360,26 @@
       </p:sp>
       <p:sp>
         <p:nvSpPr>
-          <p:cNvPr id="23" name="Text 21"/>
-          <p:cNvSpPr/>
-          <p:nvPr/>
-        </p:nvSpPr>
-        <p:spPr>
-          <a:xfrm>
-            <a:off x="649224" y="4416552"/>
-            <a:ext cx="7845552" cy="438912"/>
-          </a:xfrm>
-          <a:prstGeom prst="rect">
-            <a:avLst/>
-          </a:prstGeom>
-          <a:noFill/>
-          <a:ln/>
-        </p:spPr>
-        <p:txBody>
-          <a:bodyPr wrap="square" rtlCol="0" anchor="ctr"/>
-          <a:lstStyle/>
-          <a:p>
-            <a:pPr marL="0" indent="0">
+          <p:cNvPr id="14" name="Text 12"/>
+          <p:cNvSpPr/>
+          <p:nvPr/>
+        </p:nvSpPr>
+        <p:spPr>
+          <a:xfrm>
+            <a:off x="649224" y="4023360"/>
+            <a:ext cx="7845552" cy="548640"/>
+          </a:xfrm>
+          <a:prstGeom prst="rect">
+            <a:avLst/>
+          </a:prstGeom>
+          <a:noFill/>
+          <a:ln/>
+        </p:spPr>
+        <p:txBody>
+          <a:bodyPr wrap="square" rtlCol="0" anchor="ctr"/>
+          <a:lstStyle/>
+          <a:p>
+            <a:pPr indent="0" marL="0">
               <a:lnSpc>
                 <a:spcPts val="1500"/>
               </a:lnSpc>
@@ -4118,36 +4388,48 @@
             <a:r>
               <a:rPr lang="en-US" sz="1200" dirty="0">
                 <a:solidFill>
-                  <a:srgbClr val="9C6212"/>
-                </a:solidFill>
-                <a:latin typeface="Microsoft JhengHei" pitchFamily="34" charset="0"/>
-                <a:ea typeface="Microsoft JhengHei" pitchFamily="34" charset="-122"/>
-                <a:cs typeface="Microsoft JhengHei" pitchFamily="34" charset="-120"/>
-              </a:rPr>
-              <a:t>🙋  </a:t>
-            </a:r>
+                  <a:srgbClr val="9A3B3B"/>
+                </a:solidFill>
+                <a:latin typeface="Microsoft JhengHei" pitchFamily="34" charset="0"/>
+                <a:ea typeface="Microsoft JhengHei" pitchFamily="34" charset="-122"/>
+                <a:cs typeface="Microsoft JhengHei" pitchFamily="34" charset="-120"/>
+              </a:rPr>
+              <a:t>🚫  </a:t>
+            </a:r>
+            <a:pPr indent="0" marL="0">
+              <a:lnSpc>
+                <a:spcPts val="1500"/>
+              </a:lnSpc>
+              <a:buNone/>
+            </a:pPr>
             <a:r>
               <a:rPr lang="en-US" sz="1150" b="1" dirty="0">
                 <a:solidFill>
-                  <a:srgbClr val="9C6212"/>
-                </a:solidFill>
-                <a:latin typeface="Microsoft JhengHei" pitchFamily="34" charset="0"/>
-                <a:ea typeface="Microsoft JhengHei" pitchFamily="34" charset="-122"/>
-                <a:cs typeface="Microsoft JhengHei" pitchFamily="34" charset="-120"/>
-              </a:rPr>
-              <a:t>遇到無法回答或客人情緒不佳時，請轉給主管處理，不要自行承諾。
+                  <a:srgbClr val="9A3B3B"/>
+                </a:solidFill>
+                <a:latin typeface="Microsoft JhengHei" pitchFamily="34" charset="0"/>
+                <a:ea typeface="Microsoft JhengHei" pitchFamily="34" charset="-122"/>
+                <a:cs typeface="Microsoft JhengHei" pitchFamily="34" charset="-120"/>
+              </a:rPr>
+              <a:t>客人追問中獎率時，請勿透露任何數字 —— 一律回「由系統隨機產生」。
 </a:t>
             </a:r>
+            <a:pPr indent="0" marL="0">
+              <a:lnSpc>
+                <a:spcPts val="1500"/>
+              </a:lnSpc>
+              <a:buNone/>
+            </a:pPr>
             <a:r>
               <a:rPr lang="en-US" sz="950" dirty="0">
                 <a:solidFill>
-                  <a:srgbClr val="9C6212"/>
-                </a:solidFill>
-                <a:latin typeface="Microsoft JhengHei" pitchFamily="34" charset="0"/>
-                <a:ea typeface="Microsoft JhengHei" pitchFamily="34" charset="-122"/>
-                <a:cs typeface="Microsoft JhengHei" pitchFamily="34" charset="-120"/>
-              </a:rPr>
-              <a:t>　　 If you cannot answer, or the guest is upset, escalate to your supervisor — do not make commitments yourself.</a:t>
+                  <a:srgbClr val="9A3B3B"/>
+                </a:solidFill>
+                <a:latin typeface="Microsoft JhengHei" pitchFamily="34" charset="0"/>
+                <a:ea typeface="Microsoft JhengHei" pitchFamily="34" charset="-122"/>
+                <a:cs typeface="Microsoft JhengHei" pitchFamily="34" charset="-120"/>
+              </a:rPr>
+              <a:t>　　 If pressed on the odds, never share numbers — always answer that results are randomly generated.</a:t>
             </a:r>
             <a:endParaRPr lang="en-US" sz="1200" dirty="0"/>
           </a:p>
@@ -4169,7 +4451,6 @@
         <a:solidFill>
           <a:srgbClr val="FAF8F6"/>
         </a:solidFill>
-        <a:effectLst/>
       </p:bgPr>
     </p:bg>
     <p:spTree>
@@ -4207,7 +4488,7 @@
           <a:bodyPr wrap="square" rtlCol="0" anchor="ctr"/>
           <a:lstStyle/>
           <a:p>
-            <a:pPr marL="0" indent="0">
+            <a:pPr indent="0" marL="0">
               <a:buNone/>
             </a:pPr>
             <a:r>
@@ -4219,7 +4500,7 @@
                 <a:ea typeface="Microsoft JhengHei" pitchFamily="34" charset="-122"/>
                 <a:cs typeface="Microsoft JhengHei" pitchFamily="34" charset="-120"/>
               </a:rPr>
-              <a:t>八、什麼狀況要往上回報</a:t>
+              <a:t>八、不可以對客人說的事</a:t>
             </a:r>
             <a:endParaRPr lang="en-US" sz="2200" dirty="0"/>
           </a:p>
@@ -4246,7 +4527,7 @@
           <a:bodyPr wrap="square" rtlCol="0" anchor="ctr"/>
           <a:lstStyle/>
           <a:p>
-            <a:pPr marL="0" indent="0">
+            <a:pPr indent="0" marL="0">
               <a:buNone/>
             </a:pPr>
             <a:r>
@@ -4258,7 +4539,7 @@
                 <a:ea typeface="Microsoft JhengHei" pitchFamily="34" charset="-122"/>
                 <a:cs typeface="Microsoft JhengHei" pitchFamily="34" charset="-120"/>
               </a:rPr>
-              <a:t>When to Escalate</a:t>
+              <a:t>What Not to Disclose to Guests</a:t>
             </a:r>
             <a:endParaRPr lang="en-US" sz="1150" dirty="0"/>
           </a:p>
@@ -4305,7 +4586,7 @@
           <a:bodyPr wrap="square" rtlCol="0" anchor="ctr"/>
           <a:lstStyle/>
           <a:p>
-            <a:pPr marL="0" indent="0" algn="r">
+            <a:pPr algn="r" indent="0" marL="0">
               <a:buNone/>
             </a:pPr>
             <a:r>
@@ -4344,7 +4625,7 @@
           <a:bodyPr wrap="square" rtlCol="0" anchor="ctr"/>
           <a:lstStyle/>
           <a:p>
-            <a:pPr marL="0" indent="0">
+            <a:pPr indent="0" marL="0">
               <a:buNone/>
             </a:pPr>
             <a:r>
@@ -4370,623 +4651,704 @@
         </p:nvSpPr>
         <p:spPr>
           <a:xfrm>
-            <a:off x="502920" y="1234440"/>
-            <a:ext cx="8138160" cy="566928"/>
+            <a:off x="502920" y="1188720"/>
+            <a:ext cx="8138160" cy="548640"/>
           </a:xfrm>
           <a:prstGeom prst="roundRect">
             <a:avLst>
-              <a:gd name="adj" fmla="val 8065"/>
+              <a:gd name="adj" fmla="val 8333"/>
             </a:avLst>
           </a:prstGeom>
           <a:solidFill>
-            <a:srgbClr val="FFFDFA"/>
+            <a:srgbClr val="FBEDED"/>
+          </a:solidFill>
+          <a:ln/>
+        </p:spPr>
+      </p:sp>
+      <p:sp>
+        <p:nvSpPr>
+          <p:cNvPr id="8" name="Text 6"/>
+          <p:cNvSpPr/>
+          <p:nvPr/>
+        </p:nvSpPr>
+        <p:spPr>
+          <a:xfrm>
+            <a:off x="685800" y="1225296"/>
+            <a:ext cx="4663440" cy="475488"/>
+          </a:xfrm>
+          <a:prstGeom prst="rect">
+            <a:avLst/>
+          </a:prstGeom>
+          <a:noFill/>
+          <a:ln/>
+        </p:spPr>
+        <p:txBody>
+          <a:bodyPr wrap="square" rtlCol="0" anchor="ctr"/>
+          <a:lstStyle/>
+          <a:p>
+            <a:pPr indent="0" marL="0">
+              <a:lnSpc>
+                <a:spcPts val="1300"/>
+              </a:lnSpc>
+              <a:buNone/>
+            </a:pPr>
+            <a:r>
+              <a:rPr lang="en-US" sz="1150" b="1" dirty="0">
+                <a:solidFill>
+                  <a:srgbClr val="9A3B3B"/>
+                </a:solidFill>
+                <a:latin typeface="Microsoft JhengHei" pitchFamily="34" charset="0"/>
+                <a:ea typeface="Microsoft JhengHei" pitchFamily="34" charset="-122"/>
+                <a:cs typeface="Microsoft JhengHei" pitchFamily="34" charset="-120"/>
+              </a:rPr>
+              <a:t>✕  各獎項的中獎機率
+</a:t>
+            </a:r>
+            <a:pPr indent="0" marL="0">
+              <a:lnSpc>
+                <a:spcPts val="1300"/>
+              </a:lnSpc>
+              <a:buNone/>
+            </a:pPr>
+            <a:r>
+              <a:rPr lang="en-US" sz="850" dirty="0">
+                <a:solidFill>
+                  <a:srgbClr val="9A3B3B"/>
+                </a:solidFill>
+                <a:latin typeface="Microsoft JhengHei" pitchFamily="34" charset="0"/>
+                <a:ea typeface="Microsoft JhengHei" pitchFamily="34" charset="-122"/>
+                <a:cs typeface="Microsoft JhengHei" pitchFamily="34" charset="-120"/>
+              </a:rPr>
+              <a:t>　  Prize win probabilities</a:t>
+            </a:r>
+            <a:endParaRPr lang="en-US" sz="1150" dirty="0"/>
+          </a:p>
+        </p:txBody>
+      </p:sp>
+      <p:sp>
+        <p:nvSpPr>
+          <p:cNvPr id="9" name="Text 7"/>
+          <p:cNvSpPr/>
+          <p:nvPr/>
+        </p:nvSpPr>
+        <p:spPr>
+          <a:xfrm>
+            <a:off x="5440680" y="1225296"/>
+            <a:ext cx="3063240" cy="475488"/>
+          </a:xfrm>
+          <a:prstGeom prst="rect">
+            <a:avLst/>
+          </a:prstGeom>
+          <a:noFill/>
+          <a:ln/>
+        </p:spPr>
+        <p:txBody>
+          <a:bodyPr wrap="square" rtlCol="0" anchor="ctr"/>
+          <a:lstStyle/>
+          <a:p>
+            <a:pPr indent="0" marL="0">
+              <a:buNone/>
+            </a:pPr>
+            <a:r>
+              <a:rPr lang="en-US" sz="950" dirty="0">
+                <a:solidFill>
+                  <a:srgbClr val="3D3935"/>
+                </a:solidFill>
+                <a:latin typeface="Microsoft JhengHei" pitchFamily="34" charset="0"/>
+                <a:ea typeface="Microsoft JhengHei" pitchFamily="34" charset="-122"/>
+                <a:cs typeface="Microsoft JhengHei" pitchFamily="34" charset="-120"/>
+              </a:rPr>
+              <a:t>屬內部設定，公開會引發爭議與質疑</a:t>
+            </a:r>
+            <a:endParaRPr lang="en-US" sz="950" dirty="0"/>
+          </a:p>
+        </p:txBody>
+      </p:sp>
+      <p:sp>
+        <p:nvSpPr>
+          <p:cNvPr id="10" name="Shape 8"/>
+          <p:cNvSpPr/>
+          <p:nvPr/>
+        </p:nvSpPr>
+        <p:spPr>
+          <a:xfrm>
+            <a:off x="502920" y="1810512"/>
+            <a:ext cx="8138160" cy="548640"/>
+          </a:xfrm>
+          <a:prstGeom prst="roundRect">
+            <a:avLst>
+              <a:gd name="adj" fmla="val 8333"/>
+            </a:avLst>
+          </a:prstGeom>
+          <a:solidFill>
+            <a:srgbClr val="FBEDED"/>
+          </a:solidFill>
+          <a:ln/>
+        </p:spPr>
+      </p:sp>
+      <p:sp>
+        <p:nvSpPr>
+          <p:cNvPr id="11" name="Text 9"/>
+          <p:cNvSpPr/>
+          <p:nvPr/>
+        </p:nvSpPr>
+        <p:spPr>
+          <a:xfrm>
+            <a:off x="685800" y="1847088"/>
+            <a:ext cx="4663440" cy="475488"/>
+          </a:xfrm>
+          <a:prstGeom prst="rect">
+            <a:avLst/>
+          </a:prstGeom>
+          <a:noFill/>
+          <a:ln/>
+        </p:spPr>
+        <p:txBody>
+          <a:bodyPr wrap="square" rtlCol="0" anchor="ctr"/>
+          <a:lstStyle/>
+          <a:p>
+            <a:pPr indent="0" marL="0">
+              <a:lnSpc>
+                <a:spcPts val="1300"/>
+              </a:lnSpc>
+              <a:buNone/>
+            </a:pPr>
+            <a:r>
+              <a:rPr lang="en-US" sz="1150" b="1" dirty="0">
+                <a:solidFill>
+                  <a:srgbClr val="9A3B3B"/>
+                </a:solidFill>
+                <a:latin typeface="Microsoft JhengHei" pitchFamily="34" charset="0"/>
+                <a:ea typeface="Microsoft JhengHei" pitchFamily="34" charset="-122"/>
+                <a:cs typeface="Microsoft JhengHei" pitchFamily="34" charset="-120"/>
+              </a:rPr>
+              <a:t>✕  每個獎品還剩幾份／已發出幾份
+</a:t>
+            </a:r>
+            <a:pPr indent="0" marL="0">
+              <a:lnSpc>
+                <a:spcPts val="1300"/>
+              </a:lnSpc>
+              <a:buNone/>
+            </a:pPr>
+            <a:r>
+              <a:rPr lang="en-US" sz="850" dirty="0">
+                <a:solidFill>
+                  <a:srgbClr val="9A3B3B"/>
+                </a:solidFill>
+                <a:latin typeface="Microsoft JhengHei" pitchFamily="34" charset="0"/>
+                <a:ea typeface="Microsoft JhengHei" pitchFamily="34" charset="-122"/>
+                <a:cs typeface="Microsoft JhengHei" pitchFamily="34" charset="-120"/>
+              </a:rPr>
+              <a:t>　  Remaining or issued prize quantities</a:t>
+            </a:r>
+            <a:endParaRPr lang="en-US" sz="1150" dirty="0"/>
+          </a:p>
+        </p:txBody>
+      </p:sp>
+      <p:sp>
+        <p:nvSpPr>
+          <p:cNvPr id="12" name="Text 10"/>
+          <p:cNvSpPr/>
+          <p:nvPr/>
+        </p:nvSpPr>
+        <p:spPr>
+          <a:xfrm>
+            <a:off x="5440680" y="1847088"/>
+            <a:ext cx="3063240" cy="475488"/>
+          </a:xfrm>
+          <a:prstGeom prst="rect">
+            <a:avLst/>
+          </a:prstGeom>
+          <a:noFill/>
+          <a:ln/>
+        </p:spPr>
+        <p:txBody>
+          <a:bodyPr wrap="square" rtlCol="0" anchor="ctr"/>
+          <a:lstStyle/>
+          <a:p>
+            <a:pPr indent="0" marL="0">
+              <a:buNone/>
+            </a:pPr>
+            <a:r>
+              <a:rPr lang="en-US" sz="950" dirty="0">
+                <a:solidFill>
+                  <a:srgbClr val="3D3935"/>
+                </a:solidFill>
+                <a:latin typeface="Microsoft JhengHei" pitchFamily="34" charset="0"/>
+                <a:ea typeface="Microsoft JhengHei" pitchFamily="34" charset="-122"/>
+                <a:cs typeface="Microsoft JhengHei" pitchFamily="34" charset="-120"/>
+              </a:rPr>
+              <a:t>同上，也可能被人為衝量</a:t>
+            </a:r>
+            <a:endParaRPr lang="en-US" sz="950" dirty="0"/>
+          </a:p>
+        </p:txBody>
+      </p:sp>
+      <p:sp>
+        <p:nvSpPr>
+          <p:cNvPr id="13" name="Shape 11"/>
+          <p:cNvSpPr/>
+          <p:nvPr/>
+        </p:nvSpPr>
+        <p:spPr>
+          <a:xfrm>
+            <a:off x="502920" y="2432304"/>
+            <a:ext cx="8138160" cy="548640"/>
+          </a:xfrm>
+          <a:prstGeom prst="roundRect">
+            <a:avLst>
+              <a:gd name="adj" fmla="val 8333"/>
+            </a:avLst>
+          </a:prstGeom>
+          <a:solidFill>
+            <a:srgbClr val="FBEDED"/>
+          </a:solidFill>
+          <a:ln/>
+        </p:spPr>
+      </p:sp>
+      <p:sp>
+        <p:nvSpPr>
+          <p:cNvPr id="14" name="Text 12"/>
+          <p:cNvSpPr/>
+          <p:nvPr/>
+        </p:nvSpPr>
+        <p:spPr>
+          <a:xfrm>
+            <a:off x="685800" y="2468880"/>
+            <a:ext cx="4663440" cy="475488"/>
+          </a:xfrm>
+          <a:prstGeom prst="rect">
+            <a:avLst/>
+          </a:prstGeom>
+          <a:noFill/>
+          <a:ln/>
+        </p:spPr>
+        <p:txBody>
+          <a:bodyPr wrap="square" rtlCol="0" anchor="ctr"/>
+          <a:lstStyle/>
+          <a:p>
+            <a:pPr indent="0" marL="0">
+              <a:lnSpc>
+                <a:spcPts val="1300"/>
+              </a:lnSpc>
+              <a:buNone/>
+            </a:pPr>
+            <a:r>
+              <a:rPr lang="en-US" sz="1150" b="1" dirty="0">
+                <a:solidFill>
+                  <a:srgbClr val="9A3B3B"/>
+                </a:solidFill>
+                <a:latin typeface="Microsoft JhengHei" pitchFamily="34" charset="0"/>
+                <a:ea typeface="Microsoft JhengHei" pitchFamily="34" charset="-122"/>
+                <a:cs typeface="Microsoft JhengHei" pitchFamily="34" charset="-120"/>
+              </a:rPr>
+              <a:t>✕  內部管理系統的存在或操作方式
+</a:t>
+            </a:r>
+            <a:pPr indent="0" marL="0">
+              <a:lnSpc>
+                <a:spcPts val="1300"/>
+              </a:lnSpc>
+              <a:buNone/>
+            </a:pPr>
+            <a:r>
+              <a:rPr lang="en-US" sz="850" dirty="0">
+                <a:solidFill>
+                  <a:srgbClr val="9A3B3B"/>
+                </a:solidFill>
+                <a:latin typeface="Microsoft JhengHei" pitchFamily="34" charset="0"/>
+                <a:ea typeface="Microsoft JhengHei" pitchFamily="34" charset="-122"/>
+                <a:cs typeface="Microsoft JhengHei" pitchFamily="34" charset="-120"/>
+              </a:rPr>
+              <a:t>　  The existence or use of internal admin systems</a:t>
+            </a:r>
+            <a:endParaRPr lang="en-US" sz="1150" dirty="0"/>
+          </a:p>
+        </p:txBody>
+      </p:sp>
+      <p:sp>
+        <p:nvSpPr>
+          <p:cNvPr id="15" name="Text 13"/>
+          <p:cNvSpPr/>
+          <p:nvPr/>
+        </p:nvSpPr>
+        <p:spPr>
+          <a:xfrm>
+            <a:off x="5440680" y="2468880"/>
+            <a:ext cx="3063240" cy="475488"/>
+          </a:xfrm>
+          <a:prstGeom prst="rect">
+            <a:avLst/>
+          </a:prstGeom>
+          <a:noFill/>
+          <a:ln/>
+        </p:spPr>
+        <p:txBody>
+          <a:bodyPr wrap="square" rtlCol="0" anchor="ctr"/>
+          <a:lstStyle/>
+          <a:p>
+            <a:pPr indent="0" marL="0">
+              <a:buNone/>
+            </a:pPr>
+            <a:r>
+              <a:rPr lang="en-US" sz="950" dirty="0">
+                <a:solidFill>
+                  <a:srgbClr val="3D3935"/>
+                </a:solidFill>
+                <a:latin typeface="Microsoft JhengHei" pitchFamily="34" charset="0"/>
+                <a:ea typeface="Microsoft JhengHei" pitchFamily="34" charset="-122"/>
+                <a:cs typeface="Microsoft JhengHei" pitchFamily="34" charset="-120"/>
+              </a:rPr>
+              <a:t>非對外資訊</a:t>
+            </a:r>
+            <a:endParaRPr lang="en-US" sz="950" dirty="0"/>
+          </a:p>
+        </p:txBody>
+      </p:sp>
+      <p:sp>
+        <p:nvSpPr>
+          <p:cNvPr id="16" name="Shape 14"/>
+          <p:cNvSpPr/>
+          <p:nvPr/>
+        </p:nvSpPr>
+        <p:spPr>
+          <a:xfrm>
+            <a:off x="502920" y="3054096"/>
+            <a:ext cx="8138160" cy="548640"/>
+          </a:xfrm>
+          <a:prstGeom prst="roundRect">
+            <a:avLst>
+              <a:gd name="adj" fmla="val 8333"/>
+            </a:avLst>
+          </a:prstGeom>
+          <a:solidFill>
+            <a:srgbClr val="FBEDED"/>
+          </a:solidFill>
+          <a:ln/>
+        </p:spPr>
+      </p:sp>
+      <p:sp>
+        <p:nvSpPr>
+          <p:cNvPr id="17" name="Text 15"/>
+          <p:cNvSpPr/>
+          <p:nvPr/>
+        </p:nvSpPr>
+        <p:spPr>
+          <a:xfrm>
+            <a:off x="685800" y="3090672"/>
+            <a:ext cx="4663440" cy="475488"/>
+          </a:xfrm>
+          <a:prstGeom prst="rect">
+            <a:avLst/>
+          </a:prstGeom>
+          <a:noFill/>
+          <a:ln/>
+        </p:spPr>
+        <p:txBody>
+          <a:bodyPr wrap="square" rtlCol="0" anchor="ctr"/>
+          <a:lstStyle/>
+          <a:p>
+            <a:pPr indent="0" marL="0">
+              <a:lnSpc>
+                <a:spcPts val="1300"/>
+              </a:lnSpc>
+              <a:buNone/>
+            </a:pPr>
+            <a:r>
+              <a:rPr lang="en-US" sz="1150" b="1" dirty="0">
+                <a:solidFill>
+                  <a:srgbClr val="9A3B3B"/>
+                </a:solidFill>
+                <a:latin typeface="Microsoft JhengHei" pitchFamily="34" charset="0"/>
+                <a:ea typeface="Microsoft JhengHei" pitchFamily="34" charset="-122"/>
+                <a:cs typeface="Microsoft JhengHei" pitchFamily="34" charset="-120"/>
+              </a:rPr>
+              <a:t>✕  其他中獎者的姓名／電話／中獎內容
+</a:t>
+            </a:r>
+            <a:pPr indent="0" marL="0">
+              <a:lnSpc>
+                <a:spcPts val="1300"/>
+              </a:lnSpc>
+              <a:buNone/>
+            </a:pPr>
+            <a:r>
+              <a:rPr lang="en-US" sz="850" dirty="0">
+                <a:solidFill>
+                  <a:srgbClr val="9A3B3B"/>
+                </a:solidFill>
+                <a:latin typeface="Microsoft JhengHei" pitchFamily="34" charset="0"/>
+                <a:ea typeface="Microsoft JhengHei" pitchFamily="34" charset="-122"/>
+                <a:cs typeface="Microsoft JhengHei" pitchFamily="34" charset="-120"/>
+              </a:rPr>
+              <a:t>　  Other winners' names, numbers or prizes</a:t>
+            </a:r>
+            <a:endParaRPr lang="en-US" sz="1150" dirty="0"/>
+          </a:p>
+        </p:txBody>
+      </p:sp>
+      <p:sp>
+        <p:nvSpPr>
+          <p:cNvPr id="18" name="Text 16"/>
+          <p:cNvSpPr/>
+          <p:nvPr/>
+        </p:nvSpPr>
+        <p:spPr>
+          <a:xfrm>
+            <a:off x="5440680" y="3090672"/>
+            <a:ext cx="3063240" cy="475488"/>
+          </a:xfrm>
+          <a:prstGeom prst="rect">
+            <a:avLst/>
+          </a:prstGeom>
+          <a:noFill/>
+          <a:ln/>
+        </p:spPr>
+        <p:txBody>
+          <a:bodyPr wrap="square" rtlCol="0" anchor="ctr"/>
+          <a:lstStyle/>
+          <a:p>
+            <a:pPr indent="0" marL="0">
+              <a:buNone/>
+            </a:pPr>
+            <a:r>
+              <a:rPr lang="en-US" sz="950" dirty="0">
+                <a:solidFill>
+                  <a:srgbClr val="3D3935"/>
+                </a:solidFill>
+                <a:latin typeface="Microsoft JhengHei" pitchFamily="34" charset="0"/>
+                <a:ea typeface="Microsoft JhengHei" pitchFamily="34" charset="-122"/>
+                <a:cs typeface="Microsoft JhengHei" pitchFamily="34" charset="-120"/>
+              </a:rPr>
+              <a:t>個人資料，涉及法律責任</a:t>
+            </a:r>
+            <a:endParaRPr lang="en-US" sz="950" dirty="0"/>
+          </a:p>
+        </p:txBody>
+      </p:sp>
+      <p:sp>
+        <p:nvSpPr>
+          <p:cNvPr id="19" name="Shape 17"/>
+          <p:cNvSpPr/>
+          <p:nvPr/>
+        </p:nvSpPr>
+        <p:spPr>
+          <a:xfrm>
+            <a:off x="502920" y="3675888"/>
+            <a:ext cx="8138160" cy="548640"/>
+          </a:xfrm>
+          <a:prstGeom prst="roundRect">
+            <a:avLst>
+              <a:gd name="adj" fmla="val 8333"/>
+            </a:avLst>
+          </a:prstGeom>
+          <a:solidFill>
+            <a:srgbClr val="FBEDED"/>
+          </a:solidFill>
+          <a:ln/>
+        </p:spPr>
+      </p:sp>
+      <p:sp>
+        <p:nvSpPr>
+          <p:cNvPr id="20" name="Text 18"/>
+          <p:cNvSpPr/>
+          <p:nvPr/>
+        </p:nvSpPr>
+        <p:spPr>
+          <a:xfrm>
+            <a:off x="685800" y="3712464"/>
+            <a:ext cx="4663440" cy="475488"/>
+          </a:xfrm>
+          <a:prstGeom prst="rect">
+            <a:avLst/>
+          </a:prstGeom>
+          <a:noFill/>
+          <a:ln/>
+        </p:spPr>
+        <p:txBody>
+          <a:bodyPr wrap="square" rtlCol="0" anchor="ctr"/>
+          <a:lstStyle/>
+          <a:p>
+            <a:pPr indent="0" marL="0">
+              <a:lnSpc>
+                <a:spcPts val="1300"/>
+              </a:lnSpc>
+              <a:buNone/>
+            </a:pPr>
+            <a:r>
+              <a:rPr lang="en-US" sz="1150" b="1" dirty="0">
+                <a:solidFill>
+                  <a:srgbClr val="9A3B3B"/>
+                </a:solidFill>
+                <a:latin typeface="Microsoft JhengHei" pitchFamily="34" charset="0"/>
+                <a:ea typeface="Microsoft JhengHei" pitchFamily="34" charset="-122"/>
+                <a:cs typeface="Microsoft JhengHei" pitchFamily="34" charset="-120"/>
+              </a:rPr>
+              <a:t>✕  對兌換方式或日期做個人承諾
+</a:t>
+            </a:r>
+            <a:pPr indent="0" marL="0">
+              <a:lnSpc>
+                <a:spcPts val="1300"/>
+              </a:lnSpc>
+              <a:buNone/>
+            </a:pPr>
+            <a:r>
+              <a:rPr lang="en-US" sz="850" dirty="0">
+                <a:solidFill>
+                  <a:srgbClr val="9A3B3B"/>
+                </a:solidFill>
+                <a:latin typeface="Microsoft JhengHei" pitchFamily="34" charset="0"/>
+                <a:ea typeface="Microsoft JhengHei" pitchFamily="34" charset="-122"/>
+                <a:cs typeface="Microsoft JhengHei" pitchFamily="34" charset="-120"/>
+              </a:rPr>
+              <a:t>　  Personal promises about redemption terms or dates</a:t>
+            </a:r>
+            <a:endParaRPr lang="en-US" sz="1150" dirty="0"/>
+          </a:p>
+        </p:txBody>
+      </p:sp>
+      <p:sp>
+        <p:nvSpPr>
+          <p:cNvPr id="21" name="Text 19"/>
+          <p:cNvSpPr/>
+          <p:nvPr/>
+        </p:nvSpPr>
+        <p:spPr>
+          <a:xfrm>
+            <a:off x="5440680" y="3712464"/>
+            <a:ext cx="3063240" cy="475488"/>
+          </a:xfrm>
+          <a:prstGeom prst="rect">
+            <a:avLst/>
+          </a:prstGeom>
+          <a:noFill/>
+          <a:ln/>
+        </p:spPr>
+        <p:txBody>
+          <a:bodyPr wrap="square" rtlCol="0" anchor="ctr"/>
+          <a:lstStyle/>
+          <a:p>
+            <a:pPr indent="0" marL="0">
+              <a:buNone/>
+            </a:pPr>
+            <a:r>
+              <a:rPr lang="en-US" sz="950" dirty="0">
+                <a:solidFill>
+                  <a:srgbClr val="3D3935"/>
+                </a:solidFill>
+                <a:latin typeface="Microsoft JhengHei" pitchFamily="34" charset="0"/>
+                <a:ea typeface="Microsoft JhengHei" pitchFamily="34" charset="-122"/>
+                <a:cs typeface="Microsoft JhengHei" pitchFamily="34" charset="-120"/>
+              </a:rPr>
+              <a:t>一切以活動頁公告與券面規則為準</a:t>
+            </a:r>
+            <a:endParaRPr lang="en-US" sz="950" dirty="0"/>
+          </a:p>
+        </p:txBody>
+      </p:sp>
+      <p:sp>
+        <p:nvSpPr>
+          <p:cNvPr id="22" name="Shape 20"/>
+          <p:cNvSpPr/>
+          <p:nvPr/>
+        </p:nvSpPr>
+        <p:spPr>
+          <a:xfrm>
+            <a:off x="502920" y="4370832"/>
+            <a:ext cx="8138160" cy="530352"/>
+          </a:xfrm>
+          <a:prstGeom prst="roundRect">
+            <a:avLst>
+              <a:gd name="adj" fmla="val 10345"/>
+            </a:avLst>
+          </a:prstGeom>
+          <a:solidFill>
+            <a:srgbClr val="FBF1DC"/>
           </a:solidFill>
           <a:ln w="9525">
             <a:solidFill>
-              <a:srgbClr val="DAD9D6"/>
+              <a:srgbClr val="9C6212"/>
             </a:solidFill>
             <a:prstDash val="solid"/>
           </a:ln>
         </p:spPr>
-        <p:txBody>
-          <a:bodyPr/>
-          <a:lstStyle/>
-          <a:p>
-            <a:endParaRPr lang="zh-TW" altLang="en-US"/>
-          </a:p>
-        </p:txBody>
-      </p:sp>
-      <p:sp>
-        <p:nvSpPr>
-          <p:cNvPr id="8" name="Text 6"/>
-          <p:cNvSpPr/>
-          <p:nvPr/>
-        </p:nvSpPr>
-        <p:spPr>
-          <a:xfrm>
-            <a:off x="685800" y="1280160"/>
-            <a:ext cx="320040" cy="457200"/>
-          </a:xfrm>
-          <a:prstGeom prst="rect">
-            <a:avLst/>
-          </a:prstGeom>
-          <a:noFill/>
-          <a:ln/>
-        </p:spPr>
-        <p:txBody>
-          <a:bodyPr wrap="square" rtlCol="0" anchor="ctr"/>
-          <a:lstStyle/>
-          <a:p>
-            <a:pPr marL="0" indent="0">
-              <a:buNone/>
-            </a:pPr>
-            <a:r>
-              <a:rPr lang="en-US" sz="1400" dirty="0">
-                <a:solidFill>
-                  <a:srgbClr val="B8923E"/>
-                </a:solidFill>
-                <a:latin typeface="Microsoft JhengHei" pitchFamily="34" charset="0"/>
-                <a:ea typeface="Microsoft JhengHei" pitchFamily="34" charset="-122"/>
-                <a:cs typeface="Microsoft JhengHei" pitchFamily="34" charset="-120"/>
-              </a:rPr>
-              <a:t>→</a:t>
-            </a:r>
-            <a:endParaRPr lang="en-US" sz="1400" dirty="0"/>
-          </a:p>
-        </p:txBody>
-      </p:sp>
-      <p:sp>
-        <p:nvSpPr>
-          <p:cNvPr id="9" name="Text 7"/>
-          <p:cNvSpPr/>
-          <p:nvPr/>
-        </p:nvSpPr>
-        <p:spPr>
-          <a:xfrm>
-            <a:off x="1051560" y="1280160"/>
-            <a:ext cx="7406640" cy="475488"/>
-          </a:xfrm>
-          <a:prstGeom prst="rect">
-            <a:avLst/>
-          </a:prstGeom>
-          <a:noFill/>
-          <a:ln/>
-        </p:spPr>
-        <p:txBody>
-          <a:bodyPr wrap="square" rtlCol="0" anchor="ctr"/>
-          <a:lstStyle/>
-          <a:p>
-            <a:pPr marL="0" indent="0">
-              <a:lnSpc>
-                <a:spcPts val="1300"/>
-              </a:lnSpc>
-              <a:buNone/>
-            </a:pPr>
-            <a:r>
-              <a:rPr lang="en-US" sz="1150" dirty="0">
-                <a:solidFill>
-                  <a:srgbClr val="3D3935"/>
-                </a:solidFill>
-                <a:latin typeface="Microsoft JhengHei" pitchFamily="34" charset="0"/>
-                <a:ea typeface="Microsoft JhengHei" pitchFamily="34" charset="-122"/>
-                <a:cs typeface="Microsoft JhengHei" pitchFamily="34" charset="-120"/>
-              </a:rPr>
-              <a:t>客人說沒收到券，且在 LINE 對話中確實找不到
+      </p:sp>
+      <p:sp>
+        <p:nvSpPr>
+          <p:cNvPr id="23" name="Text 21"/>
+          <p:cNvSpPr/>
+          <p:nvPr/>
+        </p:nvSpPr>
+        <p:spPr>
+          <a:xfrm>
+            <a:off x="649224" y="4416552"/>
+            <a:ext cx="7845552" cy="438912"/>
+          </a:xfrm>
+          <a:prstGeom prst="rect">
+            <a:avLst/>
+          </a:prstGeom>
+          <a:noFill/>
+          <a:ln/>
+        </p:spPr>
+        <p:txBody>
+          <a:bodyPr wrap="square" rtlCol="0" anchor="ctr"/>
+          <a:lstStyle/>
+          <a:p>
+            <a:pPr indent="0" marL="0">
+              <a:lnSpc>
+                <a:spcPts val="1500"/>
+              </a:lnSpc>
+              <a:buNone/>
+            </a:pPr>
+            <a:r>
+              <a:rPr lang="en-US" sz="1200" dirty="0">
+                <a:solidFill>
+                  <a:srgbClr val="9C6212"/>
+                </a:solidFill>
+                <a:latin typeface="Microsoft JhengHei" pitchFamily="34" charset="0"/>
+                <a:ea typeface="Microsoft JhengHei" pitchFamily="34" charset="-122"/>
+                <a:cs typeface="Microsoft JhengHei" pitchFamily="34" charset="-120"/>
+              </a:rPr>
+              <a:t>🙋  </a:t>
+            </a:r>
+            <a:pPr indent="0" marL="0">
+              <a:lnSpc>
+                <a:spcPts val="1500"/>
+              </a:lnSpc>
+              <a:buNone/>
+            </a:pPr>
+            <a:r>
+              <a:rPr lang="en-US" sz="1150" b="1" dirty="0">
+                <a:solidFill>
+                  <a:srgbClr val="9C6212"/>
+                </a:solidFill>
+                <a:latin typeface="Microsoft JhengHei" pitchFamily="34" charset="0"/>
+                <a:ea typeface="Microsoft JhengHei" pitchFamily="34" charset="-122"/>
+                <a:cs typeface="Microsoft JhengHei" pitchFamily="34" charset="-120"/>
+              </a:rPr>
+              <a:t>遇到無法回答或客人情緒不佳時，請轉給主管處理，不要自行承諾。
 </a:t>
             </a:r>
-            <a:r>
-              <a:rPr lang="en-US" sz="850" dirty="0">
-                <a:solidFill>
-                  <a:srgbClr val="6E6A63"/>
-                </a:solidFill>
-                <a:latin typeface="Microsoft JhengHei" pitchFamily="34" charset="0"/>
-                <a:ea typeface="Microsoft JhengHei" pitchFamily="34" charset="-122"/>
-                <a:cs typeface="Microsoft JhengHei" pitchFamily="34" charset="-120"/>
-              </a:rPr>
-              <a:t>Guest reports a missing coupon and it is genuinely not in their LINE chat</a:t>
-            </a:r>
-            <a:endParaRPr lang="en-US" sz="1150" dirty="0"/>
-          </a:p>
-        </p:txBody>
-      </p:sp>
-      <p:sp>
-        <p:nvSpPr>
-          <p:cNvPr id="10" name="Shape 8"/>
-          <p:cNvSpPr/>
-          <p:nvPr/>
-        </p:nvSpPr>
-        <p:spPr>
-          <a:xfrm>
-            <a:off x="502920" y="1892808"/>
-            <a:ext cx="8138160" cy="566928"/>
-          </a:xfrm>
-          <a:prstGeom prst="roundRect">
-            <a:avLst>
-              <a:gd name="adj" fmla="val 8065"/>
-            </a:avLst>
-          </a:prstGeom>
-          <a:solidFill>
-            <a:srgbClr val="FFFDFA"/>
-          </a:solidFill>
-          <a:ln w="9525">
-            <a:solidFill>
-              <a:srgbClr val="DAD9D6"/>
-            </a:solidFill>
-            <a:prstDash val="solid"/>
-          </a:ln>
-        </p:spPr>
-        <p:txBody>
-          <a:bodyPr/>
-          <a:lstStyle/>
-          <a:p>
-            <a:endParaRPr lang="zh-TW" altLang="en-US"/>
-          </a:p>
-        </p:txBody>
-      </p:sp>
-      <p:sp>
-        <p:nvSpPr>
-          <p:cNvPr id="11" name="Text 9"/>
-          <p:cNvSpPr/>
-          <p:nvPr/>
-        </p:nvSpPr>
-        <p:spPr>
-          <a:xfrm>
-            <a:off x="685800" y="1938528"/>
-            <a:ext cx="320040" cy="457200"/>
-          </a:xfrm>
-          <a:prstGeom prst="rect">
-            <a:avLst/>
-          </a:prstGeom>
-          <a:noFill/>
-          <a:ln/>
-        </p:spPr>
-        <p:txBody>
-          <a:bodyPr wrap="square" rtlCol="0" anchor="ctr"/>
-          <a:lstStyle/>
-          <a:p>
-            <a:pPr marL="0" indent="0">
-              <a:buNone/>
-            </a:pPr>
-            <a:r>
-              <a:rPr lang="en-US" sz="1400" dirty="0">
-                <a:solidFill>
-                  <a:srgbClr val="B8923E"/>
-                </a:solidFill>
-                <a:latin typeface="Microsoft JhengHei" pitchFamily="34" charset="0"/>
-                <a:ea typeface="Microsoft JhengHei" pitchFamily="34" charset="-122"/>
-                <a:cs typeface="Microsoft JhengHei" pitchFamily="34" charset="-120"/>
-              </a:rPr>
-              <a:t>→</a:t>
-            </a:r>
-            <a:endParaRPr lang="en-US" sz="1400" dirty="0"/>
-          </a:p>
-        </p:txBody>
-      </p:sp>
-      <p:sp>
-        <p:nvSpPr>
-          <p:cNvPr id="12" name="Text 10"/>
-          <p:cNvSpPr/>
-          <p:nvPr/>
-        </p:nvSpPr>
-        <p:spPr>
-          <a:xfrm>
-            <a:off x="1051560" y="1938528"/>
-            <a:ext cx="7406640" cy="475488"/>
-          </a:xfrm>
-          <a:prstGeom prst="rect">
-            <a:avLst/>
-          </a:prstGeom>
-          <a:noFill/>
-          <a:ln/>
-        </p:spPr>
-        <p:txBody>
-          <a:bodyPr wrap="square" rtlCol="0" anchor="ctr"/>
-          <a:lstStyle/>
-          <a:p>
-            <a:pPr marL="0" indent="0">
-              <a:lnSpc>
-                <a:spcPts val="1300"/>
-              </a:lnSpc>
-              <a:buNone/>
-            </a:pPr>
-            <a:r>
-              <a:rPr lang="en-US" sz="1150" dirty="0">
-                <a:solidFill>
-                  <a:srgbClr val="3D3935"/>
-                </a:solidFill>
-                <a:latin typeface="Microsoft JhengHei" pitchFamily="34" charset="0"/>
-                <a:ea typeface="Microsoft JhengHei" pitchFamily="34" charset="-122"/>
-                <a:cs typeface="Microsoft JhengHei" pitchFamily="34" charset="-120"/>
-              </a:rPr>
-              <a:t>客人的兌換碼查不到，或狀態異常
-</a:t>
-            </a:r>
-            <a:r>
-              <a:rPr lang="en-US" sz="850" dirty="0">
-                <a:solidFill>
-                  <a:srgbClr val="6E6A63"/>
-                </a:solidFill>
-                <a:latin typeface="Microsoft JhengHei" pitchFamily="34" charset="0"/>
-                <a:ea typeface="Microsoft JhengHei" pitchFamily="34" charset="-122"/>
-                <a:cs typeface="Microsoft JhengHei" pitchFamily="34" charset="-120"/>
-              </a:rPr>
-              <a:t>A redemption code cannot be found, or its status looks wrong</a:t>
-            </a:r>
-            <a:endParaRPr lang="en-US" sz="1150" dirty="0"/>
-          </a:p>
-        </p:txBody>
-      </p:sp>
-      <p:sp>
-        <p:nvSpPr>
-          <p:cNvPr id="13" name="Shape 11"/>
-          <p:cNvSpPr/>
-          <p:nvPr/>
-        </p:nvSpPr>
-        <p:spPr>
-          <a:xfrm>
-            <a:off x="502920" y="2551176"/>
-            <a:ext cx="8138160" cy="566928"/>
-          </a:xfrm>
-          <a:prstGeom prst="roundRect">
-            <a:avLst>
-              <a:gd name="adj" fmla="val 8065"/>
-            </a:avLst>
-          </a:prstGeom>
-          <a:solidFill>
-            <a:srgbClr val="FFFDFA"/>
-          </a:solidFill>
-          <a:ln w="9525">
-            <a:solidFill>
-              <a:srgbClr val="DAD9D6"/>
-            </a:solidFill>
-            <a:prstDash val="solid"/>
-          </a:ln>
-        </p:spPr>
-        <p:txBody>
-          <a:bodyPr/>
-          <a:lstStyle/>
-          <a:p>
-            <a:endParaRPr lang="zh-TW" altLang="en-US"/>
-          </a:p>
-        </p:txBody>
-      </p:sp>
-      <p:sp>
-        <p:nvSpPr>
-          <p:cNvPr id="14" name="Text 12"/>
-          <p:cNvSpPr/>
-          <p:nvPr/>
-        </p:nvSpPr>
-        <p:spPr>
-          <a:xfrm>
-            <a:off x="685800" y="2596896"/>
-            <a:ext cx="320040" cy="457200"/>
-          </a:xfrm>
-          <a:prstGeom prst="rect">
-            <a:avLst/>
-          </a:prstGeom>
-          <a:noFill/>
-          <a:ln/>
-        </p:spPr>
-        <p:txBody>
-          <a:bodyPr wrap="square" rtlCol="0" anchor="ctr"/>
-          <a:lstStyle/>
-          <a:p>
-            <a:pPr marL="0" indent="0">
-              <a:buNone/>
-            </a:pPr>
-            <a:r>
-              <a:rPr lang="en-US" sz="1400" dirty="0">
-                <a:solidFill>
-                  <a:srgbClr val="B8923E"/>
-                </a:solidFill>
-                <a:latin typeface="Microsoft JhengHei" pitchFamily="34" charset="0"/>
-                <a:ea typeface="Microsoft JhengHei" pitchFamily="34" charset="-122"/>
-                <a:cs typeface="Microsoft JhengHei" pitchFamily="34" charset="-120"/>
-              </a:rPr>
-              <a:t>→</a:t>
-            </a:r>
-            <a:endParaRPr lang="en-US" sz="1400" dirty="0"/>
-          </a:p>
-        </p:txBody>
-      </p:sp>
-      <p:sp>
-        <p:nvSpPr>
-          <p:cNvPr id="15" name="Text 13"/>
-          <p:cNvSpPr/>
-          <p:nvPr/>
-        </p:nvSpPr>
-        <p:spPr>
-          <a:xfrm>
-            <a:off x="1051560" y="2596896"/>
-            <a:ext cx="7406640" cy="475488"/>
-          </a:xfrm>
-          <a:prstGeom prst="rect">
-            <a:avLst/>
-          </a:prstGeom>
-          <a:noFill/>
-          <a:ln/>
-        </p:spPr>
-        <p:txBody>
-          <a:bodyPr wrap="square" rtlCol="0" anchor="ctr"/>
-          <a:lstStyle/>
-          <a:p>
-            <a:pPr marL="0" indent="0">
-              <a:lnSpc>
-                <a:spcPts val="1300"/>
-              </a:lnSpc>
-              <a:buNone/>
-            </a:pPr>
-            <a:r>
-              <a:rPr lang="en-US" sz="1150" dirty="0">
-                <a:solidFill>
-                  <a:srgbClr val="3D3935"/>
-                </a:solidFill>
-                <a:latin typeface="Microsoft JhengHei" pitchFamily="34" charset="0"/>
-                <a:ea typeface="Microsoft JhengHei" pitchFamily="34" charset="-122"/>
-                <a:cs typeface="Microsoft JhengHei" pitchFamily="34" charset="-120"/>
-              </a:rPr>
-              <a:t>客人拿臺北洲際的兌換碼到高雄要求核銷
-</a:t>
-            </a:r>
-            <a:r>
-              <a:rPr lang="en-US" sz="850" dirty="0">
-                <a:solidFill>
-                  <a:srgbClr val="6E6A63"/>
-                </a:solidFill>
-                <a:latin typeface="Microsoft JhengHei" pitchFamily="34" charset="0"/>
-                <a:ea typeface="Microsoft JhengHei" pitchFamily="34" charset="-122"/>
-                <a:cs typeface="Microsoft JhengHei" pitchFamily="34" charset="-120"/>
-              </a:rPr>
-              <a:t>A guest presents a Taipei redemption code at a Kaohsiung counter</a:t>
-            </a:r>
-            <a:endParaRPr lang="en-US" sz="1150" dirty="0"/>
-          </a:p>
-        </p:txBody>
-      </p:sp>
-      <p:sp>
-        <p:nvSpPr>
-          <p:cNvPr id="16" name="Shape 14"/>
-          <p:cNvSpPr/>
-          <p:nvPr/>
-        </p:nvSpPr>
-        <p:spPr>
-          <a:xfrm>
-            <a:off x="502920" y="3209544"/>
-            <a:ext cx="8138160" cy="566928"/>
-          </a:xfrm>
-          <a:prstGeom prst="roundRect">
-            <a:avLst>
-              <a:gd name="adj" fmla="val 8065"/>
-            </a:avLst>
-          </a:prstGeom>
-          <a:solidFill>
-            <a:srgbClr val="FFFDFA"/>
-          </a:solidFill>
-          <a:ln w="9525">
-            <a:solidFill>
-              <a:srgbClr val="DAD9D6"/>
-            </a:solidFill>
-            <a:prstDash val="solid"/>
-          </a:ln>
-        </p:spPr>
-      </p:sp>
-      <p:sp>
-        <p:nvSpPr>
-          <p:cNvPr id="17" name="Text 15"/>
-          <p:cNvSpPr/>
-          <p:nvPr/>
-        </p:nvSpPr>
-        <p:spPr>
-          <a:xfrm>
-            <a:off x="685800" y="3255264"/>
-            <a:ext cx="320040" cy="457200"/>
-          </a:xfrm>
-          <a:prstGeom prst="rect">
-            <a:avLst/>
-          </a:prstGeom>
-          <a:noFill/>
-          <a:ln/>
-        </p:spPr>
-        <p:txBody>
-          <a:bodyPr wrap="square" rtlCol="0" anchor="ctr"/>
-          <a:lstStyle/>
-          <a:p>
-            <a:pPr marL="0" indent="0">
-              <a:buNone/>
-            </a:pPr>
-            <a:r>
-              <a:rPr lang="en-US" sz="1400" dirty="0">
-                <a:solidFill>
-                  <a:srgbClr val="B8923E"/>
-                </a:solidFill>
-                <a:latin typeface="Microsoft JhengHei" pitchFamily="34" charset="0"/>
-                <a:ea typeface="Microsoft JhengHei" pitchFamily="34" charset="-122"/>
-                <a:cs typeface="Microsoft JhengHei" pitchFamily="34" charset="-120"/>
-              </a:rPr>
-              <a:t>→</a:t>
-            </a:r>
-            <a:endParaRPr lang="en-US" sz="1400" dirty="0"/>
-          </a:p>
-        </p:txBody>
-      </p:sp>
-      <p:sp>
-        <p:nvSpPr>
-          <p:cNvPr id="18" name="Text 16"/>
-          <p:cNvSpPr/>
-          <p:nvPr/>
-        </p:nvSpPr>
-        <p:spPr>
-          <a:xfrm>
-            <a:off x="1051560" y="3255264"/>
-            <a:ext cx="7406640" cy="475488"/>
-          </a:xfrm>
-          <a:prstGeom prst="rect">
-            <a:avLst/>
-          </a:prstGeom>
-          <a:noFill/>
-          <a:ln/>
-        </p:spPr>
-        <p:txBody>
-          <a:bodyPr wrap="square" rtlCol="0" anchor="ctr"/>
-          <a:lstStyle/>
-          <a:p>
-            <a:pPr marL="0" indent="0">
-              <a:lnSpc>
-                <a:spcPts val="1300"/>
-              </a:lnSpc>
-              <a:buNone/>
-            </a:pPr>
-            <a:r>
-              <a:rPr lang="en-US" sz="1150" dirty="0">
-                <a:solidFill>
-                  <a:srgbClr val="3D3935"/>
-                </a:solidFill>
-                <a:latin typeface="Microsoft JhengHei" pitchFamily="34" charset="0"/>
-                <a:ea typeface="Microsoft JhengHei" pitchFamily="34" charset="-122"/>
-                <a:cs typeface="Microsoft JhengHei" pitchFamily="34" charset="-120"/>
-              </a:rPr>
-              <a:t>客人對中獎結果或活動規則提出申訴
-</a:t>
-            </a:r>
-            <a:r>
-              <a:rPr lang="en-US" sz="850" dirty="0">
-                <a:solidFill>
-                  <a:srgbClr val="6E6A63"/>
-                </a:solidFill>
-                <a:latin typeface="Microsoft JhengHei" pitchFamily="34" charset="0"/>
-                <a:ea typeface="Microsoft JhengHei" pitchFamily="34" charset="-122"/>
-                <a:cs typeface="Microsoft JhengHei" pitchFamily="34" charset="-120"/>
-              </a:rPr>
-              <a:t>A guest disputes the result or the campaign rules</a:t>
-            </a:r>
-            <a:endParaRPr lang="en-US" sz="1150" dirty="0"/>
-          </a:p>
-        </p:txBody>
-      </p:sp>
-      <p:sp>
-        <p:nvSpPr>
-          <p:cNvPr id="19" name="Shape 17"/>
-          <p:cNvSpPr/>
-          <p:nvPr/>
-        </p:nvSpPr>
-        <p:spPr>
-          <a:xfrm>
-            <a:off x="502920" y="3867912"/>
-            <a:ext cx="8138160" cy="566928"/>
-          </a:xfrm>
-          <a:prstGeom prst="roundRect">
-            <a:avLst>
-              <a:gd name="adj" fmla="val 8065"/>
-            </a:avLst>
-          </a:prstGeom>
-          <a:solidFill>
-            <a:srgbClr val="FFFDFA"/>
-          </a:solidFill>
-          <a:ln w="9525">
-            <a:solidFill>
-              <a:srgbClr val="DAD9D6"/>
-            </a:solidFill>
-            <a:prstDash val="solid"/>
-          </a:ln>
-        </p:spPr>
-        <p:txBody>
-          <a:bodyPr/>
-          <a:lstStyle/>
-          <a:p>
-            <a:endParaRPr lang="zh-TW" altLang="en-US"/>
-          </a:p>
-        </p:txBody>
-      </p:sp>
-      <p:sp>
-        <p:nvSpPr>
-          <p:cNvPr id="20" name="Text 18"/>
-          <p:cNvSpPr/>
-          <p:nvPr/>
-        </p:nvSpPr>
-        <p:spPr>
-          <a:xfrm>
-            <a:off x="685800" y="3913632"/>
-            <a:ext cx="320040" cy="457200"/>
-          </a:xfrm>
-          <a:prstGeom prst="rect">
-            <a:avLst/>
-          </a:prstGeom>
-          <a:noFill/>
-          <a:ln/>
-        </p:spPr>
-        <p:txBody>
-          <a:bodyPr wrap="square" rtlCol="0" anchor="ctr"/>
-          <a:lstStyle/>
-          <a:p>
-            <a:pPr marL="0" indent="0">
-              <a:buNone/>
-            </a:pPr>
-            <a:r>
-              <a:rPr lang="en-US" sz="1400" dirty="0">
-                <a:solidFill>
-                  <a:srgbClr val="B8923E"/>
-                </a:solidFill>
-                <a:latin typeface="Microsoft JhengHei" pitchFamily="34" charset="0"/>
-                <a:ea typeface="Microsoft JhengHei" pitchFamily="34" charset="-122"/>
-                <a:cs typeface="Microsoft JhengHei" pitchFamily="34" charset="-120"/>
-              </a:rPr>
-              <a:t>→</a:t>
-            </a:r>
-            <a:endParaRPr lang="en-US" sz="1400" dirty="0"/>
-          </a:p>
-        </p:txBody>
-      </p:sp>
-      <p:sp>
-        <p:nvSpPr>
-          <p:cNvPr id="21" name="Text 19"/>
-          <p:cNvSpPr/>
-          <p:nvPr/>
-        </p:nvSpPr>
-        <p:spPr>
-          <a:xfrm>
-            <a:off x="1051560" y="3913632"/>
-            <a:ext cx="7406640" cy="475488"/>
-          </a:xfrm>
-          <a:prstGeom prst="rect">
-            <a:avLst/>
-          </a:prstGeom>
-          <a:noFill/>
-          <a:ln/>
-        </p:spPr>
-        <p:txBody>
-          <a:bodyPr wrap="square" rtlCol="0" anchor="ctr"/>
-          <a:lstStyle/>
-          <a:p>
-            <a:pPr marL="0" indent="0">
-              <a:lnSpc>
-                <a:spcPts val="1300"/>
-              </a:lnSpc>
-              <a:buNone/>
-            </a:pPr>
-            <a:r>
-              <a:rPr lang="en-US" sz="1150" dirty="0">
-                <a:solidFill>
-                  <a:srgbClr val="3D3935"/>
-                </a:solidFill>
-                <a:latin typeface="Microsoft JhengHei" pitchFamily="34" charset="0"/>
-                <a:ea typeface="Microsoft JhengHei" pitchFamily="34" charset="-122"/>
-                <a:cs typeface="Microsoft JhengHei" pitchFamily="34" charset="-120"/>
-              </a:rPr>
-              <a:t>同一位客人短時間內出現大量中獎紀錄
-</a:t>
-            </a:r>
-            <a:r>
-              <a:rPr lang="en-US" sz="850" dirty="0">
-                <a:solidFill>
-                  <a:srgbClr val="6E6A63"/>
-                </a:solidFill>
-                <a:latin typeface="Microsoft JhengHei" pitchFamily="34" charset="0"/>
-                <a:ea typeface="Microsoft JhengHei" pitchFamily="34" charset="-122"/>
-                <a:cs typeface="Microsoft JhengHei" pitchFamily="34" charset="-120"/>
-              </a:rPr>
-              <a:t>One guest shows an unusually high number of wins in a short period</a:t>
-            </a:r>
-            <a:endParaRPr lang="en-US" sz="1150" dirty="0"/>
+            <a:pPr indent="0" marL="0">
+              <a:lnSpc>
+                <a:spcPts val="1500"/>
+              </a:lnSpc>
+              <a:buNone/>
+            </a:pPr>
+            <a:r>
+              <a:rPr lang="en-US" sz="950" dirty="0">
+                <a:solidFill>
+                  <a:srgbClr val="9C6212"/>
+                </a:solidFill>
+                <a:latin typeface="Microsoft JhengHei" pitchFamily="34" charset="0"/>
+                <a:ea typeface="Microsoft JhengHei" pitchFamily="34" charset="-122"/>
+                <a:cs typeface="Microsoft JhengHei" pitchFamily="34" charset="-120"/>
+              </a:rPr>
+              <a:t>　　 If you cannot answer, or the guest is upset, escalate to your supervisor — do not make commitments yourself.</a:t>
+            </a:r>
+            <a:endParaRPr lang="en-US" sz="1200" dirty="0"/>
           </a:p>
         </p:txBody>
       </p:sp>
@@ -5004,9 +5366,8 @@
     <p:bg>
       <p:bgPr>
         <a:solidFill>
-          <a:srgbClr val="2B2620"/>
+          <a:srgbClr val="FAF8F6"/>
         </a:solidFill>
-        <a:effectLst/>
       </p:bgPr>
     </p:bg>
     <p:spTree>
@@ -5031,6 +5392,844 @@
         </p:nvSpPr>
         <p:spPr>
           <a:xfrm>
+            <a:off x="502920" y="274320"/>
+            <a:ext cx="8138160" cy="384048"/>
+          </a:xfrm>
+          <a:prstGeom prst="rect">
+            <a:avLst/>
+          </a:prstGeom>
+          <a:noFill/>
+          <a:ln/>
+        </p:spPr>
+        <p:txBody>
+          <a:bodyPr wrap="square" rtlCol="0" anchor="ctr"/>
+          <a:lstStyle/>
+          <a:p>
+            <a:pPr indent="0" marL="0">
+              <a:buNone/>
+            </a:pPr>
+            <a:r>
+              <a:rPr lang="en-US" sz="2200" b="1" dirty="0">
+                <a:solidFill>
+                  <a:srgbClr val="3D3935"/>
+                </a:solidFill>
+                <a:latin typeface="Microsoft JhengHei" pitchFamily="34" charset="0"/>
+                <a:ea typeface="Microsoft JhengHei" pitchFamily="34" charset="-122"/>
+                <a:cs typeface="Microsoft JhengHei" pitchFamily="34" charset="-120"/>
+              </a:rPr>
+              <a:t>九、什麼狀況要往上回報</a:t>
+            </a:r>
+            <a:endParaRPr lang="en-US" sz="2200" dirty="0"/>
+          </a:p>
+        </p:txBody>
+      </p:sp>
+      <p:sp>
+        <p:nvSpPr>
+          <p:cNvPr id="3" name="Text 1"/>
+          <p:cNvSpPr/>
+          <p:nvPr/>
+        </p:nvSpPr>
+        <p:spPr>
+          <a:xfrm>
+            <a:off x="502920" y="658368"/>
+            <a:ext cx="8138160" cy="256032"/>
+          </a:xfrm>
+          <a:prstGeom prst="rect">
+            <a:avLst/>
+          </a:prstGeom>
+          <a:noFill/>
+          <a:ln/>
+        </p:spPr>
+        <p:txBody>
+          <a:bodyPr wrap="square" rtlCol="0" anchor="ctr"/>
+          <a:lstStyle/>
+          <a:p>
+            <a:pPr indent="0" marL="0">
+              <a:buNone/>
+            </a:pPr>
+            <a:r>
+              <a:rPr lang="en-US" sz="1150" dirty="0">
+                <a:solidFill>
+                  <a:srgbClr val="6E6A63"/>
+                </a:solidFill>
+                <a:latin typeface="Microsoft JhengHei" pitchFamily="34" charset="0"/>
+                <a:ea typeface="Microsoft JhengHei" pitchFamily="34" charset="-122"/>
+                <a:cs typeface="Microsoft JhengHei" pitchFamily="34" charset="-120"/>
+              </a:rPr>
+              <a:t>When to Escalate</a:t>
+            </a:r>
+            <a:endParaRPr lang="en-US" sz="1150" dirty="0"/>
+          </a:p>
+        </p:txBody>
+      </p:sp>
+      <p:sp>
+        <p:nvSpPr>
+          <p:cNvPr id="4" name="Shape 2"/>
+          <p:cNvSpPr/>
+          <p:nvPr/>
+        </p:nvSpPr>
+        <p:spPr>
+          <a:xfrm>
+            <a:off x="502920" y="941832"/>
+            <a:ext cx="457200" cy="36576"/>
+          </a:xfrm>
+          <a:prstGeom prst="rect">
+            <a:avLst/>
+          </a:prstGeom>
+          <a:solidFill>
+            <a:srgbClr val="935D08"/>
+          </a:solidFill>
+          <a:ln/>
+        </p:spPr>
+      </p:sp>
+      <p:sp>
+        <p:nvSpPr>
+          <p:cNvPr id="5" name="Text 3"/>
+          <p:cNvSpPr/>
+          <p:nvPr/>
+        </p:nvSpPr>
+        <p:spPr>
+          <a:xfrm>
+            <a:off x="8366760" y="4777740"/>
+            <a:ext cx="365760" cy="237744"/>
+          </a:xfrm>
+          <a:prstGeom prst="rect">
+            <a:avLst/>
+          </a:prstGeom>
+          <a:noFill/>
+          <a:ln/>
+        </p:spPr>
+        <p:txBody>
+          <a:bodyPr wrap="square" rtlCol="0" anchor="ctr"/>
+          <a:lstStyle/>
+          <a:p>
+            <a:pPr algn="r" indent="0" marL="0">
+              <a:buNone/>
+            </a:pPr>
+            <a:r>
+              <a:rPr lang="en-US" sz="950" dirty="0">
+                <a:solidFill>
+                  <a:srgbClr val="DAD9D6"/>
+                </a:solidFill>
+                <a:latin typeface="Microsoft JhengHei" pitchFamily="34" charset="0"/>
+                <a:ea typeface="Microsoft JhengHei" pitchFamily="34" charset="-122"/>
+                <a:cs typeface="Microsoft JhengHei" pitchFamily="34" charset="-120"/>
+              </a:rPr>
+              <a:t>13</a:t>
+            </a:r>
+            <a:endParaRPr lang="en-US" sz="950" dirty="0"/>
+          </a:p>
+        </p:txBody>
+      </p:sp>
+      <p:sp>
+        <p:nvSpPr>
+          <p:cNvPr id="6" name="Text 4"/>
+          <p:cNvSpPr/>
+          <p:nvPr/>
+        </p:nvSpPr>
+        <p:spPr>
+          <a:xfrm>
+            <a:off x="502920" y="4777740"/>
+            <a:ext cx="5486400" cy="237744"/>
+          </a:xfrm>
+          <a:prstGeom prst="rect">
+            <a:avLst/>
+          </a:prstGeom>
+          <a:noFill/>
+          <a:ln/>
+        </p:spPr>
+        <p:txBody>
+          <a:bodyPr wrap="square" rtlCol="0" anchor="ctr"/>
+          <a:lstStyle/>
+          <a:p>
+            <a:pPr indent="0" marL="0">
+              <a:buNone/>
+            </a:pPr>
+            <a:r>
+              <a:rPr lang="en-US" sz="850" dirty="0">
+                <a:solidFill>
+                  <a:srgbClr val="DAD9D6"/>
+                </a:solidFill>
+                <a:latin typeface="Microsoft JhengHei" pitchFamily="34" charset="0"/>
+                <a:ea typeface="Microsoft JhengHei" pitchFamily="34" charset="-122"/>
+                <a:cs typeface="Microsoft JhengHei" pitchFamily="34" charset="-120"/>
+              </a:rPr>
+              <a:t>洲遊幣 Lite 員工手冊 · InterCoins Lite Staff Guide</a:t>
+            </a:r>
+            <a:endParaRPr lang="en-US" sz="850" dirty="0"/>
+          </a:p>
+        </p:txBody>
+      </p:sp>
+      <p:sp>
+        <p:nvSpPr>
+          <p:cNvPr id="7" name="Shape 5"/>
+          <p:cNvSpPr/>
+          <p:nvPr/>
+        </p:nvSpPr>
+        <p:spPr>
+          <a:xfrm>
+            <a:off x="502920" y="1234440"/>
+            <a:ext cx="8138160" cy="566928"/>
+          </a:xfrm>
+          <a:prstGeom prst="roundRect">
+            <a:avLst>
+              <a:gd name="adj" fmla="val 8065"/>
+            </a:avLst>
+          </a:prstGeom>
+          <a:solidFill>
+            <a:srgbClr val="FFFDFA"/>
+          </a:solidFill>
+          <a:ln w="9525">
+            <a:solidFill>
+              <a:srgbClr val="DAD9D6"/>
+            </a:solidFill>
+            <a:prstDash val="solid"/>
+          </a:ln>
+        </p:spPr>
+      </p:sp>
+      <p:sp>
+        <p:nvSpPr>
+          <p:cNvPr id="8" name="Text 6"/>
+          <p:cNvSpPr/>
+          <p:nvPr/>
+        </p:nvSpPr>
+        <p:spPr>
+          <a:xfrm>
+            <a:off x="685800" y="1280160"/>
+            <a:ext cx="320040" cy="457200"/>
+          </a:xfrm>
+          <a:prstGeom prst="rect">
+            <a:avLst/>
+          </a:prstGeom>
+          <a:noFill/>
+          <a:ln/>
+        </p:spPr>
+        <p:txBody>
+          <a:bodyPr wrap="square" rtlCol="0" anchor="ctr"/>
+          <a:lstStyle/>
+          <a:p>
+            <a:pPr indent="0" marL="0">
+              <a:buNone/>
+            </a:pPr>
+            <a:r>
+              <a:rPr lang="en-US" sz="1400" dirty="0">
+                <a:solidFill>
+                  <a:srgbClr val="B8923E"/>
+                </a:solidFill>
+                <a:latin typeface="Microsoft JhengHei" pitchFamily="34" charset="0"/>
+                <a:ea typeface="Microsoft JhengHei" pitchFamily="34" charset="-122"/>
+                <a:cs typeface="Microsoft JhengHei" pitchFamily="34" charset="-120"/>
+              </a:rPr>
+              <a:t>→</a:t>
+            </a:r>
+            <a:endParaRPr lang="en-US" sz="1400" dirty="0"/>
+          </a:p>
+        </p:txBody>
+      </p:sp>
+      <p:sp>
+        <p:nvSpPr>
+          <p:cNvPr id="9" name="Text 7"/>
+          <p:cNvSpPr/>
+          <p:nvPr/>
+        </p:nvSpPr>
+        <p:spPr>
+          <a:xfrm>
+            <a:off x="1051560" y="1280160"/>
+            <a:ext cx="7406640" cy="475488"/>
+          </a:xfrm>
+          <a:prstGeom prst="rect">
+            <a:avLst/>
+          </a:prstGeom>
+          <a:noFill/>
+          <a:ln/>
+        </p:spPr>
+        <p:txBody>
+          <a:bodyPr wrap="square" rtlCol="0" anchor="ctr"/>
+          <a:lstStyle/>
+          <a:p>
+            <a:pPr indent="0" marL="0">
+              <a:lnSpc>
+                <a:spcPts val="1300"/>
+              </a:lnSpc>
+              <a:buNone/>
+            </a:pPr>
+            <a:r>
+              <a:rPr lang="en-US" sz="1150" dirty="0">
+                <a:solidFill>
+                  <a:srgbClr val="3D3935"/>
+                </a:solidFill>
+                <a:latin typeface="Microsoft JhengHei" pitchFamily="34" charset="0"/>
+                <a:ea typeface="Microsoft JhengHei" pitchFamily="34" charset="-122"/>
+                <a:cs typeface="Microsoft JhengHei" pitchFamily="34" charset="-120"/>
+              </a:rPr>
+              <a:t>客人說沒收到券，且在 LINE 對話中確實找不到
+</a:t>
+            </a:r>
+            <a:pPr indent="0" marL="0">
+              <a:lnSpc>
+                <a:spcPts val="1300"/>
+              </a:lnSpc>
+              <a:buNone/>
+            </a:pPr>
+            <a:r>
+              <a:rPr lang="en-US" sz="850" dirty="0">
+                <a:solidFill>
+                  <a:srgbClr val="6E6A63"/>
+                </a:solidFill>
+                <a:latin typeface="Microsoft JhengHei" pitchFamily="34" charset="0"/>
+                <a:ea typeface="Microsoft JhengHei" pitchFamily="34" charset="-122"/>
+                <a:cs typeface="Microsoft JhengHei" pitchFamily="34" charset="-120"/>
+              </a:rPr>
+              <a:t>Guest reports a missing coupon and it is genuinely not in their LINE chat</a:t>
+            </a:r>
+            <a:endParaRPr lang="en-US" sz="1150" dirty="0"/>
+          </a:p>
+        </p:txBody>
+      </p:sp>
+      <p:sp>
+        <p:nvSpPr>
+          <p:cNvPr id="10" name="Shape 8"/>
+          <p:cNvSpPr/>
+          <p:nvPr/>
+        </p:nvSpPr>
+        <p:spPr>
+          <a:xfrm>
+            <a:off x="502920" y="1892808"/>
+            <a:ext cx="8138160" cy="566928"/>
+          </a:xfrm>
+          <a:prstGeom prst="roundRect">
+            <a:avLst>
+              <a:gd name="adj" fmla="val 8065"/>
+            </a:avLst>
+          </a:prstGeom>
+          <a:solidFill>
+            <a:srgbClr val="FFFDFA"/>
+          </a:solidFill>
+          <a:ln w="9525">
+            <a:solidFill>
+              <a:srgbClr val="DAD9D6"/>
+            </a:solidFill>
+            <a:prstDash val="solid"/>
+          </a:ln>
+        </p:spPr>
+      </p:sp>
+      <p:sp>
+        <p:nvSpPr>
+          <p:cNvPr id="11" name="Text 9"/>
+          <p:cNvSpPr/>
+          <p:nvPr/>
+        </p:nvSpPr>
+        <p:spPr>
+          <a:xfrm>
+            <a:off x="685800" y="1938528"/>
+            <a:ext cx="320040" cy="457200"/>
+          </a:xfrm>
+          <a:prstGeom prst="rect">
+            <a:avLst/>
+          </a:prstGeom>
+          <a:noFill/>
+          <a:ln/>
+        </p:spPr>
+        <p:txBody>
+          <a:bodyPr wrap="square" rtlCol="0" anchor="ctr"/>
+          <a:lstStyle/>
+          <a:p>
+            <a:pPr indent="0" marL="0">
+              <a:buNone/>
+            </a:pPr>
+            <a:r>
+              <a:rPr lang="en-US" sz="1400" dirty="0">
+                <a:solidFill>
+                  <a:srgbClr val="B8923E"/>
+                </a:solidFill>
+                <a:latin typeface="Microsoft JhengHei" pitchFamily="34" charset="0"/>
+                <a:ea typeface="Microsoft JhengHei" pitchFamily="34" charset="-122"/>
+                <a:cs typeface="Microsoft JhengHei" pitchFamily="34" charset="-120"/>
+              </a:rPr>
+              <a:t>→</a:t>
+            </a:r>
+            <a:endParaRPr lang="en-US" sz="1400" dirty="0"/>
+          </a:p>
+        </p:txBody>
+      </p:sp>
+      <p:sp>
+        <p:nvSpPr>
+          <p:cNvPr id="12" name="Text 10"/>
+          <p:cNvSpPr/>
+          <p:nvPr/>
+        </p:nvSpPr>
+        <p:spPr>
+          <a:xfrm>
+            <a:off x="1051560" y="1938528"/>
+            <a:ext cx="7406640" cy="475488"/>
+          </a:xfrm>
+          <a:prstGeom prst="rect">
+            <a:avLst/>
+          </a:prstGeom>
+          <a:noFill/>
+          <a:ln/>
+        </p:spPr>
+        <p:txBody>
+          <a:bodyPr wrap="square" rtlCol="0" anchor="ctr"/>
+          <a:lstStyle/>
+          <a:p>
+            <a:pPr indent="0" marL="0">
+              <a:lnSpc>
+                <a:spcPts val="1300"/>
+              </a:lnSpc>
+              <a:buNone/>
+            </a:pPr>
+            <a:r>
+              <a:rPr lang="en-US" sz="1150" dirty="0">
+                <a:solidFill>
+                  <a:srgbClr val="3D3935"/>
+                </a:solidFill>
+                <a:latin typeface="Microsoft JhengHei" pitchFamily="34" charset="0"/>
+                <a:ea typeface="Microsoft JhengHei" pitchFamily="34" charset="-122"/>
+                <a:cs typeface="Microsoft JhengHei" pitchFamily="34" charset="-120"/>
+              </a:rPr>
+              <a:t>客人的兌換碼查不到，或狀態異常
+</a:t>
+            </a:r>
+            <a:pPr indent="0" marL="0">
+              <a:lnSpc>
+                <a:spcPts val="1300"/>
+              </a:lnSpc>
+              <a:buNone/>
+            </a:pPr>
+            <a:r>
+              <a:rPr lang="en-US" sz="850" dirty="0">
+                <a:solidFill>
+                  <a:srgbClr val="6E6A63"/>
+                </a:solidFill>
+                <a:latin typeface="Microsoft JhengHei" pitchFamily="34" charset="0"/>
+                <a:ea typeface="Microsoft JhengHei" pitchFamily="34" charset="-122"/>
+                <a:cs typeface="Microsoft JhengHei" pitchFamily="34" charset="-120"/>
+              </a:rPr>
+              <a:t>A redemption code cannot be found, or its status looks wrong</a:t>
+            </a:r>
+            <a:endParaRPr lang="en-US" sz="1150" dirty="0"/>
+          </a:p>
+        </p:txBody>
+      </p:sp>
+      <p:sp>
+        <p:nvSpPr>
+          <p:cNvPr id="13" name="Shape 11"/>
+          <p:cNvSpPr/>
+          <p:nvPr/>
+        </p:nvSpPr>
+        <p:spPr>
+          <a:xfrm>
+            <a:off x="502920" y="2551176"/>
+            <a:ext cx="8138160" cy="566928"/>
+          </a:xfrm>
+          <a:prstGeom prst="roundRect">
+            <a:avLst>
+              <a:gd name="adj" fmla="val 8065"/>
+            </a:avLst>
+          </a:prstGeom>
+          <a:solidFill>
+            <a:srgbClr val="FFFDFA"/>
+          </a:solidFill>
+          <a:ln w="9525">
+            <a:solidFill>
+              <a:srgbClr val="DAD9D6"/>
+            </a:solidFill>
+            <a:prstDash val="solid"/>
+          </a:ln>
+        </p:spPr>
+      </p:sp>
+      <p:sp>
+        <p:nvSpPr>
+          <p:cNvPr id="14" name="Text 12"/>
+          <p:cNvSpPr/>
+          <p:nvPr/>
+        </p:nvSpPr>
+        <p:spPr>
+          <a:xfrm>
+            <a:off x="685800" y="2596896"/>
+            <a:ext cx="320040" cy="457200"/>
+          </a:xfrm>
+          <a:prstGeom prst="rect">
+            <a:avLst/>
+          </a:prstGeom>
+          <a:noFill/>
+          <a:ln/>
+        </p:spPr>
+        <p:txBody>
+          <a:bodyPr wrap="square" rtlCol="0" anchor="ctr"/>
+          <a:lstStyle/>
+          <a:p>
+            <a:pPr indent="0" marL="0">
+              <a:buNone/>
+            </a:pPr>
+            <a:r>
+              <a:rPr lang="en-US" sz="1400" dirty="0">
+                <a:solidFill>
+                  <a:srgbClr val="B8923E"/>
+                </a:solidFill>
+                <a:latin typeface="Microsoft JhengHei" pitchFamily="34" charset="0"/>
+                <a:ea typeface="Microsoft JhengHei" pitchFamily="34" charset="-122"/>
+                <a:cs typeface="Microsoft JhengHei" pitchFamily="34" charset="-120"/>
+              </a:rPr>
+              <a:t>→</a:t>
+            </a:r>
+            <a:endParaRPr lang="en-US" sz="1400" dirty="0"/>
+          </a:p>
+        </p:txBody>
+      </p:sp>
+      <p:sp>
+        <p:nvSpPr>
+          <p:cNvPr id="15" name="Text 13"/>
+          <p:cNvSpPr/>
+          <p:nvPr/>
+        </p:nvSpPr>
+        <p:spPr>
+          <a:xfrm>
+            <a:off x="1051560" y="2596896"/>
+            <a:ext cx="7406640" cy="475488"/>
+          </a:xfrm>
+          <a:prstGeom prst="rect">
+            <a:avLst/>
+          </a:prstGeom>
+          <a:noFill/>
+          <a:ln/>
+        </p:spPr>
+        <p:txBody>
+          <a:bodyPr wrap="square" rtlCol="0" anchor="ctr"/>
+          <a:lstStyle/>
+          <a:p>
+            <a:pPr indent="0" marL="0">
+              <a:lnSpc>
+                <a:spcPts val="1300"/>
+              </a:lnSpc>
+              <a:buNone/>
+            </a:pPr>
+            <a:r>
+              <a:rPr lang="en-US" sz="1150" dirty="0">
+                <a:solidFill>
+                  <a:srgbClr val="3D3935"/>
+                </a:solidFill>
+                <a:latin typeface="Microsoft JhengHei" pitchFamily="34" charset="0"/>
+                <a:ea typeface="Microsoft JhengHei" pitchFamily="34" charset="-122"/>
+                <a:cs typeface="Microsoft JhengHei" pitchFamily="34" charset="-120"/>
+              </a:rPr>
+              <a:t>客人拿臺北洲際的兌換碼到高雄要求核銷
+</a:t>
+            </a:r>
+            <a:pPr indent="0" marL="0">
+              <a:lnSpc>
+                <a:spcPts val="1300"/>
+              </a:lnSpc>
+              <a:buNone/>
+            </a:pPr>
+            <a:r>
+              <a:rPr lang="en-US" sz="850" dirty="0">
+                <a:solidFill>
+                  <a:srgbClr val="6E6A63"/>
+                </a:solidFill>
+                <a:latin typeface="Microsoft JhengHei" pitchFamily="34" charset="0"/>
+                <a:ea typeface="Microsoft JhengHei" pitchFamily="34" charset="-122"/>
+                <a:cs typeface="Microsoft JhengHei" pitchFamily="34" charset="-120"/>
+              </a:rPr>
+              <a:t>A guest presents a Taipei redemption code at a Kaohsiung counter</a:t>
+            </a:r>
+            <a:endParaRPr lang="en-US" sz="1150" dirty="0"/>
+          </a:p>
+        </p:txBody>
+      </p:sp>
+      <p:sp>
+        <p:nvSpPr>
+          <p:cNvPr id="16" name="Shape 14"/>
+          <p:cNvSpPr/>
+          <p:nvPr/>
+        </p:nvSpPr>
+        <p:spPr>
+          <a:xfrm>
+            <a:off x="502920" y="3209544"/>
+            <a:ext cx="8138160" cy="566928"/>
+          </a:xfrm>
+          <a:prstGeom prst="roundRect">
+            <a:avLst>
+              <a:gd name="adj" fmla="val 8065"/>
+            </a:avLst>
+          </a:prstGeom>
+          <a:solidFill>
+            <a:srgbClr val="FFFDFA"/>
+          </a:solidFill>
+          <a:ln w="9525">
+            <a:solidFill>
+              <a:srgbClr val="DAD9D6"/>
+            </a:solidFill>
+            <a:prstDash val="solid"/>
+          </a:ln>
+        </p:spPr>
+      </p:sp>
+      <p:sp>
+        <p:nvSpPr>
+          <p:cNvPr id="17" name="Text 15"/>
+          <p:cNvSpPr/>
+          <p:nvPr/>
+        </p:nvSpPr>
+        <p:spPr>
+          <a:xfrm>
+            <a:off x="685800" y="3255264"/>
+            <a:ext cx="320040" cy="457200"/>
+          </a:xfrm>
+          <a:prstGeom prst="rect">
+            <a:avLst/>
+          </a:prstGeom>
+          <a:noFill/>
+          <a:ln/>
+        </p:spPr>
+        <p:txBody>
+          <a:bodyPr wrap="square" rtlCol="0" anchor="ctr"/>
+          <a:lstStyle/>
+          <a:p>
+            <a:pPr indent="0" marL="0">
+              <a:buNone/>
+            </a:pPr>
+            <a:r>
+              <a:rPr lang="en-US" sz="1400" dirty="0">
+                <a:solidFill>
+                  <a:srgbClr val="B8923E"/>
+                </a:solidFill>
+                <a:latin typeface="Microsoft JhengHei" pitchFamily="34" charset="0"/>
+                <a:ea typeface="Microsoft JhengHei" pitchFamily="34" charset="-122"/>
+                <a:cs typeface="Microsoft JhengHei" pitchFamily="34" charset="-120"/>
+              </a:rPr>
+              <a:t>→</a:t>
+            </a:r>
+            <a:endParaRPr lang="en-US" sz="1400" dirty="0"/>
+          </a:p>
+        </p:txBody>
+      </p:sp>
+      <p:sp>
+        <p:nvSpPr>
+          <p:cNvPr id="18" name="Text 16"/>
+          <p:cNvSpPr/>
+          <p:nvPr/>
+        </p:nvSpPr>
+        <p:spPr>
+          <a:xfrm>
+            <a:off x="1051560" y="3255264"/>
+            <a:ext cx="7406640" cy="475488"/>
+          </a:xfrm>
+          <a:prstGeom prst="rect">
+            <a:avLst/>
+          </a:prstGeom>
+          <a:noFill/>
+          <a:ln/>
+        </p:spPr>
+        <p:txBody>
+          <a:bodyPr wrap="square" rtlCol="0" anchor="ctr"/>
+          <a:lstStyle/>
+          <a:p>
+            <a:pPr indent="0" marL="0">
+              <a:lnSpc>
+                <a:spcPts val="1300"/>
+              </a:lnSpc>
+              <a:buNone/>
+            </a:pPr>
+            <a:r>
+              <a:rPr lang="en-US" sz="1150" dirty="0">
+                <a:solidFill>
+                  <a:srgbClr val="3D3935"/>
+                </a:solidFill>
+                <a:latin typeface="Microsoft JhengHei" pitchFamily="34" charset="0"/>
+                <a:ea typeface="Microsoft JhengHei" pitchFamily="34" charset="-122"/>
+                <a:cs typeface="Microsoft JhengHei" pitchFamily="34" charset="-120"/>
+              </a:rPr>
+              <a:t>客人對中獎結果或活動規則提出申訴
+</a:t>
+            </a:r>
+            <a:pPr indent="0" marL="0">
+              <a:lnSpc>
+                <a:spcPts val="1300"/>
+              </a:lnSpc>
+              <a:buNone/>
+            </a:pPr>
+            <a:r>
+              <a:rPr lang="en-US" sz="850" dirty="0">
+                <a:solidFill>
+                  <a:srgbClr val="6E6A63"/>
+                </a:solidFill>
+                <a:latin typeface="Microsoft JhengHei" pitchFamily="34" charset="0"/>
+                <a:ea typeface="Microsoft JhengHei" pitchFamily="34" charset="-122"/>
+                <a:cs typeface="Microsoft JhengHei" pitchFamily="34" charset="-120"/>
+              </a:rPr>
+              <a:t>A guest disputes the result or the campaign rules</a:t>
+            </a:r>
+            <a:endParaRPr lang="en-US" sz="1150" dirty="0"/>
+          </a:p>
+        </p:txBody>
+      </p:sp>
+      <p:sp>
+        <p:nvSpPr>
+          <p:cNvPr id="19" name="Shape 17"/>
+          <p:cNvSpPr/>
+          <p:nvPr/>
+        </p:nvSpPr>
+        <p:spPr>
+          <a:xfrm>
+            <a:off x="502920" y="3867912"/>
+            <a:ext cx="8138160" cy="566928"/>
+          </a:xfrm>
+          <a:prstGeom prst="roundRect">
+            <a:avLst>
+              <a:gd name="adj" fmla="val 8065"/>
+            </a:avLst>
+          </a:prstGeom>
+          <a:solidFill>
+            <a:srgbClr val="FFFDFA"/>
+          </a:solidFill>
+          <a:ln w="9525">
+            <a:solidFill>
+              <a:srgbClr val="DAD9D6"/>
+            </a:solidFill>
+            <a:prstDash val="solid"/>
+          </a:ln>
+        </p:spPr>
+      </p:sp>
+      <p:sp>
+        <p:nvSpPr>
+          <p:cNvPr id="20" name="Text 18"/>
+          <p:cNvSpPr/>
+          <p:nvPr/>
+        </p:nvSpPr>
+        <p:spPr>
+          <a:xfrm>
+            <a:off x="685800" y="3913632"/>
+            <a:ext cx="320040" cy="457200"/>
+          </a:xfrm>
+          <a:prstGeom prst="rect">
+            <a:avLst/>
+          </a:prstGeom>
+          <a:noFill/>
+          <a:ln/>
+        </p:spPr>
+        <p:txBody>
+          <a:bodyPr wrap="square" rtlCol="0" anchor="ctr"/>
+          <a:lstStyle/>
+          <a:p>
+            <a:pPr indent="0" marL="0">
+              <a:buNone/>
+            </a:pPr>
+            <a:r>
+              <a:rPr lang="en-US" sz="1400" dirty="0">
+                <a:solidFill>
+                  <a:srgbClr val="B8923E"/>
+                </a:solidFill>
+                <a:latin typeface="Microsoft JhengHei" pitchFamily="34" charset="0"/>
+                <a:ea typeface="Microsoft JhengHei" pitchFamily="34" charset="-122"/>
+                <a:cs typeface="Microsoft JhengHei" pitchFamily="34" charset="-120"/>
+              </a:rPr>
+              <a:t>→</a:t>
+            </a:r>
+            <a:endParaRPr lang="en-US" sz="1400" dirty="0"/>
+          </a:p>
+        </p:txBody>
+      </p:sp>
+      <p:sp>
+        <p:nvSpPr>
+          <p:cNvPr id="21" name="Text 19"/>
+          <p:cNvSpPr/>
+          <p:nvPr/>
+        </p:nvSpPr>
+        <p:spPr>
+          <a:xfrm>
+            <a:off x="1051560" y="3913632"/>
+            <a:ext cx="7406640" cy="475488"/>
+          </a:xfrm>
+          <a:prstGeom prst="rect">
+            <a:avLst/>
+          </a:prstGeom>
+          <a:noFill/>
+          <a:ln/>
+        </p:spPr>
+        <p:txBody>
+          <a:bodyPr wrap="square" rtlCol="0" anchor="ctr"/>
+          <a:lstStyle/>
+          <a:p>
+            <a:pPr indent="0" marL="0">
+              <a:lnSpc>
+                <a:spcPts val="1300"/>
+              </a:lnSpc>
+              <a:buNone/>
+            </a:pPr>
+            <a:r>
+              <a:rPr lang="en-US" sz="1150" dirty="0">
+                <a:solidFill>
+                  <a:srgbClr val="3D3935"/>
+                </a:solidFill>
+                <a:latin typeface="Microsoft JhengHei" pitchFamily="34" charset="0"/>
+                <a:ea typeface="Microsoft JhengHei" pitchFamily="34" charset="-122"/>
+                <a:cs typeface="Microsoft JhengHei" pitchFamily="34" charset="-120"/>
+              </a:rPr>
+              <a:t>同一位客人短時間內出現大量中獎紀錄
+</a:t>
+            </a:r>
+            <a:pPr indent="0" marL="0">
+              <a:lnSpc>
+                <a:spcPts val="1300"/>
+              </a:lnSpc>
+              <a:buNone/>
+            </a:pPr>
+            <a:r>
+              <a:rPr lang="en-US" sz="850" dirty="0">
+                <a:solidFill>
+                  <a:srgbClr val="6E6A63"/>
+                </a:solidFill>
+                <a:latin typeface="Microsoft JhengHei" pitchFamily="34" charset="0"/>
+                <a:ea typeface="Microsoft JhengHei" pitchFamily="34" charset="-122"/>
+                <a:cs typeface="Microsoft JhengHei" pitchFamily="34" charset="-120"/>
+              </a:rPr>
+              <a:t>One guest shows an unusually high number of wins in a short period</a:t>
+            </a:r>
+            <a:endParaRPr lang="en-US" sz="1150" dirty="0"/>
+          </a:p>
+        </p:txBody>
+      </p:sp>
+    </p:spTree>
+  </p:cSld>
+  <p:clrMapOvr>
+    <a:masterClrMapping/>
+  </p:clrMapOvr>
+</p:sld>
+</file>
+
+<file path=ppt/slides/slide15.xml><?xml version="1.0" encoding="utf-8"?>
+<p:sld xmlns:a="http://schemas.openxmlformats.org/drawingml/2006/main" xmlns:r="http://schemas.openxmlformats.org/officeDocument/2006/relationships" xmlns:p="http://schemas.openxmlformats.org/presentationml/2006/main">
+  <p:cSld name="Slide 15">
+    <p:bg>
+      <p:bgPr>
+        <a:solidFill>
+          <a:srgbClr val="2B2620"/>
+        </a:solidFill>
+      </p:bgPr>
+    </p:bg>
+    <p:spTree>
+      <p:nvGrpSpPr>
+        <p:cNvPr id="1" name=""/>
+        <p:cNvGrpSpPr/>
+        <p:nvPr/>
+      </p:nvGrpSpPr>
+      <p:grpSpPr>
+        <a:xfrm>
+          <a:off x="0" y="0"/>
+          <a:ext cx="0" cy="0"/>
+          <a:chOff x="0" y="0"/>
+          <a:chExt cx="0" cy="0"/>
+        </a:xfrm>
+      </p:grpSpPr>
+      <p:sp>
+        <p:nvSpPr>
+          <p:cNvPr id="2" name="Text 0"/>
+          <p:cNvSpPr/>
+          <p:nvPr/>
+        </p:nvSpPr>
+        <p:spPr>
+          <a:xfrm>
             <a:off x="548640" y="292608"/>
             <a:ext cx="8046720" cy="603504"/>
           </a:xfrm>
@@ -5044,7 +6243,7 @@
           <a:bodyPr wrap="square" rtlCol="0" anchor="ctr"/>
           <a:lstStyle/>
           <a:p>
-            <a:pPr marL="0" indent="0">
+            <a:pPr indent="0" marL="0">
               <a:lnSpc>
                 <a:spcPts val="2200"/>
               </a:lnSpc>
@@ -5062,6 +6261,12 @@
               <a:t>一頁速查卡
 </a:t>
             </a:r>
+            <a:pPr indent="0" marL="0">
+              <a:lnSpc>
+                <a:spcPts val="2200"/>
+              </a:lnSpc>
+              <a:buNone/>
+            </a:pPr>
             <a:r>
               <a:rPr lang="en-US" sz="1150" dirty="0">
                 <a:solidFill>
@@ -5140,7 +6345,7 @@
           <a:bodyPr wrap="square" rtlCol="0" anchor="ctr"/>
           <a:lstStyle/>
           <a:p>
-            <a:pPr marL="0" indent="0">
+            <a:pPr indent="0" marL="0">
               <a:buNone/>
             </a:pPr>
             <a:r>
@@ -5179,7 +6384,7 @@
           <a:bodyPr wrap="square" rtlCol="0" anchor="ctr"/>
           <a:lstStyle/>
           <a:p>
-            <a:pPr marL="0" indent="0">
+            <a:pPr indent="0" marL="0">
               <a:buNone/>
             </a:pPr>
             <a:r>
@@ -5193,6 +6398,9 @@
               </a:rPr>
               <a:t>有優惠券　</a:t>
             </a:r>
+            <a:pPr indent="0" marL="0">
+              <a:buNone/>
+            </a:pPr>
             <a:r>
               <a:rPr lang="en-US" sz="900" dirty="0">
                 <a:solidFill>
@@ -5229,7 +6437,7 @@
           <a:bodyPr wrap="square" rtlCol="0" anchor="ctr"/>
           <a:lstStyle/>
           <a:p>
-            <a:pPr marL="0" indent="0">
+            <a:pPr indent="0" marL="0">
               <a:lnSpc>
                 <a:spcPts val="1400"/>
               </a:lnSpc>
@@ -5248,6 +6456,12 @@
 出示兌換碼 → 櫃檯核銷
 </a:t>
             </a:r>
+            <a:pPr indent="0" marL="0">
+              <a:lnSpc>
+                <a:spcPts val="1400"/>
+              </a:lnSpc>
+              <a:buNone/>
+            </a:pPr>
             <a:r>
               <a:rPr lang="en-US" sz="850" dirty="0">
                 <a:solidFill>
@@ -5306,7 +6520,7 @@
           <a:bodyPr wrap="square" rtlCol="0" anchor="ctr"/>
           <a:lstStyle/>
           <a:p>
-            <a:pPr marL="0" indent="0">
+            <a:pPr indent="0" marL="0">
               <a:buNone/>
             </a:pPr>
             <a:r>
@@ -5345,7 +6559,7 @@
           <a:bodyPr wrap="square" rtlCol="0" anchor="ctr"/>
           <a:lstStyle/>
           <a:p>
-            <a:pPr marL="0" indent="0">
+            <a:pPr indent="0" marL="0">
               <a:buNone/>
             </a:pPr>
             <a:r>
@@ -5357,8 +6571,11 @@
                 <a:ea typeface="Microsoft JhengHei" pitchFamily="34" charset="-122"/>
                 <a:cs typeface="Microsoft JhengHei" pitchFamily="34" charset="-120"/>
               </a:rPr>
-              <a:t>沒有券　</a:t>
-            </a:r>
+              <a:t>只有兌換碼　</a:t>
+            </a:r>
+            <a:pPr indent="0" marL="0">
+              <a:buNone/>
+            </a:pPr>
             <a:r>
               <a:rPr lang="en-US" sz="900" dirty="0">
                 <a:solidFill>
@@ -5368,7 +6585,7 @@
                 <a:ea typeface="Microsoft JhengHei" pitchFamily="34" charset="-122"/>
                 <a:cs typeface="Microsoft JhengHei" pitchFamily="34" charset="-120"/>
               </a:rPr>
-              <a:t>Follow-Up</a:t>
+              <a:t>Code Only</a:t>
             </a:r>
             <a:endParaRPr lang="en-US" sz="1400" dirty="0"/>
           </a:p>
@@ -5395,7 +6612,7 @@
           <a:bodyPr wrap="square" rtlCol="0" anchor="ctr"/>
           <a:lstStyle/>
           <a:p>
-            <a:pPr marL="0" indent="0">
+            <a:pPr indent="0" marL="0">
               <a:lnSpc>
                 <a:spcPts val="1400"/>
               </a:lnSpc>
@@ -5410,10 +6627,16 @@
                 <a:ea typeface="Microsoft JhengHei" pitchFamily="34" charset="-122"/>
                 <a:cs typeface="Microsoft JhengHei" pitchFamily="34" charset="-120"/>
               </a:rPr>
-              <a:t>臺北全部＋高雄兩項住宿大獎
-該館同仁主動聯繫，不核銷
+              <a:t>臺北或住宿 → 不核銷，等聯繫
+其餘高雄的獎 → 受理，回報主管
 </a:t>
             </a:r>
+            <a:pPr indent="0" marL="0">
+              <a:lnSpc>
+                <a:spcPts val="1400"/>
+              </a:lnSpc>
+              <a:buNone/>
+            </a:pPr>
             <a:r>
               <a:rPr lang="en-US" sz="850" dirty="0">
                 <a:solidFill>
@@ -5423,7 +6646,7 @@
                 <a:ea typeface="Microsoft JhengHei" pitchFamily="34" charset="-122"/>
                 <a:cs typeface="Microsoft JhengHei" pitchFamily="34" charset="-120"/>
               </a:rPr>
-              <a:t>Taipei + 2 KH room prizes — never redeem</a:t>
+              <a:t>Taipei / room stay → no. Others → accept &amp; report</a:t>
             </a:r>
             <a:endParaRPr lang="en-US" sz="1050" dirty="0"/>
           </a:p>
@@ -5446,7 +6669,7 @@
             </a:avLst>
           </a:prstGeom>
           <a:solidFill>
-            <a:srgbClr val="FBEDED"/>
+            <a:srgbClr val="FBF1DC"/>
           </a:solidFill>
           <a:ln/>
         </p:spPr>
@@ -5472,7 +6695,7 @@
           <a:bodyPr wrap="square" rtlCol="0" anchor="ctr"/>
           <a:lstStyle/>
           <a:p>
-            <a:pPr marL="0" indent="0">
+            <a:pPr indent="0" marL="0">
               <a:buNone/>
             </a:pPr>
             <a:r>
@@ -5484,7 +6707,7 @@
                 <a:ea typeface="Microsoft JhengHei" pitchFamily="34" charset="-122"/>
                 <a:cs typeface="Microsoft JhengHei" pitchFamily="34" charset="-120"/>
               </a:rPr>
-              <a:t>🚫</a:t>
+              <a:t>🪙</a:t>
             </a:r>
             <a:endParaRPr lang="en-US" sz="1500" dirty="0"/>
           </a:p>
@@ -5511,30 +6734,33 @@
           <a:bodyPr wrap="square" rtlCol="0" anchor="ctr"/>
           <a:lstStyle/>
           <a:p>
-            <a:pPr marL="0" indent="0">
+            <a:pPr indent="0" marL="0">
               <a:buNone/>
             </a:pPr>
             <a:r>
               <a:rPr lang="en-US" sz="1400" b="1" dirty="0">
                 <a:solidFill>
-                  <a:srgbClr val="9A3B3B"/>
-                </a:solidFill>
-                <a:latin typeface="Microsoft JhengHei" pitchFamily="34" charset="0"/>
-                <a:ea typeface="Microsoft JhengHei" pitchFamily="34" charset="-122"/>
-                <a:cs typeface="Microsoft JhengHei" pitchFamily="34" charset="-120"/>
-              </a:rPr>
-              <a:t>絕不能說　</a:t>
-            </a:r>
+                  <a:srgbClr val="9C6212"/>
+                </a:solidFill>
+                <a:latin typeface="Microsoft JhengHei" pitchFamily="34" charset="0"/>
+                <a:ea typeface="Microsoft JhengHei" pitchFamily="34" charset="-122"/>
+                <a:cs typeface="Microsoft JhengHei" pitchFamily="34" charset="-120"/>
+              </a:rPr>
+              <a:t>沒中獎也扣幣　</a:t>
+            </a:r>
+            <a:pPr indent="0" marL="0">
+              <a:buNone/>
+            </a:pPr>
             <a:r>
               <a:rPr lang="en-US" sz="900" dirty="0">
                 <a:solidFill>
-                  <a:srgbClr val="9A3B3B"/>
-                </a:solidFill>
-                <a:latin typeface="Microsoft JhengHei" pitchFamily="34" charset="0"/>
-                <a:ea typeface="Microsoft JhengHei" pitchFamily="34" charset="-122"/>
-                <a:cs typeface="Microsoft JhengHei" pitchFamily="34" charset="-120"/>
-              </a:rPr>
-              <a:t>Never Disclose</a:t>
+                  <a:srgbClr val="9C6212"/>
+                </a:solidFill>
+                <a:latin typeface="Microsoft JhengHei" pitchFamily="34" charset="0"/>
+                <a:ea typeface="Microsoft JhengHei" pitchFamily="34" charset="-122"/>
+                <a:cs typeface="Microsoft JhengHei" pitchFamily="34" charset="-120"/>
+              </a:rPr>
+              <a:t>Coins Always Deducted</a:t>
             </a:r>
             <a:endParaRPr lang="en-US" sz="1400" dirty="0"/>
           </a:p>
@@ -5561,7 +6787,7 @@
           <a:bodyPr wrap="square" rtlCol="0" anchor="ctr"/>
           <a:lstStyle/>
           <a:p>
-            <a:pPr marL="0" indent="0">
+            <a:pPr indent="0" marL="0">
               <a:lnSpc>
                 <a:spcPts val="1400"/>
               </a:lnSpc>
@@ -5570,26 +6796,32 @@
             <a:r>
               <a:rPr lang="en-US" sz="1050" dirty="0">
                 <a:solidFill>
-                  <a:srgbClr val="9A3B3B"/>
-                </a:solidFill>
-                <a:latin typeface="Microsoft JhengHei" pitchFamily="34" charset="0"/>
-                <a:ea typeface="Microsoft JhengHei" pitchFamily="34" charset="-122"/>
-                <a:cs typeface="Microsoft JhengHei" pitchFamily="34" charset="-120"/>
-              </a:rPr>
-              <a:t>中獎機率 · 剩餘數量
-其他客人的資料
+                  <a:srgbClr val="9C6212"/>
+                </a:solidFill>
+                <a:latin typeface="Microsoft JhengHei" pitchFamily="34" charset="0"/>
+                <a:ea typeface="Microsoft JhengHei" pitchFamily="34" charset="-122"/>
+                <a:cs typeface="Microsoft JhengHei" pitchFamily="34" charset="-120"/>
+              </a:rPr>
+              <a:t>每抽一次都扣，沒中獎也扣
+請引導客人改抽三等獎
 </a:t>
             </a:r>
+            <a:pPr indent="0" marL="0">
+              <a:lnSpc>
+                <a:spcPts val="1400"/>
+              </a:lnSpc>
+              <a:buNone/>
+            </a:pPr>
             <a:r>
               <a:rPr lang="en-US" sz="850" dirty="0">
                 <a:solidFill>
-                  <a:srgbClr val="9A3B3B"/>
-                </a:solidFill>
-                <a:latin typeface="Microsoft JhengHei" pitchFamily="34" charset="0"/>
-                <a:ea typeface="Microsoft JhengHei" pitchFamily="34" charset="-122"/>
-                <a:cs typeface="Microsoft JhengHei" pitchFamily="34" charset="-120"/>
-              </a:rPr>
-              <a:t>Odds · stock · other guests' data</a:t>
+                  <a:srgbClr val="9C6212"/>
+                </a:solidFill>
+                <a:latin typeface="Microsoft JhengHei" pitchFamily="34" charset="0"/>
+                <a:ea typeface="Microsoft JhengHei" pitchFamily="34" charset="-122"/>
+                <a:cs typeface="Microsoft JhengHei" pitchFamily="34" charset="-120"/>
+              </a:rPr>
+              <a:t>Every spin costs coins — redirect to Third Prize</a:t>
             </a:r>
             <a:endParaRPr lang="en-US" sz="1050" dirty="0"/>
           </a:p>
@@ -5612,7 +6844,7 @@
             </a:avLst>
           </a:prstGeom>
           <a:solidFill>
-            <a:srgbClr val="E8F3EC"/>
+            <a:srgbClr val="FBEDED"/>
           </a:solidFill>
           <a:ln/>
         </p:spPr>
@@ -5638,7 +6870,7 @@
           <a:bodyPr wrap="square" rtlCol="0" anchor="ctr"/>
           <a:lstStyle/>
           <a:p>
-            <a:pPr marL="0" indent="0">
+            <a:pPr indent="0" marL="0">
               <a:buNone/>
             </a:pPr>
             <a:r>
@@ -5650,7 +6882,7 @@
                 <a:ea typeface="Microsoft JhengHei" pitchFamily="34" charset="-122"/>
                 <a:cs typeface="Microsoft JhengHei" pitchFamily="34" charset="-120"/>
               </a:rPr>
-              <a:t>🙋</a:t>
+              <a:t>🚫</a:t>
             </a:r>
             <a:endParaRPr lang="en-US" sz="1500" dirty="0"/>
           </a:p>
@@ -5677,30 +6909,33 @@
           <a:bodyPr wrap="square" rtlCol="0" anchor="ctr"/>
           <a:lstStyle/>
           <a:p>
-            <a:pPr marL="0" indent="0">
+            <a:pPr indent="0" marL="0">
               <a:buNone/>
             </a:pPr>
             <a:r>
               <a:rPr lang="en-US" sz="1400" b="1" dirty="0">
                 <a:solidFill>
-                  <a:srgbClr val="1F6B47"/>
-                </a:solidFill>
-                <a:latin typeface="Microsoft JhengHei" pitchFamily="34" charset="0"/>
-                <a:ea typeface="Microsoft JhengHei" pitchFamily="34" charset="-122"/>
-                <a:cs typeface="Microsoft JhengHei" pitchFamily="34" charset="-120"/>
-              </a:rPr>
-              <a:t>不確定就轉單　</a:t>
-            </a:r>
+                  <a:srgbClr val="9A3B3B"/>
+                </a:solidFill>
+                <a:latin typeface="Microsoft JhengHei" pitchFamily="34" charset="0"/>
+                <a:ea typeface="Microsoft JhengHei" pitchFamily="34" charset="-122"/>
+                <a:cs typeface="Microsoft JhengHei" pitchFamily="34" charset="-120"/>
+              </a:rPr>
+              <a:t>絕不能說　</a:t>
+            </a:r>
+            <a:pPr indent="0" marL="0">
+              <a:buNone/>
+            </a:pPr>
             <a:r>
               <a:rPr lang="en-US" sz="900" dirty="0">
                 <a:solidFill>
-                  <a:srgbClr val="1F6B47"/>
-                </a:solidFill>
-                <a:latin typeface="Microsoft JhengHei" pitchFamily="34" charset="0"/>
-                <a:ea typeface="Microsoft JhengHei" pitchFamily="34" charset="-122"/>
-                <a:cs typeface="Microsoft JhengHei" pitchFamily="34" charset="-120"/>
-              </a:rPr>
-              <a:t>When Unsure</a:t>
+                  <a:srgbClr val="9A3B3B"/>
+                </a:solidFill>
+                <a:latin typeface="Microsoft JhengHei" pitchFamily="34" charset="0"/>
+                <a:ea typeface="Microsoft JhengHei" pitchFamily="34" charset="-122"/>
+                <a:cs typeface="Microsoft JhengHei" pitchFamily="34" charset="-120"/>
+              </a:rPr>
+              <a:t>Never Disclose</a:t>
             </a:r>
             <a:endParaRPr lang="en-US" sz="1400" dirty="0"/>
           </a:p>
@@ -5727,7 +6962,7 @@
           <a:bodyPr wrap="square" rtlCol="0" anchor="ctr"/>
           <a:lstStyle/>
           <a:p>
-            <a:pPr marL="0" indent="0">
+            <a:pPr indent="0" marL="0">
               <a:lnSpc>
                 <a:spcPts val="1400"/>
               </a:lnSpc>
@@ -5736,26 +6971,32 @@
             <a:r>
               <a:rPr lang="en-US" sz="1050" dirty="0">
                 <a:solidFill>
-                  <a:srgbClr val="1F6B47"/>
-                </a:solidFill>
-                <a:latin typeface="Microsoft JhengHei" pitchFamily="34" charset="0"/>
-                <a:ea typeface="Microsoft JhengHei" pitchFamily="34" charset="-122"/>
-                <a:cs typeface="Microsoft JhengHei" pitchFamily="34" charset="-120"/>
-              </a:rPr>
-              <a:t>不要自行承諾兌換方式或日期
-一切以活動頁公告為準
+                  <a:srgbClr val="9A3B3B"/>
+                </a:solidFill>
+                <a:latin typeface="Microsoft JhengHei" pitchFamily="34" charset="0"/>
+                <a:ea typeface="Microsoft JhengHei" pitchFamily="34" charset="-122"/>
+                <a:cs typeface="Microsoft JhengHei" pitchFamily="34" charset="-120"/>
+              </a:rPr>
+              <a:t>中獎機率 · 剩餘數量 · 其他客人的資料
+不確定就轉給主管，不要自行承諾
 </a:t>
             </a:r>
+            <a:pPr indent="0" marL="0">
+              <a:lnSpc>
+                <a:spcPts val="1400"/>
+              </a:lnSpc>
+              <a:buNone/>
+            </a:pPr>
             <a:r>
               <a:rPr lang="en-US" sz="850" dirty="0">
                 <a:solidFill>
-                  <a:srgbClr val="1F6B47"/>
-                </a:solidFill>
-                <a:latin typeface="Microsoft JhengHei" pitchFamily="34" charset="0"/>
-                <a:ea typeface="Microsoft JhengHei" pitchFamily="34" charset="-122"/>
-                <a:cs typeface="Microsoft JhengHei" pitchFamily="34" charset="-120"/>
-              </a:rPr>
-              <a:t>Escalate — never promise terms</a:t>
+                  <a:srgbClr val="9A3B3B"/>
+                </a:solidFill>
+                <a:latin typeface="Microsoft JhengHei" pitchFamily="34" charset="0"/>
+                <a:ea typeface="Microsoft JhengHei" pitchFamily="34" charset="-122"/>
+                <a:cs typeface="Microsoft JhengHei" pitchFamily="34" charset="-120"/>
+              </a:rPr>
+              <a:t>Odds · stock · other guests' data — escalate if unsure</a:t>
             </a:r>
             <a:endParaRPr lang="en-US" sz="1050" dirty="0"/>
           </a:p>
@@ -5782,7 +7023,7 @@
           <a:bodyPr wrap="square" rtlCol="0" anchor="ctr"/>
           <a:lstStyle/>
           <a:p>
-            <a:pPr marL="0" indent="0" algn="ctr">
+            <a:pPr algn="ctr" indent="0" marL="0">
               <a:buNone/>
             </a:pPr>
             <a:r>
@@ -5816,7 +7057,6 @@
         <a:solidFill>
           <a:srgbClr val="FAF8F6"/>
         </a:solidFill>
-        <a:effectLst/>
       </p:bgPr>
     </p:bg>
     <p:spTree>
@@ -5854,7 +7094,7 @@
           <a:bodyPr wrap="square" rtlCol="0" anchor="ctr"/>
           <a:lstStyle/>
           <a:p>
-            <a:pPr marL="0" indent="0">
+            <a:pPr indent="0" marL="0">
               <a:buNone/>
             </a:pPr>
             <a:r>
@@ -5893,7 +7133,7 @@
           <a:bodyPr wrap="square" rtlCol="0" anchor="ctr"/>
           <a:lstStyle/>
           <a:p>
-            <a:pPr marL="0" indent="0">
+            <a:pPr indent="0" marL="0">
               <a:buNone/>
             </a:pPr>
             <a:r>
@@ -5952,7 +7192,7 @@
           <a:bodyPr wrap="square" rtlCol="0" anchor="ctr"/>
           <a:lstStyle/>
           <a:p>
-            <a:pPr marL="0" indent="0" algn="r">
+            <a:pPr algn="r" indent="0" marL="0">
               <a:buNone/>
             </a:pPr>
             <a:r>
@@ -5991,7 +7231,7 @@
           <a:bodyPr wrap="square" rtlCol="0" anchor="ctr"/>
           <a:lstStyle/>
           <a:p>
-            <a:pPr marL="0" indent="0">
+            <a:pPr indent="0" marL="0">
               <a:buNone/>
             </a:pPr>
             <a:r>
@@ -6030,7 +7270,7 @@
           <a:bodyPr wrap="square" rtlCol="0" anchor="ctr"/>
           <a:lstStyle/>
           <a:p>
-            <a:pPr marL="0" indent="0">
+            <a:pPr indent="0" marL="0">
               <a:buNone/>
             </a:pPr>
             <a:r>
@@ -6069,7 +7309,7 @@
           <a:bodyPr wrap="square" rtlCol="0" anchor="ctr"/>
           <a:lstStyle/>
           <a:p>
-            <a:pPr marL="0" indent="0">
+            <a:pPr indent="0" marL="0">
               <a:buNone/>
             </a:pPr>
             <a:r>
@@ -6108,7 +7348,7 @@
           <a:bodyPr wrap="square" rtlCol="0" anchor="ctr"/>
           <a:lstStyle/>
           <a:p>
-            <a:pPr marL="0" indent="0">
+            <a:pPr indent="0" marL="0">
               <a:buNone/>
             </a:pPr>
             <a:r>
@@ -6147,7 +7387,7 @@
           <a:bodyPr wrap="square" rtlCol="0" anchor="ctr"/>
           <a:lstStyle/>
           <a:p>
-            <a:pPr marL="0" indent="0">
+            <a:pPr indent="0" marL="0">
               <a:buNone/>
             </a:pPr>
             <a:r>
@@ -6186,7 +7426,7 @@
           <a:bodyPr wrap="square" rtlCol="0" anchor="ctr"/>
           <a:lstStyle/>
           <a:p>
-            <a:pPr marL="0" indent="0">
+            <a:pPr indent="0" marL="0">
               <a:buNone/>
             </a:pPr>
             <a:r>
@@ -6225,7 +7465,7 @@
           <a:bodyPr wrap="square" rtlCol="0" anchor="ctr"/>
           <a:lstStyle/>
           <a:p>
-            <a:pPr marL="0" indent="0">
+            <a:pPr indent="0" marL="0">
               <a:buNone/>
             </a:pPr>
             <a:r>
@@ -6264,7 +7504,7 @@
           <a:bodyPr wrap="square" rtlCol="0" anchor="ctr"/>
           <a:lstStyle/>
           <a:p>
-            <a:pPr marL="0" indent="0">
+            <a:pPr indent="0" marL="0">
               <a:buNone/>
             </a:pPr>
             <a:r>
@@ -6303,7 +7543,7 @@
           <a:bodyPr wrap="square" rtlCol="0" anchor="ctr"/>
           <a:lstStyle/>
           <a:p>
-            <a:pPr marL="0" indent="0">
+            <a:pPr indent="0" marL="0">
               <a:buNone/>
             </a:pPr>
             <a:r>
@@ -6342,7 +7582,7 @@
           <a:bodyPr wrap="square" rtlCol="0" anchor="ctr"/>
           <a:lstStyle/>
           <a:p>
-            <a:pPr marL="0" indent="0">
+            <a:pPr indent="0" marL="0">
               <a:buNone/>
             </a:pPr>
             <a:r>
@@ -6381,7 +7621,7 @@
           <a:bodyPr wrap="square" rtlCol="0" anchor="ctr"/>
           <a:lstStyle/>
           <a:p>
-            <a:pPr marL="0" indent="0">
+            <a:pPr indent="0" marL="0">
               <a:buNone/>
             </a:pPr>
             <a:r>
@@ -6420,7 +7660,7 @@
           <a:bodyPr wrap="square" rtlCol="0" anchor="ctr"/>
           <a:lstStyle/>
           <a:p>
-            <a:pPr marL="0" indent="0">
+            <a:pPr indent="0" marL="0">
               <a:buNone/>
             </a:pPr>
             <a:r>
@@ -6459,7 +7699,7 @@
           <a:bodyPr wrap="square" rtlCol="0" anchor="ctr"/>
           <a:lstStyle/>
           <a:p>
-            <a:pPr marL="0" indent="0">
+            <a:pPr indent="0" marL="0">
               <a:buNone/>
             </a:pPr>
             <a:r>
@@ -6498,7 +7738,7 @@
           <a:bodyPr wrap="square" rtlCol="0" anchor="ctr"/>
           <a:lstStyle/>
           <a:p>
-            <a:pPr marL="0" indent="0">
+            <a:pPr indent="0" marL="0">
               <a:buNone/>
             </a:pPr>
             <a:r>
@@ -6537,7 +7777,7 @@
           <a:bodyPr wrap="square" rtlCol="0" anchor="ctr"/>
           <a:lstStyle/>
           <a:p>
-            <a:pPr marL="0" indent="0">
+            <a:pPr indent="0" marL="0">
               <a:buNone/>
             </a:pPr>
             <a:r>
@@ -6549,7 +7789,7 @@
                 <a:ea typeface="Microsoft JhengHei" pitchFamily="34" charset="-122"/>
                 <a:cs typeface="Microsoft JhengHei" pitchFamily="34" charset="-120"/>
               </a:rPr>
-              <a:t>櫃檯核銷步驟</a:t>
+              <a:t>⭐ 只有兌換碼、沒有券</a:t>
             </a:r>
             <a:endParaRPr lang="en-US" sz="1350" dirty="0"/>
           </a:p>
@@ -6576,7 +7816,7 @@
           <a:bodyPr wrap="square" rtlCol="0" anchor="ctr"/>
           <a:lstStyle/>
           <a:p>
-            <a:pPr marL="0" indent="0">
+            <a:pPr indent="0" marL="0">
               <a:buNone/>
             </a:pPr>
             <a:r>
@@ -6588,7 +7828,7 @@
                 <a:ea typeface="Microsoft JhengHei" pitchFamily="34" charset="-122"/>
                 <a:cs typeface="Microsoft JhengHei" pitchFamily="34" charset="-120"/>
               </a:rPr>
-              <a:t>Counter Redemption Procedure</a:t>
+              <a:t>Code but No Coupon</a:t>
             </a:r>
             <a:endParaRPr lang="en-US" sz="950" dirty="0"/>
           </a:p>
@@ -6615,7 +7855,7 @@
           <a:bodyPr wrap="square" rtlCol="0" anchor="ctr"/>
           <a:lstStyle/>
           <a:p>
-            <a:pPr marL="0" indent="0">
+            <a:pPr indent="0" marL="0">
               <a:buNone/>
             </a:pPr>
             <a:r>
@@ -6654,7 +7894,7 @@
           <a:bodyPr wrap="square" rtlCol="0" anchor="ctr"/>
           <a:lstStyle/>
           <a:p>
-            <a:pPr marL="0" indent="0">
+            <a:pPr indent="0" marL="0">
               <a:buNone/>
             </a:pPr>
             <a:r>
@@ -6666,7 +7906,7 @@
                 <a:ea typeface="Microsoft JhengHei" pitchFamily="34" charset="-122"/>
                 <a:cs typeface="Microsoft JhengHei" pitchFamily="34" charset="-120"/>
               </a:rPr>
-              <a:t>常見問題與標準回答</a:t>
+              <a:t>櫃檯核銷步驟</a:t>
             </a:r>
             <a:endParaRPr lang="en-US" sz="1350" dirty="0"/>
           </a:p>
@@ -6693,7 +7933,7 @@
           <a:bodyPr wrap="square" rtlCol="0" anchor="ctr"/>
           <a:lstStyle/>
           <a:p>
-            <a:pPr marL="0" indent="0">
+            <a:pPr indent="0" marL="0">
               <a:buNone/>
             </a:pPr>
             <a:r>
@@ -6705,7 +7945,7 @@
                 <a:ea typeface="Microsoft JhengHei" pitchFamily="34" charset="-122"/>
                 <a:cs typeface="Microsoft JhengHei" pitchFamily="34" charset="-120"/>
               </a:rPr>
-              <a:t>FAQ &amp; Suggested Replies</a:t>
+              <a:t>Counter Redemption Procedure</a:t>
             </a:r>
             <a:endParaRPr lang="en-US" sz="950" dirty="0"/>
           </a:p>
@@ -6732,7 +7972,7 @@
           <a:bodyPr wrap="square" rtlCol="0" anchor="ctr"/>
           <a:lstStyle/>
           <a:p>
-            <a:pPr marL="0" indent="0">
+            <a:pPr indent="0" marL="0">
               <a:buNone/>
             </a:pPr>
             <a:r>
@@ -6771,7 +8011,7 @@
           <a:bodyPr wrap="square" rtlCol="0" anchor="ctr"/>
           <a:lstStyle/>
           <a:p>
-            <a:pPr marL="0" indent="0">
+            <a:pPr indent="0" marL="0">
               <a:buNone/>
             </a:pPr>
             <a:r>
@@ -6783,7 +8023,7 @@
                 <a:ea typeface="Microsoft JhengHei" pitchFamily="34" charset="-122"/>
                 <a:cs typeface="Microsoft JhengHei" pitchFamily="34" charset="-120"/>
               </a:rPr>
-              <a:t>不可以對客人說的事</a:t>
+              <a:t>常見問題與標準回答</a:t>
             </a:r>
             <a:endParaRPr lang="en-US" sz="1350" dirty="0"/>
           </a:p>
@@ -6810,7 +8050,7 @@
           <a:bodyPr wrap="square" rtlCol="0" anchor="ctr"/>
           <a:lstStyle/>
           <a:p>
-            <a:pPr marL="0" indent="0">
+            <a:pPr indent="0" marL="0">
               <a:buNone/>
             </a:pPr>
             <a:r>
@@ -6822,7 +8062,7 @@
                 <a:ea typeface="Microsoft JhengHei" pitchFamily="34" charset="-122"/>
                 <a:cs typeface="Microsoft JhengHei" pitchFamily="34" charset="-120"/>
               </a:rPr>
-              <a:t>What Not to Disclose</a:t>
+              <a:t>FAQ &amp; Suggested Replies</a:t>
             </a:r>
             <a:endParaRPr lang="en-US" sz="950" dirty="0"/>
           </a:p>
@@ -6849,7 +8089,7 @@
           <a:bodyPr wrap="square" rtlCol="0" anchor="ctr"/>
           <a:lstStyle/>
           <a:p>
-            <a:pPr marL="0" indent="0">
+            <a:pPr indent="0" marL="0">
               <a:buNone/>
             </a:pPr>
             <a:r>
@@ -6888,7 +8128,7 @@
           <a:bodyPr wrap="square" rtlCol="0" anchor="ctr"/>
           <a:lstStyle/>
           <a:p>
-            <a:pPr marL="0" indent="0">
+            <a:pPr indent="0" marL="0">
               <a:buNone/>
             </a:pPr>
             <a:r>
@@ -6900,7 +8140,7 @@
                 <a:ea typeface="Microsoft JhengHei" pitchFamily="34" charset="-122"/>
                 <a:cs typeface="Microsoft JhengHei" pitchFamily="34" charset="-120"/>
               </a:rPr>
-              <a:t>什麼狀況要往上回報</a:t>
+              <a:t>不可以對客人說的事 / 何時回報</a:t>
             </a:r>
             <a:endParaRPr lang="en-US" sz="1350" dirty="0"/>
           </a:p>
@@ -6927,7 +8167,7 @@
           <a:bodyPr wrap="square" rtlCol="0" anchor="ctr"/>
           <a:lstStyle/>
           <a:p>
-            <a:pPr marL="0" indent="0">
+            <a:pPr indent="0" marL="0">
               <a:buNone/>
             </a:pPr>
             <a:r>
@@ -6939,7 +8179,7 @@
                 <a:ea typeface="Microsoft JhengHei" pitchFamily="34" charset="-122"/>
                 <a:cs typeface="Microsoft JhengHei" pitchFamily="34" charset="-120"/>
               </a:rPr>
-              <a:t>When to Escalate</a:t>
+              <a:t>What Not to Disclose / When to Escalate</a:t>
             </a:r>
             <a:endParaRPr lang="en-US" sz="950" dirty="0"/>
           </a:p>
@@ -6993,7 +8233,7 @@
           <a:bodyPr wrap="square" rtlCol="0" anchor="ctr"/>
           <a:lstStyle/>
           <a:p>
-            <a:pPr marL="0" indent="0">
+            <a:pPr indent="0" marL="0">
               <a:lnSpc>
                 <a:spcPts val="1500"/>
               </a:lnSpc>
@@ -7010,6 +8250,12 @@
               </a:rPr>
               <a:t>📖  </a:t>
             </a:r>
+            <a:pPr indent="0" marL="0">
+              <a:lnSpc>
+                <a:spcPts val="1500"/>
+              </a:lnSpc>
+              <a:buNone/>
+            </a:pPr>
             <a:r>
               <a:rPr lang="en-US" sz="1150" b="1" dirty="0">
                 <a:solidFill>
@@ -7019,9 +8265,15 @@
                 <a:ea typeface="Microsoft JhengHei" pitchFamily="34" charset="-122"/>
                 <a:cs typeface="Microsoft JhengHei" pitchFamily="34" charset="-120"/>
               </a:rPr>
-              <a:t>第 4 章是本次最容易搞錯的部分（領獎方式看獎品、不看飯店），請務必看完。
+              <a:t>第 4、5 章是最容易搞錯的部分（領獎方式看獎品不看飯店；只有兌換碼有兩種人），請務必看完。
 </a:t>
             </a:r>
+            <a:pPr indent="0" marL="0">
+              <a:lnSpc>
+                <a:spcPts val="1500"/>
+              </a:lnSpc>
+              <a:buNone/>
+            </a:pPr>
             <a:r>
               <a:rPr lang="en-US" sz="950" dirty="0">
                 <a:solidFill>
@@ -7031,7 +8283,7 @@
                 <a:ea typeface="Microsoft JhengHei" pitchFamily="34" charset="-122"/>
                 <a:cs typeface="Microsoft JhengHei" pitchFamily="34" charset="-120"/>
               </a:rPr>
-              <a:t>　　 Section 4 is the most commonly misunderstood part — please read it carefully.</a:t>
+              <a:t>　　 Sections 4 and 5 are the most commonly misunderstood — please read them carefully.</a:t>
             </a:r>
             <a:endParaRPr lang="en-US" sz="1200" dirty="0"/>
           </a:p>
@@ -7053,7 +8305,6 @@
         <a:solidFill>
           <a:srgbClr val="FAF8F6"/>
         </a:solidFill>
-        <a:effectLst/>
       </p:bgPr>
     </p:bg>
     <p:spTree>
@@ -7091,7 +8342,7 @@
           <a:bodyPr wrap="square" rtlCol="0" anchor="ctr"/>
           <a:lstStyle/>
           <a:p>
-            <a:pPr marL="0" indent="0">
+            <a:pPr indent="0" marL="0">
               <a:buNone/>
             </a:pPr>
             <a:r>
@@ -7130,7 +8381,7 @@
           <a:bodyPr wrap="square" rtlCol="0" anchor="ctr"/>
           <a:lstStyle/>
           <a:p>
-            <a:pPr marL="0" indent="0">
+            <a:pPr indent="0" marL="0">
               <a:buNone/>
             </a:pPr>
             <a:r>
@@ -7189,7 +8440,7 @@
           <a:bodyPr wrap="square" rtlCol="0" anchor="ctr"/>
           <a:lstStyle/>
           <a:p>
-            <a:pPr marL="0" indent="0" algn="r">
+            <a:pPr algn="r" indent="0" marL="0">
               <a:buNone/>
             </a:pPr>
             <a:r>
@@ -7228,7 +8479,7 @@
           <a:bodyPr wrap="square" rtlCol="0" anchor="ctr"/>
           <a:lstStyle/>
           <a:p>
-            <a:pPr marL="0" indent="0">
+            <a:pPr indent="0" marL="0">
               <a:buNone/>
             </a:pPr>
             <a:r>
@@ -7267,7 +8518,7 @@
           <a:bodyPr wrap="square" rtlCol="0" anchor="ctr"/>
           <a:lstStyle/>
           <a:p>
-            <a:pPr marL="0" indent="0">
+            <a:pPr indent="0" marL="0">
               <a:lnSpc>
                 <a:spcPts val="1900"/>
               </a:lnSpc>
@@ -7285,6 +8536,12 @@
               <a:t>「洲遊幣 Lite」是臺北洲際酒店與高雄洲際酒店合辦的中秋線上抽獎遊戲。
 </a:t>
             </a:r>
+            <a:pPr indent="0" marL="0">
+              <a:lnSpc>
+                <a:spcPts val="1900"/>
+              </a:lnSpc>
+              <a:buNone/>
+            </a:pPr>
             <a:r>
               <a:rPr lang="en-US" sz="1000" dirty="0">
                 <a:solidFill>
@@ -7348,7 +8605,7 @@
           <a:bodyPr wrap="square" rtlCol="0" anchor="ctr"/>
           <a:lstStyle/>
           <a:p>
-            <a:pPr marL="0" indent="0">
+            <a:pPr indent="0" marL="0">
               <a:buNone/>
             </a:pPr>
             <a:r>
@@ -7387,7 +8644,7 @@
           <a:bodyPr wrap="square" rtlCol="0" anchor="ctr"/>
           <a:lstStyle/>
           <a:p>
-            <a:pPr marL="0" indent="0">
+            <a:pPr indent="0" marL="0">
               <a:buNone/>
             </a:pPr>
             <a:r>
@@ -7426,7 +8683,7 @@
           <a:bodyPr wrap="square" rtlCol="0" anchor="ctr"/>
           <a:lstStyle/>
           <a:p>
-            <a:pPr marL="0" indent="0">
+            <a:pPr indent="0" marL="0">
               <a:buNone/>
             </a:pPr>
             <a:r>
@@ -7465,7 +8722,7 @@
           <a:bodyPr wrap="square" rtlCol="0" anchor="ctr"/>
           <a:lstStyle/>
           <a:p>
-            <a:pPr marL="0" indent="0">
+            <a:pPr indent="0" marL="0">
               <a:buNone/>
             </a:pPr>
             <a:r>
@@ -7504,7 +8761,7 @@
           <a:bodyPr wrap="square" rtlCol="0" anchor="ctr"/>
           <a:lstStyle/>
           <a:p>
-            <a:pPr marL="0" indent="0">
+            <a:pPr indent="0" marL="0">
               <a:buNone/>
             </a:pPr>
             <a:r>
@@ -7570,7 +8827,7 @@
           <a:bodyPr wrap="square" rtlCol="0" anchor="ctr"/>
           <a:lstStyle/>
           <a:p>
-            <a:pPr marL="0" indent="0">
+            <a:pPr indent="0" marL="0">
               <a:buNone/>
             </a:pPr>
             <a:r>
@@ -7609,7 +8866,7 @@
           <a:bodyPr wrap="square" rtlCol="0" anchor="ctr"/>
           <a:lstStyle/>
           <a:p>
-            <a:pPr marL="0" indent="0">
+            <a:pPr indent="0" marL="0">
               <a:buNone/>
             </a:pPr>
             <a:r>
@@ -7648,7 +8905,7 @@
           <a:bodyPr wrap="square" rtlCol="0" anchor="ctr"/>
           <a:lstStyle/>
           <a:p>
-            <a:pPr marL="0" indent="0">
+            <a:pPr indent="0" marL="0">
               <a:buNone/>
             </a:pPr>
             <a:r>
@@ -7687,7 +8944,7 @@
           <a:bodyPr wrap="square" rtlCol="0" anchor="ctr"/>
           <a:lstStyle/>
           <a:p>
-            <a:pPr marL="0" indent="0">
+            <a:pPr indent="0" marL="0">
               <a:buNone/>
             </a:pPr>
             <a:r>
@@ -7726,7 +8983,7 @@
           <a:bodyPr wrap="square" rtlCol="0" anchor="ctr"/>
           <a:lstStyle/>
           <a:p>
-            <a:pPr marL="0" indent="0">
+            <a:pPr indent="0" marL="0">
               <a:buNone/>
             </a:pPr>
             <a:r>
@@ -7792,7 +9049,7 @@
           <a:bodyPr wrap="square" rtlCol="0" anchor="ctr"/>
           <a:lstStyle/>
           <a:p>
-            <a:pPr marL="0" indent="0">
+            <a:pPr indent="0" marL="0">
               <a:buNone/>
             </a:pPr>
             <a:r>
@@ -7831,7 +9088,7 @@
           <a:bodyPr wrap="square" rtlCol="0" anchor="ctr"/>
           <a:lstStyle/>
           <a:p>
-            <a:pPr marL="0" indent="0">
+            <a:pPr indent="0" marL="0">
               <a:buNone/>
             </a:pPr>
             <a:r>
@@ -7870,7 +9127,7 @@
           <a:bodyPr wrap="square" rtlCol="0" anchor="ctr"/>
           <a:lstStyle/>
           <a:p>
-            <a:pPr marL="0" indent="0">
+            <a:pPr indent="0" marL="0">
               <a:buNone/>
             </a:pPr>
             <a:r>
@@ -7909,7 +9166,7 @@
           <a:bodyPr wrap="square" rtlCol="0" anchor="ctr"/>
           <a:lstStyle/>
           <a:p>
-            <a:pPr marL="0" indent="0">
+            <a:pPr indent="0" marL="0">
               <a:buNone/>
             </a:pPr>
             <a:r>
@@ -7948,7 +9205,7 @@
           <a:bodyPr wrap="square" rtlCol="0" anchor="ctr"/>
           <a:lstStyle/>
           <a:p>
-            <a:pPr marL="0" indent="0">
+            <a:pPr indent="0" marL="0">
               <a:buNone/>
             </a:pPr>
             <a:r>
@@ -8014,7 +9271,7 @@
           <a:bodyPr wrap="square" rtlCol="0" anchor="ctr"/>
           <a:lstStyle/>
           <a:p>
-            <a:pPr marL="0" indent="0">
+            <a:pPr indent="0" marL="0">
               <a:lnSpc>
                 <a:spcPts val="1500"/>
               </a:lnSpc>
@@ -8031,6 +9288,12 @@
               </a:rPr>
               <a:t>🥮  </a:t>
             </a:r>
+            <a:pPr indent="0" marL="0">
+              <a:lnSpc>
+                <a:spcPts val="1500"/>
+              </a:lnSpc>
+              <a:buNone/>
+            </a:pPr>
             <a:r>
               <a:rPr lang="en-US" sz="1150" b="1" dirty="0">
                 <a:solidFill>
@@ -8043,6 +9306,12 @@
               <a:t>客人是掃描月餅禮盒內附的 QR Code 進入活動。
 </a:t>
             </a:r>
+            <a:pPr indent="0" marL="0">
+              <a:lnSpc>
+                <a:spcPts val="1500"/>
+              </a:lnSpc>
+              <a:buNone/>
+            </a:pPr>
             <a:r>
               <a:rPr lang="en-US" sz="950" dirty="0">
                 <a:solidFill>
@@ -8074,7 +9343,6 @@
         <a:solidFill>
           <a:srgbClr val="FAF8F6"/>
         </a:solidFill>
-        <a:effectLst/>
       </p:bgPr>
     </p:bg>
     <p:spTree>
@@ -8112,7 +9380,7 @@
           <a:bodyPr wrap="square" rtlCol="0" anchor="ctr"/>
           <a:lstStyle/>
           <a:p>
-            <a:pPr marL="0" indent="0">
+            <a:pPr indent="0" marL="0">
               <a:buNone/>
             </a:pPr>
             <a:r>
@@ -8151,7 +9419,7 @@
           <a:bodyPr wrap="square" rtlCol="0" anchor="ctr"/>
           <a:lstStyle/>
           <a:p>
-            <a:pPr marL="0" indent="0">
+            <a:pPr indent="0" marL="0">
               <a:buNone/>
             </a:pPr>
             <a:r>
@@ -8210,7 +9478,7 @@
           <a:bodyPr wrap="square" rtlCol="0" anchor="ctr"/>
           <a:lstStyle/>
           <a:p>
-            <a:pPr marL="0" indent="0" algn="r">
+            <a:pPr algn="r" indent="0" marL="0">
               <a:buNone/>
             </a:pPr>
             <a:r>
@@ -8249,7 +9517,7 @@
           <a:bodyPr wrap="square" rtlCol="0" anchor="ctr"/>
           <a:lstStyle/>
           <a:p>
-            <a:pPr marL="0" indent="0">
+            <a:pPr indent="0" marL="0">
               <a:buNone/>
             </a:pPr>
             <a:r>
@@ -8308,7 +9576,7 @@
           <a:bodyPr wrap="square" rtlCol="0" anchor="ctr"/>
           <a:lstStyle/>
           <a:p>
-            <a:pPr marL="0" indent="0" algn="ctr">
+            <a:pPr algn="ctr" indent="0" marL="0">
               <a:buNone/>
             </a:pPr>
             <a:r>
@@ -8347,7 +9615,7 @@
           <a:bodyPr wrap="square" rtlCol="0" anchor="ctr"/>
           <a:lstStyle/>
           <a:p>
-            <a:pPr marL="0" indent="0">
+            <a:pPr indent="0" marL="0">
               <a:buNone/>
             </a:pPr>
             <a:r>
@@ -8386,7 +9654,7 @@
           <a:bodyPr wrap="square" rtlCol="0" anchor="ctr"/>
           <a:lstStyle/>
           <a:p>
-            <a:pPr marL="0" indent="0">
+            <a:pPr indent="0" marL="0">
               <a:buNone/>
             </a:pPr>
             <a:r>
@@ -8445,7 +9713,7 @@
           <a:bodyPr wrap="square" rtlCol="0" anchor="ctr"/>
           <a:lstStyle/>
           <a:p>
-            <a:pPr marL="0" indent="0" algn="ctr">
+            <a:pPr algn="ctr" indent="0" marL="0">
               <a:buNone/>
             </a:pPr>
             <a:r>
@@ -8484,7 +9752,7 @@
           <a:bodyPr wrap="square" rtlCol="0" anchor="ctr"/>
           <a:lstStyle/>
           <a:p>
-            <a:pPr marL="0" indent="0">
+            <a:pPr indent="0" marL="0">
               <a:buNone/>
             </a:pPr>
             <a:r>
@@ -8523,7 +9791,7 @@
           <a:bodyPr wrap="square" rtlCol="0" anchor="ctr"/>
           <a:lstStyle/>
           <a:p>
-            <a:pPr marL="0" indent="0">
+            <a:pPr indent="0" marL="0">
               <a:buNone/>
             </a:pPr>
             <a:r>
@@ -8582,7 +9850,7 @@
           <a:bodyPr wrap="square" rtlCol="0" anchor="ctr"/>
           <a:lstStyle/>
           <a:p>
-            <a:pPr marL="0" indent="0" algn="ctr">
+            <a:pPr algn="ctr" indent="0" marL="0">
               <a:buNone/>
             </a:pPr>
             <a:r>
@@ -8621,7 +9889,7 @@
           <a:bodyPr wrap="square" rtlCol="0" anchor="ctr"/>
           <a:lstStyle/>
           <a:p>
-            <a:pPr marL="0" indent="0">
+            <a:pPr indent="0" marL="0">
               <a:buNone/>
             </a:pPr>
             <a:r>
@@ -8660,7 +9928,7 @@
           <a:bodyPr wrap="square" rtlCol="0" anchor="ctr"/>
           <a:lstStyle/>
           <a:p>
-            <a:pPr marL="0" indent="0">
+            <a:pPr indent="0" marL="0">
               <a:buNone/>
             </a:pPr>
             <a:r>
@@ -8719,7 +9987,7 @@
           <a:bodyPr wrap="square" rtlCol="0" anchor="ctr"/>
           <a:lstStyle/>
           <a:p>
-            <a:pPr marL="0" indent="0" algn="ctr">
+            <a:pPr algn="ctr" indent="0" marL="0">
               <a:buNone/>
             </a:pPr>
             <a:r>
@@ -8758,7 +10026,7 @@
           <a:bodyPr wrap="square" rtlCol="0" anchor="ctr"/>
           <a:lstStyle/>
           <a:p>
-            <a:pPr marL="0" indent="0">
+            <a:pPr indent="0" marL="0">
               <a:buNone/>
             </a:pPr>
             <a:r>
@@ -8797,7 +10065,7 @@
           <a:bodyPr wrap="square" rtlCol="0" anchor="ctr"/>
           <a:lstStyle/>
           <a:p>
-            <a:pPr marL="0" indent="0">
+            <a:pPr indent="0" marL="0">
               <a:buNone/>
             </a:pPr>
             <a:r>
@@ -8863,7 +10131,7 @@
           <a:bodyPr wrap="square" rtlCol="0" anchor="ctr"/>
           <a:lstStyle/>
           <a:p>
-            <a:pPr marL="0" indent="0">
+            <a:pPr indent="0" marL="0">
               <a:lnSpc>
                 <a:spcPts val="1500"/>
               </a:lnSpc>
@@ -8880,6 +10148,12 @@
               </a:rPr>
               <a:t>❓  </a:t>
             </a:r>
+            <a:pPr indent="0" marL="0">
+              <a:lnSpc>
+                <a:spcPts val="1500"/>
+              </a:lnSpc>
+              <a:buNone/>
+            </a:pPr>
             <a:r>
               <a:rPr lang="en-US" sz="1150" b="1" dirty="0">
                 <a:solidFill>
@@ -8892,6 +10166,12 @@
               <a:t>為什麼一定要加好友？
 </a:t>
             </a:r>
+            <a:pPr indent="0" marL="0">
+              <a:lnSpc>
+                <a:spcPts val="1500"/>
+              </a:lnSpc>
+              <a:buNone/>
+            </a:pPr>
             <a:r>
               <a:rPr lang="en-US" sz="950" dirty="0">
                 <a:solidFill>
@@ -8955,7 +10235,7 @@
           <a:bodyPr wrap="square" rtlCol="0" anchor="ctr"/>
           <a:lstStyle/>
           <a:p>
-            <a:pPr marL="0" indent="0">
+            <a:pPr indent="0" marL="0">
               <a:lnSpc>
                 <a:spcPts val="1500"/>
               </a:lnSpc>
@@ -8972,6 +10252,12 @@
               </a:rPr>
               <a:t>🙅  </a:t>
             </a:r>
+            <a:pPr indent="0" marL="0">
+              <a:lnSpc>
+                <a:spcPts val="1500"/>
+              </a:lnSpc>
+              <a:buNone/>
+            </a:pPr>
             <a:r>
               <a:rPr lang="en-US" sz="1150" b="1" dirty="0">
                 <a:solidFill>
@@ -8984,6 +10270,12 @@
               <a:t>請勿私下轉發活動連結給客人。
 </a:t>
             </a:r>
+            <a:pPr indent="0" marL="0">
+              <a:lnSpc>
+                <a:spcPts val="1500"/>
+              </a:lnSpc>
+              <a:buNone/>
+            </a:pPr>
             <a:r>
               <a:rPr lang="en-US" sz="950" dirty="0">
                 <a:solidFill>
@@ -9015,7 +10307,6 @@
         <a:solidFill>
           <a:srgbClr val="FAF8F6"/>
         </a:solidFill>
-        <a:effectLst/>
       </p:bgPr>
     </p:bg>
     <p:spTree>
@@ -9053,7 +10344,7 @@
           <a:bodyPr wrap="square" rtlCol="0" anchor="ctr"/>
           <a:lstStyle/>
           <a:p>
-            <a:pPr marL="0" indent="0">
+            <a:pPr indent="0" marL="0">
               <a:buNone/>
             </a:pPr>
             <a:r>
@@ -9092,7 +10383,7 @@
           <a:bodyPr wrap="square" rtlCol="0" anchor="ctr"/>
           <a:lstStyle/>
           <a:p>
-            <a:pPr marL="0" indent="0">
+            <a:pPr indent="0" marL="0">
               <a:buNone/>
             </a:pPr>
             <a:r>
@@ -9151,7 +10442,7 @@
           <a:bodyPr wrap="square" rtlCol="0" anchor="ctr"/>
           <a:lstStyle/>
           <a:p>
-            <a:pPr marL="0" indent="0" algn="r">
+            <a:pPr algn="r" indent="0" marL="0">
               <a:buNone/>
             </a:pPr>
             <a:r>
@@ -9190,7 +10481,7 @@
           <a:bodyPr wrap="square" rtlCol="0" anchor="ctr"/>
           <a:lstStyle/>
           <a:p>
-            <a:pPr marL="0" indent="0">
+            <a:pPr indent="0" marL="0">
               <a:buNone/>
             </a:pPr>
             <a:r>
@@ -9229,7 +10520,7 @@
           <a:bodyPr wrap="square" rtlCol="0" anchor="ctr"/>
           <a:lstStyle/>
           <a:p>
-            <a:pPr marL="0" indent="0">
+            <a:pPr indent="0" marL="0">
               <a:lnSpc>
                 <a:spcPts val="1900"/>
               </a:lnSpc>
@@ -9247,6 +10538,12 @@
               <a:t>完成任務 → 獲得洲遊幣 → 投幣抽獎
 </a:t>
             </a:r>
+            <a:pPr indent="0" marL="0">
+              <a:lnSpc>
+                <a:spcPts val="1900"/>
+              </a:lnSpc>
+              <a:buNone/>
+            </a:pPr>
             <a:r>
               <a:rPr lang="en-US" sz="1000" dirty="0">
                 <a:solidFill>
@@ -9310,7 +10607,7 @@
           <a:bodyPr wrap="square" rtlCol="0" anchor="ctr"/>
           <a:lstStyle/>
           <a:p>
-            <a:pPr marL="0" indent="0">
+            <a:pPr indent="0" marL="0">
               <a:lnSpc>
                 <a:spcPts val="1300"/>
               </a:lnSpc>
@@ -9328,6 +10625,12 @@
               <a:t>可以做的任務
 </a:t>
             </a:r>
+            <a:pPr indent="0" marL="0">
+              <a:lnSpc>
+                <a:spcPts val="1300"/>
+              </a:lnSpc>
+              <a:buNone/>
+            </a:pPr>
             <a:r>
               <a:rPr lang="en-US" sz="850" dirty="0">
                 <a:solidFill>
@@ -9364,7 +10667,7 @@
           <a:bodyPr wrap="square" rtlCol="0" anchor="ctr"/>
           <a:lstStyle/>
           <a:p>
-            <a:pPr marL="0" indent="0">
+            <a:pPr indent="0" marL="0">
               <a:lnSpc>
                 <a:spcPts val="1700"/>
               </a:lnSpc>
@@ -9380,10 +10683,78 @@
                 <a:cs typeface="Microsoft JhengHei" pitchFamily="34" charset="-120"/>
               </a:rPr>
               <a:t>▸ 追蹤 高雄洲際 Instagram / Facebook
-▸ 追蹤 臺北洲際 Instagram / Facebook
-▸ 追蹤 高雄洲際「食遇」Instagram / Facebook
-▸ 分享活動給好友
-▸ 填寫個人資料</a:t>
+</a:t>
+            </a:r>
+            <a:pPr indent="0" marL="0">
+              <a:lnSpc>
+                <a:spcPts val="1700"/>
+              </a:lnSpc>
+              <a:buNone/>
+            </a:pPr>
+            <a:r>
+              <a:rPr lang="en-US" sz="1050" dirty="0">
+                <a:solidFill>
+                  <a:srgbClr val="3D3935"/>
+                </a:solidFill>
+                <a:latin typeface="Microsoft JhengHei" pitchFamily="34" charset="0"/>
+                <a:ea typeface="Microsoft JhengHei" pitchFamily="34" charset="-122"/>
+                <a:cs typeface="Microsoft JhengHei" pitchFamily="34" charset="-120"/>
+              </a:rPr>
+              <a:t>▸ 追蹤 臺北洲際 Instagram / Facebook
+</a:t>
+            </a:r>
+            <a:pPr indent="0" marL="0">
+              <a:lnSpc>
+                <a:spcPts val="1700"/>
+              </a:lnSpc>
+              <a:buNone/>
+            </a:pPr>
+            <a:r>
+              <a:rPr lang="en-US" sz="1050" dirty="0">
+                <a:solidFill>
+                  <a:srgbClr val="3D3935"/>
+                </a:solidFill>
+                <a:latin typeface="Microsoft JhengHei" pitchFamily="34" charset="0"/>
+                <a:ea typeface="Microsoft JhengHei" pitchFamily="34" charset="-122"/>
+                <a:cs typeface="Microsoft JhengHei" pitchFamily="34" charset="-120"/>
+              </a:rPr>
+              <a:t>▸ 追蹤 高雄洲際「食遇」Instagram / Facebook
+</a:t>
+            </a:r>
+            <a:pPr indent="0" marL="0">
+              <a:lnSpc>
+                <a:spcPts val="1700"/>
+              </a:lnSpc>
+              <a:buNone/>
+            </a:pPr>
+            <a:r>
+              <a:rPr lang="en-US" sz="1050" dirty="0">
+                <a:solidFill>
+                  <a:srgbClr val="3D3935"/>
+                </a:solidFill>
+                <a:latin typeface="Microsoft JhengHei" pitchFamily="34" charset="0"/>
+                <a:ea typeface="Microsoft JhengHei" pitchFamily="34" charset="-122"/>
+                <a:cs typeface="Microsoft JhengHei" pitchFamily="34" charset="-120"/>
+              </a:rPr>
+              <a:t>▸ 分享活動給好友
+</a:t>
+            </a:r>
+            <a:pPr indent="0" marL="0">
+              <a:lnSpc>
+                <a:spcPts val="1700"/>
+              </a:lnSpc>
+              <a:buNone/>
+            </a:pPr>
+            <a:r>
+              <a:rPr lang="en-US" sz="1050" dirty="0">
+                <a:solidFill>
+                  <a:srgbClr val="3D3935"/>
+                </a:solidFill>
+                <a:latin typeface="Microsoft JhengHei" pitchFamily="34" charset="0"/>
+                <a:ea typeface="Microsoft JhengHei" pitchFamily="34" charset="-122"/>
+                <a:cs typeface="Microsoft JhengHei" pitchFamily="34" charset="-120"/>
+              </a:rPr>
+              <a:t>▸ 填寫個人資料</a:t>
             </a:r>
             <a:endParaRPr lang="en-US" sz="1050" dirty="0"/>
           </a:p>
@@ -9437,7 +10808,7 @@
           <a:bodyPr wrap="square" rtlCol="0" anchor="ctr"/>
           <a:lstStyle/>
           <a:p>
-            <a:pPr marL="0" indent="0">
+            <a:pPr indent="0" marL="0">
               <a:lnSpc>
                 <a:spcPts val="1300"/>
               </a:lnSpc>
@@ -9455,6 +10826,12 @@
               <a:t>投幣抽獎
 </a:t>
             </a:r>
+            <a:pPr indent="0" marL="0">
+              <a:lnSpc>
+                <a:spcPts val="1300"/>
+              </a:lnSpc>
+              <a:buNone/>
+            </a:pPr>
             <a:r>
               <a:rPr lang="en-US" sz="850" dirty="0">
                 <a:solidFill>
@@ -9491,7 +10868,7 @@
           <a:bodyPr wrap="square" rtlCol="0" anchor="ctr"/>
           <a:lstStyle/>
           <a:p>
-            <a:pPr marL="0" indent="0">
+            <a:pPr indent="0" marL="0">
               <a:buNone/>
             </a:pPr>
             <a:r>
@@ -9505,6 +10882,9 @@
               </a:rPr>
               <a:t>三等獎　</a:t>
             </a:r>
+            <a:pPr indent="0" marL="0">
+              <a:buNone/>
+            </a:pPr>
             <a:r>
               <a:rPr lang="en-US" sz="850" dirty="0">
                 <a:solidFill>
@@ -9563,7 +10943,7 @@
           <a:bodyPr wrap="square" rtlCol="0" anchor="ctr"/>
           <a:lstStyle/>
           <a:p>
-            <a:pPr marL="0" indent="0" algn="ctr">
+            <a:pPr algn="ctr" indent="0" marL="0">
               <a:buNone/>
             </a:pPr>
             <a:r>
@@ -9602,7 +10982,7 @@
           <a:bodyPr wrap="square" rtlCol="0" anchor="ctr"/>
           <a:lstStyle/>
           <a:p>
-            <a:pPr marL="0" indent="0">
+            <a:pPr indent="0" marL="0">
               <a:buNone/>
             </a:pPr>
             <a:r>
@@ -9616,6 +10996,9 @@
               </a:rPr>
               <a:t>二等獎　</a:t>
             </a:r>
+            <a:pPr indent="0" marL="0">
+              <a:buNone/>
+            </a:pPr>
             <a:r>
               <a:rPr lang="en-US" sz="850" dirty="0">
                 <a:solidFill>
@@ -9674,7 +11057,7 @@
           <a:bodyPr wrap="square" rtlCol="0" anchor="ctr"/>
           <a:lstStyle/>
           <a:p>
-            <a:pPr marL="0" indent="0" algn="ctr">
+            <a:pPr algn="ctr" indent="0" marL="0">
               <a:buNone/>
             </a:pPr>
             <a:r>
@@ -9713,7 +11096,7 @@
           <a:bodyPr wrap="square" rtlCol="0" anchor="ctr"/>
           <a:lstStyle/>
           <a:p>
-            <a:pPr marL="0" indent="0">
+            <a:pPr indent="0" marL="0">
               <a:buNone/>
             </a:pPr>
             <a:r>
@@ -9727,6 +11110,9 @@
               </a:rPr>
               <a:t>一等獎　</a:t>
             </a:r>
+            <a:pPr indent="0" marL="0">
+              <a:buNone/>
+            </a:pPr>
             <a:r>
               <a:rPr lang="en-US" sz="850" dirty="0">
                 <a:solidFill>
@@ -9785,7 +11171,7 @@
           <a:bodyPr wrap="square" rtlCol="0" anchor="ctr"/>
           <a:lstStyle/>
           <a:p>
-            <a:pPr marL="0" indent="0" algn="ctr">
+            <a:pPr algn="ctr" indent="0" marL="0">
               <a:buNone/>
             </a:pPr>
             <a:r>
@@ -9820,11 +11206,11 @@
             </a:avLst>
           </a:prstGeom>
           <a:solidFill>
-            <a:srgbClr val="F4ECE7"/>
+            <a:srgbClr val="FBEDED"/>
           </a:solidFill>
           <a:ln w="9525">
             <a:solidFill>
-              <a:srgbClr val="935D08"/>
+              <a:srgbClr val="9A3B3B"/>
             </a:solidFill>
             <a:prstDash val="solid"/>
           </a:ln>
@@ -9851,7 +11237,7 @@
           <a:bodyPr wrap="square" rtlCol="0" anchor="ctr"/>
           <a:lstStyle/>
           <a:p>
-            <a:pPr marL="0" indent="0">
+            <a:pPr indent="0" marL="0">
               <a:lnSpc>
                 <a:spcPts val="1500"/>
               </a:lnSpc>
@@ -9860,36 +11246,48 @@
             <a:r>
               <a:rPr lang="en-US" sz="1200" dirty="0">
                 <a:solidFill>
-                  <a:srgbClr val="935D08"/>
-                </a:solidFill>
-                <a:latin typeface="Microsoft JhengHei" pitchFamily="34" charset="0"/>
-                <a:ea typeface="Microsoft JhengHei" pitchFamily="34" charset="-122"/>
-                <a:cs typeface="Microsoft JhengHei" pitchFamily="34" charset="-120"/>
-              </a:rPr>
-              <a:t>🎡  </a:t>
-            </a:r>
+                  <a:srgbClr val="9A3B3B"/>
+                </a:solidFill>
+                <a:latin typeface="Microsoft JhengHei" pitchFamily="34" charset="0"/>
+                <a:ea typeface="Microsoft JhengHei" pitchFamily="34" charset="-122"/>
+                <a:cs typeface="Microsoft JhengHei" pitchFamily="34" charset="-120"/>
+              </a:rPr>
+              <a:t>🪙  </a:t>
+            </a:r>
+            <a:pPr indent="0" marL="0">
+              <a:lnSpc>
+                <a:spcPts val="1500"/>
+              </a:lnSpc>
+              <a:buNone/>
+            </a:pPr>
             <a:r>
               <a:rPr lang="en-US" sz="1150" b="1" dirty="0">
                 <a:solidFill>
-                  <a:srgbClr val="935D08"/>
-                </a:solidFill>
-                <a:latin typeface="Microsoft JhengHei" pitchFamily="34" charset="0"/>
-                <a:ea typeface="Microsoft JhengHei" pitchFamily="34" charset="-122"/>
-                <a:cs typeface="Microsoft JhengHei" pitchFamily="34" charset="-120"/>
-              </a:rPr>
-              <a:t>轉盤上同時有兩家飯店的獎品，客人抽到哪一家的獎是隨機的。
+                  <a:srgbClr val="9A3B3B"/>
+                </a:solidFill>
+                <a:latin typeface="Microsoft JhengHei" pitchFamily="34" charset="0"/>
+                <a:ea typeface="Microsoft JhengHei" pitchFamily="34" charset="-122"/>
+                <a:cs typeface="Microsoft JhengHei" pitchFamily="34" charset="-120"/>
+              </a:rPr>
+              <a:t>每抽一次都會扣洲遊幣，沒有中獎也一樣扣。這是客人最常抱怨的一點。
 </a:t>
             </a:r>
+            <a:pPr indent="0" marL="0">
+              <a:lnSpc>
+                <a:spcPts val="1500"/>
+              </a:lnSpc>
+              <a:buNone/>
+            </a:pPr>
             <a:r>
               <a:rPr lang="en-US" sz="950" dirty="0">
                 <a:solidFill>
-                  <a:srgbClr val="935D08"/>
-                </a:solidFill>
-                <a:latin typeface="Microsoft JhengHei" pitchFamily="34" charset="0"/>
-                <a:ea typeface="Microsoft JhengHei" pitchFamily="34" charset="-122"/>
-                <a:cs typeface="Microsoft JhengHei" pitchFamily="34" charset="-120"/>
-              </a:rPr>
-              <a:t>　　 The wheel contains prizes from both hotels; which hotel a guest wins from is random.</a:t>
+                  <a:srgbClr val="9A3B3B"/>
+                </a:solidFill>
+                <a:latin typeface="Microsoft JhengHei" pitchFamily="34" charset="0"/>
+                <a:ea typeface="Microsoft JhengHei" pitchFamily="34" charset="-122"/>
+                <a:cs typeface="Microsoft JhengHei" pitchFamily="34" charset="-120"/>
+              </a:rPr>
+              <a:t>　　 Coins are deducted on every spin, including when nothing is won. This is the most common complaint.</a:t>
             </a:r>
             <a:endParaRPr lang="en-US" sz="1200" dirty="0"/>
           </a:p>
@@ -9911,7 +11309,6 @@
         <a:solidFill>
           <a:srgbClr val="FAF8F6"/>
         </a:solidFill>
-        <a:effectLst/>
       </p:bgPr>
     </p:bg>
     <p:spTree>
@@ -9949,7 +11346,7 @@
           <a:bodyPr wrap="square" rtlCol="0" anchor="ctr"/>
           <a:lstStyle/>
           <a:p>
-            <a:pPr marL="0" indent="0">
+            <a:pPr indent="0" marL="0">
               <a:buNone/>
             </a:pPr>
             <a:r>
@@ -9988,7 +11385,7 @@
           <a:bodyPr wrap="square" rtlCol="0" anchor="ctr"/>
           <a:lstStyle/>
           <a:p>
-            <a:pPr marL="0" indent="0">
+            <a:pPr indent="0" marL="0">
               <a:buNone/>
             </a:pPr>
             <a:r>
@@ -10047,7 +11444,7 @@
           <a:bodyPr wrap="square" rtlCol="0" anchor="ctr"/>
           <a:lstStyle/>
           <a:p>
-            <a:pPr marL="0" indent="0" algn="r">
+            <a:pPr algn="r" indent="0" marL="0">
               <a:buNone/>
             </a:pPr>
             <a:r>
@@ -10086,7 +11483,7 @@
           <a:bodyPr wrap="square" rtlCol="0" anchor="ctr"/>
           <a:lstStyle/>
           <a:p>
-            <a:pPr marL="0" indent="0">
+            <a:pPr indent="0" marL="0">
               <a:buNone/>
             </a:pPr>
             <a:r>
@@ -10125,7 +11522,7 @@
           <a:bodyPr wrap="square" rtlCol="0" anchor="ctr"/>
           <a:lstStyle/>
           <a:p>
-            <a:pPr marL="0" indent="0">
+            <a:pPr indent="0" marL="0">
               <a:lnSpc>
                 <a:spcPts val="1700"/>
               </a:lnSpc>
@@ -10143,6 +11540,12 @@
               <a:t>看【客人手上有沒有優惠券】，不是看哪一家飯店。
 </a:t>
             </a:r>
+            <a:pPr indent="0" marL="0">
+              <a:lnSpc>
+                <a:spcPts val="1700"/>
+              </a:lnSpc>
+              <a:buNone/>
+            </a:pPr>
             <a:r>
               <a:rPr lang="en-US" sz="1000" dirty="0">
                 <a:solidFill>
@@ -10184,13 +11587,6 @@
             <a:prstDash val="solid"/>
           </a:ln>
         </p:spPr>
-        <p:txBody>
-          <a:bodyPr/>
-          <a:lstStyle/>
-          <a:p>
-            <a:endParaRPr lang="zh-TW" altLang="en-US"/>
-          </a:p>
-        </p:txBody>
       </p:sp>
       <p:sp>
         <p:nvSpPr>
@@ -10213,7 +11609,7 @@
           <a:bodyPr wrap="square" rtlCol="0" anchor="ctr"/>
           <a:lstStyle/>
           <a:p>
-            <a:pPr marL="0" indent="0">
+            <a:pPr indent="0" marL="0">
               <a:lnSpc>
                 <a:spcPts val="1400"/>
               </a:lnSpc>
@@ -10231,6 +11627,12 @@
               <a:t>📩  有優惠券（多數獎項）
 </a:t>
             </a:r>
+            <a:pPr indent="0" marL="0">
+              <a:lnSpc>
+                <a:spcPts val="1400"/>
+              </a:lnSpc>
+              <a:buNone/>
+            </a:pPr>
             <a:r>
               <a:rPr lang="en-US" sz="900" dirty="0">
                 <a:solidFill>
@@ -10267,7 +11669,7 @@
           <a:bodyPr wrap="square" rtlCol="0" anchor="ctr"/>
           <a:lstStyle/>
           <a:p>
-            <a:pPr marL="0" indent="0">
+            <a:pPr indent="0" marL="0">
               <a:lnSpc>
                 <a:spcPts val="1300"/>
               </a:lnSpc>
@@ -10285,6 +11687,12 @@
               <a:t>券在中獎當下自動進客人的 LINE
 </a:t>
             </a:r>
+            <a:pPr indent="0" marL="0">
+              <a:lnSpc>
+                <a:spcPts val="1300"/>
+              </a:lnSpc>
+              <a:buNone/>
+            </a:pPr>
             <a:r>
               <a:rPr lang="en-US" sz="850" dirty="0">
                 <a:solidFill>
@@ -10297,6 +11705,12 @@
               <a:t>Delivered to their LINE chat automatically
 </a:t>
             </a:r>
+            <a:pPr indent="0" marL="0">
+              <a:lnSpc>
+                <a:spcPts val="1300"/>
+              </a:lnSpc>
+              <a:buNone/>
+            </a:pPr>
             <a:r>
               <a:rPr lang="en-US" sz="1050" dirty="0">
                 <a:solidFill>
@@ -10309,6 +11723,12 @@
               <a:t>▸ 客人自行點選領取（限一次）
 </a:t>
             </a:r>
+            <a:pPr indent="0" marL="0">
+              <a:lnSpc>
+                <a:spcPts val="1300"/>
+              </a:lnSpc>
+              <a:buNone/>
+            </a:pPr>
             <a:r>
               <a:rPr lang="en-US" sz="800" dirty="0">
                 <a:solidFill>
@@ -10321,6 +11741,12 @@
               <a:t>   Claimed by the guest, once only
 </a:t>
             </a:r>
+            <a:pPr indent="0" marL="0">
+              <a:lnSpc>
+                <a:spcPts val="1300"/>
+              </a:lnSpc>
+              <a:buNone/>
+            </a:pPr>
             <a:r>
               <a:rPr lang="en-US" sz="1050" dirty="0">
                 <a:solidFill>
@@ -10333,6 +11759,12 @@
               <a:t>▸ 到店出示兌換碼 → 櫃檯核銷
 </a:t>
             </a:r>
+            <a:pPr indent="0" marL="0">
+              <a:lnSpc>
+                <a:spcPts val="1300"/>
+              </a:lnSpc>
+              <a:buNone/>
+            </a:pPr>
             <a:r>
               <a:rPr lang="en-US" sz="800" dirty="0">
                 <a:solidFill>
@@ -10374,13 +11806,6 @@
             <a:prstDash val="solid"/>
           </a:ln>
         </p:spPr>
-        <p:txBody>
-          <a:bodyPr/>
-          <a:lstStyle/>
-          <a:p>
-            <a:endParaRPr lang="zh-TW" altLang="en-US"/>
-          </a:p>
-        </p:txBody>
       </p:sp>
       <p:sp>
         <p:nvSpPr>
@@ -10403,7 +11828,7 @@
           <a:bodyPr wrap="square" rtlCol="0" anchor="ctr"/>
           <a:lstStyle/>
           <a:p>
-            <a:pPr marL="0" indent="0">
+            <a:pPr indent="0" marL="0">
               <a:lnSpc>
                 <a:spcPts val="1400"/>
               </a:lnSpc>
@@ -10421,6 +11846,12 @@
               <a:t>📞  沒有券・專人聯繫
 </a:t>
             </a:r>
+            <a:pPr indent="0" marL="0">
+              <a:lnSpc>
+                <a:spcPts val="1400"/>
+              </a:lnSpc>
+              <a:buNone/>
+            </a:pPr>
             <a:r>
               <a:rPr lang="en-US" sz="900" dirty="0">
                 <a:solidFill>
@@ -10457,7 +11888,7 @@
           <a:bodyPr wrap="square" rtlCol="0" anchor="ctr"/>
           <a:lstStyle/>
           <a:p>
-            <a:pPr marL="0" indent="0">
+            <a:pPr indent="0" marL="0">
               <a:lnSpc>
                 <a:spcPts val="1300"/>
               </a:lnSpc>
@@ -10475,6 +11906,12 @@
               <a:t>臺北全部獎項 ＋ 高雄的兩項住宿大獎
 </a:t>
             </a:r>
+            <a:pPr indent="0" marL="0">
+              <a:lnSpc>
+                <a:spcPts val="1300"/>
+              </a:lnSpc>
+              <a:buNone/>
+            </a:pPr>
             <a:r>
               <a:rPr lang="en-US" sz="850" dirty="0">
                 <a:solidFill>
@@ -10487,6 +11924,12 @@
               <a:t>All Taipei prizes + two Kaohsiung room prizes
 </a:t>
             </a:r>
+            <a:pPr indent="0" marL="0">
+              <a:lnSpc>
+                <a:spcPts val="1300"/>
+              </a:lnSpc>
+              <a:buNone/>
+            </a:pPr>
             <a:r>
               <a:rPr lang="en-US" sz="1050" dirty="0">
                 <a:solidFill>
@@ -10499,6 +11942,12 @@
               <a:t>▸ 畫面請客人留姓名／手機／Email
 </a:t>
             </a:r>
+            <a:pPr indent="0" marL="0">
+              <a:lnSpc>
+                <a:spcPts val="1300"/>
+              </a:lnSpc>
+              <a:buNone/>
+            </a:pPr>
             <a:r>
               <a:rPr lang="en-US" sz="800" dirty="0">
                 <a:solidFill>
@@ -10511,6 +11960,12 @@
               <a:t>   Guest submits their contact details
 </a:t>
             </a:r>
+            <a:pPr indent="0" marL="0">
+              <a:lnSpc>
+                <a:spcPts val="1300"/>
+              </a:lnSpc>
+              <a:buNone/>
+            </a:pPr>
             <a:r>
               <a:rPr lang="en-US" sz="1050" dirty="0">
                 <a:solidFill>
@@ -10523,6 +11978,12 @@
               <a:t>▸ 該館同仁主動聯繫安排
 </a:t>
             </a:r>
+            <a:pPr indent="0" marL="0">
+              <a:lnSpc>
+                <a:spcPts val="1300"/>
+              </a:lnSpc>
+              <a:buNone/>
+            </a:pPr>
             <a:r>
               <a:rPr lang="en-US" sz="800" dirty="0">
                 <a:solidFill>
@@ -10564,13 +12025,6 @@
             <a:prstDash val="solid"/>
           </a:ln>
         </p:spPr>
-        <p:txBody>
-          <a:bodyPr/>
-          <a:lstStyle/>
-          <a:p>
-            <a:endParaRPr lang="zh-TW" altLang="en-US"/>
-          </a:p>
-        </p:txBody>
       </p:sp>
       <p:sp>
         <p:nvSpPr>
@@ -10593,7 +12047,7 @@
           <a:bodyPr wrap="square" rtlCol="0" anchor="ctr"/>
           <a:lstStyle/>
           <a:p>
-            <a:pPr marL="0" indent="0">
+            <a:pPr indent="0" marL="0">
               <a:lnSpc>
                 <a:spcPts val="1500"/>
               </a:lnSpc>
@@ -10610,6 +12064,12 @@
               </a:rPr>
               <a:t>🚫  </a:t>
             </a:r>
+            <a:pPr indent="0" marL="0">
+              <a:lnSpc>
+                <a:spcPts val="1500"/>
+              </a:lnSpc>
+              <a:buNone/>
+            </a:pPr>
             <a:r>
               <a:rPr lang="en-US" sz="1150" b="1" dirty="0">
                 <a:solidFill>
@@ -10622,6 +12082,12 @@
               <a:t>客人只有兌換碼、LINE 裡沒有優惠券 → 是專人聯繫的獎項，請勿核銷。
 </a:t>
             </a:r>
+            <a:pPr indent="0" marL="0">
+              <a:lnSpc>
+                <a:spcPts val="1500"/>
+              </a:lnSpc>
+              <a:buNone/>
+            </a:pPr>
             <a:r>
               <a:rPr lang="en-US" sz="950" dirty="0">
                 <a:solidFill>
@@ -10653,7 +12119,6 @@
         <a:solidFill>
           <a:srgbClr val="FAF8F6"/>
         </a:solidFill>
-        <a:effectLst/>
       </p:bgPr>
     </p:bg>
     <p:spTree>
@@ -10691,7 +12156,7 @@
           <a:bodyPr wrap="square" rtlCol="0" anchor="ctr"/>
           <a:lstStyle/>
           <a:p>
-            <a:pPr marL="0" indent="0">
+            <a:pPr indent="0" marL="0">
               <a:buNone/>
             </a:pPr>
             <a:r>
@@ -10730,7 +12195,7 @@
           <a:bodyPr wrap="square" rtlCol="0" anchor="ctr"/>
           <a:lstStyle/>
           <a:p>
-            <a:pPr marL="0" indent="0">
+            <a:pPr indent="0" marL="0">
               <a:buNone/>
             </a:pPr>
             <a:r>
@@ -10789,7 +12254,7 @@
           <a:bodyPr wrap="square" rtlCol="0" anchor="ctr"/>
           <a:lstStyle/>
           <a:p>
-            <a:pPr marL="0" indent="0" algn="r">
+            <a:pPr algn="r" indent="0" marL="0">
               <a:buNone/>
             </a:pPr>
             <a:r>
@@ -10828,7 +12293,7 @@
           <a:bodyPr wrap="square" rtlCol="0" anchor="ctr"/>
           <a:lstStyle/>
           <a:p>
-            <a:pPr marL="0" indent="0">
+            <a:pPr indent="0" marL="0">
               <a:buNone/>
             </a:pPr>
             <a:r>
@@ -10872,13 +12337,6 @@
             <a:prstDash val="solid"/>
           </a:ln>
         </p:spPr>
-        <p:txBody>
-          <a:bodyPr/>
-          <a:lstStyle/>
-          <a:p>
-            <a:endParaRPr lang="zh-TW" altLang="en-US"/>
-          </a:p>
-        </p:txBody>
       </p:sp>
       <p:sp>
         <p:nvSpPr>
@@ -10901,7 +12359,7 @@
           <a:bodyPr wrap="square" rtlCol="0" anchor="ctr"/>
           <a:lstStyle/>
           <a:p>
-            <a:pPr marL="0" indent="0">
+            <a:pPr indent="0" marL="0">
               <a:lnSpc>
                 <a:spcPts val="1400"/>
               </a:lnSpc>
@@ -10919,6 +12377,12 @@
               <a:t>🔵  臺北洲際酒店
 </a:t>
             </a:r>
+            <a:pPr indent="0" marL="0">
+              <a:lnSpc>
+                <a:spcPts val="1400"/>
+              </a:lnSpc>
+              <a:buNone/>
+            </a:pPr>
             <a:r>
               <a:rPr lang="en-US" sz="850" dirty="0">
                 <a:solidFill>
@@ -10931,6 +12395,12 @@
               <a:t>InterContinental Taipei
 </a:t>
             </a:r>
+            <a:pPr indent="0" marL="0">
+              <a:lnSpc>
+                <a:spcPts val="1400"/>
+              </a:lnSpc>
+              <a:buNone/>
+            </a:pPr>
             <a:r>
               <a:rPr lang="en-US" sz="1200" b="1" dirty="0">
                 <a:solidFill>
@@ -10943,6 +12413,12 @@
               <a:t>全部獎項
 </a:t>
             </a:r>
+            <a:pPr indent="0" marL="0">
+              <a:lnSpc>
+                <a:spcPts val="1400"/>
+              </a:lnSpc>
+              <a:buNone/>
+            </a:pPr>
             <a:r>
               <a:rPr lang="en-US" sz="850" dirty="0">
                 <a:solidFill>
@@ -10984,13 +12460,6 @@
             <a:prstDash val="solid"/>
           </a:ln>
         </p:spPr>
-        <p:txBody>
-          <a:bodyPr/>
-          <a:lstStyle/>
-          <a:p>
-            <a:endParaRPr lang="zh-TW" altLang="en-US"/>
-          </a:p>
-        </p:txBody>
       </p:sp>
       <p:sp>
         <p:nvSpPr>
@@ -11013,7 +12482,7 @@
           <a:bodyPr wrap="square" rtlCol="0" anchor="ctr"/>
           <a:lstStyle/>
           <a:p>
-            <a:pPr marL="0" indent="0">
+            <a:pPr indent="0" marL="0">
               <a:lnSpc>
                 <a:spcPts val="1400"/>
               </a:lnSpc>
@@ -11031,6 +12500,12 @@
               <a:t>🟡  高雄洲際酒店
 </a:t>
             </a:r>
+            <a:pPr indent="0" marL="0">
+              <a:lnSpc>
+                <a:spcPts val="1400"/>
+              </a:lnSpc>
+              <a:buNone/>
+            </a:pPr>
             <a:r>
               <a:rPr lang="en-US" sz="850" dirty="0">
                 <a:solidFill>
@@ -11043,6 +12518,12 @@
               <a:t>InterContinental Kaohsiung
 </a:t>
             </a:r>
+            <a:pPr indent="0" marL="0">
+              <a:lnSpc>
+                <a:spcPts val="1400"/>
+              </a:lnSpc>
+              <a:buNone/>
+            </a:pPr>
             <a:r>
               <a:rPr lang="en-US" sz="1200" b="1" dirty="0">
                 <a:solidFill>
@@ -11055,6 +12536,12 @@
               <a:t>只有這兩項住宿大獎
 </a:t>
             </a:r>
+            <a:pPr indent="0" marL="0">
+              <a:lnSpc>
+                <a:spcPts val="1400"/>
+              </a:lnSpc>
+              <a:buNone/>
+            </a:pPr>
             <a:r>
               <a:rPr lang="en-US" sz="850" dirty="0">
                 <a:solidFill>
@@ -11096,13 +12583,6 @@
             <a:prstDash val="solid"/>
           </a:ln>
         </p:spPr>
-        <p:txBody>
-          <a:bodyPr/>
-          <a:lstStyle/>
-          <a:p>
-            <a:endParaRPr lang="zh-TW" altLang="en-US"/>
-          </a:p>
-        </p:txBody>
       </p:sp>
       <p:sp>
         <p:nvSpPr>
@@ -11125,7 +12605,7 @@
           <a:bodyPr wrap="square" rtlCol="0" anchor="ctr"/>
           <a:lstStyle/>
           <a:p>
-            <a:pPr marL="0" indent="0">
+            <a:pPr indent="0" marL="0">
               <a:buNone/>
             </a:pPr>
             <a:r>
@@ -11164,7 +12644,7 @@
           <a:bodyPr wrap="square" rtlCol="0" anchor="ctr"/>
           <a:lstStyle/>
           <a:p>
-            <a:pPr marL="0" indent="0">
+            <a:pPr indent="0" marL="0">
               <a:lnSpc>
                 <a:spcPts val="1300"/>
               </a:lnSpc>
@@ -11182,6 +12662,12 @@
               <a:t>高雄洲際酒店 港灣海景開放式套房 住宿一晚（含雙人早餐）
 </a:t>
             </a:r>
+            <a:pPr indent="0" marL="0">
+              <a:lnSpc>
+                <a:spcPts val="1300"/>
+              </a:lnSpc>
+              <a:buNone/>
+            </a:pPr>
             <a:r>
               <a:rPr lang="en-US" sz="850" dirty="0">
                 <a:solidFill>
@@ -11245,7 +12731,7 @@
           <a:bodyPr wrap="square" rtlCol="0" anchor="ctr"/>
           <a:lstStyle/>
           <a:p>
-            <a:pPr marL="0" indent="0">
+            <a:pPr indent="0" marL="0">
               <a:buNone/>
             </a:pPr>
             <a:r>
@@ -11284,7 +12770,7 @@
           <a:bodyPr wrap="square" rtlCol="0" anchor="ctr"/>
           <a:lstStyle/>
           <a:p>
-            <a:pPr marL="0" indent="0">
+            <a:pPr indent="0" marL="0">
               <a:lnSpc>
                 <a:spcPts val="1300"/>
               </a:lnSpc>
@@ -11302,6 +12788,12 @@
               <a:t>高雄洲際酒店 豪華經典房 住宿一晚（含雙人早餐）
 </a:t>
             </a:r>
+            <a:pPr indent="0" marL="0">
+              <a:lnSpc>
+                <a:spcPts val="1300"/>
+              </a:lnSpc>
+              <a:buNone/>
+            </a:pPr>
             <a:r>
               <a:rPr lang="en-US" sz="850" dirty="0">
                 <a:solidFill>
@@ -11365,7 +12857,7 @@
           <a:bodyPr wrap="square" rtlCol="0" anchor="ctr"/>
           <a:lstStyle/>
           <a:p>
-            <a:pPr marL="0" indent="0">
+            <a:pPr indent="0" marL="0">
               <a:lnSpc>
                 <a:spcPts val="1500"/>
               </a:lnSpc>
@@ -11382,6 +12874,12 @@
               </a:rPr>
               <a:t>🛏  </a:t>
             </a:r>
+            <a:pPr indent="0" marL="0">
+              <a:lnSpc>
+                <a:spcPts val="1500"/>
+              </a:lnSpc>
+              <a:buNone/>
+            </a:pPr>
             <a:r>
               <a:rPr lang="en-US" sz="1150" b="1" dirty="0">
                 <a:solidFill>
@@ -11394,6 +12892,12 @@
               <a:t>住宿券要安排入住日期與房型，不是拿張券到櫃檯就能換，所以由飯店的人主動聯繫。
 </a:t>
             </a:r>
+            <a:pPr indent="0" marL="0">
+              <a:lnSpc>
+                <a:spcPts val="1500"/>
+              </a:lnSpc>
+              <a:buNone/>
+            </a:pPr>
             <a:r>
               <a:rPr lang="en-US" sz="950" dirty="0">
                 <a:solidFill>
@@ -11425,7 +12929,6 @@
         <a:solidFill>
           <a:srgbClr val="FAF8F6"/>
         </a:solidFill>
-        <a:effectLst/>
       </p:bgPr>
     </p:bg>
     <p:spTree>
@@ -11463,7 +12966,7 @@
           <a:bodyPr wrap="square" rtlCol="0" anchor="ctr"/>
           <a:lstStyle/>
           <a:p>
-            <a:pPr marL="0" indent="0">
+            <a:pPr indent="0" marL="0">
               <a:buNone/>
             </a:pPr>
             <a:r>
@@ -11475,7 +12978,7 @@
                 <a:ea typeface="Microsoft JhengHei" pitchFamily="34" charset="-122"/>
                 <a:cs typeface="Microsoft JhengHei" pitchFamily="34" charset="-120"/>
               </a:rPr>
-              <a:t>五、櫃檯核銷步驟（高雄）</a:t>
+              <a:t>五、⭐ 只有兌換碼、沒有優惠券</a:t>
             </a:r>
             <a:endParaRPr lang="en-US" sz="2200" dirty="0"/>
           </a:p>
@@ -11502,7 +13005,7 @@
           <a:bodyPr wrap="square" rtlCol="0" anchor="ctr"/>
           <a:lstStyle/>
           <a:p>
-            <a:pPr marL="0" indent="0">
+            <a:pPr indent="0" marL="0">
               <a:buNone/>
             </a:pPr>
             <a:r>
@@ -11514,7 +13017,7 @@
                 <a:ea typeface="Microsoft JhengHei" pitchFamily="34" charset="-122"/>
                 <a:cs typeface="Microsoft JhengHei" pitchFamily="34" charset="-120"/>
               </a:rPr>
-              <a:t>Counter Redemption Procedure (Kaohsiung)</a:t>
+              <a:t>Code but No Coupon　—　有兩種人，要分開處理 / Two different cases</a:t>
             </a:r>
             <a:endParaRPr lang="en-US" sz="1150" dirty="0"/>
           </a:p>
@@ -11561,7 +13064,7 @@
           <a:bodyPr wrap="square" rtlCol="0" anchor="ctr"/>
           <a:lstStyle/>
           <a:p>
-            <a:pPr marL="0" indent="0" algn="r">
+            <a:pPr algn="r" indent="0" marL="0">
               <a:buNone/>
             </a:pPr>
             <a:r>
@@ -11600,7 +13103,7 @@
           <a:bodyPr wrap="square" rtlCol="0" anchor="ctr"/>
           <a:lstStyle/>
           <a:p>
-            <a:pPr marL="0" indent="0">
+            <a:pPr indent="0" marL="0">
               <a:buNone/>
             </a:pPr>
             <a:r>
@@ -11620,128 +13123,51 @@
       </p:sp>
       <p:sp>
         <p:nvSpPr>
-          <p:cNvPr id="7" name="Shape 5"/>
-          <p:cNvSpPr/>
-          <p:nvPr/>
-        </p:nvSpPr>
-        <p:spPr>
-          <a:xfrm>
-            <a:off x="548640" y="1280160"/>
-            <a:ext cx="384048" cy="384048"/>
-          </a:xfrm>
-          <a:prstGeom prst="ellipse">
-            <a:avLst/>
-          </a:prstGeom>
-          <a:solidFill>
-            <a:srgbClr val="935D08"/>
-          </a:solidFill>
-          <a:ln/>
-        </p:spPr>
-      </p:sp>
-      <p:sp>
-        <p:nvSpPr>
-          <p:cNvPr id="8" name="Text 6"/>
-          <p:cNvSpPr/>
-          <p:nvPr/>
-        </p:nvSpPr>
-        <p:spPr>
-          <a:xfrm>
-            <a:off x="548640" y="1280160"/>
-            <a:ext cx="384048" cy="384048"/>
-          </a:xfrm>
-          <a:prstGeom prst="rect">
-            <a:avLst/>
-          </a:prstGeom>
-          <a:noFill/>
-          <a:ln/>
-        </p:spPr>
-        <p:txBody>
-          <a:bodyPr wrap="square" rtlCol="0" anchor="ctr"/>
-          <a:lstStyle/>
-          <a:p>
-            <a:pPr marL="0" indent="0" algn="ctr">
-              <a:buNone/>
-            </a:pPr>
-            <a:r>
-              <a:rPr lang="en-US" sz="1400" b="1" dirty="0">
-                <a:solidFill>
-                  <a:srgbClr val="FFFFFF"/>
-                </a:solidFill>
-                <a:latin typeface="Microsoft JhengHei" pitchFamily="34" charset="0"/>
-                <a:ea typeface="Microsoft JhengHei" pitchFamily="34" charset="-122"/>
-                <a:cs typeface="Microsoft JhengHei" pitchFamily="34" charset="-120"/>
-              </a:rPr>
-              <a:t>1</a:t>
-            </a:r>
-            <a:endParaRPr lang="en-US" sz="1400" dirty="0"/>
-          </a:p>
-        </p:txBody>
-      </p:sp>
-      <p:sp>
-        <p:nvSpPr>
-          <p:cNvPr id="9" name="Text 7"/>
-          <p:cNvSpPr/>
-          <p:nvPr/>
-        </p:nvSpPr>
-        <p:spPr>
-          <a:xfrm>
-            <a:off x="1097280" y="1252728"/>
-            <a:ext cx="7680960" cy="256032"/>
-          </a:xfrm>
-          <a:prstGeom prst="rect">
-            <a:avLst/>
-          </a:prstGeom>
-          <a:noFill/>
-          <a:ln/>
-        </p:spPr>
-        <p:txBody>
-          <a:bodyPr wrap="square" rtlCol="0" anchor="ctr"/>
-          <a:lstStyle/>
-          <a:p>
-            <a:pPr marL="0" indent="0">
-              <a:buNone/>
-            </a:pPr>
-            <a:r>
-              <a:rPr lang="en-US" sz="1300" b="1" dirty="0">
-                <a:solidFill>
-                  <a:srgbClr val="3D3935"/>
-                </a:solidFill>
-                <a:latin typeface="Microsoft JhengHei" pitchFamily="34" charset="0"/>
-                <a:ea typeface="Microsoft JhengHei" pitchFamily="34" charset="-122"/>
-                <a:cs typeface="Microsoft JhengHei" pitchFamily="34" charset="-120"/>
-              </a:rPr>
-              <a:t>請客人出示 LINE 中的優惠券畫面與兌換碼</a:t>
-            </a:r>
-            <a:endParaRPr lang="en-US" sz="1300" dirty="0"/>
-          </a:p>
-        </p:txBody>
-      </p:sp>
-      <p:sp>
-        <p:nvSpPr>
-          <p:cNvPr id="10" name="Text 8"/>
-          <p:cNvSpPr/>
-          <p:nvPr/>
-        </p:nvSpPr>
-        <p:spPr>
-          <a:xfrm>
-            <a:off x="1097280" y="1508760"/>
-            <a:ext cx="7680960" cy="219456"/>
-          </a:xfrm>
-          <a:prstGeom prst="rect">
-            <a:avLst/>
-          </a:prstGeom>
-          <a:noFill/>
-          <a:ln/>
-        </p:spPr>
-        <p:txBody>
-          <a:bodyPr wrap="square" rtlCol="0" anchor="ctr"/>
-          <a:lstStyle/>
-          <a:p>
-            <a:pPr marL="0" indent="0">
-              <a:buNone/>
-            </a:pPr>
-            <a:r>
-              <a:rPr lang="en-US" sz="950" dirty="0">
+          <p:cNvPr id="7" name="Text 5"/>
+          <p:cNvSpPr/>
+          <p:nvPr/>
+        </p:nvSpPr>
+        <p:spPr>
+          <a:xfrm>
+            <a:off x="640080" y="1152144"/>
+            <a:ext cx="7863840" cy="457200"/>
+          </a:xfrm>
+          <a:prstGeom prst="rect">
+            <a:avLst/>
+          </a:prstGeom>
+          <a:noFill/>
+          <a:ln/>
+        </p:spPr>
+        <p:txBody>
+          <a:bodyPr wrap="square" rtlCol="0" anchor="ctr"/>
+          <a:lstStyle/>
+          <a:p>
+            <a:pPr indent="0" marL="0">
+              <a:lnSpc>
+                <a:spcPts val="1700"/>
+              </a:lnSpc>
+              <a:buNone/>
+            </a:pPr>
+            <a:r>
+              <a:rPr lang="en-US" sz="1200" b="1" dirty="0">
+                <a:solidFill>
+                  <a:srgbClr val="935D08"/>
+                </a:solidFill>
+                <a:latin typeface="Microsoft JhengHei" pitchFamily="34" charset="0"/>
+                <a:ea typeface="Microsoft JhengHei" pitchFamily="34" charset="-122"/>
+                <a:cs typeface="Microsoft JhengHei" pitchFamily="34" charset="-120"/>
+              </a:rPr>
+              <a:t>同樣是「只有兌換碼」，有的人是真的中獎，有的人要等專人聯繫。看獎品名稱就能分。
+</a:t>
+            </a:r>
+            <a:pPr indent="0" marL="0">
+              <a:lnSpc>
+                <a:spcPts val="1700"/>
+              </a:lnSpc>
+              <a:buNone/>
+            </a:pPr>
+            <a:r>
+              <a:rPr lang="en-US" sz="1000" dirty="0">
                 <a:solidFill>
                   <a:srgbClr val="6E6A63"/>
                 </a:solidFill>
@@ -11749,445 +13175,34 @@
                 <a:ea typeface="Microsoft JhengHei" pitchFamily="34" charset="-122"/>
                 <a:cs typeface="Microsoft JhengHei" pitchFamily="34" charset="-120"/>
               </a:rPr>
-              <a:t>Ask the guest to show the coupon in LINE, along with the redemption code</a:t>
-            </a:r>
-            <a:endParaRPr lang="en-US" sz="950" dirty="0"/>
-          </a:p>
-        </p:txBody>
-      </p:sp>
-      <p:sp>
-        <p:nvSpPr>
-          <p:cNvPr id="11" name="Shape 9"/>
-          <p:cNvSpPr/>
-          <p:nvPr/>
-        </p:nvSpPr>
-        <p:spPr>
-          <a:xfrm>
-            <a:off x="548640" y="1874520"/>
-            <a:ext cx="384048" cy="384048"/>
-          </a:xfrm>
-          <a:prstGeom prst="ellipse">
-            <a:avLst/>
-          </a:prstGeom>
-          <a:solidFill>
-            <a:srgbClr val="935D08"/>
-          </a:solidFill>
-          <a:ln/>
-        </p:spPr>
-      </p:sp>
-      <p:sp>
-        <p:nvSpPr>
-          <p:cNvPr id="12" name="Text 10"/>
-          <p:cNvSpPr/>
-          <p:nvPr/>
-        </p:nvSpPr>
-        <p:spPr>
-          <a:xfrm>
-            <a:off x="548640" y="1874520"/>
-            <a:ext cx="384048" cy="384048"/>
-          </a:xfrm>
-          <a:prstGeom prst="rect">
-            <a:avLst/>
-          </a:prstGeom>
-          <a:noFill/>
-          <a:ln/>
-        </p:spPr>
-        <p:txBody>
-          <a:bodyPr wrap="square" rtlCol="0" anchor="ctr"/>
-          <a:lstStyle/>
-          <a:p>
-            <a:pPr marL="0" indent="0" algn="ctr">
-              <a:buNone/>
-            </a:pPr>
-            <a:r>
-              <a:rPr lang="en-US" sz="1400" b="1" dirty="0">
-                <a:solidFill>
-                  <a:srgbClr val="FFFFFF"/>
-                </a:solidFill>
-                <a:latin typeface="Microsoft JhengHei" pitchFamily="34" charset="0"/>
-                <a:ea typeface="Microsoft JhengHei" pitchFamily="34" charset="-122"/>
-                <a:cs typeface="Microsoft JhengHei" pitchFamily="34" charset="-120"/>
-              </a:rPr>
-              <a:t>2</a:t>
-            </a:r>
-            <a:endParaRPr lang="en-US" sz="1400" dirty="0"/>
-          </a:p>
-        </p:txBody>
-      </p:sp>
-      <p:sp>
-        <p:nvSpPr>
-          <p:cNvPr id="13" name="Text 11"/>
-          <p:cNvSpPr/>
-          <p:nvPr/>
-        </p:nvSpPr>
-        <p:spPr>
-          <a:xfrm>
-            <a:off x="1097280" y="1847088"/>
-            <a:ext cx="7680960" cy="256032"/>
-          </a:xfrm>
-          <a:prstGeom prst="rect">
-            <a:avLst/>
-          </a:prstGeom>
-          <a:noFill/>
-          <a:ln/>
-        </p:spPr>
-        <p:txBody>
-          <a:bodyPr wrap="square" rtlCol="0" anchor="ctr"/>
-          <a:lstStyle/>
-          <a:p>
-            <a:pPr marL="0" indent="0">
-              <a:buNone/>
-            </a:pPr>
-            <a:r>
-              <a:rPr lang="en-US" sz="1300" b="1" dirty="0">
-                <a:solidFill>
-                  <a:srgbClr val="3D3935"/>
-                </a:solidFill>
-                <a:latin typeface="Microsoft JhengHei" pitchFamily="34" charset="0"/>
-                <a:ea typeface="Microsoft JhengHei" pitchFamily="34" charset="-122"/>
-                <a:cs typeface="Microsoft JhengHei" pitchFamily="34" charset="-120"/>
-              </a:rPr>
-              <a:t>沒有優惠券、只有兌換碼 → 是專人聯繫的獎項，不核銷</a:t>
-            </a:r>
-            <a:endParaRPr lang="en-US" sz="1300" dirty="0"/>
-          </a:p>
-        </p:txBody>
-      </p:sp>
-      <p:sp>
-        <p:nvSpPr>
-          <p:cNvPr id="14" name="Text 12"/>
-          <p:cNvSpPr/>
-          <p:nvPr/>
-        </p:nvSpPr>
-        <p:spPr>
-          <a:xfrm>
-            <a:off x="1097280" y="2103120"/>
-            <a:ext cx="7680960" cy="219456"/>
-          </a:xfrm>
-          <a:prstGeom prst="rect">
-            <a:avLst/>
-          </a:prstGeom>
-          <a:noFill/>
-          <a:ln/>
-        </p:spPr>
-        <p:txBody>
-          <a:bodyPr wrap="square" rtlCol="0" anchor="ctr"/>
-          <a:lstStyle/>
-          <a:p>
-            <a:pPr marL="0" indent="0">
-              <a:buNone/>
-            </a:pPr>
-            <a:r>
-              <a:rPr lang="en-US" sz="950" dirty="0">
-                <a:solidFill>
-                  <a:srgbClr val="6E6A63"/>
-                </a:solidFill>
-                <a:latin typeface="Microsoft JhengHei" pitchFamily="34" charset="0"/>
-                <a:ea typeface="Microsoft JhengHei" pitchFamily="34" charset="-122"/>
-                <a:cs typeface="Microsoft JhengHei" pitchFamily="34" charset="-120"/>
-              </a:rPr>
-              <a:t>A code with no coupon means it is a follow-up prize — do not redeem</a:t>
-            </a:r>
-            <a:endParaRPr lang="en-US" sz="950" dirty="0"/>
-          </a:p>
-        </p:txBody>
-      </p:sp>
-      <p:sp>
-        <p:nvSpPr>
-          <p:cNvPr id="15" name="Shape 13"/>
-          <p:cNvSpPr/>
-          <p:nvPr/>
-        </p:nvSpPr>
-        <p:spPr>
-          <a:xfrm>
-            <a:off x="548640" y="2468880"/>
-            <a:ext cx="384048" cy="384048"/>
-          </a:xfrm>
-          <a:prstGeom prst="ellipse">
-            <a:avLst/>
-          </a:prstGeom>
-          <a:solidFill>
-            <a:srgbClr val="935D08"/>
-          </a:solidFill>
-          <a:ln/>
-        </p:spPr>
-      </p:sp>
-      <p:sp>
-        <p:nvSpPr>
-          <p:cNvPr id="16" name="Text 14"/>
-          <p:cNvSpPr/>
-          <p:nvPr/>
-        </p:nvSpPr>
-        <p:spPr>
-          <a:xfrm>
-            <a:off x="548640" y="2468880"/>
-            <a:ext cx="384048" cy="384048"/>
-          </a:xfrm>
-          <a:prstGeom prst="rect">
-            <a:avLst/>
-          </a:prstGeom>
-          <a:noFill/>
-          <a:ln/>
-        </p:spPr>
-        <p:txBody>
-          <a:bodyPr wrap="square" rtlCol="0" anchor="ctr"/>
-          <a:lstStyle/>
-          <a:p>
-            <a:pPr marL="0" indent="0" algn="ctr">
-              <a:buNone/>
-            </a:pPr>
-            <a:r>
-              <a:rPr lang="en-US" sz="1400" b="1" dirty="0">
-                <a:solidFill>
-                  <a:srgbClr val="FFFFFF"/>
-                </a:solidFill>
-                <a:latin typeface="Microsoft JhengHei" pitchFamily="34" charset="0"/>
-                <a:ea typeface="Microsoft JhengHei" pitchFamily="34" charset="-122"/>
-                <a:cs typeface="Microsoft JhengHei" pitchFamily="34" charset="-120"/>
-              </a:rPr>
-              <a:t>3</a:t>
-            </a:r>
-            <a:endParaRPr lang="en-US" sz="1400" dirty="0"/>
-          </a:p>
-        </p:txBody>
-      </p:sp>
-      <p:sp>
-        <p:nvSpPr>
-          <p:cNvPr id="17" name="Text 15"/>
-          <p:cNvSpPr/>
-          <p:nvPr/>
-        </p:nvSpPr>
-        <p:spPr>
-          <a:xfrm>
-            <a:off x="1097280" y="2441448"/>
-            <a:ext cx="7680960" cy="256032"/>
-          </a:xfrm>
-          <a:prstGeom prst="rect">
-            <a:avLst/>
-          </a:prstGeom>
-          <a:noFill/>
-          <a:ln/>
-        </p:spPr>
-        <p:txBody>
-          <a:bodyPr wrap="square" rtlCol="0" anchor="ctr"/>
-          <a:lstStyle/>
-          <a:p>
-            <a:pPr marL="0" indent="0">
-              <a:buNone/>
-            </a:pPr>
-            <a:r>
-              <a:rPr lang="en-US" sz="1300" b="1" dirty="0">
-                <a:solidFill>
-                  <a:srgbClr val="3D3935"/>
-                </a:solidFill>
-                <a:latin typeface="Microsoft JhengHei" pitchFamily="34" charset="0"/>
-                <a:ea typeface="Microsoft JhengHei" pitchFamily="34" charset="-122"/>
-                <a:cs typeface="Microsoft JhengHei" pitchFamily="34" charset="-120"/>
-              </a:rPr>
-              <a:t>依券面規則辦理（部分獎品有消費門檻或指定地點／時段）</a:t>
-            </a:r>
-            <a:endParaRPr lang="en-US" sz="1300" dirty="0"/>
-          </a:p>
-        </p:txBody>
-      </p:sp>
-      <p:sp>
-        <p:nvSpPr>
-          <p:cNvPr id="18" name="Text 16"/>
-          <p:cNvSpPr/>
-          <p:nvPr/>
-        </p:nvSpPr>
-        <p:spPr>
-          <a:xfrm>
-            <a:off x="1097280" y="2697480"/>
-            <a:ext cx="7680960" cy="219456"/>
-          </a:xfrm>
-          <a:prstGeom prst="rect">
-            <a:avLst/>
-          </a:prstGeom>
-          <a:noFill/>
-          <a:ln/>
-        </p:spPr>
-        <p:txBody>
-          <a:bodyPr wrap="square" rtlCol="0" anchor="ctr"/>
-          <a:lstStyle/>
-          <a:p>
-            <a:pPr marL="0" indent="0">
-              <a:buNone/>
-            </a:pPr>
-            <a:r>
-              <a:rPr lang="en-US" sz="950" dirty="0">
-                <a:solidFill>
-                  <a:srgbClr val="6E6A63"/>
-                </a:solidFill>
-                <a:latin typeface="Microsoft JhengHei" pitchFamily="34" charset="0"/>
-                <a:ea typeface="Microsoft JhengHei" pitchFamily="34" charset="-122"/>
-                <a:cs typeface="Microsoft JhengHei" pitchFamily="34" charset="-120"/>
-              </a:rPr>
-              <a:t>Follow the terms shown on the coupon — some prizes have a minimum spend, venue or time window</a:t>
-            </a:r>
-            <a:endParaRPr lang="en-US" sz="950" dirty="0"/>
-          </a:p>
-        </p:txBody>
-      </p:sp>
-      <p:sp>
-        <p:nvSpPr>
-          <p:cNvPr id="19" name="Shape 17"/>
-          <p:cNvSpPr/>
-          <p:nvPr/>
-        </p:nvSpPr>
-        <p:spPr>
-          <a:xfrm>
-            <a:off x="548640" y="3063240"/>
-            <a:ext cx="384048" cy="384048"/>
-          </a:xfrm>
-          <a:prstGeom prst="ellipse">
-            <a:avLst/>
-          </a:prstGeom>
-          <a:solidFill>
-            <a:srgbClr val="935D08"/>
-          </a:solidFill>
-          <a:ln/>
-        </p:spPr>
-      </p:sp>
-      <p:sp>
-        <p:nvSpPr>
-          <p:cNvPr id="20" name="Text 18"/>
-          <p:cNvSpPr/>
-          <p:nvPr/>
-        </p:nvSpPr>
-        <p:spPr>
-          <a:xfrm>
-            <a:off x="548640" y="3063240"/>
-            <a:ext cx="384048" cy="384048"/>
-          </a:xfrm>
-          <a:prstGeom prst="rect">
-            <a:avLst/>
-          </a:prstGeom>
-          <a:noFill/>
-          <a:ln/>
-        </p:spPr>
-        <p:txBody>
-          <a:bodyPr wrap="square" rtlCol="0" anchor="ctr"/>
-          <a:lstStyle/>
-          <a:p>
-            <a:pPr marL="0" indent="0" algn="ctr">
-              <a:buNone/>
-            </a:pPr>
-            <a:r>
-              <a:rPr lang="en-US" sz="1400" b="1" dirty="0">
-                <a:solidFill>
-                  <a:srgbClr val="FFFFFF"/>
-                </a:solidFill>
-                <a:latin typeface="Microsoft JhengHei" pitchFamily="34" charset="0"/>
-                <a:ea typeface="Microsoft JhengHei" pitchFamily="34" charset="-122"/>
-                <a:cs typeface="Microsoft JhengHei" pitchFamily="34" charset="-120"/>
-              </a:rPr>
-              <a:t>4</a:t>
-            </a:r>
-            <a:endParaRPr lang="en-US" sz="1400" dirty="0"/>
-          </a:p>
-        </p:txBody>
-      </p:sp>
-      <p:sp>
-        <p:nvSpPr>
-          <p:cNvPr id="21" name="Text 19"/>
-          <p:cNvSpPr/>
-          <p:nvPr/>
-        </p:nvSpPr>
-        <p:spPr>
-          <a:xfrm>
-            <a:off x="1097280" y="3035808"/>
-            <a:ext cx="7680960" cy="256032"/>
-          </a:xfrm>
-          <a:prstGeom prst="rect">
-            <a:avLst/>
-          </a:prstGeom>
-          <a:noFill/>
-          <a:ln/>
-        </p:spPr>
-        <p:txBody>
-          <a:bodyPr wrap="square" rtlCol="0" anchor="ctr"/>
-          <a:lstStyle/>
-          <a:p>
-            <a:pPr marL="0" indent="0">
-              <a:buNone/>
-            </a:pPr>
-            <a:r>
-              <a:rPr lang="en-US" sz="1300" b="1" dirty="0">
-                <a:solidFill>
-                  <a:srgbClr val="3D3935"/>
-                </a:solidFill>
-                <a:latin typeface="Microsoft JhengHei" pitchFamily="34" charset="0"/>
-                <a:ea typeface="Microsoft JhengHei" pitchFamily="34" charset="-122"/>
-                <a:cs typeface="Microsoft JhengHei" pitchFamily="34" charset="-120"/>
-              </a:rPr>
-              <a:t>核銷後交付獎品</a:t>
-            </a:r>
-            <a:endParaRPr lang="en-US" sz="1300" dirty="0"/>
-          </a:p>
-        </p:txBody>
-      </p:sp>
-      <p:sp>
-        <p:nvSpPr>
-          <p:cNvPr id="22" name="Text 20"/>
-          <p:cNvSpPr/>
-          <p:nvPr/>
-        </p:nvSpPr>
-        <p:spPr>
-          <a:xfrm>
-            <a:off x="1097280" y="3291840"/>
-            <a:ext cx="7680960" cy="219456"/>
-          </a:xfrm>
-          <a:prstGeom prst="rect">
-            <a:avLst/>
-          </a:prstGeom>
-          <a:noFill/>
-          <a:ln/>
-        </p:spPr>
-        <p:txBody>
-          <a:bodyPr wrap="square" rtlCol="0" anchor="ctr"/>
-          <a:lstStyle/>
-          <a:p>
-            <a:pPr marL="0" indent="0">
-              <a:buNone/>
-            </a:pPr>
-            <a:r>
-              <a:rPr lang="en-US" sz="950" dirty="0">
-                <a:solidFill>
-                  <a:srgbClr val="6E6A63"/>
-                </a:solidFill>
-                <a:latin typeface="Microsoft JhengHei" pitchFamily="34" charset="0"/>
-                <a:ea typeface="Microsoft JhengHei" pitchFamily="34" charset="-122"/>
-                <a:cs typeface="Microsoft JhengHei" pitchFamily="34" charset="-120"/>
-              </a:rPr>
-              <a:t>Complete redemption and hand over the prize</a:t>
-            </a:r>
-            <a:endParaRPr lang="en-US" sz="950" dirty="0"/>
-          </a:p>
-        </p:txBody>
-      </p:sp>
-      <p:sp>
-        <p:nvSpPr>
-          <p:cNvPr id="23" name="Shape 21"/>
-          <p:cNvSpPr/>
-          <p:nvPr/>
-        </p:nvSpPr>
-        <p:spPr>
-          <a:xfrm>
-            <a:off x="502920" y="3749040"/>
-            <a:ext cx="3931920" cy="868680"/>
+              <a:t>Both look the same. Tell them apart by the prize name.</a:t>
+            </a:r>
+            <a:endParaRPr lang="en-US" sz="1200" dirty="0"/>
+          </a:p>
+        </p:txBody>
+      </p:sp>
+      <p:sp>
+        <p:nvSpPr>
+          <p:cNvPr id="8" name="Shape 6"/>
+          <p:cNvSpPr/>
+          <p:nvPr/>
+        </p:nvSpPr>
+        <p:spPr>
+          <a:xfrm>
+            <a:off x="502920" y="1700784"/>
+            <a:ext cx="3931920" cy="2194560"/>
           </a:xfrm>
           <a:prstGeom prst="roundRect">
             <a:avLst>
-              <a:gd name="adj" fmla="val 6316"/>
+              <a:gd name="adj" fmla="val 3333"/>
             </a:avLst>
           </a:prstGeom>
           <a:solidFill>
-            <a:srgbClr val="FBF1DC"/>
+            <a:srgbClr val="E8F3EC"/>
           </a:solidFill>
-          <a:ln w="9525">
+          <a:ln w="15240">
             <a:solidFill>
-              <a:srgbClr val="9C6212"/>
+              <a:srgbClr val="1F6B47"/>
             </a:solidFill>
             <a:prstDash val="solid"/>
           </a:ln>
@@ -12195,89 +13210,180 @@
       </p:sp>
       <p:sp>
         <p:nvSpPr>
-          <p:cNvPr id="24" name="Text 22"/>
-          <p:cNvSpPr/>
-          <p:nvPr/>
-        </p:nvSpPr>
-        <p:spPr>
-          <a:xfrm>
-            <a:off x="649224" y="3794760"/>
-            <a:ext cx="3639312" cy="777240"/>
-          </a:xfrm>
-          <a:prstGeom prst="rect">
-            <a:avLst/>
-          </a:prstGeom>
-          <a:noFill/>
-          <a:ln/>
-        </p:spPr>
-        <p:txBody>
-          <a:bodyPr wrap="square" rtlCol="0" anchor="ctr"/>
-          <a:lstStyle/>
-          <a:p>
-            <a:pPr marL="0" indent="0">
+          <p:cNvPr id="9" name="Text 7"/>
+          <p:cNvSpPr/>
+          <p:nvPr/>
+        </p:nvSpPr>
+        <p:spPr>
+          <a:xfrm>
+            <a:off x="713232" y="1828800"/>
+            <a:ext cx="3566160" cy="457200"/>
+          </a:xfrm>
+          <a:prstGeom prst="rect">
+            <a:avLst/>
+          </a:prstGeom>
+          <a:noFill/>
+          <a:ln/>
+        </p:spPr>
+        <p:txBody>
+          <a:bodyPr wrap="square" rtlCol="0" anchor="ctr"/>
+          <a:lstStyle/>
+          <a:p>
+            <a:pPr indent="0" marL="0">
               <a:lnSpc>
                 <a:spcPts val="1500"/>
               </a:lnSpc>
               <a:buNone/>
             </a:pPr>
             <a:r>
-              <a:rPr lang="en-US" sz="1200" dirty="0">
-                <a:solidFill>
-                  <a:srgbClr val="9C6212"/>
-                </a:solidFill>
-                <a:latin typeface="Microsoft JhengHei" pitchFamily="34" charset="0"/>
-                <a:ea typeface="Microsoft JhengHei" pitchFamily="34" charset="-122"/>
-                <a:cs typeface="Microsoft JhengHei" pitchFamily="34" charset="-120"/>
-              </a:rPr>
-              <a:t>🤔  </a:t>
-            </a:r>
-            <a:r>
-              <a:rPr lang="en-US" sz="1150" b="1" dirty="0">
-                <a:solidFill>
-                  <a:srgbClr val="9C6212"/>
-                </a:solidFill>
-                <a:latin typeface="Microsoft JhengHei" pitchFamily="34" charset="0"/>
-                <a:ea typeface="Microsoft JhengHei" pitchFamily="34" charset="-122"/>
-                <a:cs typeface="Microsoft JhengHei" pitchFamily="34" charset="-120"/>
-              </a:rPr>
-              <a:t>無法確認時，不要自行判斷。
+              <a:rPr lang="en-US" sz="1350" b="1" dirty="0">
+                <a:solidFill>
+                  <a:srgbClr val="1F6B47"/>
+                </a:solidFill>
+                <a:latin typeface="Microsoft JhengHei" pitchFamily="34" charset="0"/>
+                <a:ea typeface="Microsoft JhengHei" pitchFamily="34" charset="-122"/>
+                <a:cs typeface="Microsoft JhengHei" pitchFamily="34" charset="-120"/>
+              </a:rPr>
+              <a:t>✅  是真的中獎 → 受理
 </a:t>
             </a:r>
-            <a:r>
-              <a:rPr lang="en-US" sz="950" dirty="0">
-                <a:solidFill>
-                  <a:srgbClr val="9C6212"/>
-                </a:solidFill>
-                <a:latin typeface="Microsoft JhengHei" pitchFamily="34" charset="0"/>
-                <a:ea typeface="Microsoft JhengHei" pitchFamily="34" charset="-122"/>
-                <a:cs typeface="Microsoft JhengHei" pitchFamily="34" charset="-120"/>
-              </a:rPr>
-              <a:t>　　 If anything is unclear, do not decide on your own — contact your supervisor to check the record.</a:t>
-            </a:r>
-            <a:endParaRPr lang="en-US" sz="1200" dirty="0"/>
-          </a:p>
-        </p:txBody>
-      </p:sp>
-      <p:sp>
-        <p:nvSpPr>
-          <p:cNvPr id="25" name="Shape 23"/>
-          <p:cNvSpPr/>
-          <p:nvPr/>
-        </p:nvSpPr>
-        <p:spPr>
-          <a:xfrm>
-            <a:off x="4709160" y="3749040"/>
-            <a:ext cx="3931920" cy="868680"/>
+            <a:pPr indent="0" marL="0">
+              <a:lnSpc>
+                <a:spcPts val="1500"/>
+              </a:lnSpc>
+              <a:buNone/>
+            </a:pPr>
+            <a:r>
+              <a:rPr lang="en-US" sz="900" dirty="0">
+                <a:solidFill>
+                  <a:srgbClr val="6E6A63"/>
+                </a:solidFill>
+                <a:latin typeface="Microsoft JhengHei" pitchFamily="34" charset="0"/>
+                <a:ea typeface="Microsoft JhengHei" pitchFamily="34" charset="-122"/>
+                <a:cs typeface="Microsoft JhengHei" pitchFamily="34" charset="-120"/>
+              </a:rPr>
+              <a:t>A genuine win — accept it</a:t>
+            </a:r>
+            <a:endParaRPr lang="en-US" sz="1350" dirty="0"/>
+          </a:p>
+        </p:txBody>
+      </p:sp>
+      <p:sp>
+        <p:nvSpPr>
+          <p:cNvPr id="10" name="Text 8"/>
+          <p:cNvSpPr/>
+          <p:nvPr/>
+        </p:nvSpPr>
+        <p:spPr>
+          <a:xfrm>
+            <a:off x="713232" y="2340864"/>
+            <a:ext cx="3566160" cy="1463040"/>
+          </a:xfrm>
+          <a:prstGeom prst="rect">
+            <a:avLst/>
+          </a:prstGeom>
+          <a:noFill/>
+          <a:ln/>
+        </p:spPr>
+        <p:txBody>
+          <a:bodyPr wrap="square" rtlCol="0" anchor="ctr"/>
+          <a:lstStyle/>
+          <a:p>
+            <a:pPr indent="0" marL="0">
+              <a:lnSpc>
+                <a:spcPts val="1600"/>
+              </a:lnSpc>
+              <a:buNone/>
+            </a:pPr>
+            <a:r>
+              <a:rPr lang="en-US" sz="1050" b="1" dirty="0">
+                <a:solidFill>
+                  <a:srgbClr val="3D3935"/>
+                </a:solidFill>
+                <a:latin typeface="Microsoft JhengHei" pitchFamily="34" charset="0"/>
+                <a:ea typeface="Microsoft JhengHei" pitchFamily="34" charset="-122"/>
+                <a:cs typeface="Microsoft JhengHei" pitchFamily="34" charset="-120"/>
+              </a:rPr>
+              <a:t>獎品是「高雄洲際酒店」的實體小物或餐飲券
+</a:t>
+            </a:r>
+            <a:pPr indent="0" marL="0">
+              <a:lnSpc>
+                <a:spcPts val="1600"/>
+              </a:lnSpc>
+              <a:buNone/>
+            </a:pPr>
+            <a:r>
+              <a:rPr lang="en-US" sz="850" dirty="0">
+                <a:solidFill>
+                  <a:srgbClr val="6E6A63"/>
+                </a:solidFill>
+                <a:latin typeface="Microsoft JhengHei" pitchFamily="34" charset="0"/>
+                <a:ea typeface="Microsoft JhengHei" pitchFamily="34" charset="-122"/>
+                <a:cs typeface="Microsoft JhengHei" pitchFamily="34" charset="-120"/>
+              </a:rPr>
+              <a:t>Kaohsiung merchandise or dining vouchers
+</a:t>
+            </a:r>
+            <a:pPr indent="0" marL="0">
+              <a:lnSpc>
+                <a:spcPts val="1600"/>
+              </a:lnSpc>
+              <a:buNone/>
+            </a:pPr>
+            <a:r>
+              <a:rPr lang="en-US" sz="1050" dirty="0">
+                <a:solidFill>
+                  <a:srgbClr val="3D3935"/>
+                </a:solidFill>
+                <a:latin typeface="Microsoft JhengHei" pitchFamily="34" charset="0"/>
+                <a:ea typeface="Microsoft JhengHei" pitchFamily="34" charset="-122"/>
+                <a:cs typeface="Microsoft JhengHei" pitchFamily="34" charset="-120"/>
+              </a:rPr>
+              <a:t>系統曾經發生異常，券沒送進客人的 LINE。
+</a:t>
+            </a:r>
+            <a:pPr indent="0" marL="0">
+              <a:lnSpc>
+                <a:spcPts val="1600"/>
+              </a:lnSpc>
+              <a:buNone/>
+            </a:pPr>
+            <a:r>
+              <a:rPr lang="en-US" sz="1050" b="1" dirty="0">
+                <a:solidFill>
+                  <a:srgbClr val="3D3935"/>
+                </a:solidFill>
+                <a:latin typeface="Microsoft JhengHei" pitchFamily="34" charset="0"/>
+                <a:ea typeface="Microsoft JhengHei" pitchFamily="34" charset="-122"/>
+                <a:cs typeface="Microsoft JhengHei" pitchFamily="34" charset="-120"/>
+              </a:rPr>
+              <a:t>獎品確實是他的 —— 請受理並回報主管確認。</a:t>
+            </a:r>
+            <a:endParaRPr lang="en-US" sz="1050" dirty="0"/>
+          </a:p>
+        </p:txBody>
+      </p:sp>
+      <p:sp>
+        <p:nvSpPr>
+          <p:cNvPr id="11" name="Shape 9"/>
+          <p:cNvSpPr/>
+          <p:nvPr/>
+        </p:nvSpPr>
+        <p:spPr>
+          <a:xfrm>
+            <a:off x="4709160" y="1700784"/>
+            <a:ext cx="3931920" cy="2194560"/>
           </a:xfrm>
           <a:prstGeom prst="roundRect">
             <a:avLst>
-              <a:gd name="adj" fmla="val 6316"/>
+              <a:gd name="adj" fmla="val 3333"/>
             </a:avLst>
           </a:prstGeom>
           <a:solidFill>
             <a:srgbClr val="FBEDED"/>
           </a:solidFill>
-          <a:ln w="9525">
+          <a:ln w="15240">
             <a:solidFill>
               <a:srgbClr val="9A3B3B"/>
             </a:solidFill>
@@ -12287,64 +13393,260 @@
       </p:sp>
       <p:sp>
         <p:nvSpPr>
-          <p:cNvPr id="26" name="Text 24"/>
-          <p:cNvSpPr/>
-          <p:nvPr/>
-        </p:nvSpPr>
-        <p:spPr>
-          <a:xfrm>
-            <a:off x="4855464" y="3794760"/>
-            <a:ext cx="3639312" cy="777240"/>
-          </a:xfrm>
-          <a:prstGeom prst="rect">
-            <a:avLst/>
-          </a:prstGeom>
-          <a:noFill/>
-          <a:ln/>
-        </p:spPr>
-        <p:txBody>
-          <a:bodyPr wrap="square" rtlCol="0" anchor="ctr"/>
-          <a:lstStyle/>
-          <a:p>
-            <a:pPr marL="0" indent="0">
+          <p:cNvPr id="12" name="Text 10"/>
+          <p:cNvSpPr/>
+          <p:nvPr/>
+        </p:nvSpPr>
+        <p:spPr>
+          <a:xfrm>
+            <a:off x="4919472" y="1828800"/>
+            <a:ext cx="3566160" cy="457200"/>
+          </a:xfrm>
+          <a:prstGeom prst="rect">
+            <a:avLst/>
+          </a:prstGeom>
+          <a:noFill/>
+          <a:ln/>
+        </p:spPr>
+        <p:txBody>
+          <a:bodyPr wrap="square" rtlCol="0" anchor="ctr"/>
+          <a:lstStyle/>
+          <a:p>
+            <a:pPr indent="0" marL="0">
               <a:lnSpc>
                 <a:spcPts val="1500"/>
               </a:lnSpc>
               <a:buNone/>
             </a:pPr>
             <a:r>
+              <a:rPr lang="en-US" sz="1350" b="1" dirty="0">
+                <a:solidFill>
+                  <a:srgbClr val="9A3B3B"/>
+                </a:solidFill>
+                <a:latin typeface="Microsoft JhengHei" pitchFamily="34" charset="0"/>
+                <a:ea typeface="Microsoft JhengHei" pitchFamily="34" charset="-122"/>
+                <a:cs typeface="Microsoft JhengHei" pitchFamily="34" charset="-120"/>
+              </a:rPr>
+              <a:t>🚫  專人聯繫類 → 不核銷
+</a:t>
+            </a:r>
+            <a:pPr indent="0" marL="0">
+              <a:lnSpc>
+                <a:spcPts val="1500"/>
+              </a:lnSpc>
+              <a:buNone/>
+            </a:pPr>
+            <a:r>
+              <a:rPr lang="en-US" sz="900" dirty="0">
+                <a:solidFill>
+                  <a:srgbClr val="6E6A63"/>
+                </a:solidFill>
+                <a:latin typeface="Microsoft JhengHei" pitchFamily="34" charset="0"/>
+                <a:ea typeface="Microsoft JhengHei" pitchFamily="34" charset="-122"/>
+                <a:cs typeface="Microsoft JhengHei" pitchFamily="34" charset="-120"/>
+              </a:rPr>
+              <a:t>Follow-up prize — do not redeem</a:t>
+            </a:r>
+            <a:endParaRPr lang="en-US" sz="1350" dirty="0"/>
+          </a:p>
+        </p:txBody>
+      </p:sp>
+      <p:sp>
+        <p:nvSpPr>
+          <p:cNvPr id="13" name="Text 11"/>
+          <p:cNvSpPr/>
+          <p:nvPr/>
+        </p:nvSpPr>
+        <p:spPr>
+          <a:xfrm>
+            <a:off x="4919472" y="2340864"/>
+            <a:ext cx="3566160" cy="1463040"/>
+          </a:xfrm>
+          <a:prstGeom prst="rect">
+            <a:avLst/>
+          </a:prstGeom>
+          <a:noFill/>
+          <a:ln/>
+        </p:spPr>
+        <p:txBody>
+          <a:bodyPr wrap="square" rtlCol="0" anchor="ctr"/>
+          <a:lstStyle/>
+          <a:p>
+            <a:pPr indent="0" marL="0">
+              <a:lnSpc>
+                <a:spcPts val="1600"/>
+              </a:lnSpc>
+              <a:buNone/>
+            </a:pPr>
+            <a:r>
+              <a:rPr lang="en-US" sz="1050" b="1" dirty="0">
+                <a:solidFill>
+                  <a:srgbClr val="3D3935"/>
+                </a:solidFill>
+                <a:latin typeface="Microsoft JhengHei" pitchFamily="34" charset="0"/>
+                <a:ea typeface="Microsoft JhengHei" pitchFamily="34" charset="-122"/>
+                <a:cs typeface="Microsoft JhengHei" pitchFamily="34" charset="-120"/>
+              </a:rPr>
+              <a:t>① 獎品名稱有「臺北洲際酒店」
+② 任何「住宿一晚」的獎項
+</a:t>
+            </a:r>
+            <a:pPr indent="0" marL="0">
+              <a:lnSpc>
+                <a:spcPts val="1600"/>
+              </a:lnSpc>
+              <a:buNone/>
+            </a:pPr>
+            <a:r>
+              <a:rPr lang="en-US" sz="850" dirty="0">
+                <a:solidFill>
+                  <a:srgbClr val="6E6A63"/>
+                </a:solidFill>
+                <a:latin typeface="Microsoft JhengHei" pitchFamily="34" charset="0"/>
+                <a:ea typeface="Microsoft JhengHei" pitchFamily="34" charset="-122"/>
+                <a:cs typeface="Microsoft JhengHei" pitchFamily="34" charset="-120"/>
+              </a:rPr>
+              <a:t>Any Taipei prize, or any room stay
+</a:t>
+            </a:r>
+            <a:pPr indent="0" marL="0">
+              <a:lnSpc>
+                <a:spcPts val="1600"/>
+              </a:lnSpc>
+              <a:buNone/>
+            </a:pPr>
+            <a:r>
+              <a:rPr lang="en-US" sz="1050" dirty="0">
+                <a:solidFill>
+                  <a:srgbClr val="3D3935"/>
+                </a:solidFill>
+                <a:latin typeface="Microsoft JhengHei" pitchFamily="34" charset="0"/>
+                <a:ea typeface="Microsoft JhengHei" pitchFamily="34" charset="-122"/>
+                <a:cs typeface="Microsoft JhengHei" pitchFamily="34" charset="-120"/>
+              </a:rPr>
+              <a:t>這類獎項本來就不發券，由該館同仁主動聯繫。
+</a:t>
+            </a:r>
+            <a:pPr indent="0" marL="0">
+              <a:lnSpc>
+                <a:spcPts val="1600"/>
+              </a:lnSpc>
+              <a:buNone/>
+            </a:pPr>
+            <a:r>
+              <a:rPr lang="en-US" sz="1050" b="1" dirty="0">
+                <a:solidFill>
+                  <a:srgbClr val="3D3935"/>
+                </a:solidFill>
+                <a:latin typeface="Microsoft JhengHei" pitchFamily="34" charset="0"/>
+                <a:ea typeface="Microsoft JhengHei" pitchFamily="34" charset="-122"/>
+                <a:cs typeface="Microsoft JhengHei" pitchFamily="34" charset="-120"/>
+              </a:rPr>
+              <a:t>請告知客人會有專人聯繫，並回報主管。</a:t>
+            </a:r>
+            <a:endParaRPr lang="en-US" sz="1050" dirty="0"/>
+          </a:p>
+        </p:txBody>
+      </p:sp>
+      <p:sp>
+        <p:nvSpPr>
+          <p:cNvPr id="14" name="Shape 12"/>
+          <p:cNvSpPr/>
+          <p:nvPr/>
+        </p:nvSpPr>
+        <p:spPr>
+          <a:xfrm>
+            <a:off x="502920" y="4041648"/>
+            <a:ext cx="8138160" cy="640080"/>
+          </a:xfrm>
+          <a:prstGeom prst="roundRect">
+            <a:avLst>
+              <a:gd name="adj" fmla="val 8571"/>
+            </a:avLst>
+          </a:prstGeom>
+          <a:solidFill>
+            <a:srgbClr val="F4ECE7"/>
+          </a:solidFill>
+          <a:ln w="9525">
+            <a:solidFill>
+              <a:srgbClr val="935D08"/>
+            </a:solidFill>
+            <a:prstDash val="solid"/>
+          </a:ln>
+        </p:spPr>
+      </p:sp>
+      <p:sp>
+        <p:nvSpPr>
+          <p:cNvPr id="15" name="Text 13"/>
+          <p:cNvSpPr/>
+          <p:nvPr/>
+        </p:nvSpPr>
+        <p:spPr>
+          <a:xfrm>
+            <a:off x="649224" y="4087368"/>
+            <a:ext cx="7845552" cy="548640"/>
+          </a:xfrm>
+          <a:prstGeom prst="rect">
+            <a:avLst/>
+          </a:prstGeom>
+          <a:noFill/>
+          <a:ln/>
+        </p:spPr>
+        <p:txBody>
+          <a:bodyPr wrap="square" rtlCol="0" anchor="ctr"/>
+          <a:lstStyle/>
+          <a:p>
+            <a:pPr indent="0" marL="0">
+              <a:lnSpc>
+                <a:spcPts val="1500"/>
+              </a:lnSpc>
+              <a:buNone/>
+            </a:pPr>
+            <a:r>
               <a:rPr lang="en-US" sz="1200" dirty="0">
                 <a:solidFill>
-                  <a:srgbClr val="9A3B3B"/>
-                </a:solidFill>
-                <a:latin typeface="Microsoft JhengHei" pitchFamily="34" charset="0"/>
-                <a:ea typeface="Microsoft JhengHei" pitchFamily="34" charset="-122"/>
-                <a:cs typeface="Microsoft JhengHei" pitchFamily="34" charset="-120"/>
-              </a:rPr>
-              <a:t>🚫  </a:t>
-            </a:r>
+                  <a:srgbClr val="935D08"/>
+                </a:solidFill>
+                <a:latin typeface="Microsoft JhengHei" pitchFamily="34" charset="0"/>
+                <a:ea typeface="Microsoft JhengHei" pitchFamily="34" charset="-122"/>
+                <a:cs typeface="Microsoft JhengHei" pitchFamily="34" charset="-120"/>
+              </a:rPr>
+              <a:t>🔑  </a:t>
+            </a:r>
+            <a:pPr indent="0" marL="0">
+              <a:lnSpc>
+                <a:spcPts val="1500"/>
+              </a:lnSpc>
+              <a:buNone/>
+            </a:pPr>
             <a:r>
               <a:rPr lang="en-US" sz="1150" b="1" dirty="0">
                 <a:solidFill>
-                  <a:srgbClr val="9A3B3B"/>
-                </a:solidFill>
-                <a:latin typeface="Microsoft JhengHei" pitchFamily="34" charset="0"/>
-                <a:ea typeface="Microsoft JhengHei" pitchFamily="34" charset="-122"/>
-                <a:cs typeface="Microsoft JhengHei" pitchFamily="34" charset="-120"/>
-              </a:rPr>
-              <a:t>臺北的獎、或高雄的住宿大獎 → 一律不核銷。
+                  <a:srgbClr val="935D08"/>
+                </a:solidFill>
+                <a:latin typeface="Microsoft JhengHei" pitchFamily="34" charset="0"/>
+                <a:ea typeface="Microsoft JhengHei" pitchFamily="34" charset="-122"/>
+                <a:cs typeface="Microsoft JhengHei" pitchFamily="34" charset="-120"/>
+              </a:rPr>
+              <a:t>一句話：看到「臺北」或「住宿」→ 不核銷；其餘高雄的實體小物與餐飲券 → 受理，回報主管。
 </a:t>
             </a:r>
+            <a:pPr indent="0" marL="0">
+              <a:lnSpc>
+                <a:spcPts val="1500"/>
+              </a:lnSpc>
+              <a:buNone/>
+            </a:pPr>
             <a:r>
               <a:rPr lang="en-US" sz="950" dirty="0">
                 <a:solidFill>
-                  <a:srgbClr val="9A3B3B"/>
-                </a:solidFill>
-                <a:latin typeface="Microsoft JhengHei" pitchFamily="34" charset="0"/>
-                <a:ea typeface="Microsoft JhengHei" pitchFamily="34" charset="-122"/>
-                <a:cs typeface="Microsoft JhengHei" pitchFamily="34" charset="-120"/>
-              </a:rPr>
-              <a:t>　　 Taipei prizes and Kaohsiung room stays are never redeemed at the counter.</a:t>
+                  <a:srgbClr val="935D08"/>
+                </a:solidFill>
+                <a:latin typeface="Microsoft JhengHei" pitchFamily="34" charset="0"/>
+                <a:ea typeface="Microsoft JhengHei" pitchFamily="34" charset="-122"/>
+                <a:cs typeface="Microsoft JhengHei" pitchFamily="34" charset="-120"/>
+              </a:rPr>
+              <a:t>　　 In short: Taipei or room stay → do not redeem. Other Kaohsiung items → accept and report to your supervisor.</a:t>
             </a:r>
             <a:endParaRPr lang="en-US" sz="1200" dirty="0"/>
           </a:p>
@@ -12366,7 +13668,6 @@
         <a:solidFill>
           <a:srgbClr val="FAF8F6"/>
         </a:solidFill>
-        <a:effectLst/>
       </p:bgPr>
     </p:bg>
     <p:spTree>
@@ -12404,7 +13705,7 @@
           <a:bodyPr wrap="square" rtlCol="0" anchor="ctr"/>
           <a:lstStyle/>
           <a:p>
-            <a:pPr marL="0" indent="0">
+            <a:pPr indent="0" marL="0">
               <a:buNone/>
             </a:pPr>
             <a:r>
@@ -12416,7 +13717,7 @@
                 <a:ea typeface="Microsoft JhengHei" pitchFamily="34" charset="-122"/>
                 <a:cs typeface="Microsoft JhengHei" pitchFamily="34" charset="-120"/>
               </a:rPr>
-              <a:t>六、常見問題與標準回答（1/3）</a:t>
+              <a:t>六、櫃檯核銷步驟（高雄）</a:t>
             </a:r>
             <a:endParaRPr lang="en-US" sz="2200" dirty="0"/>
           </a:p>
@@ -12443,7 +13744,7 @@
           <a:bodyPr wrap="square" rtlCol="0" anchor="ctr"/>
           <a:lstStyle/>
           <a:p>
-            <a:pPr marL="0" indent="0">
+            <a:pPr indent="0" marL="0">
               <a:buNone/>
             </a:pPr>
             <a:r>
@@ -12455,7 +13756,7 @@
                 <a:ea typeface="Microsoft JhengHei" pitchFamily="34" charset="-122"/>
                 <a:cs typeface="Microsoft JhengHei" pitchFamily="34" charset="-120"/>
               </a:rPr>
-              <a:t>FAQ &amp; Suggested Replies (1 of 3)</a:t>
+              <a:t>Counter Redemption Procedure (Kaohsiung)</a:t>
             </a:r>
             <a:endParaRPr lang="en-US" sz="1150" dirty="0"/>
           </a:p>
@@ -12502,7 +13803,7 @@
           <a:bodyPr wrap="square" rtlCol="0" anchor="ctr"/>
           <a:lstStyle/>
           <a:p>
-            <a:pPr marL="0" indent="0" algn="r">
+            <a:pPr algn="r" indent="0" marL="0">
               <a:buNone/>
             </a:pPr>
             <a:r>
@@ -12541,7 +13842,7 @@
           <a:bodyPr wrap="square" rtlCol="0" anchor="ctr"/>
           <a:lstStyle/>
           <a:p>
-            <a:pPr marL="0" indent="0">
+            <a:pPr indent="0" marL="0">
               <a:buNone/>
             </a:pPr>
             <a:r>
@@ -12567,20 +13868,568 @@
         </p:nvSpPr>
         <p:spPr>
           <a:xfrm>
-            <a:off x="502920" y="1115568"/>
-            <a:ext cx="8138160" cy="1243584"/>
+            <a:off x="548640" y="1280160"/>
+            <a:ext cx="384048" cy="384048"/>
+          </a:xfrm>
+          <a:prstGeom prst="ellipse">
+            <a:avLst/>
+          </a:prstGeom>
+          <a:solidFill>
+            <a:srgbClr val="935D08"/>
+          </a:solidFill>
+          <a:ln/>
+        </p:spPr>
+      </p:sp>
+      <p:sp>
+        <p:nvSpPr>
+          <p:cNvPr id="8" name="Text 6"/>
+          <p:cNvSpPr/>
+          <p:nvPr/>
+        </p:nvSpPr>
+        <p:spPr>
+          <a:xfrm>
+            <a:off x="548640" y="1280160"/>
+            <a:ext cx="384048" cy="384048"/>
+          </a:xfrm>
+          <a:prstGeom prst="rect">
+            <a:avLst/>
+          </a:prstGeom>
+          <a:noFill/>
+          <a:ln/>
+        </p:spPr>
+        <p:txBody>
+          <a:bodyPr wrap="square" rtlCol="0" anchor="ctr"/>
+          <a:lstStyle/>
+          <a:p>
+            <a:pPr algn="ctr" indent="0" marL="0">
+              <a:buNone/>
+            </a:pPr>
+            <a:r>
+              <a:rPr lang="en-US" sz="1400" b="1" dirty="0">
+                <a:solidFill>
+                  <a:srgbClr val="FFFFFF"/>
+                </a:solidFill>
+                <a:latin typeface="Microsoft JhengHei" pitchFamily="34" charset="0"/>
+                <a:ea typeface="Microsoft JhengHei" pitchFamily="34" charset="-122"/>
+                <a:cs typeface="Microsoft JhengHei" pitchFamily="34" charset="-120"/>
+              </a:rPr>
+              <a:t>1</a:t>
+            </a:r>
+            <a:endParaRPr lang="en-US" sz="1400" dirty="0"/>
+          </a:p>
+        </p:txBody>
+      </p:sp>
+      <p:sp>
+        <p:nvSpPr>
+          <p:cNvPr id="9" name="Text 7"/>
+          <p:cNvSpPr/>
+          <p:nvPr/>
+        </p:nvSpPr>
+        <p:spPr>
+          <a:xfrm>
+            <a:off x="1097280" y="1252728"/>
+            <a:ext cx="7680960" cy="256032"/>
+          </a:xfrm>
+          <a:prstGeom prst="rect">
+            <a:avLst/>
+          </a:prstGeom>
+          <a:noFill/>
+          <a:ln/>
+        </p:spPr>
+        <p:txBody>
+          <a:bodyPr wrap="square" rtlCol="0" anchor="ctr"/>
+          <a:lstStyle/>
+          <a:p>
+            <a:pPr indent="0" marL="0">
+              <a:buNone/>
+            </a:pPr>
+            <a:r>
+              <a:rPr lang="en-US" sz="1300" b="1" dirty="0">
+                <a:solidFill>
+                  <a:srgbClr val="3D3935"/>
+                </a:solidFill>
+                <a:latin typeface="Microsoft JhengHei" pitchFamily="34" charset="0"/>
+                <a:ea typeface="Microsoft JhengHei" pitchFamily="34" charset="-122"/>
+                <a:cs typeface="Microsoft JhengHei" pitchFamily="34" charset="-120"/>
+              </a:rPr>
+              <a:t>請客人出示 LINE 中的優惠券畫面與兌換碼</a:t>
+            </a:r>
+            <a:endParaRPr lang="en-US" sz="1300" dirty="0"/>
+          </a:p>
+        </p:txBody>
+      </p:sp>
+      <p:sp>
+        <p:nvSpPr>
+          <p:cNvPr id="10" name="Text 8"/>
+          <p:cNvSpPr/>
+          <p:nvPr/>
+        </p:nvSpPr>
+        <p:spPr>
+          <a:xfrm>
+            <a:off x="1097280" y="1508760"/>
+            <a:ext cx="7680960" cy="219456"/>
+          </a:xfrm>
+          <a:prstGeom prst="rect">
+            <a:avLst/>
+          </a:prstGeom>
+          <a:noFill/>
+          <a:ln/>
+        </p:spPr>
+        <p:txBody>
+          <a:bodyPr wrap="square" rtlCol="0" anchor="ctr"/>
+          <a:lstStyle/>
+          <a:p>
+            <a:pPr indent="0" marL="0">
+              <a:buNone/>
+            </a:pPr>
+            <a:r>
+              <a:rPr lang="en-US" sz="950" dirty="0">
+                <a:solidFill>
+                  <a:srgbClr val="6E6A63"/>
+                </a:solidFill>
+                <a:latin typeface="Microsoft JhengHei" pitchFamily="34" charset="0"/>
+                <a:ea typeface="Microsoft JhengHei" pitchFamily="34" charset="-122"/>
+                <a:cs typeface="Microsoft JhengHei" pitchFamily="34" charset="-120"/>
+              </a:rPr>
+              <a:t>Ask the guest to show the coupon in LINE, along with the redemption code</a:t>
+            </a:r>
+            <a:endParaRPr lang="en-US" sz="950" dirty="0"/>
+          </a:p>
+        </p:txBody>
+      </p:sp>
+      <p:sp>
+        <p:nvSpPr>
+          <p:cNvPr id="11" name="Shape 9"/>
+          <p:cNvSpPr/>
+          <p:nvPr/>
+        </p:nvSpPr>
+        <p:spPr>
+          <a:xfrm>
+            <a:off x="548640" y="1874520"/>
+            <a:ext cx="384048" cy="384048"/>
+          </a:xfrm>
+          <a:prstGeom prst="ellipse">
+            <a:avLst/>
+          </a:prstGeom>
+          <a:solidFill>
+            <a:srgbClr val="935D08"/>
+          </a:solidFill>
+          <a:ln/>
+        </p:spPr>
+      </p:sp>
+      <p:sp>
+        <p:nvSpPr>
+          <p:cNvPr id="12" name="Text 10"/>
+          <p:cNvSpPr/>
+          <p:nvPr/>
+        </p:nvSpPr>
+        <p:spPr>
+          <a:xfrm>
+            <a:off x="548640" y="1874520"/>
+            <a:ext cx="384048" cy="384048"/>
+          </a:xfrm>
+          <a:prstGeom prst="rect">
+            <a:avLst/>
+          </a:prstGeom>
+          <a:noFill/>
+          <a:ln/>
+        </p:spPr>
+        <p:txBody>
+          <a:bodyPr wrap="square" rtlCol="0" anchor="ctr"/>
+          <a:lstStyle/>
+          <a:p>
+            <a:pPr algn="ctr" indent="0" marL="0">
+              <a:buNone/>
+            </a:pPr>
+            <a:r>
+              <a:rPr lang="en-US" sz="1400" b="1" dirty="0">
+                <a:solidFill>
+                  <a:srgbClr val="FFFFFF"/>
+                </a:solidFill>
+                <a:latin typeface="Microsoft JhengHei" pitchFamily="34" charset="0"/>
+                <a:ea typeface="Microsoft JhengHei" pitchFamily="34" charset="-122"/>
+                <a:cs typeface="Microsoft JhengHei" pitchFamily="34" charset="-120"/>
+              </a:rPr>
+              <a:t>2</a:t>
+            </a:r>
+            <a:endParaRPr lang="en-US" sz="1400" dirty="0"/>
+          </a:p>
+        </p:txBody>
+      </p:sp>
+      <p:sp>
+        <p:nvSpPr>
+          <p:cNvPr id="13" name="Text 11"/>
+          <p:cNvSpPr/>
+          <p:nvPr/>
+        </p:nvSpPr>
+        <p:spPr>
+          <a:xfrm>
+            <a:off x="1097280" y="1847088"/>
+            <a:ext cx="7680960" cy="256032"/>
+          </a:xfrm>
+          <a:prstGeom prst="rect">
+            <a:avLst/>
+          </a:prstGeom>
+          <a:noFill/>
+          <a:ln/>
+        </p:spPr>
+        <p:txBody>
+          <a:bodyPr wrap="square" rtlCol="0" anchor="ctr"/>
+          <a:lstStyle/>
+          <a:p>
+            <a:pPr indent="0" marL="0">
+              <a:buNone/>
+            </a:pPr>
+            <a:r>
+              <a:rPr lang="en-US" sz="1300" b="1" dirty="0">
+                <a:solidFill>
+                  <a:srgbClr val="3D3935"/>
+                </a:solidFill>
+                <a:latin typeface="Microsoft JhengHei" pitchFamily="34" charset="0"/>
+                <a:ea typeface="Microsoft JhengHei" pitchFamily="34" charset="-122"/>
+                <a:cs typeface="Microsoft JhengHei" pitchFamily="34" charset="-120"/>
+              </a:rPr>
+              <a:t>沒有優惠券、只有兌換碼 → 先看獎品名稱再決定（見下一頁）</a:t>
+            </a:r>
+            <a:endParaRPr lang="en-US" sz="1300" dirty="0"/>
+          </a:p>
+        </p:txBody>
+      </p:sp>
+      <p:sp>
+        <p:nvSpPr>
+          <p:cNvPr id="14" name="Text 12"/>
+          <p:cNvSpPr/>
+          <p:nvPr/>
+        </p:nvSpPr>
+        <p:spPr>
+          <a:xfrm>
+            <a:off x="1097280" y="2103120"/>
+            <a:ext cx="7680960" cy="219456"/>
+          </a:xfrm>
+          <a:prstGeom prst="rect">
+            <a:avLst/>
+          </a:prstGeom>
+          <a:noFill/>
+          <a:ln/>
+        </p:spPr>
+        <p:txBody>
+          <a:bodyPr wrap="square" rtlCol="0" anchor="ctr"/>
+          <a:lstStyle/>
+          <a:p>
+            <a:pPr indent="0" marL="0">
+              <a:buNone/>
+            </a:pPr>
+            <a:r>
+              <a:rPr lang="en-US" sz="950" dirty="0">
+                <a:solidFill>
+                  <a:srgbClr val="6E6A63"/>
+                </a:solidFill>
+                <a:latin typeface="Microsoft JhengHei" pitchFamily="34" charset="0"/>
+                <a:ea typeface="Microsoft JhengHei" pitchFamily="34" charset="-122"/>
+                <a:cs typeface="Microsoft JhengHei" pitchFamily="34" charset="-120"/>
+              </a:rPr>
+              <a:t>A code with no coupon — check the prize name first (see next page)</a:t>
+            </a:r>
+            <a:endParaRPr lang="en-US" sz="950" dirty="0"/>
+          </a:p>
+        </p:txBody>
+      </p:sp>
+      <p:sp>
+        <p:nvSpPr>
+          <p:cNvPr id="15" name="Shape 13"/>
+          <p:cNvSpPr/>
+          <p:nvPr/>
+        </p:nvSpPr>
+        <p:spPr>
+          <a:xfrm>
+            <a:off x="548640" y="2468880"/>
+            <a:ext cx="384048" cy="384048"/>
+          </a:xfrm>
+          <a:prstGeom prst="ellipse">
+            <a:avLst/>
+          </a:prstGeom>
+          <a:solidFill>
+            <a:srgbClr val="935D08"/>
+          </a:solidFill>
+          <a:ln/>
+        </p:spPr>
+      </p:sp>
+      <p:sp>
+        <p:nvSpPr>
+          <p:cNvPr id="16" name="Text 14"/>
+          <p:cNvSpPr/>
+          <p:nvPr/>
+        </p:nvSpPr>
+        <p:spPr>
+          <a:xfrm>
+            <a:off x="548640" y="2468880"/>
+            <a:ext cx="384048" cy="384048"/>
+          </a:xfrm>
+          <a:prstGeom prst="rect">
+            <a:avLst/>
+          </a:prstGeom>
+          <a:noFill/>
+          <a:ln/>
+        </p:spPr>
+        <p:txBody>
+          <a:bodyPr wrap="square" rtlCol="0" anchor="ctr"/>
+          <a:lstStyle/>
+          <a:p>
+            <a:pPr algn="ctr" indent="0" marL="0">
+              <a:buNone/>
+            </a:pPr>
+            <a:r>
+              <a:rPr lang="en-US" sz="1400" b="1" dirty="0">
+                <a:solidFill>
+                  <a:srgbClr val="FFFFFF"/>
+                </a:solidFill>
+                <a:latin typeface="Microsoft JhengHei" pitchFamily="34" charset="0"/>
+                <a:ea typeface="Microsoft JhengHei" pitchFamily="34" charset="-122"/>
+                <a:cs typeface="Microsoft JhengHei" pitchFamily="34" charset="-120"/>
+              </a:rPr>
+              <a:t>3</a:t>
+            </a:r>
+            <a:endParaRPr lang="en-US" sz="1400" dirty="0"/>
+          </a:p>
+        </p:txBody>
+      </p:sp>
+      <p:sp>
+        <p:nvSpPr>
+          <p:cNvPr id="17" name="Text 15"/>
+          <p:cNvSpPr/>
+          <p:nvPr/>
+        </p:nvSpPr>
+        <p:spPr>
+          <a:xfrm>
+            <a:off x="1097280" y="2441448"/>
+            <a:ext cx="7680960" cy="256032"/>
+          </a:xfrm>
+          <a:prstGeom prst="rect">
+            <a:avLst/>
+          </a:prstGeom>
+          <a:noFill/>
+          <a:ln/>
+        </p:spPr>
+        <p:txBody>
+          <a:bodyPr wrap="square" rtlCol="0" anchor="ctr"/>
+          <a:lstStyle/>
+          <a:p>
+            <a:pPr indent="0" marL="0">
+              <a:buNone/>
+            </a:pPr>
+            <a:r>
+              <a:rPr lang="en-US" sz="1300" b="1" dirty="0">
+                <a:solidFill>
+                  <a:srgbClr val="3D3935"/>
+                </a:solidFill>
+                <a:latin typeface="Microsoft JhengHei" pitchFamily="34" charset="0"/>
+                <a:ea typeface="Microsoft JhengHei" pitchFamily="34" charset="-122"/>
+                <a:cs typeface="Microsoft JhengHei" pitchFamily="34" charset="-120"/>
+              </a:rPr>
+              <a:t>依券面規則辦理（部分獎品有消費門檻或指定地點／時段）</a:t>
+            </a:r>
+            <a:endParaRPr lang="en-US" sz="1300" dirty="0"/>
+          </a:p>
+        </p:txBody>
+      </p:sp>
+      <p:sp>
+        <p:nvSpPr>
+          <p:cNvPr id="18" name="Text 16"/>
+          <p:cNvSpPr/>
+          <p:nvPr/>
+        </p:nvSpPr>
+        <p:spPr>
+          <a:xfrm>
+            <a:off x="1097280" y="2697480"/>
+            <a:ext cx="7680960" cy="219456"/>
+          </a:xfrm>
+          <a:prstGeom prst="rect">
+            <a:avLst/>
+          </a:prstGeom>
+          <a:noFill/>
+          <a:ln/>
+        </p:spPr>
+        <p:txBody>
+          <a:bodyPr wrap="square" rtlCol="0" anchor="ctr"/>
+          <a:lstStyle/>
+          <a:p>
+            <a:pPr indent="0" marL="0">
+              <a:buNone/>
+            </a:pPr>
+            <a:r>
+              <a:rPr lang="en-US" sz="950" dirty="0">
+                <a:solidFill>
+                  <a:srgbClr val="6E6A63"/>
+                </a:solidFill>
+                <a:latin typeface="Microsoft JhengHei" pitchFamily="34" charset="0"/>
+                <a:ea typeface="Microsoft JhengHei" pitchFamily="34" charset="-122"/>
+                <a:cs typeface="Microsoft JhengHei" pitchFamily="34" charset="-120"/>
+              </a:rPr>
+              <a:t>Follow the terms shown on the coupon — some prizes have a minimum spend, venue or time window</a:t>
+            </a:r>
+            <a:endParaRPr lang="en-US" sz="950" dirty="0"/>
+          </a:p>
+        </p:txBody>
+      </p:sp>
+      <p:sp>
+        <p:nvSpPr>
+          <p:cNvPr id="19" name="Shape 17"/>
+          <p:cNvSpPr/>
+          <p:nvPr/>
+        </p:nvSpPr>
+        <p:spPr>
+          <a:xfrm>
+            <a:off x="548640" y="3063240"/>
+            <a:ext cx="384048" cy="384048"/>
+          </a:xfrm>
+          <a:prstGeom prst="ellipse">
+            <a:avLst/>
+          </a:prstGeom>
+          <a:solidFill>
+            <a:srgbClr val="935D08"/>
+          </a:solidFill>
+          <a:ln/>
+        </p:spPr>
+      </p:sp>
+      <p:sp>
+        <p:nvSpPr>
+          <p:cNvPr id="20" name="Text 18"/>
+          <p:cNvSpPr/>
+          <p:nvPr/>
+        </p:nvSpPr>
+        <p:spPr>
+          <a:xfrm>
+            <a:off x="548640" y="3063240"/>
+            <a:ext cx="384048" cy="384048"/>
+          </a:xfrm>
+          <a:prstGeom prst="rect">
+            <a:avLst/>
+          </a:prstGeom>
+          <a:noFill/>
+          <a:ln/>
+        </p:spPr>
+        <p:txBody>
+          <a:bodyPr wrap="square" rtlCol="0" anchor="ctr"/>
+          <a:lstStyle/>
+          <a:p>
+            <a:pPr algn="ctr" indent="0" marL="0">
+              <a:buNone/>
+            </a:pPr>
+            <a:r>
+              <a:rPr lang="en-US" sz="1400" b="1" dirty="0">
+                <a:solidFill>
+                  <a:srgbClr val="FFFFFF"/>
+                </a:solidFill>
+                <a:latin typeface="Microsoft JhengHei" pitchFamily="34" charset="0"/>
+                <a:ea typeface="Microsoft JhengHei" pitchFamily="34" charset="-122"/>
+                <a:cs typeface="Microsoft JhengHei" pitchFamily="34" charset="-120"/>
+              </a:rPr>
+              <a:t>4</a:t>
+            </a:r>
+            <a:endParaRPr lang="en-US" sz="1400" dirty="0"/>
+          </a:p>
+        </p:txBody>
+      </p:sp>
+      <p:sp>
+        <p:nvSpPr>
+          <p:cNvPr id="21" name="Text 19"/>
+          <p:cNvSpPr/>
+          <p:nvPr/>
+        </p:nvSpPr>
+        <p:spPr>
+          <a:xfrm>
+            <a:off x="1097280" y="3035808"/>
+            <a:ext cx="7680960" cy="256032"/>
+          </a:xfrm>
+          <a:prstGeom prst="rect">
+            <a:avLst/>
+          </a:prstGeom>
+          <a:noFill/>
+          <a:ln/>
+        </p:spPr>
+        <p:txBody>
+          <a:bodyPr wrap="square" rtlCol="0" anchor="ctr"/>
+          <a:lstStyle/>
+          <a:p>
+            <a:pPr indent="0" marL="0">
+              <a:buNone/>
+            </a:pPr>
+            <a:r>
+              <a:rPr lang="en-US" sz="1300" b="1" dirty="0">
+                <a:solidFill>
+                  <a:srgbClr val="3D3935"/>
+                </a:solidFill>
+                <a:latin typeface="Microsoft JhengHei" pitchFamily="34" charset="0"/>
+                <a:ea typeface="Microsoft JhengHei" pitchFamily="34" charset="-122"/>
+                <a:cs typeface="Microsoft JhengHei" pitchFamily="34" charset="-120"/>
+              </a:rPr>
+              <a:t>核銷後交付獎品</a:t>
+            </a:r>
+            <a:endParaRPr lang="en-US" sz="1300" dirty="0"/>
+          </a:p>
+        </p:txBody>
+      </p:sp>
+      <p:sp>
+        <p:nvSpPr>
+          <p:cNvPr id="22" name="Text 20"/>
+          <p:cNvSpPr/>
+          <p:nvPr/>
+        </p:nvSpPr>
+        <p:spPr>
+          <a:xfrm>
+            <a:off x="1097280" y="3291840"/>
+            <a:ext cx="7680960" cy="219456"/>
+          </a:xfrm>
+          <a:prstGeom prst="rect">
+            <a:avLst/>
+          </a:prstGeom>
+          <a:noFill/>
+          <a:ln/>
+        </p:spPr>
+        <p:txBody>
+          <a:bodyPr wrap="square" rtlCol="0" anchor="ctr"/>
+          <a:lstStyle/>
+          <a:p>
+            <a:pPr indent="0" marL="0">
+              <a:buNone/>
+            </a:pPr>
+            <a:r>
+              <a:rPr lang="en-US" sz="950" dirty="0">
+                <a:solidFill>
+                  <a:srgbClr val="6E6A63"/>
+                </a:solidFill>
+                <a:latin typeface="Microsoft JhengHei" pitchFamily="34" charset="0"/>
+                <a:ea typeface="Microsoft JhengHei" pitchFamily="34" charset="-122"/>
+                <a:cs typeface="Microsoft JhengHei" pitchFamily="34" charset="-120"/>
+              </a:rPr>
+              <a:t>Complete redemption and hand over the prize</a:t>
+            </a:r>
+            <a:endParaRPr lang="en-US" sz="950" dirty="0"/>
+          </a:p>
+        </p:txBody>
+      </p:sp>
+      <p:sp>
+        <p:nvSpPr>
+          <p:cNvPr id="23" name="Shape 21"/>
+          <p:cNvSpPr/>
+          <p:nvPr/>
+        </p:nvSpPr>
+        <p:spPr>
+          <a:xfrm>
+            <a:off x="502920" y="3749040"/>
+            <a:ext cx="3931920" cy="868680"/>
           </a:xfrm>
           <a:prstGeom prst="roundRect">
             <a:avLst>
-              <a:gd name="adj" fmla="val 4412"/>
+              <a:gd name="adj" fmla="val 6316"/>
             </a:avLst>
           </a:prstGeom>
           <a:solidFill>
-            <a:srgbClr val="FFFDFA"/>
+            <a:srgbClr val="FBF1DC"/>
           </a:solidFill>
           <a:ln w="9525">
             <a:solidFill>
-              <a:srgbClr val="DAD9D6"/>
+              <a:srgbClr val="9C6212"/>
             </a:solidFill>
             <a:prstDash val="solid"/>
           </a:ln>
@@ -12588,145 +14437,103 @@
       </p:sp>
       <p:sp>
         <p:nvSpPr>
-          <p:cNvPr id="8" name="Text 6"/>
-          <p:cNvSpPr/>
-          <p:nvPr/>
-        </p:nvSpPr>
-        <p:spPr>
-          <a:xfrm>
-            <a:off x="685800" y="1188720"/>
-            <a:ext cx="7772400" cy="457200"/>
-          </a:xfrm>
-          <a:prstGeom prst="rect">
-            <a:avLst/>
-          </a:prstGeom>
-          <a:noFill/>
-          <a:ln/>
-        </p:spPr>
-        <p:txBody>
-          <a:bodyPr wrap="square" rtlCol="0" anchor="ctr"/>
-          <a:lstStyle/>
-          <a:p>
-            <a:pPr marL="0" indent="0">
-              <a:lnSpc>
-                <a:spcPts val="1300"/>
-              </a:lnSpc>
-              <a:buNone/>
-            </a:pPr>
-            <a:r>
-              <a:rPr lang="en-US" sz="1100" b="1" dirty="0">
-                <a:solidFill>
-                  <a:srgbClr val="B8923E"/>
-                </a:solidFill>
-                <a:latin typeface="Microsoft JhengHei" pitchFamily="34" charset="0"/>
-                <a:ea typeface="Microsoft JhengHei" pitchFamily="34" charset="-122"/>
-                <a:cs typeface="Microsoft JhengHei" pitchFamily="34" charset="-120"/>
-              </a:rPr>
-              <a:t>Q  </a:t>
-            </a:r>
-            <a:r>
-              <a:rPr lang="en-US" sz="1200" b="1" dirty="0">
-                <a:solidFill>
-                  <a:srgbClr val="935D08"/>
-                </a:solidFill>
-                <a:latin typeface="Microsoft JhengHei" pitchFamily="34" charset="0"/>
-                <a:ea typeface="Microsoft JhengHei" pitchFamily="34" charset="-122"/>
-                <a:cs typeface="Microsoft JhengHei" pitchFamily="34" charset="-120"/>
-              </a:rPr>
-              <a:t>我沒有收到優惠券？
+          <p:cNvPr id="24" name="Text 22"/>
+          <p:cNvSpPr/>
+          <p:nvPr/>
+        </p:nvSpPr>
+        <p:spPr>
+          <a:xfrm>
+            <a:off x="649224" y="3794760"/>
+            <a:ext cx="3639312" cy="777240"/>
+          </a:xfrm>
+          <a:prstGeom prst="rect">
+            <a:avLst/>
+          </a:prstGeom>
+          <a:noFill/>
+          <a:ln/>
+        </p:spPr>
+        <p:txBody>
+          <a:bodyPr wrap="square" rtlCol="0" anchor="ctr"/>
+          <a:lstStyle/>
+          <a:p>
+            <a:pPr indent="0" marL="0">
+              <a:lnSpc>
+                <a:spcPts val="1500"/>
+              </a:lnSpc>
+              <a:buNone/>
+            </a:pPr>
+            <a:r>
+              <a:rPr lang="en-US" sz="1200" dirty="0">
+                <a:solidFill>
+                  <a:srgbClr val="9C6212"/>
+                </a:solidFill>
+                <a:latin typeface="Microsoft JhengHei" pitchFamily="34" charset="0"/>
+                <a:ea typeface="Microsoft JhengHei" pitchFamily="34" charset="-122"/>
+                <a:cs typeface="Microsoft JhengHei" pitchFamily="34" charset="-120"/>
+              </a:rPr>
+              <a:t>🤔  </a:t>
+            </a:r>
+            <a:pPr indent="0" marL="0">
+              <a:lnSpc>
+                <a:spcPts val="1500"/>
+              </a:lnSpc>
+              <a:buNone/>
+            </a:pPr>
+            <a:r>
+              <a:rPr lang="en-US" sz="1150" b="1" dirty="0">
+                <a:solidFill>
+                  <a:srgbClr val="9C6212"/>
+                </a:solidFill>
+                <a:latin typeface="Microsoft JhengHei" pitchFamily="34" charset="0"/>
+                <a:ea typeface="Microsoft JhengHei" pitchFamily="34" charset="-122"/>
+                <a:cs typeface="Microsoft JhengHei" pitchFamily="34" charset="-120"/>
+              </a:rPr>
+              <a:t>無法確認時，不要自行判斷。
 </a:t>
             </a:r>
-            <a:r>
-              <a:rPr lang="en-US" sz="900" dirty="0">
-                <a:solidFill>
-                  <a:srgbClr val="6E6A63"/>
-                </a:solidFill>
-                <a:latin typeface="Microsoft JhengHei" pitchFamily="34" charset="0"/>
-                <a:ea typeface="Microsoft JhengHei" pitchFamily="34" charset="-122"/>
-                <a:cs typeface="Microsoft JhengHei" pitchFamily="34" charset="-120"/>
-              </a:rPr>
-              <a:t>　  I didn't receive my coupon.</a:t>
-            </a:r>
-            <a:endParaRPr lang="en-US" sz="1100" dirty="0"/>
-          </a:p>
-        </p:txBody>
-      </p:sp>
-      <p:sp>
-        <p:nvSpPr>
-          <p:cNvPr id="9" name="Text 7"/>
-          <p:cNvSpPr/>
-          <p:nvPr/>
-        </p:nvSpPr>
-        <p:spPr>
-          <a:xfrm>
-            <a:off x="685800" y="1682496"/>
-            <a:ext cx="7772400" cy="603504"/>
-          </a:xfrm>
-          <a:prstGeom prst="rect">
-            <a:avLst/>
-          </a:prstGeom>
-          <a:noFill/>
-          <a:ln/>
-        </p:spPr>
-        <p:txBody>
-          <a:bodyPr wrap="square" rtlCol="0" anchor="ctr"/>
-          <a:lstStyle/>
-          <a:p>
-            <a:pPr marL="0" indent="0">
-              <a:lnSpc>
-                <a:spcPts val="1300"/>
-              </a:lnSpc>
-              <a:buNone/>
-            </a:pPr>
-            <a:r>
-              <a:rPr lang="en-US" sz="1050" dirty="0">
-                <a:solidFill>
-                  <a:srgbClr val="3D3935"/>
-                </a:solidFill>
-                <a:latin typeface="Microsoft JhengHei" pitchFamily="34" charset="0"/>
-                <a:ea typeface="Microsoft JhengHei" pitchFamily="34" charset="-122"/>
-                <a:cs typeface="Microsoft JhengHei" pitchFamily="34" charset="-120"/>
-              </a:rPr>
-              <a:t>請打開高雄洲際酒店的 LINE 對話往上找，優惠券是以訊息形式發送的。若真的找不到，我幫您回報，會有同仁協助處理。
-</a:t>
-            </a:r>
-            <a:r>
-              <a:rPr lang="en-US" sz="900" dirty="0">
-                <a:solidFill>
-                  <a:srgbClr val="6E6A63"/>
-                </a:solidFill>
-                <a:latin typeface="Microsoft JhengHei" pitchFamily="34" charset="0"/>
-                <a:ea typeface="Microsoft JhengHei" pitchFamily="34" charset="-122"/>
-                <a:cs typeface="Microsoft JhengHei" pitchFamily="34" charset="-120"/>
-              </a:rPr>
-              <a:t>Please scroll up in your LINE chat with InterContinental Kaohsiung — the coupon is sent as a message. If you still can't find it, I'll report it for assistance.</a:t>
-            </a:r>
-            <a:endParaRPr lang="en-US" sz="1050" dirty="0"/>
-          </a:p>
-        </p:txBody>
-      </p:sp>
-      <p:sp>
-        <p:nvSpPr>
-          <p:cNvPr id="10" name="Shape 8"/>
-          <p:cNvSpPr/>
-          <p:nvPr/>
-        </p:nvSpPr>
-        <p:spPr>
-          <a:xfrm>
-            <a:off x="502920" y="2450592"/>
-            <a:ext cx="8138160" cy="1024128"/>
+            <a:pPr indent="0" marL="0">
+              <a:lnSpc>
+                <a:spcPts val="1500"/>
+              </a:lnSpc>
+              <a:buNone/>
+            </a:pPr>
+            <a:r>
+              <a:rPr lang="en-US" sz="950" dirty="0">
+                <a:solidFill>
+                  <a:srgbClr val="9C6212"/>
+                </a:solidFill>
+                <a:latin typeface="Microsoft JhengHei" pitchFamily="34" charset="0"/>
+                <a:ea typeface="Microsoft JhengHei" pitchFamily="34" charset="-122"/>
+                <a:cs typeface="Microsoft JhengHei" pitchFamily="34" charset="-120"/>
+              </a:rPr>
+              <a:t>　　 If anything is unclear, do not decide on your own — contact your supervisor to check the record.</a:t>
+            </a:r>
+            <a:endParaRPr lang="en-US" sz="1200" dirty="0"/>
+          </a:p>
+        </p:txBody>
+      </p:sp>
+      <p:sp>
+        <p:nvSpPr>
+          <p:cNvPr id="25" name="Shape 23"/>
+          <p:cNvSpPr/>
+          <p:nvPr/>
+        </p:nvSpPr>
+        <p:spPr>
+          <a:xfrm>
+            <a:off x="4709160" y="3749040"/>
+            <a:ext cx="3931920" cy="868680"/>
           </a:xfrm>
           <a:prstGeom prst="roundRect">
             <a:avLst>
-              <a:gd name="adj" fmla="val 5357"/>
+              <a:gd name="adj" fmla="val 6316"/>
             </a:avLst>
           </a:prstGeom>
           <a:solidFill>
-            <a:srgbClr val="FFFDFA"/>
+            <a:srgbClr val="FBEDED"/>
           </a:solidFill>
           <a:ln w="9525">
             <a:solidFill>
-              <a:srgbClr val="DAD9D6"/>
+              <a:srgbClr val="9A3B3B"/>
             </a:solidFill>
             <a:prstDash val="solid"/>
           </a:ln>
@@ -12734,266 +14541,78 @@
       </p:sp>
       <p:sp>
         <p:nvSpPr>
-          <p:cNvPr id="11" name="Text 9"/>
-          <p:cNvSpPr/>
-          <p:nvPr/>
-        </p:nvSpPr>
-        <p:spPr>
-          <a:xfrm>
-            <a:off x="685800" y="2523744"/>
-            <a:ext cx="7772400" cy="457200"/>
-          </a:xfrm>
-          <a:prstGeom prst="rect">
-            <a:avLst/>
-          </a:prstGeom>
-          <a:noFill/>
-          <a:ln/>
-        </p:spPr>
-        <p:txBody>
-          <a:bodyPr wrap="square" rtlCol="0" anchor="ctr"/>
-          <a:lstStyle/>
-          <a:p>
-            <a:pPr marL="0" indent="0">
-              <a:lnSpc>
-                <a:spcPts val="1300"/>
-              </a:lnSpc>
-              <a:buNone/>
-            </a:pPr>
-            <a:r>
-              <a:rPr lang="en-US" sz="1100" b="1" dirty="0">
-                <a:solidFill>
-                  <a:srgbClr val="B8923E"/>
-                </a:solidFill>
-                <a:latin typeface="Microsoft JhengHei" pitchFamily="34" charset="0"/>
-                <a:ea typeface="Microsoft JhengHei" pitchFamily="34" charset="-122"/>
-                <a:cs typeface="Microsoft JhengHei" pitchFamily="34" charset="-120"/>
-              </a:rPr>
-              <a:t>Q  </a:t>
-            </a:r>
-            <a:r>
-              <a:rPr lang="en-US" sz="1200" b="1" dirty="0">
-                <a:solidFill>
-                  <a:srgbClr val="935D08"/>
-                </a:solidFill>
-                <a:latin typeface="Microsoft JhengHei" pitchFamily="34" charset="0"/>
-                <a:ea typeface="Microsoft JhengHei" pitchFamily="34" charset="-122"/>
-                <a:cs typeface="Microsoft JhengHei" pitchFamily="34" charset="-120"/>
-              </a:rPr>
-              <a:t>券的連結點了，顯示「已使用過」？
+          <p:cNvPr id="26" name="Text 24"/>
+          <p:cNvSpPr/>
+          <p:nvPr/>
+        </p:nvSpPr>
+        <p:spPr>
+          <a:xfrm>
+            <a:off x="4855464" y="3794760"/>
+            <a:ext cx="3639312" cy="777240"/>
+          </a:xfrm>
+          <a:prstGeom prst="rect">
+            <a:avLst/>
+          </a:prstGeom>
+          <a:noFill/>
+          <a:ln/>
+        </p:spPr>
+        <p:txBody>
+          <a:bodyPr wrap="square" rtlCol="0" anchor="ctr"/>
+          <a:lstStyle/>
+          <a:p>
+            <a:pPr indent="0" marL="0">
+              <a:lnSpc>
+                <a:spcPts val="1500"/>
+              </a:lnSpc>
+              <a:buNone/>
+            </a:pPr>
+            <a:r>
+              <a:rPr lang="en-US" sz="1200" dirty="0">
+                <a:solidFill>
+                  <a:srgbClr val="9A3B3B"/>
+                </a:solidFill>
+                <a:latin typeface="Microsoft JhengHei" pitchFamily="34" charset="0"/>
+                <a:ea typeface="Microsoft JhengHei" pitchFamily="34" charset="-122"/>
+                <a:cs typeface="Microsoft JhengHei" pitchFamily="34" charset="-120"/>
+              </a:rPr>
+              <a:t>🚫  </a:t>
+            </a:r>
+            <a:pPr indent="0" marL="0">
+              <a:lnSpc>
+                <a:spcPts val="1500"/>
+              </a:lnSpc>
+              <a:buNone/>
+            </a:pPr>
+            <a:r>
+              <a:rPr lang="en-US" sz="1150" b="1" dirty="0">
+                <a:solidFill>
+                  <a:srgbClr val="9A3B3B"/>
+                </a:solidFill>
+                <a:latin typeface="Microsoft JhengHei" pitchFamily="34" charset="0"/>
+                <a:ea typeface="Microsoft JhengHei" pitchFamily="34" charset="-122"/>
+                <a:cs typeface="Microsoft JhengHei" pitchFamily="34" charset="-120"/>
+              </a:rPr>
+              <a:t>臺北的獎、或任何住宿獎 → 一律不核銷。
 </a:t>
             </a:r>
-            <a:r>
-              <a:rPr lang="en-US" sz="900" dirty="0">
-                <a:solidFill>
-                  <a:srgbClr val="6E6A63"/>
-                </a:solidFill>
-                <a:latin typeface="Microsoft JhengHei" pitchFamily="34" charset="0"/>
-                <a:ea typeface="Microsoft JhengHei" pitchFamily="34" charset="-122"/>
-                <a:cs typeface="Microsoft JhengHei" pitchFamily="34" charset="-120"/>
-              </a:rPr>
-              <a:t>　  The coupon link says it has already been used.</a:t>
-            </a:r>
-            <a:endParaRPr lang="en-US" sz="1100" dirty="0"/>
-          </a:p>
-        </p:txBody>
-      </p:sp>
-      <p:sp>
-        <p:nvSpPr>
-          <p:cNvPr id="12" name="Text 10"/>
-          <p:cNvSpPr/>
-          <p:nvPr/>
-        </p:nvSpPr>
-        <p:spPr>
-          <a:xfrm>
-            <a:off x="685800" y="3017520"/>
-            <a:ext cx="7772400" cy="384048"/>
-          </a:xfrm>
-          <a:prstGeom prst="rect">
-            <a:avLst/>
-          </a:prstGeom>
-          <a:noFill/>
-          <a:ln/>
-        </p:spPr>
-        <p:txBody>
-          <a:bodyPr wrap="square" rtlCol="0" anchor="ctr"/>
-          <a:lstStyle/>
-          <a:p>
-            <a:pPr marL="0" indent="0">
-              <a:lnSpc>
-                <a:spcPts val="1300"/>
-              </a:lnSpc>
-              <a:buNone/>
-            </a:pPr>
-            <a:r>
-              <a:rPr lang="en-US" sz="1050" dirty="0">
-                <a:solidFill>
-                  <a:srgbClr val="3D3935"/>
-                </a:solidFill>
-                <a:latin typeface="Microsoft JhengHei" pitchFamily="34" charset="0"/>
-                <a:ea typeface="Microsoft JhengHei" pitchFamily="34" charset="-122"/>
-                <a:cs typeface="Microsoft JhengHei" pitchFamily="34" charset="-120"/>
-              </a:rPr>
-              <a:t>每張券只能領取一次。如果您確定沒有領過，我幫您回報查詢。
-</a:t>
-            </a:r>
-            <a:r>
-              <a:rPr lang="en-US" sz="900" dirty="0">
-                <a:solidFill>
-                  <a:srgbClr val="6E6A63"/>
-                </a:solidFill>
-                <a:latin typeface="Microsoft JhengHei" pitchFamily="34" charset="0"/>
-                <a:ea typeface="Microsoft JhengHei" pitchFamily="34" charset="-122"/>
-                <a:cs typeface="Microsoft JhengHei" pitchFamily="34" charset="-120"/>
-              </a:rPr>
-              <a:t>Each coupon can only be claimed once. If you're sure you haven't claimed it, I'll report it for verification.</a:t>
-            </a:r>
-            <a:endParaRPr lang="en-US" sz="1050" dirty="0"/>
-          </a:p>
-        </p:txBody>
-      </p:sp>
-      <p:sp>
-        <p:nvSpPr>
-          <p:cNvPr id="13" name="Shape 11"/>
-          <p:cNvSpPr/>
-          <p:nvPr/>
-        </p:nvSpPr>
-        <p:spPr>
-          <a:xfrm>
-            <a:off x="502920" y="3566160"/>
-            <a:ext cx="8138160" cy="1078992"/>
-          </a:xfrm>
-          <a:prstGeom prst="roundRect">
-            <a:avLst>
-              <a:gd name="adj" fmla="val 5085"/>
-            </a:avLst>
-          </a:prstGeom>
-          <a:solidFill>
-            <a:srgbClr val="FFFDFA"/>
-          </a:solidFill>
-          <a:ln w="9525">
-            <a:solidFill>
-              <a:srgbClr val="DAD9D6"/>
-            </a:solidFill>
-            <a:prstDash val="solid"/>
-          </a:ln>
-        </p:spPr>
-      </p:sp>
-      <p:sp>
-        <p:nvSpPr>
-          <p:cNvPr id="14" name="Text 12"/>
-          <p:cNvSpPr/>
-          <p:nvPr/>
-        </p:nvSpPr>
-        <p:spPr>
-          <a:xfrm>
-            <a:off x="685800" y="3639312"/>
-            <a:ext cx="7772400" cy="457200"/>
-          </a:xfrm>
-          <a:prstGeom prst="rect">
-            <a:avLst/>
-          </a:prstGeom>
-          <a:noFill/>
-          <a:ln/>
-        </p:spPr>
-        <p:txBody>
-          <a:bodyPr wrap="square" rtlCol="0" anchor="ctr"/>
-          <a:lstStyle/>
-          <a:p>
-            <a:pPr marL="0" indent="0">
-              <a:lnSpc>
-                <a:spcPts val="1300"/>
-              </a:lnSpc>
-              <a:buNone/>
-            </a:pPr>
-            <a:r>
-              <a:rPr lang="en-US" sz="1100" b="1" dirty="0">
-                <a:solidFill>
-                  <a:srgbClr val="B8923E"/>
-                </a:solidFill>
-                <a:latin typeface="Microsoft JhengHei" pitchFamily="34" charset="0"/>
-                <a:ea typeface="Microsoft JhengHei" pitchFamily="34" charset="-122"/>
-                <a:cs typeface="Microsoft JhengHei" pitchFamily="34" charset="-120"/>
-              </a:rPr>
-              <a:t>Q  </a:t>
-            </a:r>
-            <a:r>
-              <a:rPr lang="en-US" sz="1200" b="1" dirty="0">
-                <a:solidFill>
-                  <a:srgbClr val="935D08"/>
-                </a:solidFill>
-                <a:latin typeface="Microsoft JhengHei" pitchFamily="34" charset="0"/>
-                <a:ea typeface="Microsoft JhengHei" pitchFamily="34" charset="-122"/>
-                <a:cs typeface="Microsoft JhengHei" pitchFamily="34" charset="-120"/>
-              </a:rPr>
-              <a:t>我中獎了，怎麼都沒有券？
-</a:t>
-            </a:r>
-            <a:r>
-              <a:rPr lang="en-US" sz="900" dirty="0">
-                <a:solidFill>
-                  <a:srgbClr val="6E6A63"/>
-                </a:solidFill>
-                <a:latin typeface="Microsoft JhengHei" pitchFamily="34" charset="0"/>
-                <a:ea typeface="Microsoft JhengHei" pitchFamily="34" charset="-122"/>
-                <a:cs typeface="Microsoft JhengHei" pitchFamily="34" charset="-120"/>
-              </a:rPr>
-              <a:t>　  I won a prize, but there's no coupon.</a:t>
-            </a:r>
-            <a:endParaRPr lang="en-US" sz="1100" dirty="0"/>
-          </a:p>
-        </p:txBody>
-      </p:sp>
-      <p:sp>
-        <p:nvSpPr>
-          <p:cNvPr id="15" name="Text 13"/>
-          <p:cNvSpPr/>
-          <p:nvPr/>
-        </p:nvSpPr>
-        <p:spPr>
-          <a:xfrm>
-            <a:off x="685800" y="4133088"/>
-            <a:ext cx="7772400" cy="438912"/>
-          </a:xfrm>
-          <a:prstGeom prst="rect">
-            <a:avLst/>
-          </a:prstGeom>
-          <a:noFill/>
-          <a:ln/>
-        </p:spPr>
-        <p:txBody>
-          <a:bodyPr wrap="square" rtlCol="0" anchor="ctr"/>
-          <a:lstStyle/>
-          <a:p>
-            <a:pPr marL="0" indent="0">
-              <a:lnSpc>
-                <a:spcPts val="1300"/>
-              </a:lnSpc>
-              <a:buNone/>
-            </a:pPr>
-            <a:r>
-              <a:rPr lang="en-US" sz="1050" dirty="0">
-                <a:solidFill>
-                  <a:srgbClr val="3D3935"/>
-                </a:solidFill>
-                <a:latin typeface="Microsoft JhengHei" pitchFamily="34" charset="0"/>
-                <a:ea typeface="Microsoft JhengHei" pitchFamily="34" charset="-122"/>
-                <a:cs typeface="Microsoft JhengHei" pitchFamily="34" charset="-120"/>
-              </a:rPr>
-              <a:t>部分獎項（臺北的全部獎項，以及高雄的兩項住宿大獎）由飯店同仁直接與您聯繫安排，所以不會發送優惠券。只要您已留下聯絡資料，我們會盡快與您聯繫。
-</a:t>
-            </a:r>
-            <a:r>
-              <a:rPr lang="en-US" sz="900" dirty="0">
-                <a:solidFill>
-                  <a:srgbClr val="6E6A63"/>
-                </a:solidFill>
-                <a:latin typeface="Microsoft JhengHei" pitchFamily="34" charset="0"/>
-                <a:ea typeface="Microsoft JhengHei" pitchFamily="34" charset="-122"/>
-                <a:cs typeface="Microsoft JhengHei" pitchFamily="34" charset="-120"/>
-              </a:rPr>
-              <a:t>Some prizes — all Taipei prizes and two Kaohsiung room stays — are arranged directly by our colleagues, so no coupon is issued. We'll be in touch shortly.</a:t>
-            </a:r>
-            <a:endParaRPr lang="en-US" sz="1050" dirty="0"/>
+            <a:pPr indent="0" marL="0">
+              <a:lnSpc>
+                <a:spcPts val="1500"/>
+              </a:lnSpc>
+              <a:buNone/>
+            </a:pPr>
+            <a:r>
+              <a:rPr lang="en-US" sz="950" dirty="0">
+                <a:solidFill>
+                  <a:srgbClr val="9A3B3B"/>
+                </a:solidFill>
+                <a:latin typeface="Microsoft JhengHei" pitchFamily="34" charset="0"/>
+                <a:ea typeface="Microsoft JhengHei" pitchFamily="34" charset="-122"/>
+                <a:cs typeface="Microsoft JhengHei" pitchFamily="34" charset="-120"/>
+              </a:rPr>
+              <a:t>　　 Taipei prizes and any room-stay prize are never redeemed at the counter.</a:t>
+            </a:r>
+            <a:endParaRPr lang="en-US" sz="1200" dirty="0"/>
           </a:p>
         </p:txBody>
       </p:sp>
@@ -13298,319 +14917,4 @@
     </a:ext>
   </a:extLst>
 </a:theme>
-</file>
-
-<file path=ppt/theme/theme2.xml><?xml version="1.0" encoding="utf-8"?>
-<a:theme xmlns:a="http://schemas.openxmlformats.org/drawingml/2006/main" name="Office 佈景主題">
-  <a:themeElements>
-    <a:clrScheme name="Office">
-      <a:dk1>
-        <a:sysClr val="windowText" lastClr="000000"/>
-      </a:dk1>
-      <a:lt1>
-        <a:sysClr val="window" lastClr="FFFFFF"/>
-      </a:lt1>
-      <a:dk2>
-        <a:srgbClr val="0E2841"/>
-      </a:dk2>
-      <a:lt2>
-        <a:srgbClr val="E8E8E8"/>
-      </a:lt2>
-      <a:accent1>
-        <a:srgbClr val="156082"/>
-      </a:accent1>
-      <a:accent2>
-        <a:srgbClr val="E97132"/>
-      </a:accent2>
-      <a:accent3>
-        <a:srgbClr val="196B24"/>
-      </a:accent3>
-      <a:accent4>
-        <a:srgbClr val="0F9ED5"/>
-      </a:accent4>
-      <a:accent5>
-        <a:srgbClr val="A02B93"/>
-      </a:accent5>
-      <a:accent6>
-        <a:srgbClr val="4EA72E"/>
-      </a:accent6>
-      <a:hlink>
-        <a:srgbClr val="467886"/>
-      </a:hlink>
-      <a:folHlink>
-        <a:srgbClr val="96607D"/>
-      </a:folHlink>
-    </a:clrScheme>
-    <a:fontScheme name="Office">
-      <a:majorFont>
-        <a:latin typeface="Aptos Display" panose="02110004020202020204"/>
-        <a:ea typeface=""/>
-        <a:cs typeface=""/>
-        <a:font script="Jpan" typeface="游ゴシック Light"/>
-        <a:font script="Hang" typeface="맑은 고딕"/>
-        <a:font script="Hans" typeface="等线 Light"/>
-        <a:font script="Hant" typeface="新細明體"/>
-        <a:font script="Arab" typeface="Times New Roman"/>
-        <a:font script="Hebr" typeface="Times New Roman"/>
-        <a:font script="Thai" typeface="Angsana New"/>
-        <a:font script="Ethi" typeface="Nyala"/>
-        <a:font script="Beng" typeface="Vrinda"/>
-        <a:font script="Gujr" typeface="Shruti"/>
-        <a:font script="Khmr" typeface="MoolBoran"/>
-        <a:font script="Knda" typeface="Tunga"/>
-        <a:font script="Guru" typeface="Raavi"/>
-        <a:font script="Cans" typeface="Euphemia"/>
-        <a:font script="Cher" typeface="Plantagenet Cherokee"/>
-        <a:font script="Yiii" typeface="Microsoft Yi Baiti"/>
-        <a:font script="Tibt" typeface="Microsoft Himalaya"/>
-        <a:font script="Thaa" typeface="MV Boli"/>
-        <a:font script="Deva" typeface="Mangal"/>
-        <a:font script="Telu" typeface="Gautami"/>
-        <a:font script="Taml" typeface="Latha"/>
-        <a:font script="Syrc" typeface="Estrangelo Edessa"/>
-        <a:font script="Orya" typeface="Kalinga"/>
-        <a:font script="Mlym" typeface="Kartika"/>
-        <a:font script="Laoo" typeface="DokChampa"/>
-        <a:font script="Sinh" typeface="Iskoola Pota"/>
-        <a:font script="Mong" typeface="Mongolian Baiti"/>
-        <a:font script="Viet" typeface="Times New Roman"/>
-        <a:font script="Uigh" typeface="Microsoft Uighur"/>
-        <a:font script="Geor" typeface="Sylfaen"/>
-        <a:font script="Armn" typeface="Arial"/>
-        <a:font script="Bugi" typeface="Leelawadee UI"/>
-        <a:font script="Bopo" typeface="Microsoft JhengHei"/>
-        <a:font script="Java" typeface="Javanese Text"/>
-        <a:font script="Lisu" typeface="Segoe UI"/>
-        <a:font script="Mymr" typeface="Myanmar Text"/>
-        <a:font script="Nkoo" typeface="Ebrima"/>
-        <a:font script="Olck" typeface="Nirmala UI"/>
-        <a:font script="Osma" typeface="Ebrima"/>
-        <a:font script="Phag" typeface="Phagspa"/>
-        <a:font script="Syrn" typeface="Estrangelo Edessa"/>
-        <a:font script="Syrj" typeface="Estrangelo Edessa"/>
-        <a:font script="Syre" typeface="Estrangelo Edessa"/>
-        <a:font script="Sora" typeface="Nirmala UI"/>
-        <a:font script="Tale" typeface="Microsoft Tai Le"/>
-        <a:font script="Talu" typeface="Microsoft New Tai Lue"/>
-        <a:font script="Tfng" typeface="Ebrima"/>
-      </a:majorFont>
-      <a:minorFont>
-        <a:latin typeface="Aptos" panose="02110004020202020204"/>
-        <a:ea typeface=""/>
-        <a:cs typeface=""/>
-        <a:font script="Jpan" typeface="游ゴシック"/>
-        <a:font script="Hang" typeface="맑은 고딕"/>
-        <a:font script="Hans" typeface="等线"/>
-        <a:font script="Hant" typeface="新細明體"/>
-        <a:font script="Arab" typeface="Arial"/>
-        <a:font script="Hebr" typeface="Arial"/>
-        <a:font script="Thai" typeface="Cordia New"/>
-        <a:font script="Ethi" typeface="Nyala"/>
-        <a:font script="Beng" typeface="Vrinda"/>
-        <a:font script="Gujr" typeface="Shruti"/>
-        <a:font script="Khmr" typeface="DaunPenh"/>
-        <a:font script="Knda" typeface="Tunga"/>
-        <a:font script="Guru" typeface="Raavi"/>
-        <a:font script="Cans" typeface="Euphemia"/>
-        <a:font script="Cher" typeface="Plantagenet Cherokee"/>
-        <a:font script="Yiii" typeface="Microsoft Yi Baiti"/>
-        <a:font script="Tibt" typeface="Microsoft Himalaya"/>
-        <a:font script="Thaa" typeface="MV Boli"/>
-        <a:font script="Deva" typeface="Mangal"/>
-        <a:font script="Telu" typeface="Gautami"/>
-        <a:font script="Taml" typeface="Latha"/>
-        <a:font script="Syrc" typeface="Estrangelo Edessa"/>
-        <a:font script="Orya" typeface="Kalinga"/>
-        <a:font script="Mlym" typeface="Kartika"/>
-        <a:font script="Laoo" typeface="DokChampa"/>
-        <a:font script="Sinh" typeface="Iskoola Pota"/>
-        <a:font script="Mong" typeface="Mongolian Baiti"/>
-        <a:font script="Viet" typeface="Arial"/>
-        <a:font script="Uigh" typeface="Microsoft Uighur"/>
-        <a:font script="Geor" typeface="Sylfaen"/>
-        <a:font script="Armn" typeface="Arial"/>
-        <a:font script="Bugi" typeface="Leelawadee UI"/>
-        <a:font script="Bopo" typeface="Microsoft JhengHei"/>
-        <a:font script="Java" typeface="Javanese Text"/>
-        <a:font script="Lisu" typeface="Segoe UI"/>
-        <a:font script="Mymr" typeface="Myanmar Text"/>
-        <a:font script="Nkoo" typeface="Ebrima"/>
-        <a:font script="Olck" typeface="Nirmala UI"/>
-        <a:font script="Osma" typeface="Ebrima"/>
-        <a:font script="Phag" typeface="Phagspa"/>
-        <a:font script="Syrn" typeface="Estrangelo Edessa"/>
-        <a:font script="Syrj" typeface="Estrangelo Edessa"/>
-        <a:font script="Syre" typeface="Estrangelo Edessa"/>
-        <a:font script="Sora" typeface="Nirmala UI"/>
-        <a:font script="Tale" typeface="Microsoft Tai Le"/>
-        <a:font script="Talu" typeface="Microsoft New Tai Lue"/>
-        <a:font script="Tfng" typeface="Ebrima"/>
-      </a:minorFont>
-    </a:fontScheme>
-    <a:fmtScheme name="Office">
-      <a:fillStyleLst>
-        <a:solidFill>
-          <a:schemeClr val="phClr"/>
-        </a:solidFill>
-        <a:gradFill rotWithShape="1">
-          <a:gsLst>
-            <a:gs pos="0">
-              <a:schemeClr val="phClr">
-                <a:lumMod val="110000"/>
-                <a:satMod val="105000"/>
-                <a:tint val="67000"/>
-              </a:schemeClr>
-            </a:gs>
-            <a:gs pos="50000">
-              <a:schemeClr val="phClr">
-                <a:lumMod val="105000"/>
-                <a:satMod val="103000"/>
-                <a:tint val="73000"/>
-              </a:schemeClr>
-            </a:gs>
-            <a:gs pos="100000">
-              <a:schemeClr val="phClr">
-                <a:lumMod val="105000"/>
-                <a:satMod val="109000"/>
-                <a:tint val="81000"/>
-              </a:schemeClr>
-            </a:gs>
-          </a:gsLst>
-          <a:lin ang="5400000" scaled="0"/>
-        </a:gradFill>
-        <a:gradFill rotWithShape="1">
-          <a:gsLst>
-            <a:gs pos="0">
-              <a:schemeClr val="phClr">
-                <a:satMod val="103000"/>
-                <a:lumMod val="102000"/>
-                <a:tint val="94000"/>
-              </a:schemeClr>
-            </a:gs>
-            <a:gs pos="50000">
-              <a:schemeClr val="phClr">
-                <a:satMod val="110000"/>
-                <a:lumMod val="100000"/>
-                <a:shade val="100000"/>
-              </a:schemeClr>
-            </a:gs>
-            <a:gs pos="100000">
-              <a:schemeClr val="phClr">
-                <a:lumMod val="99000"/>
-                <a:satMod val="120000"/>
-                <a:shade val="78000"/>
-              </a:schemeClr>
-            </a:gs>
-          </a:gsLst>
-          <a:lin ang="5400000" scaled="0"/>
-        </a:gradFill>
-      </a:fillStyleLst>
-      <a:lnStyleLst>
-        <a:ln w="12700" cap="flat" cmpd="sng" algn="ctr">
-          <a:solidFill>
-            <a:schemeClr val="phClr"/>
-          </a:solidFill>
-          <a:prstDash val="solid"/>
-          <a:miter lim="800000"/>
-        </a:ln>
-        <a:ln w="19050" cap="flat" cmpd="sng" algn="ctr">
-          <a:solidFill>
-            <a:schemeClr val="phClr"/>
-          </a:solidFill>
-          <a:prstDash val="solid"/>
-          <a:miter lim="800000"/>
-        </a:ln>
-        <a:ln w="25400" cap="flat" cmpd="sng" algn="ctr">
-          <a:solidFill>
-            <a:schemeClr val="phClr"/>
-          </a:solidFill>
-          <a:prstDash val="solid"/>
-          <a:miter lim="800000"/>
-        </a:ln>
-      </a:lnStyleLst>
-      <a:effectStyleLst>
-        <a:effectStyle>
-          <a:effectLst/>
-        </a:effectStyle>
-        <a:effectStyle>
-          <a:effectLst/>
-        </a:effectStyle>
-        <a:effectStyle>
-          <a:effectLst>
-            <a:outerShdw blurRad="57150" dist="19050" dir="5400000" algn="ctr" rotWithShape="0">
-              <a:srgbClr val="000000">
-                <a:alpha val="63000"/>
-              </a:srgbClr>
-            </a:outerShdw>
-          </a:effectLst>
-        </a:effectStyle>
-      </a:effectStyleLst>
-      <a:bgFillStyleLst>
-        <a:solidFill>
-          <a:schemeClr val="phClr"/>
-        </a:solidFill>
-        <a:solidFill>
-          <a:schemeClr val="phClr">
-            <a:tint val="95000"/>
-            <a:satMod val="170000"/>
-          </a:schemeClr>
-        </a:solidFill>
-        <a:gradFill rotWithShape="1">
-          <a:gsLst>
-            <a:gs pos="0">
-              <a:schemeClr val="phClr">
-                <a:tint val="93000"/>
-                <a:satMod val="150000"/>
-                <a:shade val="98000"/>
-                <a:lumMod val="102000"/>
-              </a:schemeClr>
-            </a:gs>
-            <a:gs pos="50000">
-              <a:schemeClr val="phClr">
-                <a:tint val="98000"/>
-                <a:satMod val="130000"/>
-                <a:shade val="90000"/>
-                <a:lumMod val="103000"/>
-              </a:schemeClr>
-            </a:gs>
-            <a:gs pos="100000">
-              <a:schemeClr val="phClr">
-                <a:shade val="63000"/>
-                <a:satMod val="120000"/>
-              </a:schemeClr>
-            </a:gs>
-          </a:gsLst>
-          <a:lin ang="5400000" scaled="0"/>
-        </a:gradFill>
-      </a:bgFillStyleLst>
-    </a:fmtScheme>
-  </a:themeElements>
-  <a:objectDefaults>
-    <a:lnDef>
-      <a:spPr/>
-      <a:bodyPr/>
-      <a:lstStyle/>
-      <a:style>
-        <a:lnRef idx="2">
-          <a:schemeClr val="accent1"/>
-        </a:lnRef>
-        <a:fillRef idx="0">
-          <a:schemeClr val="accent1"/>
-        </a:fillRef>
-        <a:effectRef idx="1">
-          <a:schemeClr val="accent1"/>
-        </a:effectRef>
-        <a:fontRef idx="minor">
-          <a:schemeClr val="tx1"/>
-        </a:fontRef>
-      </a:style>
-    </a:lnDef>
-  </a:objectDefaults>
-  <a:extraClrSchemeLst/>
-  <a:extLst>
-    <a:ext uri="{05A4C25C-085E-4340-85A3-A5531E510DB2}">
-      <thm15:themeFamily xmlns:thm15="http://schemas.microsoft.com/office/thememl/2012/main" name="Office Theme" id="{2E142A2C-CD16-42D6-873A-C26D2A0506FA}" vid="{1BDDFF52-6CD6-40A5-AB3C-68EB2F1E4D0A}"/>
-    </a:ext>
-  </a:extLst>
-</a:theme>
 </file>
--- a/docs/洲遊幣Lite_員工手冊_一般版_雙語.pptx
+++ b/docs/洲遊幣Lite_員工手冊_一般版_雙語.pptx
@@ -3607,7 +3607,7 @@
                 <a:ea typeface="Microsoft JhengHei" pitchFamily="34" charset="-122"/>
                 <a:cs typeface="Microsoft JhengHei" pitchFamily="34" charset="-120"/>
               </a:rPr>
-              <a:t>我抽到「銘謝惠顧」，洲遊幣還被扣掉了？
+              <a:t>為什麼我一直抽到餐飲 85 折？
 </a:t>
             </a:r>
             <a:pPr indent="0" marL="0">
@@ -3625,7 +3625,7 @@
                 <a:ea typeface="Microsoft JhengHei" pitchFamily="34" charset="-122"/>
                 <a:cs typeface="Microsoft JhengHei" pitchFamily="34" charset="-120"/>
               </a:rPr>
-              <a:t>　  I got nothing, and my coins were still deducted?</a:t>
+              <a:t>　  Why do I keep getting the 15% dining discount?</a:t>
             </a:r>
             <a:endParaRPr lang="en-US" sz="1100" dirty="0"/>
           </a:p>
@@ -3667,7 +3667,7 @@
                 <a:ea typeface="Microsoft JhengHei" pitchFamily="34" charset="-122"/>
                 <a:cs typeface="Microsoft JhengHei" pitchFamily="34" charset="-120"/>
               </a:rPr>
-              <a:t>抽獎每一次都會扣除洲遊幣，沒有中獎也一樣。建議您改抽三等獎，目前三等獎一定會中獎。
+              <a:t>本活動每次抽獎都一定會中獎，餐飲 85 折是保底獎項，其他獎品則有名額限制，發完為止。
 </a:t>
             </a:r>
             <a:pPr indent="0" marL="0">
@@ -3685,7 +3685,7 @@
                 <a:ea typeface="Microsoft JhengHei" pitchFamily="34" charset="-122"/>
                 <a:cs typeface="Microsoft JhengHei" pitchFamily="34" charset="-120"/>
               </a:rPr>
-              <a:t>Coins are deducted on every spin, whether or not a prize is won. We suggest trying the Third Prize tier — it currently always awards a prize.</a:t>
+              <a:t>Every spin wins something. The 15% dining discount is the guaranteed baseline; other prizes are limited and awarded while stocks last.</a:t>
             </a:r>
             <a:endParaRPr lang="en-US" sz="1050" dirty="0"/>
           </a:p>
@@ -3708,11 +3708,11 @@
             </a:avLst>
           </a:prstGeom>
           <a:solidFill>
-            <a:srgbClr val="FBF1DC"/>
+            <a:srgbClr val="E8F3EC"/>
           </a:solidFill>
           <a:ln w="9525">
             <a:solidFill>
-              <a:srgbClr val="9C6212"/>
+              <a:srgbClr val="1F6B47"/>
             </a:solidFill>
             <a:prstDash val="solid"/>
           </a:ln>
@@ -3748,7 +3748,7 @@
             <a:r>
               <a:rPr lang="en-US" sz="1200" dirty="0">
                 <a:solidFill>
-                  <a:srgbClr val="9C6212"/>
+                  <a:srgbClr val="1F6B47"/>
                 </a:solidFill>
                 <a:latin typeface="Microsoft JhengHei" pitchFamily="34" charset="0"/>
                 <a:ea typeface="Microsoft JhengHei" pitchFamily="34" charset="-122"/>
@@ -3765,13 +3765,13 @@
             <a:r>
               <a:rPr lang="en-US" sz="1150" b="1" dirty="0">
                 <a:solidFill>
-                  <a:srgbClr val="9C6212"/>
-                </a:solidFill>
-                <a:latin typeface="Microsoft JhengHei" pitchFamily="34" charset="0"/>
-                <a:ea typeface="Microsoft JhengHei" pitchFamily="34" charset="-122"/>
-                <a:cs typeface="Microsoft JhengHei" pitchFamily="34" charset="-120"/>
-              </a:rPr>
-              <a:t>不要說「不會扣」——  現在確實會扣。請直接引導客人改抽三等獎。
+                  <a:srgbClr val="1F6B47"/>
+                </a:solidFill>
+                <a:latin typeface="Microsoft JhengHei" pitchFamily="34" charset="0"/>
+                <a:ea typeface="Microsoft JhengHei" pitchFamily="34" charset="-122"/>
+                <a:cs typeface="Microsoft JhengHei" pitchFamily="34" charset="-120"/>
+              </a:rPr>
+              <a:t>重點講「每抽必中，最少也有 85 折」—— 不要說「沒中獎」，現在沒有這種結果。
 </a:t>
             </a:r>
             <a:pPr indent="0" marL="0">
@@ -3783,13 +3783,13 @@
             <a:r>
               <a:rPr lang="en-US" sz="950" dirty="0">
                 <a:solidFill>
-                  <a:srgbClr val="9C6212"/>
-                </a:solidFill>
-                <a:latin typeface="Microsoft JhengHei" pitchFamily="34" charset="0"/>
-                <a:ea typeface="Microsoft JhengHei" pitchFamily="34" charset="-122"/>
-                <a:cs typeface="Microsoft JhengHei" pitchFamily="34" charset="-120"/>
-              </a:rPr>
-              <a:t>　　 Never say coins are not deducted — they are. Redirect the guest to the Third Prize tier instead.</a:t>
+                  <a:srgbClr val="1F6B47"/>
+                </a:solidFill>
+                <a:latin typeface="Microsoft JhengHei" pitchFamily="34" charset="0"/>
+                <a:ea typeface="Microsoft JhengHei" pitchFamily="34" charset="-122"/>
+                <a:cs typeface="Microsoft JhengHei" pitchFamily="34" charset="-120"/>
+              </a:rPr>
+              <a:t>　　 Emphasise that every spin wins something. There is no longer a "no prize" outcome.</a:t>
             </a:r>
             <a:endParaRPr lang="en-US" sz="1200" dirty="0"/>
           </a:p>
@@ -6669,7 +6669,7 @@
             </a:avLst>
           </a:prstGeom>
           <a:solidFill>
-            <a:srgbClr val="FBF1DC"/>
+            <a:srgbClr val="E8F3EC"/>
           </a:solidFill>
           <a:ln/>
         </p:spPr>
@@ -6707,7 +6707,7 @@
                 <a:ea typeface="Microsoft JhengHei" pitchFamily="34" charset="-122"/>
                 <a:cs typeface="Microsoft JhengHei" pitchFamily="34" charset="-120"/>
               </a:rPr>
-              <a:t>🪙</a:t>
+              <a:t>🎁</a:t>
             </a:r>
             <a:endParaRPr lang="en-US" sz="1500" dirty="0"/>
           </a:p>
@@ -6740,13 +6740,13 @@
             <a:r>
               <a:rPr lang="en-US" sz="1400" b="1" dirty="0">
                 <a:solidFill>
-                  <a:srgbClr val="9C6212"/>
-                </a:solidFill>
-                <a:latin typeface="Microsoft JhengHei" pitchFamily="34" charset="0"/>
-                <a:ea typeface="Microsoft JhengHei" pitchFamily="34" charset="-122"/>
-                <a:cs typeface="Microsoft JhengHei" pitchFamily="34" charset="-120"/>
-              </a:rPr>
-              <a:t>沒中獎也扣幣　</a:t>
+                  <a:srgbClr val="1F6B47"/>
+                </a:solidFill>
+                <a:latin typeface="Microsoft JhengHei" pitchFamily="34" charset="0"/>
+                <a:ea typeface="Microsoft JhengHei" pitchFamily="34" charset="-122"/>
+                <a:cs typeface="Microsoft JhengHei" pitchFamily="34" charset="-120"/>
+              </a:rPr>
+              <a:t>每抽必中　</a:t>
             </a:r>
             <a:pPr indent="0" marL="0">
               <a:buNone/>
@@ -6754,13 +6754,13 @@
             <a:r>
               <a:rPr lang="en-US" sz="900" dirty="0">
                 <a:solidFill>
-                  <a:srgbClr val="9C6212"/>
-                </a:solidFill>
-                <a:latin typeface="Microsoft JhengHei" pitchFamily="34" charset="0"/>
-                <a:ea typeface="Microsoft JhengHei" pitchFamily="34" charset="-122"/>
-                <a:cs typeface="Microsoft JhengHei" pitchFamily="34" charset="-120"/>
-              </a:rPr>
-              <a:t>Coins Always Deducted</a:t>
+                  <a:srgbClr val="1F6B47"/>
+                </a:solidFill>
+                <a:latin typeface="Microsoft JhengHei" pitchFamily="34" charset="0"/>
+                <a:ea typeface="Microsoft JhengHei" pitchFamily="34" charset="-122"/>
+                <a:cs typeface="Microsoft JhengHei" pitchFamily="34" charset="-120"/>
+              </a:rPr>
+              <a:t>Every Spin Wins</a:t>
             </a:r>
             <a:endParaRPr lang="en-US" sz="1400" dirty="0"/>
           </a:p>
@@ -6796,14 +6796,14 @@
             <a:r>
               <a:rPr lang="en-US" sz="1050" dirty="0">
                 <a:solidFill>
-                  <a:srgbClr val="9C6212"/>
-                </a:solidFill>
-                <a:latin typeface="Microsoft JhengHei" pitchFamily="34" charset="0"/>
-                <a:ea typeface="Microsoft JhengHei" pitchFamily="34" charset="-122"/>
-                <a:cs typeface="Microsoft JhengHei" pitchFamily="34" charset="-120"/>
-              </a:rPr>
-              <a:t>每抽一次都扣，沒中獎也扣
-請引導客人改抽三等獎
+                  <a:srgbClr val="1F6B47"/>
+                </a:solidFill>
+                <a:latin typeface="Microsoft JhengHei" pitchFamily="34" charset="0"/>
+                <a:ea typeface="Microsoft JhengHei" pitchFamily="34" charset="-122"/>
+                <a:cs typeface="Microsoft JhengHei" pitchFamily="34" charset="-120"/>
+              </a:rPr>
+              <a:t>每次都扣洲遊幣，但一定中獎
+最少也會拿到餐飲 85 折
 </a:t>
             </a:r>
             <a:pPr indent="0" marL="0">
@@ -6815,13 +6815,13 @@
             <a:r>
               <a:rPr lang="en-US" sz="850" dirty="0">
                 <a:solidFill>
-                  <a:srgbClr val="9C6212"/>
-                </a:solidFill>
-                <a:latin typeface="Microsoft JhengHei" pitchFamily="34" charset="0"/>
-                <a:ea typeface="Microsoft JhengHei" pitchFamily="34" charset="-122"/>
-                <a:cs typeface="Microsoft JhengHei" pitchFamily="34" charset="-120"/>
-              </a:rPr>
-              <a:t>Every spin costs coins — redirect to Third Prize</a:t>
+                  <a:srgbClr val="1F6B47"/>
+                </a:solidFill>
+                <a:latin typeface="Microsoft JhengHei" pitchFamily="34" charset="0"/>
+                <a:ea typeface="Microsoft JhengHei" pitchFamily="34" charset="-122"/>
+                <a:cs typeface="Microsoft JhengHei" pitchFamily="34" charset="-120"/>
+              </a:rPr>
+              <a:t>Coins deducted, but every spin wins — min. 15% dining discount</a:t>
             </a:r>
             <a:endParaRPr lang="en-US" sz="1050" dirty="0"/>
           </a:p>
@@ -11269,7 +11269,7 @@
                 <a:ea typeface="Microsoft JhengHei" pitchFamily="34" charset="-122"/>
                 <a:cs typeface="Microsoft JhengHei" pitchFamily="34" charset="-120"/>
               </a:rPr>
-              <a:t>每抽一次都會扣洲遊幣，沒有中獎也一樣扣。這是客人最常抱怨的一點。
+              <a:t>每次抽獎都會扣洲遊幣，但一定會中獎 —— 最少也會拿到餐飲 85 折優惠。
 </a:t>
             </a:r>
             <a:pPr indent="0" marL="0">
@@ -11287,7 +11287,7 @@
                 <a:ea typeface="Microsoft JhengHei" pitchFamily="34" charset="-122"/>
                 <a:cs typeface="Microsoft JhengHei" pitchFamily="34" charset="-120"/>
               </a:rPr>
-              <a:t>　　 Coins are deducted on every spin, including when nothing is won. This is the most common complaint.</a:t>
+              <a:t>　　 Every spin costs coins, and every spin wins something — at minimum a 15% dining discount.</a:t>
             </a:r>
             <a:endParaRPr lang="en-US" sz="1200" dirty="0"/>
           </a:p>

--- a/docs/洲遊幣Lite_員工手冊_一般版_雙語.pptx
+++ b/docs/洲遊幣Lite_員工手冊_一般版_雙語.pptx
@@ -3371,12 +3371,12 @@
         </p:nvSpPr>
         <p:spPr>
           <a:xfrm>
-            <a:off x="502920" y="1188720"/>
-            <a:ext cx="8138160" cy="1188720"/>
+            <a:off x="502920" y="1115568"/>
+            <a:ext cx="8138160" cy="1024128"/>
           </a:xfrm>
           <a:prstGeom prst="roundRect">
             <a:avLst>
-              <a:gd name="adj" fmla="val 4615"/>
+              <a:gd name="adj" fmla="val 5357"/>
             </a:avLst>
           </a:prstGeom>
           <a:solidFill>
@@ -3398,7 +3398,7 @@
         </p:nvSpPr>
         <p:spPr>
           <a:xfrm>
-            <a:off x="685800" y="1261872"/>
+            <a:off x="685800" y="1188720"/>
             <a:ext cx="7772400" cy="457200"/>
           </a:xfrm>
           <a:prstGeom prst="rect">
@@ -3475,8 +3475,8 @@
         </p:nvSpPr>
         <p:spPr>
           <a:xfrm>
-            <a:off x="685800" y="1755648"/>
-            <a:ext cx="7772400" cy="548640"/>
+            <a:off x="685800" y="1682496"/>
+            <a:ext cx="7772400" cy="384048"/>
           </a:xfrm>
           <a:prstGeom prst="rect">
             <a:avLst/>
@@ -3535,12 +3535,12 @@
         </p:nvSpPr>
         <p:spPr>
           <a:xfrm>
-            <a:off x="502920" y="2514600"/>
-            <a:ext cx="8138160" cy="1188720"/>
+            <a:off x="502920" y="2231136"/>
+            <a:ext cx="8138160" cy="1133856"/>
           </a:xfrm>
           <a:prstGeom prst="roundRect">
             <a:avLst>
-              <a:gd name="adj" fmla="val 4615"/>
+              <a:gd name="adj" fmla="val 4839"/>
             </a:avLst>
           </a:prstGeom>
           <a:solidFill>
@@ -3562,7 +3562,7 @@
         </p:nvSpPr>
         <p:spPr>
           <a:xfrm>
-            <a:off x="685800" y="2587752"/>
+            <a:off x="685800" y="2304288"/>
             <a:ext cx="7772400" cy="457200"/>
           </a:xfrm>
           <a:prstGeom prst="rect">
@@ -3639,8 +3639,8 @@
         </p:nvSpPr>
         <p:spPr>
           <a:xfrm>
-            <a:off x="685800" y="3081528"/>
-            <a:ext cx="7772400" cy="548640"/>
+            <a:off x="685800" y="2798064"/>
+            <a:ext cx="7772400" cy="493776"/>
           </a:xfrm>
           <a:prstGeom prst="rect">
             <a:avLst/>
@@ -3699,20 +3699,20 @@
         </p:nvSpPr>
         <p:spPr>
           <a:xfrm>
-            <a:off x="502920" y="3977640"/>
-            <a:ext cx="8138160" cy="640080"/>
+            <a:off x="502920" y="3456432"/>
+            <a:ext cx="8138160" cy="1207008"/>
           </a:xfrm>
           <a:prstGeom prst="roundRect">
             <a:avLst>
-              <a:gd name="adj" fmla="val 8571"/>
+              <a:gd name="adj" fmla="val 4545"/>
             </a:avLst>
           </a:prstGeom>
           <a:solidFill>
-            <a:srgbClr val="E8F3EC"/>
+            <a:srgbClr val="FFFDFA"/>
           </a:solidFill>
           <a:ln w="9525">
             <a:solidFill>
-              <a:srgbClr val="1F6B47"/>
+              <a:srgbClr val="DAD9D6"/>
             </a:solidFill>
             <a:prstDash val="solid"/>
           </a:ln>
@@ -3726,72 +3726,132 @@
         </p:nvSpPr>
         <p:spPr>
           <a:xfrm>
-            <a:off x="649224" y="4023360"/>
-            <a:ext cx="7845552" cy="548640"/>
-          </a:xfrm>
-          <a:prstGeom prst="rect">
-            <a:avLst/>
-          </a:prstGeom>
-          <a:noFill/>
-          <a:ln/>
-        </p:spPr>
-        <p:txBody>
-          <a:bodyPr wrap="square" rtlCol="0" anchor="ctr"/>
-          <a:lstStyle/>
-          <a:p>
-            <a:pPr indent="0" marL="0">
-              <a:lnSpc>
-                <a:spcPts val="1500"/>
-              </a:lnSpc>
-              <a:buNone/>
-            </a:pPr>
-            <a:r>
-              <a:rPr lang="en-US" sz="1200" dirty="0">
-                <a:solidFill>
-                  <a:srgbClr val="1F6B47"/>
-                </a:solidFill>
-                <a:latin typeface="Microsoft JhengHei" pitchFamily="34" charset="0"/>
-                <a:ea typeface="Microsoft JhengHei" pitchFamily="34" charset="-122"/>
-                <a:cs typeface="Microsoft JhengHei" pitchFamily="34" charset="-120"/>
-              </a:rPr>
-              <a:t>💬  </a:t>
-            </a:r>
-            <a:pPr indent="0" marL="0">
-              <a:lnSpc>
-                <a:spcPts val="1500"/>
-              </a:lnSpc>
-              <a:buNone/>
-            </a:pPr>
-            <a:r>
-              <a:rPr lang="en-US" sz="1150" b="1" dirty="0">
-                <a:solidFill>
-                  <a:srgbClr val="1F6B47"/>
-                </a:solidFill>
-                <a:latin typeface="Microsoft JhengHei" pitchFamily="34" charset="0"/>
-                <a:ea typeface="Microsoft JhengHei" pitchFamily="34" charset="-122"/>
-                <a:cs typeface="Microsoft JhengHei" pitchFamily="34" charset="-120"/>
-              </a:rPr>
-              <a:t>重點講「每抽必中，最少也有 85 折」—— 不要說「沒中獎」，現在沒有這種結果。
+            <a:off x="685800" y="3529584"/>
+            <a:ext cx="7772400" cy="457200"/>
+          </a:xfrm>
+          <a:prstGeom prst="rect">
+            <a:avLst/>
+          </a:prstGeom>
+          <a:noFill/>
+          <a:ln/>
+        </p:spPr>
+        <p:txBody>
+          <a:bodyPr wrap="square" rtlCol="0" anchor="ctr"/>
+          <a:lstStyle/>
+          <a:p>
+            <a:pPr indent="0" marL="0">
+              <a:lnSpc>
+                <a:spcPts val="1300"/>
+              </a:lnSpc>
+              <a:buNone/>
+            </a:pPr>
+            <a:r>
+              <a:rPr lang="en-US" sz="1100" b="1" dirty="0">
+                <a:solidFill>
+                  <a:srgbClr val="B8923E"/>
+                </a:solidFill>
+                <a:latin typeface="Microsoft JhengHei" pitchFamily="34" charset="0"/>
+                <a:ea typeface="Microsoft JhengHei" pitchFamily="34" charset="-122"/>
+                <a:cs typeface="Microsoft JhengHei" pitchFamily="34" charset="-120"/>
+              </a:rPr>
+              <a:t>Q  </a:t>
+            </a:r>
+            <a:pPr indent="0" marL="0">
+              <a:lnSpc>
+                <a:spcPts val="1300"/>
+              </a:lnSpc>
+              <a:buNone/>
+            </a:pPr>
+            <a:r>
+              <a:rPr lang="en-US" sz="1200" b="1" dirty="0">
+                <a:solidFill>
+                  <a:srgbClr val="935D08"/>
+                </a:solidFill>
+                <a:latin typeface="Microsoft JhengHei" pitchFamily="34" charset="0"/>
+                <a:ea typeface="Microsoft JhengHei" pitchFamily="34" charset="-122"/>
+                <a:cs typeface="Microsoft JhengHei" pitchFamily="34" charset="-120"/>
+              </a:rPr>
+              <a:t>獎項一覽上的獎品抽不到？我抽到的又沒列在上面？
 </a:t>
             </a:r>
             <a:pPr indent="0" marL="0">
               <a:lnSpc>
-                <a:spcPts val="1500"/>
-              </a:lnSpc>
-              <a:buNone/>
-            </a:pPr>
-            <a:r>
-              <a:rPr lang="en-US" sz="950" dirty="0">
-                <a:solidFill>
-                  <a:srgbClr val="1F6B47"/>
-                </a:solidFill>
-                <a:latin typeface="Microsoft JhengHei" pitchFamily="34" charset="0"/>
-                <a:ea typeface="Microsoft JhengHei" pitchFamily="34" charset="-122"/>
-                <a:cs typeface="Microsoft JhengHei" pitchFamily="34" charset="-120"/>
-              </a:rPr>
-              <a:t>　　 Emphasise that every spin wins something. There is no longer a "no prize" outcome.</a:t>
-            </a:r>
-            <a:endParaRPr lang="en-US" sz="1200" dirty="0"/>
+                <a:spcPts val="1300"/>
+              </a:lnSpc>
+              <a:buNone/>
+            </a:pPr>
+            <a:r>
+              <a:rPr lang="en-US" sz="900" dirty="0">
+                <a:solidFill>
+                  <a:srgbClr val="6E6A63"/>
+                </a:solidFill>
+                <a:latin typeface="Microsoft JhengHei" pitchFamily="34" charset="0"/>
+                <a:ea typeface="Microsoft JhengHei" pitchFamily="34" charset="-122"/>
+                <a:cs typeface="Microsoft JhengHei" pitchFamily="34" charset="-120"/>
+              </a:rPr>
+              <a:t>　  I can't win what's listed — and what I won isn't on the list?</a:t>
+            </a:r>
+            <a:endParaRPr lang="en-US" sz="1100" dirty="0"/>
+          </a:p>
+        </p:txBody>
+      </p:sp>
+      <p:sp>
+        <p:nvSpPr>
+          <p:cNvPr id="15" name="Text 13"/>
+          <p:cNvSpPr/>
+          <p:nvPr/>
+        </p:nvSpPr>
+        <p:spPr>
+          <a:xfrm>
+            <a:off x="685800" y="4023360"/>
+            <a:ext cx="7772400" cy="566928"/>
+          </a:xfrm>
+          <a:prstGeom prst="rect">
+            <a:avLst/>
+          </a:prstGeom>
+          <a:noFill/>
+          <a:ln/>
+        </p:spPr>
+        <p:txBody>
+          <a:bodyPr wrap="square" rtlCol="0" anchor="ctr"/>
+          <a:lstStyle/>
+          <a:p>
+            <a:pPr indent="0" marL="0">
+              <a:lnSpc>
+                <a:spcPts val="1300"/>
+              </a:lnSpc>
+              <a:buNone/>
+            </a:pPr>
+            <a:r>
+              <a:rPr lang="en-US" sz="1050" dirty="0">
+                <a:solidFill>
+                  <a:srgbClr val="3D3935"/>
+                </a:solidFill>
+                <a:latin typeface="Microsoft JhengHei" pitchFamily="34" charset="0"/>
+                <a:ea typeface="Microsoft JhengHei" pitchFamily="34" charset="-122"/>
+                <a:cs typeface="Microsoft JhengHei" pitchFamily="34" charset="-120"/>
+              </a:rPr>
+              <a:t>獎項一覽列的是本活動的獎品種類，部分獎品已經送完；餐飲 85 折是保底獎項，不在清單上但一定拿得到。實際以抽獎結果為準。
+</a:t>
+            </a:r>
+            <a:pPr indent="0" marL="0">
+              <a:lnSpc>
+                <a:spcPts val="1300"/>
+              </a:lnSpc>
+              <a:buNone/>
+            </a:pPr>
+            <a:r>
+              <a:rPr lang="en-US" sz="900" dirty="0">
+                <a:solidFill>
+                  <a:srgbClr val="6E6A63"/>
+                </a:solidFill>
+                <a:latin typeface="Microsoft JhengHei" pitchFamily="34" charset="0"/>
+                <a:ea typeface="Microsoft JhengHei" pitchFamily="34" charset="-122"/>
+                <a:cs typeface="Microsoft JhengHei" pitchFamily="34" charset="-120"/>
+              </a:rPr>
+              <a:t>The list shows the prize types in this campaign; some are already fully claimed. The 15% dining discount is the guaranteed baseline and is not listed. The draw result is what counts.</a:t>
+            </a:r>
+            <a:endParaRPr lang="en-US" sz="1050" dirty="0"/>
           </a:p>
         </p:txBody>
       </p:sp>
@@ -6802,8 +6862,8 @@
                 <a:ea typeface="Microsoft JhengHei" pitchFamily="34" charset="-122"/>
                 <a:cs typeface="Microsoft JhengHei" pitchFamily="34" charset="-120"/>
               </a:rPr>
-              <a:t>每次都扣洲遊幣，但一定中獎
-最少也會拿到餐飲 85 折
+              <a:t>每次扣幣但一定中獎，最少 85 折
+85 折不在清單上；清單含已送完的獎
 </a:t>
             </a:r>
             <a:pPr indent="0" marL="0">
@@ -6821,7 +6881,7 @@
                 <a:ea typeface="Microsoft JhengHei" pitchFamily="34" charset="-122"/>
                 <a:cs typeface="Microsoft JhengHei" pitchFamily="34" charset="-120"/>
               </a:rPr>
-              <a:t>Coins deducted, but every spin wins — min. 15% dining discount</a:t>
+              <a:t>Every spin wins — min. 15% discount (unlisted); list includes sold-out items</a:t>
             </a:r>
             <a:endParaRPr lang="en-US" sz="1050" dirty="0"/>
           </a:p>
@@ -6977,8 +7037,8 @@
                 <a:ea typeface="Microsoft JhengHei" pitchFamily="34" charset="-122"/>
                 <a:cs typeface="Microsoft JhengHei" pitchFamily="34" charset="-120"/>
               </a:rPr>
-              <a:t>中獎機率 · 剩餘數量 · 其他客人的資料
-不確定就轉給主管，不要自行承諾
+              <a:t>中獎機率 · 剩餘數量 · 其他客人資料
+不確定就轉主管，不要自行承諾
 </a:t>
             </a:r>
             <a:pPr indent="0" marL="0">

--- a/docs/洲遊幣Lite_員工手冊_一般版_雙語.pptx
+++ b/docs/洲遊幣Lite_員工手冊_一般版_雙語.pptx
@@ -20,9 +20,10 @@
     <p:sldId id="268" r:id="rId14"/>
     <p:sldId id="269" r:id="rId15"/>
     <p:sldId id="270" r:id="rId16"/>
+    <p:sldId id="271" r:id="rId17"/>
   </p:sldIdLst>
   <p:notesMasterIdLst>
-    <p:notesMasterId r:id="rId17"/>
+    <p:notesMasterId r:id="rId18"/>
   </p:notesMasterIdLst>
   <p:sldSz cx="9144000" cy="5143500"/>
   <p:notesSz cx="5143500" cy="9144000"/>
@@ -1068,6 +1069,94 @@
             <a:fld id="{F7021451-1387-4CA6-816F-3879F97B5CBC}" type="slidenum">
               <a:rPr lang="en-US"/>
               <a:t>15</a:t>
+            </a:fld>
+            <a:endParaRPr lang="en-US"/>
+          </a:p>
+        </p:txBody>
+      </p:sp>
+    </p:spTree>
+    <p:extLst>
+      <p:ext uri="{BB962C8B-B14F-4D97-AF65-F5344CB8AC3E}">
+        <p14:creationId xmlns:p14="http://schemas.microsoft.com/office/powerpoint/2010/main" val="1024086991"/>
+      </p:ext>
+    </p:extLst>
+  </p:cSld>
+  <p:clrMapOvr>
+    <a:masterClrMapping/>
+  </p:clrMapOvr>
+</p:notes>
+</file>
+
+<file path=ppt/notesSlides/notesSlide16.xml><?xml version="1.0" encoding="utf-8"?>
+<p:notes xmlns:a="http://schemas.openxmlformats.org/drawingml/2006/main" xmlns:r="http://schemas.openxmlformats.org/officeDocument/2006/relationships" xmlns:p="http://schemas.openxmlformats.org/presentationml/2006/main">
+  <p:cSld>
+    <p:spTree>
+      <p:nvGrpSpPr>
+        <p:cNvPr id="1" name=""/>
+        <p:cNvGrpSpPr/>
+        <p:nvPr/>
+      </p:nvGrpSpPr>
+      <p:grpSpPr>
+        <a:xfrm>
+          <a:off x="0" y="0"/>
+          <a:ext cx="0" cy="0"/>
+          <a:chOff x="0" y="0"/>
+          <a:chExt cx="0" cy="0"/>
+        </a:xfrm>
+      </p:grpSpPr>
+      <p:sp>
+        <p:nvSpPr>
+          <p:cNvPr id="2" name="Slide Image Placeholder 1"/>
+          <p:cNvSpPr>
+            <a:spLocks noGrp="1" noRot="1" noChangeAspect="1"/>
+          </p:cNvSpPr>
+          <p:nvPr>
+            <p:ph type="sldImg"/>
+          </p:nvPr>
+        </p:nvSpPr>
+        <p:spPr/>
+      </p:sp>
+      <p:sp>
+        <p:nvSpPr>
+          <p:cNvPr id="3" name="Notes Placeholder 2"/>
+          <p:cNvSpPr>
+            <a:spLocks noGrp="1"/>
+          </p:cNvSpPr>
+          <p:nvPr>
+            <p:ph type="body" idx="1"/>
+          </p:nvPr>
+        </p:nvSpPr>
+        <p:spPr/>
+        <p:txBody>
+          <a:bodyPr/>
+          <a:lstStyle/>
+          <a:p>
+            <a:r>
+              <a:rPr lang="en-US" dirty="0"/>
+              <a:t/>
+            </a:r>
+            <a:endParaRPr lang="en-US" dirty="0"/>
+          </a:p>
+        </p:txBody>
+      </p:sp>
+      <p:sp>
+        <p:nvSpPr>
+          <p:cNvPr id="4" name="Slide Number Placeholder 3"/>
+          <p:cNvSpPr>
+            <a:spLocks noGrp="1"/>
+          </p:cNvSpPr>
+          <p:nvPr>
+            <p:ph type="sldNum" sz="quarter" idx="10"/>
+          </p:nvPr>
+        </p:nvSpPr>
+        <p:spPr/>
+        <p:txBody>
+          <a:bodyPr/>
+          <a:lstStyle/>
+          <a:p>
+            <a:fld id="{F7021451-1387-4CA6-816F-3879F97B5CBC}" type="slidenum">
+              <a:rPr lang="en-US"/>
+              <a:t>16</a:t>
             </a:fld>
             <a:endParaRPr lang="en-US"/>
           </a:p>
@@ -2520,7 +2609,7 @@
                 <a:ea typeface="Microsoft JhengHei" pitchFamily="34" charset="-122"/>
                 <a:cs typeface="Microsoft JhengHei" pitchFamily="34" charset="-120"/>
               </a:rPr>
-              <a:t>七、常見問題與標準回答（1/3）</a:t>
+              <a:t>七、常見問題與標準回答（1/4）</a:t>
             </a:r>
             <a:endParaRPr lang="en-US" sz="2200" dirty="0"/>
           </a:p>
@@ -2559,7 +2648,7 @@
                 <a:ea typeface="Microsoft JhengHei" pitchFamily="34" charset="-122"/>
                 <a:cs typeface="Microsoft JhengHei" pitchFamily="34" charset="-120"/>
               </a:rPr>
-              <a:t>FAQ &amp; Suggested Replies (1 of 3)</a:t>
+              <a:t>FAQ &amp; Suggested Replies (1 of 4)</a:t>
             </a:r>
             <a:endParaRPr lang="en-US" sz="1150" dirty="0"/>
           </a:p>
@@ -3220,7 +3309,7 @@
                 <a:ea typeface="Microsoft JhengHei" pitchFamily="34" charset="-122"/>
                 <a:cs typeface="Microsoft JhengHei" pitchFamily="34" charset="-120"/>
               </a:rPr>
-              <a:t>七、常見問題與標準回答（2/3）</a:t>
+              <a:t>七、常見問題與標準回答（2/4）</a:t>
             </a:r>
             <a:endParaRPr lang="en-US" sz="2200" dirty="0"/>
           </a:p>
@@ -3259,7 +3348,7 @@
                 <a:ea typeface="Microsoft JhengHei" pitchFamily="34" charset="-122"/>
                 <a:cs typeface="Microsoft JhengHei" pitchFamily="34" charset="-120"/>
               </a:rPr>
-              <a:t>FAQ &amp; Suggested Replies (2 of 3)</a:t>
+              <a:t>FAQ &amp; Suggested Replies (2 of 4)</a:t>
             </a:r>
             <a:endParaRPr lang="en-US" sz="1150" dirty="0"/>
           </a:p>
@@ -3920,7 +4009,7 @@
                 <a:ea typeface="Microsoft JhengHei" pitchFamily="34" charset="-122"/>
                 <a:cs typeface="Microsoft JhengHei" pitchFamily="34" charset="-120"/>
               </a:rPr>
-              <a:t>七、常見問題與標準回答（3/3）</a:t>
+              <a:t>七、常見問題與標準回答（3/4）</a:t>
             </a:r>
             <a:endParaRPr lang="en-US" sz="2200" dirty="0"/>
           </a:p>
@@ -3959,7 +4048,7 @@
                 <a:ea typeface="Microsoft JhengHei" pitchFamily="34" charset="-122"/>
                 <a:cs typeface="Microsoft JhengHei" pitchFamily="34" charset="-120"/>
               </a:rPr>
-              <a:t>FAQ &amp; Suggested Replies (3 of 3)</a:t>
+              <a:t>FAQ &amp; Suggested Replies (3 of 4)</a:t>
             </a:r>
             <a:endParaRPr lang="en-US" sz="1150" dirty="0"/>
           </a:p>
@@ -4560,7 +4649,7 @@
                 <a:ea typeface="Microsoft JhengHei" pitchFamily="34" charset="-122"/>
                 <a:cs typeface="Microsoft JhengHei" pitchFamily="34" charset="-120"/>
               </a:rPr>
-              <a:t>八、不可以對客人說的事</a:t>
+              <a:t>七、常見問題與標準回答（4/4）</a:t>
             </a:r>
             <a:endParaRPr lang="en-US" sz="2200" dirty="0"/>
           </a:p>
@@ -4599,7 +4688,7 @@
                 <a:ea typeface="Microsoft JhengHei" pitchFamily="34" charset="-122"/>
                 <a:cs typeface="Microsoft JhengHei" pitchFamily="34" charset="-120"/>
               </a:rPr>
-              <a:t>What Not to Disclose to Guests</a:t>
+              <a:t>FAQ &amp; Suggested Replies (4 of 4)</a:t>
             </a:r>
             <a:endParaRPr lang="en-US" sz="1150" dirty="0"/>
           </a:p>
@@ -4711,625 +4800,20 @@
         </p:nvSpPr>
         <p:spPr>
           <a:xfrm>
-            <a:off x="502920" y="1188720"/>
-            <a:ext cx="8138160" cy="548640"/>
+            <a:off x="502920" y="1115568"/>
+            <a:ext cx="8138160" cy="1133856"/>
           </a:xfrm>
           <a:prstGeom prst="roundRect">
             <a:avLst>
-              <a:gd name="adj" fmla="val 8333"/>
+              <a:gd name="adj" fmla="val 4839"/>
             </a:avLst>
           </a:prstGeom>
           <a:solidFill>
-            <a:srgbClr val="FBEDED"/>
-          </a:solidFill>
-          <a:ln/>
-        </p:spPr>
-      </p:sp>
-      <p:sp>
-        <p:nvSpPr>
-          <p:cNvPr id="8" name="Text 6"/>
-          <p:cNvSpPr/>
-          <p:nvPr/>
-        </p:nvSpPr>
-        <p:spPr>
-          <a:xfrm>
-            <a:off x="685800" y="1225296"/>
-            <a:ext cx="4663440" cy="475488"/>
-          </a:xfrm>
-          <a:prstGeom prst="rect">
-            <a:avLst/>
-          </a:prstGeom>
-          <a:noFill/>
-          <a:ln/>
-        </p:spPr>
-        <p:txBody>
-          <a:bodyPr wrap="square" rtlCol="0" anchor="ctr"/>
-          <a:lstStyle/>
-          <a:p>
-            <a:pPr indent="0" marL="0">
-              <a:lnSpc>
-                <a:spcPts val="1300"/>
-              </a:lnSpc>
-              <a:buNone/>
-            </a:pPr>
-            <a:r>
-              <a:rPr lang="en-US" sz="1150" b="1" dirty="0">
-                <a:solidFill>
-                  <a:srgbClr val="9A3B3B"/>
-                </a:solidFill>
-                <a:latin typeface="Microsoft JhengHei" pitchFamily="34" charset="0"/>
-                <a:ea typeface="Microsoft JhengHei" pitchFamily="34" charset="-122"/>
-                <a:cs typeface="Microsoft JhengHei" pitchFamily="34" charset="-120"/>
-              </a:rPr>
-              <a:t>✕  各獎項的中獎機率
-</a:t>
-            </a:r>
-            <a:pPr indent="0" marL="0">
-              <a:lnSpc>
-                <a:spcPts val="1300"/>
-              </a:lnSpc>
-              <a:buNone/>
-            </a:pPr>
-            <a:r>
-              <a:rPr lang="en-US" sz="850" dirty="0">
-                <a:solidFill>
-                  <a:srgbClr val="9A3B3B"/>
-                </a:solidFill>
-                <a:latin typeface="Microsoft JhengHei" pitchFamily="34" charset="0"/>
-                <a:ea typeface="Microsoft JhengHei" pitchFamily="34" charset="-122"/>
-                <a:cs typeface="Microsoft JhengHei" pitchFamily="34" charset="-120"/>
-              </a:rPr>
-              <a:t>　  Prize win probabilities</a:t>
-            </a:r>
-            <a:endParaRPr lang="en-US" sz="1150" dirty="0"/>
-          </a:p>
-        </p:txBody>
-      </p:sp>
-      <p:sp>
-        <p:nvSpPr>
-          <p:cNvPr id="9" name="Text 7"/>
-          <p:cNvSpPr/>
-          <p:nvPr/>
-        </p:nvSpPr>
-        <p:spPr>
-          <a:xfrm>
-            <a:off x="5440680" y="1225296"/>
-            <a:ext cx="3063240" cy="475488"/>
-          </a:xfrm>
-          <a:prstGeom prst="rect">
-            <a:avLst/>
-          </a:prstGeom>
-          <a:noFill/>
-          <a:ln/>
-        </p:spPr>
-        <p:txBody>
-          <a:bodyPr wrap="square" rtlCol="0" anchor="ctr"/>
-          <a:lstStyle/>
-          <a:p>
-            <a:pPr indent="0" marL="0">
-              <a:buNone/>
-            </a:pPr>
-            <a:r>
-              <a:rPr lang="en-US" sz="950" dirty="0">
-                <a:solidFill>
-                  <a:srgbClr val="3D3935"/>
-                </a:solidFill>
-                <a:latin typeface="Microsoft JhengHei" pitchFamily="34" charset="0"/>
-                <a:ea typeface="Microsoft JhengHei" pitchFamily="34" charset="-122"/>
-                <a:cs typeface="Microsoft JhengHei" pitchFamily="34" charset="-120"/>
-              </a:rPr>
-              <a:t>屬內部設定，公開會引發爭議與質疑</a:t>
-            </a:r>
-            <a:endParaRPr lang="en-US" sz="950" dirty="0"/>
-          </a:p>
-        </p:txBody>
-      </p:sp>
-      <p:sp>
-        <p:nvSpPr>
-          <p:cNvPr id="10" name="Shape 8"/>
-          <p:cNvSpPr/>
-          <p:nvPr/>
-        </p:nvSpPr>
-        <p:spPr>
-          <a:xfrm>
-            <a:off x="502920" y="1810512"/>
-            <a:ext cx="8138160" cy="548640"/>
-          </a:xfrm>
-          <a:prstGeom prst="roundRect">
-            <a:avLst>
-              <a:gd name="adj" fmla="val 8333"/>
-            </a:avLst>
-          </a:prstGeom>
-          <a:solidFill>
-            <a:srgbClr val="FBEDED"/>
-          </a:solidFill>
-          <a:ln/>
-        </p:spPr>
-      </p:sp>
-      <p:sp>
-        <p:nvSpPr>
-          <p:cNvPr id="11" name="Text 9"/>
-          <p:cNvSpPr/>
-          <p:nvPr/>
-        </p:nvSpPr>
-        <p:spPr>
-          <a:xfrm>
-            <a:off x="685800" y="1847088"/>
-            <a:ext cx="4663440" cy="475488"/>
-          </a:xfrm>
-          <a:prstGeom prst="rect">
-            <a:avLst/>
-          </a:prstGeom>
-          <a:noFill/>
-          <a:ln/>
-        </p:spPr>
-        <p:txBody>
-          <a:bodyPr wrap="square" rtlCol="0" anchor="ctr"/>
-          <a:lstStyle/>
-          <a:p>
-            <a:pPr indent="0" marL="0">
-              <a:lnSpc>
-                <a:spcPts val="1300"/>
-              </a:lnSpc>
-              <a:buNone/>
-            </a:pPr>
-            <a:r>
-              <a:rPr lang="en-US" sz="1150" b="1" dirty="0">
-                <a:solidFill>
-                  <a:srgbClr val="9A3B3B"/>
-                </a:solidFill>
-                <a:latin typeface="Microsoft JhengHei" pitchFamily="34" charset="0"/>
-                <a:ea typeface="Microsoft JhengHei" pitchFamily="34" charset="-122"/>
-                <a:cs typeface="Microsoft JhengHei" pitchFamily="34" charset="-120"/>
-              </a:rPr>
-              <a:t>✕  每個獎品還剩幾份／已發出幾份
-</a:t>
-            </a:r>
-            <a:pPr indent="0" marL="0">
-              <a:lnSpc>
-                <a:spcPts val="1300"/>
-              </a:lnSpc>
-              <a:buNone/>
-            </a:pPr>
-            <a:r>
-              <a:rPr lang="en-US" sz="850" dirty="0">
-                <a:solidFill>
-                  <a:srgbClr val="9A3B3B"/>
-                </a:solidFill>
-                <a:latin typeface="Microsoft JhengHei" pitchFamily="34" charset="0"/>
-                <a:ea typeface="Microsoft JhengHei" pitchFamily="34" charset="-122"/>
-                <a:cs typeface="Microsoft JhengHei" pitchFamily="34" charset="-120"/>
-              </a:rPr>
-              <a:t>　  Remaining or issued prize quantities</a:t>
-            </a:r>
-            <a:endParaRPr lang="en-US" sz="1150" dirty="0"/>
-          </a:p>
-        </p:txBody>
-      </p:sp>
-      <p:sp>
-        <p:nvSpPr>
-          <p:cNvPr id="12" name="Text 10"/>
-          <p:cNvSpPr/>
-          <p:nvPr/>
-        </p:nvSpPr>
-        <p:spPr>
-          <a:xfrm>
-            <a:off x="5440680" y="1847088"/>
-            <a:ext cx="3063240" cy="475488"/>
-          </a:xfrm>
-          <a:prstGeom prst="rect">
-            <a:avLst/>
-          </a:prstGeom>
-          <a:noFill/>
-          <a:ln/>
-        </p:spPr>
-        <p:txBody>
-          <a:bodyPr wrap="square" rtlCol="0" anchor="ctr"/>
-          <a:lstStyle/>
-          <a:p>
-            <a:pPr indent="0" marL="0">
-              <a:buNone/>
-            </a:pPr>
-            <a:r>
-              <a:rPr lang="en-US" sz="950" dirty="0">
-                <a:solidFill>
-                  <a:srgbClr val="3D3935"/>
-                </a:solidFill>
-                <a:latin typeface="Microsoft JhengHei" pitchFamily="34" charset="0"/>
-                <a:ea typeface="Microsoft JhengHei" pitchFamily="34" charset="-122"/>
-                <a:cs typeface="Microsoft JhengHei" pitchFamily="34" charset="-120"/>
-              </a:rPr>
-              <a:t>同上，也可能被人為衝量</a:t>
-            </a:r>
-            <a:endParaRPr lang="en-US" sz="950" dirty="0"/>
-          </a:p>
-        </p:txBody>
-      </p:sp>
-      <p:sp>
-        <p:nvSpPr>
-          <p:cNvPr id="13" name="Shape 11"/>
-          <p:cNvSpPr/>
-          <p:nvPr/>
-        </p:nvSpPr>
-        <p:spPr>
-          <a:xfrm>
-            <a:off x="502920" y="2432304"/>
-            <a:ext cx="8138160" cy="548640"/>
-          </a:xfrm>
-          <a:prstGeom prst="roundRect">
-            <a:avLst>
-              <a:gd name="adj" fmla="val 8333"/>
-            </a:avLst>
-          </a:prstGeom>
-          <a:solidFill>
-            <a:srgbClr val="FBEDED"/>
-          </a:solidFill>
-          <a:ln/>
-        </p:spPr>
-      </p:sp>
-      <p:sp>
-        <p:nvSpPr>
-          <p:cNvPr id="14" name="Text 12"/>
-          <p:cNvSpPr/>
-          <p:nvPr/>
-        </p:nvSpPr>
-        <p:spPr>
-          <a:xfrm>
-            <a:off x="685800" y="2468880"/>
-            <a:ext cx="4663440" cy="475488"/>
-          </a:xfrm>
-          <a:prstGeom prst="rect">
-            <a:avLst/>
-          </a:prstGeom>
-          <a:noFill/>
-          <a:ln/>
-        </p:spPr>
-        <p:txBody>
-          <a:bodyPr wrap="square" rtlCol="0" anchor="ctr"/>
-          <a:lstStyle/>
-          <a:p>
-            <a:pPr indent="0" marL="0">
-              <a:lnSpc>
-                <a:spcPts val="1300"/>
-              </a:lnSpc>
-              <a:buNone/>
-            </a:pPr>
-            <a:r>
-              <a:rPr lang="en-US" sz="1150" b="1" dirty="0">
-                <a:solidFill>
-                  <a:srgbClr val="9A3B3B"/>
-                </a:solidFill>
-                <a:latin typeface="Microsoft JhengHei" pitchFamily="34" charset="0"/>
-                <a:ea typeface="Microsoft JhengHei" pitchFamily="34" charset="-122"/>
-                <a:cs typeface="Microsoft JhengHei" pitchFamily="34" charset="-120"/>
-              </a:rPr>
-              <a:t>✕  內部管理系統的存在或操作方式
-</a:t>
-            </a:r>
-            <a:pPr indent="0" marL="0">
-              <a:lnSpc>
-                <a:spcPts val="1300"/>
-              </a:lnSpc>
-              <a:buNone/>
-            </a:pPr>
-            <a:r>
-              <a:rPr lang="en-US" sz="850" dirty="0">
-                <a:solidFill>
-                  <a:srgbClr val="9A3B3B"/>
-                </a:solidFill>
-                <a:latin typeface="Microsoft JhengHei" pitchFamily="34" charset="0"/>
-                <a:ea typeface="Microsoft JhengHei" pitchFamily="34" charset="-122"/>
-                <a:cs typeface="Microsoft JhengHei" pitchFamily="34" charset="-120"/>
-              </a:rPr>
-              <a:t>　  The existence or use of internal admin systems</a:t>
-            </a:r>
-            <a:endParaRPr lang="en-US" sz="1150" dirty="0"/>
-          </a:p>
-        </p:txBody>
-      </p:sp>
-      <p:sp>
-        <p:nvSpPr>
-          <p:cNvPr id="15" name="Text 13"/>
-          <p:cNvSpPr/>
-          <p:nvPr/>
-        </p:nvSpPr>
-        <p:spPr>
-          <a:xfrm>
-            <a:off x="5440680" y="2468880"/>
-            <a:ext cx="3063240" cy="475488"/>
-          </a:xfrm>
-          <a:prstGeom prst="rect">
-            <a:avLst/>
-          </a:prstGeom>
-          <a:noFill/>
-          <a:ln/>
-        </p:spPr>
-        <p:txBody>
-          <a:bodyPr wrap="square" rtlCol="0" anchor="ctr"/>
-          <a:lstStyle/>
-          <a:p>
-            <a:pPr indent="0" marL="0">
-              <a:buNone/>
-            </a:pPr>
-            <a:r>
-              <a:rPr lang="en-US" sz="950" dirty="0">
-                <a:solidFill>
-                  <a:srgbClr val="3D3935"/>
-                </a:solidFill>
-                <a:latin typeface="Microsoft JhengHei" pitchFamily="34" charset="0"/>
-                <a:ea typeface="Microsoft JhengHei" pitchFamily="34" charset="-122"/>
-                <a:cs typeface="Microsoft JhengHei" pitchFamily="34" charset="-120"/>
-              </a:rPr>
-              <a:t>非對外資訊</a:t>
-            </a:r>
-            <a:endParaRPr lang="en-US" sz="950" dirty="0"/>
-          </a:p>
-        </p:txBody>
-      </p:sp>
-      <p:sp>
-        <p:nvSpPr>
-          <p:cNvPr id="16" name="Shape 14"/>
-          <p:cNvSpPr/>
-          <p:nvPr/>
-        </p:nvSpPr>
-        <p:spPr>
-          <a:xfrm>
-            <a:off x="502920" y="3054096"/>
-            <a:ext cx="8138160" cy="548640"/>
-          </a:xfrm>
-          <a:prstGeom prst="roundRect">
-            <a:avLst>
-              <a:gd name="adj" fmla="val 8333"/>
-            </a:avLst>
-          </a:prstGeom>
-          <a:solidFill>
-            <a:srgbClr val="FBEDED"/>
-          </a:solidFill>
-          <a:ln/>
-        </p:spPr>
-      </p:sp>
-      <p:sp>
-        <p:nvSpPr>
-          <p:cNvPr id="17" name="Text 15"/>
-          <p:cNvSpPr/>
-          <p:nvPr/>
-        </p:nvSpPr>
-        <p:spPr>
-          <a:xfrm>
-            <a:off x="685800" y="3090672"/>
-            <a:ext cx="4663440" cy="475488"/>
-          </a:xfrm>
-          <a:prstGeom prst="rect">
-            <a:avLst/>
-          </a:prstGeom>
-          <a:noFill/>
-          <a:ln/>
-        </p:spPr>
-        <p:txBody>
-          <a:bodyPr wrap="square" rtlCol="0" anchor="ctr"/>
-          <a:lstStyle/>
-          <a:p>
-            <a:pPr indent="0" marL="0">
-              <a:lnSpc>
-                <a:spcPts val="1300"/>
-              </a:lnSpc>
-              <a:buNone/>
-            </a:pPr>
-            <a:r>
-              <a:rPr lang="en-US" sz="1150" b="1" dirty="0">
-                <a:solidFill>
-                  <a:srgbClr val="9A3B3B"/>
-                </a:solidFill>
-                <a:latin typeface="Microsoft JhengHei" pitchFamily="34" charset="0"/>
-                <a:ea typeface="Microsoft JhengHei" pitchFamily="34" charset="-122"/>
-                <a:cs typeface="Microsoft JhengHei" pitchFamily="34" charset="-120"/>
-              </a:rPr>
-              <a:t>✕  其他中獎者的姓名／電話／中獎內容
-</a:t>
-            </a:r>
-            <a:pPr indent="0" marL="0">
-              <a:lnSpc>
-                <a:spcPts val="1300"/>
-              </a:lnSpc>
-              <a:buNone/>
-            </a:pPr>
-            <a:r>
-              <a:rPr lang="en-US" sz="850" dirty="0">
-                <a:solidFill>
-                  <a:srgbClr val="9A3B3B"/>
-                </a:solidFill>
-                <a:latin typeface="Microsoft JhengHei" pitchFamily="34" charset="0"/>
-                <a:ea typeface="Microsoft JhengHei" pitchFamily="34" charset="-122"/>
-                <a:cs typeface="Microsoft JhengHei" pitchFamily="34" charset="-120"/>
-              </a:rPr>
-              <a:t>　  Other winners' names, numbers or prizes</a:t>
-            </a:r>
-            <a:endParaRPr lang="en-US" sz="1150" dirty="0"/>
-          </a:p>
-        </p:txBody>
-      </p:sp>
-      <p:sp>
-        <p:nvSpPr>
-          <p:cNvPr id="18" name="Text 16"/>
-          <p:cNvSpPr/>
-          <p:nvPr/>
-        </p:nvSpPr>
-        <p:spPr>
-          <a:xfrm>
-            <a:off x="5440680" y="3090672"/>
-            <a:ext cx="3063240" cy="475488"/>
-          </a:xfrm>
-          <a:prstGeom prst="rect">
-            <a:avLst/>
-          </a:prstGeom>
-          <a:noFill/>
-          <a:ln/>
-        </p:spPr>
-        <p:txBody>
-          <a:bodyPr wrap="square" rtlCol="0" anchor="ctr"/>
-          <a:lstStyle/>
-          <a:p>
-            <a:pPr indent="0" marL="0">
-              <a:buNone/>
-            </a:pPr>
-            <a:r>
-              <a:rPr lang="en-US" sz="950" dirty="0">
-                <a:solidFill>
-                  <a:srgbClr val="3D3935"/>
-                </a:solidFill>
-                <a:latin typeface="Microsoft JhengHei" pitchFamily="34" charset="0"/>
-                <a:ea typeface="Microsoft JhengHei" pitchFamily="34" charset="-122"/>
-                <a:cs typeface="Microsoft JhengHei" pitchFamily="34" charset="-120"/>
-              </a:rPr>
-              <a:t>個人資料，涉及法律責任</a:t>
-            </a:r>
-            <a:endParaRPr lang="en-US" sz="950" dirty="0"/>
-          </a:p>
-        </p:txBody>
-      </p:sp>
-      <p:sp>
-        <p:nvSpPr>
-          <p:cNvPr id="19" name="Shape 17"/>
-          <p:cNvSpPr/>
-          <p:nvPr/>
-        </p:nvSpPr>
-        <p:spPr>
-          <a:xfrm>
-            <a:off x="502920" y="3675888"/>
-            <a:ext cx="8138160" cy="548640"/>
-          </a:xfrm>
-          <a:prstGeom prst="roundRect">
-            <a:avLst>
-              <a:gd name="adj" fmla="val 8333"/>
-            </a:avLst>
-          </a:prstGeom>
-          <a:solidFill>
-            <a:srgbClr val="FBEDED"/>
-          </a:solidFill>
-          <a:ln/>
-        </p:spPr>
-      </p:sp>
-      <p:sp>
-        <p:nvSpPr>
-          <p:cNvPr id="20" name="Text 18"/>
-          <p:cNvSpPr/>
-          <p:nvPr/>
-        </p:nvSpPr>
-        <p:spPr>
-          <a:xfrm>
-            <a:off x="685800" y="3712464"/>
-            <a:ext cx="4663440" cy="475488"/>
-          </a:xfrm>
-          <a:prstGeom prst="rect">
-            <a:avLst/>
-          </a:prstGeom>
-          <a:noFill/>
-          <a:ln/>
-        </p:spPr>
-        <p:txBody>
-          <a:bodyPr wrap="square" rtlCol="0" anchor="ctr"/>
-          <a:lstStyle/>
-          <a:p>
-            <a:pPr indent="0" marL="0">
-              <a:lnSpc>
-                <a:spcPts val="1300"/>
-              </a:lnSpc>
-              <a:buNone/>
-            </a:pPr>
-            <a:r>
-              <a:rPr lang="en-US" sz="1150" b="1" dirty="0">
-                <a:solidFill>
-                  <a:srgbClr val="9A3B3B"/>
-                </a:solidFill>
-                <a:latin typeface="Microsoft JhengHei" pitchFamily="34" charset="0"/>
-                <a:ea typeface="Microsoft JhengHei" pitchFamily="34" charset="-122"/>
-                <a:cs typeface="Microsoft JhengHei" pitchFamily="34" charset="-120"/>
-              </a:rPr>
-              <a:t>✕  對兌換方式或日期做個人承諾
-</a:t>
-            </a:r>
-            <a:pPr indent="0" marL="0">
-              <a:lnSpc>
-                <a:spcPts val="1300"/>
-              </a:lnSpc>
-              <a:buNone/>
-            </a:pPr>
-            <a:r>
-              <a:rPr lang="en-US" sz="850" dirty="0">
-                <a:solidFill>
-                  <a:srgbClr val="9A3B3B"/>
-                </a:solidFill>
-                <a:latin typeface="Microsoft JhengHei" pitchFamily="34" charset="0"/>
-                <a:ea typeface="Microsoft JhengHei" pitchFamily="34" charset="-122"/>
-                <a:cs typeface="Microsoft JhengHei" pitchFamily="34" charset="-120"/>
-              </a:rPr>
-              <a:t>　  Personal promises about redemption terms or dates</a:t>
-            </a:r>
-            <a:endParaRPr lang="en-US" sz="1150" dirty="0"/>
-          </a:p>
-        </p:txBody>
-      </p:sp>
-      <p:sp>
-        <p:nvSpPr>
-          <p:cNvPr id="21" name="Text 19"/>
-          <p:cNvSpPr/>
-          <p:nvPr/>
-        </p:nvSpPr>
-        <p:spPr>
-          <a:xfrm>
-            <a:off x="5440680" y="3712464"/>
-            <a:ext cx="3063240" cy="475488"/>
-          </a:xfrm>
-          <a:prstGeom prst="rect">
-            <a:avLst/>
-          </a:prstGeom>
-          <a:noFill/>
-          <a:ln/>
-        </p:spPr>
-        <p:txBody>
-          <a:bodyPr wrap="square" rtlCol="0" anchor="ctr"/>
-          <a:lstStyle/>
-          <a:p>
-            <a:pPr indent="0" marL="0">
-              <a:buNone/>
-            </a:pPr>
-            <a:r>
-              <a:rPr lang="en-US" sz="950" dirty="0">
-                <a:solidFill>
-                  <a:srgbClr val="3D3935"/>
-                </a:solidFill>
-                <a:latin typeface="Microsoft JhengHei" pitchFamily="34" charset="0"/>
-                <a:ea typeface="Microsoft JhengHei" pitchFamily="34" charset="-122"/>
-                <a:cs typeface="Microsoft JhengHei" pitchFamily="34" charset="-120"/>
-              </a:rPr>
-              <a:t>一切以活動頁公告與券面規則為準</a:t>
-            </a:r>
-            <a:endParaRPr lang="en-US" sz="950" dirty="0"/>
-          </a:p>
-        </p:txBody>
-      </p:sp>
-      <p:sp>
-        <p:nvSpPr>
-          <p:cNvPr id="22" name="Shape 20"/>
-          <p:cNvSpPr/>
-          <p:nvPr/>
-        </p:nvSpPr>
-        <p:spPr>
-          <a:xfrm>
-            <a:off x="502920" y="4370832"/>
-            <a:ext cx="8138160" cy="530352"/>
-          </a:xfrm>
-          <a:prstGeom prst="roundRect">
-            <a:avLst>
-              <a:gd name="adj" fmla="val 10345"/>
-            </a:avLst>
-          </a:prstGeom>
-          <a:solidFill>
-            <a:srgbClr val="FBF1DC"/>
+            <a:srgbClr val="FFFDFA"/>
           </a:solidFill>
           <a:ln w="9525">
             <a:solidFill>
-              <a:srgbClr val="9C6212"/>
+              <a:srgbClr val="DAD9D6"/>
             </a:solidFill>
             <a:prstDash val="solid"/>
           </a:ln>
@@ -5337,78 +4821,466 @@
       </p:sp>
       <p:sp>
         <p:nvSpPr>
-          <p:cNvPr id="23" name="Text 21"/>
-          <p:cNvSpPr/>
-          <p:nvPr/>
-        </p:nvSpPr>
-        <p:spPr>
-          <a:xfrm>
-            <a:off x="649224" y="4416552"/>
-            <a:ext cx="7845552" cy="438912"/>
-          </a:xfrm>
-          <a:prstGeom prst="rect">
-            <a:avLst/>
-          </a:prstGeom>
-          <a:noFill/>
-          <a:ln/>
-        </p:spPr>
-        <p:txBody>
-          <a:bodyPr wrap="square" rtlCol="0" anchor="ctr"/>
-          <a:lstStyle/>
-          <a:p>
-            <a:pPr indent="0" marL="0">
-              <a:lnSpc>
-                <a:spcPts val="1500"/>
-              </a:lnSpc>
-              <a:buNone/>
-            </a:pPr>
-            <a:r>
-              <a:rPr lang="en-US" sz="1200" dirty="0">
-                <a:solidFill>
-                  <a:srgbClr val="9C6212"/>
-                </a:solidFill>
-                <a:latin typeface="Microsoft JhengHei" pitchFamily="34" charset="0"/>
-                <a:ea typeface="Microsoft JhengHei" pitchFamily="34" charset="-122"/>
-                <a:cs typeface="Microsoft JhengHei" pitchFamily="34" charset="-120"/>
-              </a:rPr>
-              <a:t>🙋  </a:t>
-            </a:r>
-            <a:pPr indent="0" marL="0">
-              <a:lnSpc>
-                <a:spcPts val="1500"/>
-              </a:lnSpc>
-              <a:buNone/>
-            </a:pPr>
-            <a:r>
-              <a:rPr lang="en-US" sz="1150" b="1" dirty="0">
-                <a:solidFill>
-                  <a:srgbClr val="9C6212"/>
-                </a:solidFill>
-                <a:latin typeface="Microsoft JhengHei" pitchFamily="34" charset="0"/>
-                <a:ea typeface="Microsoft JhengHei" pitchFamily="34" charset="-122"/>
-                <a:cs typeface="Microsoft JhengHei" pitchFamily="34" charset="-120"/>
-              </a:rPr>
-              <a:t>遇到無法回答或客人情緒不佳時，請轉給主管處理，不要自行承諾。
+          <p:cNvPr id="8" name="Text 6"/>
+          <p:cNvSpPr/>
+          <p:nvPr/>
+        </p:nvSpPr>
+        <p:spPr>
+          <a:xfrm>
+            <a:off x="685800" y="1188720"/>
+            <a:ext cx="7772400" cy="457200"/>
+          </a:xfrm>
+          <a:prstGeom prst="rect">
+            <a:avLst/>
+          </a:prstGeom>
+          <a:noFill/>
+          <a:ln/>
+        </p:spPr>
+        <p:txBody>
+          <a:bodyPr wrap="square" rtlCol="0" anchor="ctr"/>
+          <a:lstStyle/>
+          <a:p>
+            <a:pPr indent="0" marL="0">
+              <a:lnSpc>
+                <a:spcPts val="1300"/>
+              </a:lnSpc>
+              <a:buNone/>
+            </a:pPr>
+            <a:r>
+              <a:rPr lang="en-US" sz="1100" b="1" dirty="0">
+                <a:solidFill>
+                  <a:srgbClr val="B8923E"/>
+                </a:solidFill>
+                <a:latin typeface="Microsoft JhengHei" pitchFamily="34" charset="0"/>
+                <a:ea typeface="Microsoft JhengHei" pitchFamily="34" charset="-122"/>
+                <a:cs typeface="Microsoft JhengHei" pitchFamily="34" charset="-120"/>
+              </a:rPr>
+              <a:t>Q  </a:t>
+            </a:r>
+            <a:pPr indent="0" marL="0">
+              <a:lnSpc>
+                <a:spcPts val="1300"/>
+              </a:lnSpc>
+              <a:buNone/>
+            </a:pPr>
+            <a:r>
+              <a:rPr lang="en-US" sz="1200" b="1" dirty="0">
+                <a:solidFill>
+                  <a:srgbClr val="935D08"/>
+                </a:solidFill>
+                <a:latin typeface="Microsoft JhengHei" pitchFamily="34" charset="0"/>
+                <a:ea typeface="Microsoft JhengHei" pitchFamily="34" charset="-122"/>
+                <a:cs typeface="Microsoft JhengHei" pitchFamily="34" charset="-120"/>
+              </a:rPr>
+              <a:t>為什麼一等獎、二等獎抽到的都是餐飲 85 折？
 </a:t>
             </a:r>
             <a:pPr indent="0" marL="0">
               <a:lnSpc>
-                <a:spcPts val="1500"/>
-              </a:lnSpc>
-              <a:buNone/>
-            </a:pPr>
-            <a:r>
-              <a:rPr lang="en-US" sz="950" dirty="0">
-                <a:solidFill>
-                  <a:srgbClr val="9C6212"/>
-                </a:solidFill>
-                <a:latin typeface="Microsoft JhengHei" pitchFamily="34" charset="0"/>
-                <a:ea typeface="Microsoft JhengHei" pitchFamily="34" charset="-122"/>
-                <a:cs typeface="Microsoft JhengHei" pitchFamily="34" charset="-120"/>
-              </a:rPr>
-              <a:t>　　 If you cannot answer, or the guest is upset, escalate to your supervisor — do not make commitments yourself.</a:t>
-            </a:r>
-            <a:endParaRPr lang="en-US" sz="1200" dirty="0"/>
+                <a:spcPts val="1300"/>
+              </a:lnSpc>
+              <a:buNone/>
+            </a:pPr>
+            <a:r>
+              <a:rPr lang="en-US" sz="900" dirty="0">
+                <a:solidFill>
+                  <a:srgbClr val="6E6A63"/>
+                </a:solidFill>
+                <a:latin typeface="Microsoft JhengHei" pitchFamily="34" charset="0"/>
+                <a:ea typeface="Microsoft JhengHei" pitchFamily="34" charset="-122"/>
+                <a:cs typeface="Microsoft JhengHei" pitchFamily="34" charset="-120"/>
+              </a:rPr>
+              <a:t>　  Why do the First and Second Prize tiers only give the dining discount?</a:t>
+            </a:r>
+            <a:endParaRPr lang="en-US" sz="1100" dirty="0"/>
+          </a:p>
+        </p:txBody>
+      </p:sp>
+      <p:sp>
+        <p:nvSpPr>
+          <p:cNvPr id="9" name="Text 7"/>
+          <p:cNvSpPr/>
+          <p:nvPr/>
+        </p:nvSpPr>
+        <p:spPr>
+          <a:xfrm>
+            <a:off x="685800" y="1682496"/>
+            <a:ext cx="7772400" cy="493776"/>
+          </a:xfrm>
+          <a:prstGeom prst="rect">
+            <a:avLst/>
+          </a:prstGeom>
+          <a:noFill/>
+          <a:ln/>
+        </p:spPr>
+        <p:txBody>
+          <a:bodyPr wrap="square" rtlCol="0" anchor="ctr"/>
+          <a:lstStyle/>
+          <a:p>
+            <a:pPr indent="0" marL="0">
+              <a:lnSpc>
+                <a:spcPts val="1300"/>
+              </a:lnSpc>
+              <a:buNone/>
+            </a:pPr>
+            <a:r>
+              <a:rPr lang="en-US" sz="1050" dirty="0">
+                <a:solidFill>
+                  <a:srgbClr val="3D3935"/>
+                </a:solidFill>
+                <a:latin typeface="Microsoft JhengHei" pitchFamily="34" charset="0"/>
+                <a:ea typeface="Microsoft JhengHei" pitchFamily="34" charset="-122"/>
+                <a:cs typeface="Microsoft JhengHei" pitchFamily="34" charset="-120"/>
+              </a:rPr>
+              <a:t>這兩個等級的獎品已經全部送完，目前抽到的是保底的餐飲 85 折。三等獎還有其他獎品，建議您改抽三等獎。
+</a:t>
+            </a:r>
+            <a:pPr indent="0" marL="0">
+              <a:lnSpc>
+                <a:spcPts val="1300"/>
+              </a:lnSpc>
+              <a:buNone/>
+            </a:pPr>
+            <a:r>
+              <a:rPr lang="en-US" sz="900" dirty="0">
+                <a:solidFill>
+                  <a:srgbClr val="6E6A63"/>
+                </a:solidFill>
+                <a:latin typeface="Microsoft JhengHei" pitchFamily="34" charset="0"/>
+                <a:ea typeface="Microsoft JhengHei" pitchFamily="34" charset="-122"/>
+                <a:cs typeface="Microsoft JhengHei" pitchFamily="34" charset="-120"/>
+              </a:rPr>
+              <a:t>All prizes in those two tiers have been claimed, so the guaranteed 15% dining discount is awarded instead. The Third Prize tier still has other prizes available.</a:t>
+            </a:r>
+            <a:endParaRPr lang="en-US" sz="1050" dirty="0"/>
+          </a:p>
+        </p:txBody>
+      </p:sp>
+      <p:sp>
+        <p:nvSpPr>
+          <p:cNvPr id="10" name="Shape 8"/>
+          <p:cNvSpPr/>
+          <p:nvPr/>
+        </p:nvSpPr>
+        <p:spPr>
+          <a:xfrm>
+            <a:off x="502920" y="2340864"/>
+            <a:ext cx="8138160" cy="1060704"/>
+          </a:xfrm>
+          <a:prstGeom prst="roundRect">
+            <a:avLst>
+              <a:gd name="adj" fmla="val 5172"/>
+            </a:avLst>
+          </a:prstGeom>
+          <a:solidFill>
+            <a:srgbClr val="FFFDFA"/>
+          </a:solidFill>
+          <a:ln w="9525">
+            <a:solidFill>
+              <a:srgbClr val="DAD9D6"/>
+            </a:solidFill>
+            <a:prstDash val="solid"/>
+          </a:ln>
+        </p:spPr>
+      </p:sp>
+      <p:sp>
+        <p:nvSpPr>
+          <p:cNvPr id="11" name="Text 9"/>
+          <p:cNvSpPr/>
+          <p:nvPr/>
+        </p:nvSpPr>
+        <p:spPr>
+          <a:xfrm>
+            <a:off x="685800" y="2414016"/>
+            <a:ext cx="7772400" cy="457200"/>
+          </a:xfrm>
+          <a:prstGeom prst="rect">
+            <a:avLst/>
+          </a:prstGeom>
+          <a:noFill/>
+          <a:ln/>
+        </p:spPr>
+        <p:txBody>
+          <a:bodyPr wrap="square" rtlCol="0" anchor="ctr"/>
+          <a:lstStyle/>
+          <a:p>
+            <a:pPr indent="0" marL="0">
+              <a:lnSpc>
+                <a:spcPts val="1300"/>
+              </a:lnSpc>
+              <a:buNone/>
+            </a:pPr>
+            <a:r>
+              <a:rPr lang="en-US" sz="1100" b="1" dirty="0">
+                <a:solidFill>
+                  <a:srgbClr val="B8923E"/>
+                </a:solidFill>
+                <a:latin typeface="Microsoft JhengHei" pitchFamily="34" charset="0"/>
+                <a:ea typeface="Microsoft JhengHei" pitchFamily="34" charset="-122"/>
+                <a:cs typeface="Microsoft JhengHei" pitchFamily="34" charset="-120"/>
+              </a:rPr>
+              <a:t>Q  </a:t>
+            </a:r>
+            <a:pPr indent="0" marL="0">
+              <a:lnSpc>
+                <a:spcPts val="1300"/>
+              </a:lnSpc>
+              <a:buNone/>
+            </a:pPr>
+            <a:r>
+              <a:rPr lang="en-US" sz="1200" b="1" dirty="0">
+                <a:solidFill>
+                  <a:srgbClr val="935D08"/>
+                </a:solidFill>
+                <a:latin typeface="Microsoft JhengHei" pitchFamily="34" charset="0"/>
+                <a:ea typeface="Microsoft JhengHei" pitchFamily="34" charset="-122"/>
+                <a:cs typeface="Microsoft JhengHei" pitchFamily="34" charset="-120"/>
+              </a:rPr>
+              <a:t>為什麼現在抽不到「洲遊幣」了？
+</a:t>
+            </a:r>
+            <a:pPr indent="0" marL="0">
+              <a:lnSpc>
+                <a:spcPts val="1300"/>
+              </a:lnSpc>
+              <a:buNone/>
+            </a:pPr>
+            <a:r>
+              <a:rPr lang="en-US" sz="900" dirty="0">
+                <a:solidFill>
+                  <a:srgbClr val="6E6A63"/>
+                </a:solidFill>
+                <a:latin typeface="Microsoft JhengHei" pitchFamily="34" charset="0"/>
+                <a:ea typeface="Microsoft JhengHei" pitchFamily="34" charset="-122"/>
+                <a:cs typeface="Microsoft JhengHei" pitchFamily="34" charset="-120"/>
+              </a:rPr>
+              <a:t>　  Why can't I win InterCoins from the wheel any more?</a:t>
+            </a:r>
+            <a:endParaRPr lang="en-US" sz="1100" dirty="0"/>
+          </a:p>
+        </p:txBody>
+      </p:sp>
+      <p:sp>
+        <p:nvSpPr>
+          <p:cNvPr id="12" name="Text 10"/>
+          <p:cNvSpPr/>
+          <p:nvPr/>
+        </p:nvSpPr>
+        <p:spPr>
+          <a:xfrm>
+            <a:off x="685800" y="2907792"/>
+            <a:ext cx="7772400" cy="420624"/>
+          </a:xfrm>
+          <a:prstGeom prst="rect">
+            <a:avLst/>
+          </a:prstGeom>
+          <a:noFill/>
+          <a:ln/>
+        </p:spPr>
+        <p:txBody>
+          <a:bodyPr wrap="square" rtlCol="0" anchor="ctr"/>
+          <a:lstStyle/>
+          <a:p>
+            <a:pPr indent="0" marL="0">
+              <a:lnSpc>
+                <a:spcPts val="1300"/>
+              </a:lnSpc>
+              <a:buNone/>
+            </a:pPr>
+            <a:r>
+              <a:rPr lang="en-US" sz="1050" dirty="0">
+                <a:solidFill>
+                  <a:srgbClr val="3D3935"/>
+                </a:solidFill>
+                <a:latin typeface="Microsoft JhengHei" pitchFamily="34" charset="0"/>
+                <a:ea typeface="Microsoft JhengHei" pitchFamily="34" charset="-122"/>
+                <a:cs typeface="Microsoft JhengHei" pitchFamily="34" charset="-120"/>
+              </a:rPr>
+              <a:t>洲遊幣目前只能透過完成任務取得，轉盤上不再發放。
+</a:t>
+            </a:r>
+            <a:pPr indent="0" marL="0">
+              <a:lnSpc>
+                <a:spcPts val="1300"/>
+              </a:lnSpc>
+              <a:buNone/>
+            </a:pPr>
+            <a:r>
+              <a:rPr lang="en-US" sz="900" dirty="0">
+                <a:solidFill>
+                  <a:srgbClr val="6E6A63"/>
+                </a:solidFill>
+                <a:latin typeface="Microsoft JhengHei" pitchFamily="34" charset="0"/>
+                <a:ea typeface="Microsoft JhengHei" pitchFamily="34" charset="-122"/>
+                <a:cs typeface="Microsoft JhengHei" pitchFamily="34" charset="-120"/>
+              </a:rPr>
+              <a:t>InterCoins are now earned only by completing tasks; they are no longer awarded on the wheel.</a:t>
+            </a:r>
+            <a:endParaRPr lang="en-US" sz="1050" dirty="0"/>
+          </a:p>
+        </p:txBody>
+      </p:sp>
+      <p:sp>
+        <p:nvSpPr>
+          <p:cNvPr id="13" name="Shape 11"/>
+          <p:cNvSpPr/>
+          <p:nvPr/>
+        </p:nvSpPr>
+        <p:spPr>
+          <a:xfrm>
+            <a:off x="502920" y="3493008"/>
+            <a:ext cx="8138160" cy="1170432"/>
+          </a:xfrm>
+          <a:prstGeom prst="roundRect">
+            <a:avLst>
+              <a:gd name="adj" fmla="val 4688"/>
+            </a:avLst>
+          </a:prstGeom>
+          <a:solidFill>
+            <a:srgbClr val="FFFDFA"/>
+          </a:solidFill>
+          <a:ln w="9525">
+            <a:solidFill>
+              <a:srgbClr val="DAD9D6"/>
+            </a:solidFill>
+            <a:prstDash val="solid"/>
+          </a:ln>
+        </p:spPr>
+      </p:sp>
+      <p:sp>
+        <p:nvSpPr>
+          <p:cNvPr id="14" name="Text 12"/>
+          <p:cNvSpPr/>
+          <p:nvPr/>
+        </p:nvSpPr>
+        <p:spPr>
+          <a:xfrm>
+            <a:off x="685800" y="3566160"/>
+            <a:ext cx="7772400" cy="457200"/>
+          </a:xfrm>
+          <a:prstGeom prst="rect">
+            <a:avLst/>
+          </a:prstGeom>
+          <a:noFill/>
+          <a:ln/>
+        </p:spPr>
+        <p:txBody>
+          <a:bodyPr wrap="square" rtlCol="0" anchor="ctr"/>
+          <a:lstStyle/>
+          <a:p>
+            <a:pPr indent="0" marL="0">
+              <a:lnSpc>
+                <a:spcPts val="1300"/>
+              </a:lnSpc>
+              <a:buNone/>
+            </a:pPr>
+            <a:r>
+              <a:rPr lang="en-US" sz="1100" b="1" dirty="0">
+                <a:solidFill>
+                  <a:srgbClr val="B8923E"/>
+                </a:solidFill>
+                <a:latin typeface="Microsoft JhengHei" pitchFamily="34" charset="0"/>
+                <a:ea typeface="Microsoft JhengHei" pitchFamily="34" charset="-122"/>
+                <a:cs typeface="Microsoft JhengHei" pitchFamily="34" charset="-120"/>
+              </a:rPr>
+              <a:t>Q  </a:t>
+            </a:r>
+            <a:pPr indent="0" marL="0">
+              <a:lnSpc>
+                <a:spcPts val="1300"/>
+              </a:lnSpc>
+              <a:buNone/>
+            </a:pPr>
+            <a:r>
+              <a:rPr lang="en-US" sz="1200" b="1" dirty="0">
+                <a:solidFill>
+                  <a:srgbClr val="935D08"/>
+                </a:solidFill>
+                <a:latin typeface="Microsoft JhengHei" pitchFamily="34" charset="0"/>
+                <a:ea typeface="Microsoft JhengHei" pitchFamily="34" charset="-122"/>
+                <a:cs typeface="Microsoft JhengHei" pitchFamily="34" charset="-120"/>
+              </a:rPr>
+              <a:t>我中了住宿獎，什麼時候會有人聯絡我？
+</a:t>
+            </a:r>
+            <a:pPr indent="0" marL="0">
+              <a:lnSpc>
+                <a:spcPts val="1300"/>
+              </a:lnSpc>
+              <a:buNone/>
+            </a:pPr>
+            <a:r>
+              <a:rPr lang="en-US" sz="900" dirty="0">
+                <a:solidFill>
+                  <a:srgbClr val="6E6A63"/>
+                </a:solidFill>
+                <a:latin typeface="Microsoft JhengHei" pitchFamily="34" charset="0"/>
+                <a:ea typeface="Microsoft JhengHei" pitchFamily="34" charset="-122"/>
+                <a:cs typeface="Microsoft JhengHei" pitchFamily="34" charset="-120"/>
+              </a:rPr>
+              <a:t>　  I won a room stay — when will someone contact me?</a:t>
+            </a:r>
+            <a:endParaRPr lang="en-US" sz="1100" dirty="0"/>
+          </a:p>
+        </p:txBody>
+      </p:sp>
+      <p:sp>
+        <p:nvSpPr>
+          <p:cNvPr id="15" name="Text 13"/>
+          <p:cNvSpPr/>
+          <p:nvPr/>
+        </p:nvSpPr>
+        <p:spPr>
+          <a:xfrm>
+            <a:off x="685800" y="4059936"/>
+            <a:ext cx="7772400" cy="530352"/>
+          </a:xfrm>
+          <a:prstGeom prst="rect">
+            <a:avLst/>
+          </a:prstGeom>
+          <a:noFill/>
+          <a:ln/>
+        </p:spPr>
+        <p:txBody>
+          <a:bodyPr wrap="square" rtlCol="0" anchor="ctr"/>
+          <a:lstStyle/>
+          <a:p>
+            <a:pPr indent="0" marL="0">
+              <a:lnSpc>
+                <a:spcPts val="1300"/>
+              </a:lnSpc>
+              <a:buNone/>
+            </a:pPr>
+            <a:r>
+              <a:rPr lang="en-US" sz="1050" dirty="0">
+                <a:solidFill>
+                  <a:srgbClr val="3D3935"/>
+                </a:solidFill>
+                <a:latin typeface="Microsoft JhengHei" pitchFamily="34" charset="0"/>
+                <a:ea typeface="Microsoft JhengHei" pitchFamily="34" charset="-122"/>
+                <a:cs typeface="Microsoft JhengHei" pitchFamily="34" charset="-120"/>
+              </a:rPr>
+              <a:t>已收到您的資料，飯店同仁會主動與您聯繫安排。若超過一週仍未接到聯繫，我幫您回報。
+</a:t>
+            </a:r>
+            <a:pPr indent="0" marL="0">
+              <a:lnSpc>
+                <a:spcPts val="1300"/>
+              </a:lnSpc>
+              <a:buNone/>
+            </a:pPr>
+            <a:r>
+              <a:rPr lang="en-US" sz="900" dirty="0">
+                <a:solidFill>
+                  <a:srgbClr val="6E6A63"/>
+                </a:solidFill>
+                <a:latin typeface="Microsoft JhengHei" pitchFamily="34" charset="0"/>
+                <a:ea typeface="Microsoft JhengHei" pitchFamily="34" charset="-122"/>
+                <a:cs typeface="Microsoft JhengHei" pitchFamily="34" charset="-120"/>
+              </a:rPr>
+              <a:t>We have your details and a colleague from the hotel will contact you to make arrangements. If you haven't heard from us within a week, I'll report it for you.</a:t>
+            </a:r>
+            <a:endParaRPr lang="en-US" sz="1050" dirty="0"/>
           </a:p>
         </p:txBody>
       </p:sp>
@@ -5477,7 +5349,7 @@
                 <a:ea typeface="Microsoft JhengHei" pitchFamily="34" charset="-122"/>
                 <a:cs typeface="Microsoft JhengHei" pitchFamily="34" charset="-120"/>
               </a:rPr>
-              <a:t>九、什麼狀況要往上回報</a:t>
+              <a:t>八、不可以對客人說的事</a:t>
             </a:r>
             <a:endParaRPr lang="en-US" sz="2200" dirty="0"/>
           </a:p>
@@ -5516,7 +5388,7 @@
                 <a:ea typeface="Microsoft JhengHei" pitchFamily="34" charset="-122"/>
                 <a:cs typeface="Microsoft JhengHei" pitchFamily="34" charset="-120"/>
               </a:rPr>
-              <a:t>When to Escalate</a:t>
+              <a:t>What Not to Disclose to Guests</a:t>
             </a:r>
             <a:endParaRPr lang="en-US" sz="1150" dirty="0"/>
           </a:p>
@@ -5628,20 +5500,625 @@
         </p:nvSpPr>
         <p:spPr>
           <a:xfrm>
-            <a:off x="502920" y="1234440"/>
-            <a:ext cx="8138160" cy="566928"/>
+            <a:off x="502920" y="1188720"/>
+            <a:ext cx="8138160" cy="548640"/>
           </a:xfrm>
           <a:prstGeom prst="roundRect">
             <a:avLst>
-              <a:gd name="adj" fmla="val 8065"/>
+              <a:gd name="adj" fmla="val 8333"/>
             </a:avLst>
           </a:prstGeom>
           <a:solidFill>
-            <a:srgbClr val="FFFDFA"/>
+            <a:srgbClr val="FBEDED"/>
+          </a:solidFill>
+          <a:ln/>
+        </p:spPr>
+      </p:sp>
+      <p:sp>
+        <p:nvSpPr>
+          <p:cNvPr id="8" name="Text 6"/>
+          <p:cNvSpPr/>
+          <p:nvPr/>
+        </p:nvSpPr>
+        <p:spPr>
+          <a:xfrm>
+            <a:off x="685800" y="1225296"/>
+            <a:ext cx="4663440" cy="475488"/>
+          </a:xfrm>
+          <a:prstGeom prst="rect">
+            <a:avLst/>
+          </a:prstGeom>
+          <a:noFill/>
+          <a:ln/>
+        </p:spPr>
+        <p:txBody>
+          <a:bodyPr wrap="square" rtlCol="0" anchor="ctr"/>
+          <a:lstStyle/>
+          <a:p>
+            <a:pPr indent="0" marL="0">
+              <a:lnSpc>
+                <a:spcPts val="1300"/>
+              </a:lnSpc>
+              <a:buNone/>
+            </a:pPr>
+            <a:r>
+              <a:rPr lang="en-US" sz="1150" b="1" dirty="0">
+                <a:solidFill>
+                  <a:srgbClr val="9A3B3B"/>
+                </a:solidFill>
+                <a:latin typeface="Microsoft JhengHei" pitchFamily="34" charset="0"/>
+                <a:ea typeface="Microsoft JhengHei" pitchFamily="34" charset="-122"/>
+                <a:cs typeface="Microsoft JhengHei" pitchFamily="34" charset="-120"/>
+              </a:rPr>
+              <a:t>✕  各獎項的中獎機率
+</a:t>
+            </a:r>
+            <a:pPr indent="0" marL="0">
+              <a:lnSpc>
+                <a:spcPts val="1300"/>
+              </a:lnSpc>
+              <a:buNone/>
+            </a:pPr>
+            <a:r>
+              <a:rPr lang="en-US" sz="850" dirty="0">
+                <a:solidFill>
+                  <a:srgbClr val="9A3B3B"/>
+                </a:solidFill>
+                <a:latin typeface="Microsoft JhengHei" pitchFamily="34" charset="0"/>
+                <a:ea typeface="Microsoft JhengHei" pitchFamily="34" charset="-122"/>
+                <a:cs typeface="Microsoft JhengHei" pitchFamily="34" charset="-120"/>
+              </a:rPr>
+              <a:t>　  Prize win probabilities</a:t>
+            </a:r>
+            <a:endParaRPr lang="en-US" sz="1150" dirty="0"/>
+          </a:p>
+        </p:txBody>
+      </p:sp>
+      <p:sp>
+        <p:nvSpPr>
+          <p:cNvPr id="9" name="Text 7"/>
+          <p:cNvSpPr/>
+          <p:nvPr/>
+        </p:nvSpPr>
+        <p:spPr>
+          <a:xfrm>
+            <a:off x="5440680" y="1225296"/>
+            <a:ext cx="3063240" cy="475488"/>
+          </a:xfrm>
+          <a:prstGeom prst="rect">
+            <a:avLst/>
+          </a:prstGeom>
+          <a:noFill/>
+          <a:ln/>
+        </p:spPr>
+        <p:txBody>
+          <a:bodyPr wrap="square" rtlCol="0" anchor="ctr"/>
+          <a:lstStyle/>
+          <a:p>
+            <a:pPr indent="0" marL="0">
+              <a:buNone/>
+            </a:pPr>
+            <a:r>
+              <a:rPr lang="en-US" sz="950" dirty="0">
+                <a:solidFill>
+                  <a:srgbClr val="3D3935"/>
+                </a:solidFill>
+                <a:latin typeface="Microsoft JhengHei" pitchFamily="34" charset="0"/>
+                <a:ea typeface="Microsoft JhengHei" pitchFamily="34" charset="-122"/>
+                <a:cs typeface="Microsoft JhengHei" pitchFamily="34" charset="-120"/>
+              </a:rPr>
+              <a:t>屬內部設定，公開會引發爭議與質疑</a:t>
+            </a:r>
+            <a:endParaRPr lang="en-US" sz="950" dirty="0"/>
+          </a:p>
+        </p:txBody>
+      </p:sp>
+      <p:sp>
+        <p:nvSpPr>
+          <p:cNvPr id="10" name="Shape 8"/>
+          <p:cNvSpPr/>
+          <p:nvPr/>
+        </p:nvSpPr>
+        <p:spPr>
+          <a:xfrm>
+            <a:off x="502920" y="1810512"/>
+            <a:ext cx="8138160" cy="548640"/>
+          </a:xfrm>
+          <a:prstGeom prst="roundRect">
+            <a:avLst>
+              <a:gd name="adj" fmla="val 8333"/>
+            </a:avLst>
+          </a:prstGeom>
+          <a:solidFill>
+            <a:srgbClr val="FBEDED"/>
+          </a:solidFill>
+          <a:ln/>
+        </p:spPr>
+      </p:sp>
+      <p:sp>
+        <p:nvSpPr>
+          <p:cNvPr id="11" name="Text 9"/>
+          <p:cNvSpPr/>
+          <p:nvPr/>
+        </p:nvSpPr>
+        <p:spPr>
+          <a:xfrm>
+            <a:off x="685800" y="1847088"/>
+            <a:ext cx="4663440" cy="475488"/>
+          </a:xfrm>
+          <a:prstGeom prst="rect">
+            <a:avLst/>
+          </a:prstGeom>
+          <a:noFill/>
+          <a:ln/>
+        </p:spPr>
+        <p:txBody>
+          <a:bodyPr wrap="square" rtlCol="0" anchor="ctr"/>
+          <a:lstStyle/>
+          <a:p>
+            <a:pPr indent="0" marL="0">
+              <a:lnSpc>
+                <a:spcPts val="1300"/>
+              </a:lnSpc>
+              <a:buNone/>
+            </a:pPr>
+            <a:r>
+              <a:rPr lang="en-US" sz="1150" b="1" dirty="0">
+                <a:solidFill>
+                  <a:srgbClr val="9A3B3B"/>
+                </a:solidFill>
+                <a:latin typeface="Microsoft JhengHei" pitchFamily="34" charset="0"/>
+                <a:ea typeface="Microsoft JhengHei" pitchFamily="34" charset="-122"/>
+                <a:cs typeface="Microsoft JhengHei" pitchFamily="34" charset="-120"/>
+              </a:rPr>
+              <a:t>✕  每個獎品還剩幾份／已發出幾份
+</a:t>
+            </a:r>
+            <a:pPr indent="0" marL="0">
+              <a:lnSpc>
+                <a:spcPts val="1300"/>
+              </a:lnSpc>
+              <a:buNone/>
+            </a:pPr>
+            <a:r>
+              <a:rPr lang="en-US" sz="850" dirty="0">
+                <a:solidFill>
+                  <a:srgbClr val="9A3B3B"/>
+                </a:solidFill>
+                <a:latin typeface="Microsoft JhengHei" pitchFamily="34" charset="0"/>
+                <a:ea typeface="Microsoft JhengHei" pitchFamily="34" charset="-122"/>
+                <a:cs typeface="Microsoft JhengHei" pitchFamily="34" charset="-120"/>
+              </a:rPr>
+              <a:t>　  Remaining or issued prize quantities</a:t>
+            </a:r>
+            <a:endParaRPr lang="en-US" sz="1150" dirty="0"/>
+          </a:p>
+        </p:txBody>
+      </p:sp>
+      <p:sp>
+        <p:nvSpPr>
+          <p:cNvPr id="12" name="Text 10"/>
+          <p:cNvSpPr/>
+          <p:nvPr/>
+        </p:nvSpPr>
+        <p:spPr>
+          <a:xfrm>
+            <a:off x="5440680" y="1847088"/>
+            <a:ext cx="3063240" cy="475488"/>
+          </a:xfrm>
+          <a:prstGeom prst="rect">
+            <a:avLst/>
+          </a:prstGeom>
+          <a:noFill/>
+          <a:ln/>
+        </p:spPr>
+        <p:txBody>
+          <a:bodyPr wrap="square" rtlCol="0" anchor="ctr"/>
+          <a:lstStyle/>
+          <a:p>
+            <a:pPr indent="0" marL="0">
+              <a:buNone/>
+            </a:pPr>
+            <a:r>
+              <a:rPr lang="en-US" sz="950" dirty="0">
+                <a:solidFill>
+                  <a:srgbClr val="3D3935"/>
+                </a:solidFill>
+                <a:latin typeface="Microsoft JhengHei" pitchFamily="34" charset="0"/>
+                <a:ea typeface="Microsoft JhengHei" pitchFamily="34" charset="-122"/>
+                <a:cs typeface="Microsoft JhengHei" pitchFamily="34" charset="-120"/>
+              </a:rPr>
+              <a:t>同上，也可能被人為衝量</a:t>
+            </a:r>
+            <a:endParaRPr lang="en-US" sz="950" dirty="0"/>
+          </a:p>
+        </p:txBody>
+      </p:sp>
+      <p:sp>
+        <p:nvSpPr>
+          <p:cNvPr id="13" name="Shape 11"/>
+          <p:cNvSpPr/>
+          <p:nvPr/>
+        </p:nvSpPr>
+        <p:spPr>
+          <a:xfrm>
+            <a:off x="502920" y="2432304"/>
+            <a:ext cx="8138160" cy="548640"/>
+          </a:xfrm>
+          <a:prstGeom prst="roundRect">
+            <a:avLst>
+              <a:gd name="adj" fmla="val 8333"/>
+            </a:avLst>
+          </a:prstGeom>
+          <a:solidFill>
+            <a:srgbClr val="FBEDED"/>
+          </a:solidFill>
+          <a:ln/>
+        </p:spPr>
+      </p:sp>
+      <p:sp>
+        <p:nvSpPr>
+          <p:cNvPr id="14" name="Text 12"/>
+          <p:cNvSpPr/>
+          <p:nvPr/>
+        </p:nvSpPr>
+        <p:spPr>
+          <a:xfrm>
+            <a:off x="685800" y="2468880"/>
+            <a:ext cx="4663440" cy="475488"/>
+          </a:xfrm>
+          <a:prstGeom prst="rect">
+            <a:avLst/>
+          </a:prstGeom>
+          <a:noFill/>
+          <a:ln/>
+        </p:spPr>
+        <p:txBody>
+          <a:bodyPr wrap="square" rtlCol="0" anchor="ctr"/>
+          <a:lstStyle/>
+          <a:p>
+            <a:pPr indent="0" marL="0">
+              <a:lnSpc>
+                <a:spcPts val="1300"/>
+              </a:lnSpc>
+              <a:buNone/>
+            </a:pPr>
+            <a:r>
+              <a:rPr lang="en-US" sz="1150" b="1" dirty="0">
+                <a:solidFill>
+                  <a:srgbClr val="9A3B3B"/>
+                </a:solidFill>
+                <a:latin typeface="Microsoft JhengHei" pitchFamily="34" charset="0"/>
+                <a:ea typeface="Microsoft JhengHei" pitchFamily="34" charset="-122"/>
+                <a:cs typeface="Microsoft JhengHei" pitchFamily="34" charset="-120"/>
+              </a:rPr>
+              <a:t>✕  內部管理系統的存在或操作方式
+</a:t>
+            </a:r>
+            <a:pPr indent="0" marL="0">
+              <a:lnSpc>
+                <a:spcPts val="1300"/>
+              </a:lnSpc>
+              <a:buNone/>
+            </a:pPr>
+            <a:r>
+              <a:rPr lang="en-US" sz="850" dirty="0">
+                <a:solidFill>
+                  <a:srgbClr val="9A3B3B"/>
+                </a:solidFill>
+                <a:latin typeface="Microsoft JhengHei" pitchFamily="34" charset="0"/>
+                <a:ea typeface="Microsoft JhengHei" pitchFamily="34" charset="-122"/>
+                <a:cs typeface="Microsoft JhengHei" pitchFamily="34" charset="-120"/>
+              </a:rPr>
+              <a:t>　  The existence or use of internal admin systems</a:t>
+            </a:r>
+            <a:endParaRPr lang="en-US" sz="1150" dirty="0"/>
+          </a:p>
+        </p:txBody>
+      </p:sp>
+      <p:sp>
+        <p:nvSpPr>
+          <p:cNvPr id="15" name="Text 13"/>
+          <p:cNvSpPr/>
+          <p:nvPr/>
+        </p:nvSpPr>
+        <p:spPr>
+          <a:xfrm>
+            <a:off x="5440680" y="2468880"/>
+            <a:ext cx="3063240" cy="475488"/>
+          </a:xfrm>
+          <a:prstGeom prst="rect">
+            <a:avLst/>
+          </a:prstGeom>
+          <a:noFill/>
+          <a:ln/>
+        </p:spPr>
+        <p:txBody>
+          <a:bodyPr wrap="square" rtlCol="0" anchor="ctr"/>
+          <a:lstStyle/>
+          <a:p>
+            <a:pPr indent="0" marL="0">
+              <a:buNone/>
+            </a:pPr>
+            <a:r>
+              <a:rPr lang="en-US" sz="950" dirty="0">
+                <a:solidFill>
+                  <a:srgbClr val="3D3935"/>
+                </a:solidFill>
+                <a:latin typeface="Microsoft JhengHei" pitchFamily="34" charset="0"/>
+                <a:ea typeface="Microsoft JhengHei" pitchFamily="34" charset="-122"/>
+                <a:cs typeface="Microsoft JhengHei" pitchFamily="34" charset="-120"/>
+              </a:rPr>
+              <a:t>非對外資訊</a:t>
+            </a:r>
+            <a:endParaRPr lang="en-US" sz="950" dirty="0"/>
+          </a:p>
+        </p:txBody>
+      </p:sp>
+      <p:sp>
+        <p:nvSpPr>
+          <p:cNvPr id="16" name="Shape 14"/>
+          <p:cNvSpPr/>
+          <p:nvPr/>
+        </p:nvSpPr>
+        <p:spPr>
+          <a:xfrm>
+            <a:off x="502920" y="3054096"/>
+            <a:ext cx="8138160" cy="548640"/>
+          </a:xfrm>
+          <a:prstGeom prst="roundRect">
+            <a:avLst>
+              <a:gd name="adj" fmla="val 8333"/>
+            </a:avLst>
+          </a:prstGeom>
+          <a:solidFill>
+            <a:srgbClr val="FBEDED"/>
+          </a:solidFill>
+          <a:ln/>
+        </p:spPr>
+      </p:sp>
+      <p:sp>
+        <p:nvSpPr>
+          <p:cNvPr id="17" name="Text 15"/>
+          <p:cNvSpPr/>
+          <p:nvPr/>
+        </p:nvSpPr>
+        <p:spPr>
+          <a:xfrm>
+            <a:off x="685800" y="3090672"/>
+            <a:ext cx="4663440" cy="475488"/>
+          </a:xfrm>
+          <a:prstGeom prst="rect">
+            <a:avLst/>
+          </a:prstGeom>
+          <a:noFill/>
+          <a:ln/>
+        </p:spPr>
+        <p:txBody>
+          <a:bodyPr wrap="square" rtlCol="0" anchor="ctr"/>
+          <a:lstStyle/>
+          <a:p>
+            <a:pPr indent="0" marL="0">
+              <a:lnSpc>
+                <a:spcPts val="1300"/>
+              </a:lnSpc>
+              <a:buNone/>
+            </a:pPr>
+            <a:r>
+              <a:rPr lang="en-US" sz="1150" b="1" dirty="0">
+                <a:solidFill>
+                  <a:srgbClr val="9A3B3B"/>
+                </a:solidFill>
+                <a:latin typeface="Microsoft JhengHei" pitchFamily="34" charset="0"/>
+                <a:ea typeface="Microsoft JhengHei" pitchFamily="34" charset="-122"/>
+                <a:cs typeface="Microsoft JhengHei" pitchFamily="34" charset="-120"/>
+              </a:rPr>
+              <a:t>✕  其他中獎者的姓名／電話／中獎內容
+</a:t>
+            </a:r>
+            <a:pPr indent="0" marL="0">
+              <a:lnSpc>
+                <a:spcPts val="1300"/>
+              </a:lnSpc>
+              <a:buNone/>
+            </a:pPr>
+            <a:r>
+              <a:rPr lang="en-US" sz="850" dirty="0">
+                <a:solidFill>
+                  <a:srgbClr val="9A3B3B"/>
+                </a:solidFill>
+                <a:latin typeface="Microsoft JhengHei" pitchFamily="34" charset="0"/>
+                <a:ea typeface="Microsoft JhengHei" pitchFamily="34" charset="-122"/>
+                <a:cs typeface="Microsoft JhengHei" pitchFamily="34" charset="-120"/>
+              </a:rPr>
+              <a:t>　  Other winners' names, numbers or prizes</a:t>
+            </a:r>
+            <a:endParaRPr lang="en-US" sz="1150" dirty="0"/>
+          </a:p>
+        </p:txBody>
+      </p:sp>
+      <p:sp>
+        <p:nvSpPr>
+          <p:cNvPr id="18" name="Text 16"/>
+          <p:cNvSpPr/>
+          <p:nvPr/>
+        </p:nvSpPr>
+        <p:spPr>
+          <a:xfrm>
+            <a:off x="5440680" y="3090672"/>
+            <a:ext cx="3063240" cy="475488"/>
+          </a:xfrm>
+          <a:prstGeom prst="rect">
+            <a:avLst/>
+          </a:prstGeom>
+          <a:noFill/>
+          <a:ln/>
+        </p:spPr>
+        <p:txBody>
+          <a:bodyPr wrap="square" rtlCol="0" anchor="ctr"/>
+          <a:lstStyle/>
+          <a:p>
+            <a:pPr indent="0" marL="0">
+              <a:buNone/>
+            </a:pPr>
+            <a:r>
+              <a:rPr lang="en-US" sz="950" dirty="0">
+                <a:solidFill>
+                  <a:srgbClr val="3D3935"/>
+                </a:solidFill>
+                <a:latin typeface="Microsoft JhengHei" pitchFamily="34" charset="0"/>
+                <a:ea typeface="Microsoft JhengHei" pitchFamily="34" charset="-122"/>
+                <a:cs typeface="Microsoft JhengHei" pitchFamily="34" charset="-120"/>
+              </a:rPr>
+              <a:t>個人資料，涉及法律責任</a:t>
+            </a:r>
+            <a:endParaRPr lang="en-US" sz="950" dirty="0"/>
+          </a:p>
+        </p:txBody>
+      </p:sp>
+      <p:sp>
+        <p:nvSpPr>
+          <p:cNvPr id="19" name="Shape 17"/>
+          <p:cNvSpPr/>
+          <p:nvPr/>
+        </p:nvSpPr>
+        <p:spPr>
+          <a:xfrm>
+            <a:off x="502920" y="3675888"/>
+            <a:ext cx="8138160" cy="548640"/>
+          </a:xfrm>
+          <a:prstGeom prst="roundRect">
+            <a:avLst>
+              <a:gd name="adj" fmla="val 8333"/>
+            </a:avLst>
+          </a:prstGeom>
+          <a:solidFill>
+            <a:srgbClr val="FBEDED"/>
+          </a:solidFill>
+          <a:ln/>
+        </p:spPr>
+      </p:sp>
+      <p:sp>
+        <p:nvSpPr>
+          <p:cNvPr id="20" name="Text 18"/>
+          <p:cNvSpPr/>
+          <p:nvPr/>
+        </p:nvSpPr>
+        <p:spPr>
+          <a:xfrm>
+            <a:off x="685800" y="3712464"/>
+            <a:ext cx="4663440" cy="475488"/>
+          </a:xfrm>
+          <a:prstGeom prst="rect">
+            <a:avLst/>
+          </a:prstGeom>
+          <a:noFill/>
+          <a:ln/>
+        </p:spPr>
+        <p:txBody>
+          <a:bodyPr wrap="square" rtlCol="0" anchor="ctr"/>
+          <a:lstStyle/>
+          <a:p>
+            <a:pPr indent="0" marL="0">
+              <a:lnSpc>
+                <a:spcPts val="1300"/>
+              </a:lnSpc>
+              <a:buNone/>
+            </a:pPr>
+            <a:r>
+              <a:rPr lang="en-US" sz="1150" b="1" dirty="0">
+                <a:solidFill>
+                  <a:srgbClr val="9A3B3B"/>
+                </a:solidFill>
+                <a:latin typeface="Microsoft JhengHei" pitchFamily="34" charset="0"/>
+                <a:ea typeface="Microsoft JhengHei" pitchFamily="34" charset="-122"/>
+                <a:cs typeface="Microsoft JhengHei" pitchFamily="34" charset="-120"/>
+              </a:rPr>
+              <a:t>✕  對兌換方式或日期做個人承諾
+</a:t>
+            </a:r>
+            <a:pPr indent="0" marL="0">
+              <a:lnSpc>
+                <a:spcPts val="1300"/>
+              </a:lnSpc>
+              <a:buNone/>
+            </a:pPr>
+            <a:r>
+              <a:rPr lang="en-US" sz="850" dirty="0">
+                <a:solidFill>
+                  <a:srgbClr val="9A3B3B"/>
+                </a:solidFill>
+                <a:latin typeface="Microsoft JhengHei" pitchFamily="34" charset="0"/>
+                <a:ea typeface="Microsoft JhengHei" pitchFamily="34" charset="-122"/>
+                <a:cs typeface="Microsoft JhengHei" pitchFamily="34" charset="-120"/>
+              </a:rPr>
+              <a:t>　  Personal promises about redemption terms or dates</a:t>
+            </a:r>
+            <a:endParaRPr lang="en-US" sz="1150" dirty="0"/>
+          </a:p>
+        </p:txBody>
+      </p:sp>
+      <p:sp>
+        <p:nvSpPr>
+          <p:cNvPr id="21" name="Text 19"/>
+          <p:cNvSpPr/>
+          <p:nvPr/>
+        </p:nvSpPr>
+        <p:spPr>
+          <a:xfrm>
+            <a:off x="5440680" y="3712464"/>
+            <a:ext cx="3063240" cy="475488"/>
+          </a:xfrm>
+          <a:prstGeom prst="rect">
+            <a:avLst/>
+          </a:prstGeom>
+          <a:noFill/>
+          <a:ln/>
+        </p:spPr>
+        <p:txBody>
+          <a:bodyPr wrap="square" rtlCol="0" anchor="ctr"/>
+          <a:lstStyle/>
+          <a:p>
+            <a:pPr indent="0" marL="0">
+              <a:buNone/>
+            </a:pPr>
+            <a:r>
+              <a:rPr lang="en-US" sz="950" dirty="0">
+                <a:solidFill>
+                  <a:srgbClr val="3D3935"/>
+                </a:solidFill>
+                <a:latin typeface="Microsoft JhengHei" pitchFamily="34" charset="0"/>
+                <a:ea typeface="Microsoft JhengHei" pitchFamily="34" charset="-122"/>
+                <a:cs typeface="Microsoft JhengHei" pitchFamily="34" charset="-120"/>
+              </a:rPr>
+              <a:t>一切以活動頁公告與券面規則為準</a:t>
+            </a:r>
+            <a:endParaRPr lang="en-US" sz="950" dirty="0"/>
+          </a:p>
+        </p:txBody>
+      </p:sp>
+      <p:sp>
+        <p:nvSpPr>
+          <p:cNvPr id="22" name="Shape 20"/>
+          <p:cNvSpPr/>
+          <p:nvPr/>
+        </p:nvSpPr>
+        <p:spPr>
+          <a:xfrm>
+            <a:off x="502920" y="4370832"/>
+            <a:ext cx="8138160" cy="530352"/>
+          </a:xfrm>
+          <a:prstGeom prst="roundRect">
+            <a:avLst>
+              <a:gd name="adj" fmla="val 10345"/>
+            </a:avLst>
+          </a:prstGeom>
+          <a:solidFill>
+            <a:srgbClr val="FBF1DC"/>
           </a:solidFill>
           <a:ln w="9525">
             <a:solidFill>
-              <a:srgbClr val="DAD9D6"/>
+              <a:srgbClr val="9C6212"/>
             </a:solidFill>
             <a:prstDash val="solid"/>
           </a:ln>
@@ -5649,604 +6126,78 @@
       </p:sp>
       <p:sp>
         <p:nvSpPr>
-          <p:cNvPr id="8" name="Text 6"/>
-          <p:cNvSpPr/>
-          <p:nvPr/>
-        </p:nvSpPr>
-        <p:spPr>
-          <a:xfrm>
-            <a:off x="685800" y="1280160"/>
-            <a:ext cx="320040" cy="457200"/>
-          </a:xfrm>
-          <a:prstGeom prst="rect">
-            <a:avLst/>
-          </a:prstGeom>
-          <a:noFill/>
-          <a:ln/>
-        </p:spPr>
-        <p:txBody>
-          <a:bodyPr wrap="square" rtlCol="0" anchor="ctr"/>
-          <a:lstStyle/>
-          <a:p>
-            <a:pPr indent="0" marL="0">
-              <a:buNone/>
-            </a:pPr>
-            <a:r>
-              <a:rPr lang="en-US" sz="1400" dirty="0">
-                <a:solidFill>
-                  <a:srgbClr val="B8923E"/>
-                </a:solidFill>
-                <a:latin typeface="Microsoft JhengHei" pitchFamily="34" charset="0"/>
-                <a:ea typeface="Microsoft JhengHei" pitchFamily="34" charset="-122"/>
-                <a:cs typeface="Microsoft JhengHei" pitchFamily="34" charset="-120"/>
-              </a:rPr>
-              <a:t>→</a:t>
-            </a:r>
-            <a:endParaRPr lang="en-US" sz="1400" dirty="0"/>
-          </a:p>
-        </p:txBody>
-      </p:sp>
-      <p:sp>
-        <p:nvSpPr>
-          <p:cNvPr id="9" name="Text 7"/>
-          <p:cNvSpPr/>
-          <p:nvPr/>
-        </p:nvSpPr>
-        <p:spPr>
-          <a:xfrm>
-            <a:off x="1051560" y="1280160"/>
-            <a:ext cx="7406640" cy="475488"/>
-          </a:xfrm>
-          <a:prstGeom prst="rect">
-            <a:avLst/>
-          </a:prstGeom>
-          <a:noFill/>
-          <a:ln/>
-        </p:spPr>
-        <p:txBody>
-          <a:bodyPr wrap="square" rtlCol="0" anchor="ctr"/>
-          <a:lstStyle/>
-          <a:p>
-            <a:pPr indent="0" marL="0">
-              <a:lnSpc>
-                <a:spcPts val="1300"/>
-              </a:lnSpc>
-              <a:buNone/>
-            </a:pPr>
-            <a:r>
-              <a:rPr lang="en-US" sz="1150" dirty="0">
-                <a:solidFill>
-                  <a:srgbClr val="3D3935"/>
-                </a:solidFill>
-                <a:latin typeface="Microsoft JhengHei" pitchFamily="34" charset="0"/>
-                <a:ea typeface="Microsoft JhengHei" pitchFamily="34" charset="-122"/>
-                <a:cs typeface="Microsoft JhengHei" pitchFamily="34" charset="-120"/>
-              </a:rPr>
-              <a:t>客人說沒收到券，且在 LINE 對話中確實找不到
+          <p:cNvPr id="23" name="Text 21"/>
+          <p:cNvSpPr/>
+          <p:nvPr/>
+        </p:nvSpPr>
+        <p:spPr>
+          <a:xfrm>
+            <a:off x="649224" y="4416552"/>
+            <a:ext cx="7845552" cy="438912"/>
+          </a:xfrm>
+          <a:prstGeom prst="rect">
+            <a:avLst/>
+          </a:prstGeom>
+          <a:noFill/>
+          <a:ln/>
+        </p:spPr>
+        <p:txBody>
+          <a:bodyPr wrap="square" rtlCol="0" anchor="ctr"/>
+          <a:lstStyle/>
+          <a:p>
+            <a:pPr indent="0" marL="0">
+              <a:lnSpc>
+                <a:spcPts val="1500"/>
+              </a:lnSpc>
+              <a:buNone/>
+            </a:pPr>
+            <a:r>
+              <a:rPr lang="en-US" sz="1200" dirty="0">
+                <a:solidFill>
+                  <a:srgbClr val="9C6212"/>
+                </a:solidFill>
+                <a:latin typeface="Microsoft JhengHei" pitchFamily="34" charset="0"/>
+                <a:ea typeface="Microsoft JhengHei" pitchFamily="34" charset="-122"/>
+                <a:cs typeface="Microsoft JhengHei" pitchFamily="34" charset="-120"/>
+              </a:rPr>
+              <a:t>🙋  </a:t>
+            </a:r>
+            <a:pPr indent="0" marL="0">
+              <a:lnSpc>
+                <a:spcPts val="1500"/>
+              </a:lnSpc>
+              <a:buNone/>
+            </a:pPr>
+            <a:r>
+              <a:rPr lang="en-US" sz="1150" b="1" dirty="0">
+                <a:solidFill>
+                  <a:srgbClr val="9C6212"/>
+                </a:solidFill>
+                <a:latin typeface="Microsoft JhengHei" pitchFamily="34" charset="0"/>
+                <a:ea typeface="Microsoft JhengHei" pitchFamily="34" charset="-122"/>
+                <a:cs typeface="Microsoft JhengHei" pitchFamily="34" charset="-120"/>
+              </a:rPr>
+              <a:t>遇到無法回答或客人情緒不佳時，請轉給主管處理，不要自行承諾。
 </a:t>
             </a:r>
             <a:pPr indent="0" marL="0">
               <a:lnSpc>
-                <a:spcPts val="1300"/>
-              </a:lnSpc>
-              <a:buNone/>
-            </a:pPr>
-            <a:r>
-              <a:rPr lang="en-US" sz="850" dirty="0">
-                <a:solidFill>
-                  <a:srgbClr val="6E6A63"/>
-                </a:solidFill>
-                <a:latin typeface="Microsoft JhengHei" pitchFamily="34" charset="0"/>
-                <a:ea typeface="Microsoft JhengHei" pitchFamily="34" charset="-122"/>
-                <a:cs typeface="Microsoft JhengHei" pitchFamily="34" charset="-120"/>
-              </a:rPr>
-              <a:t>Guest reports a missing coupon and it is genuinely not in their LINE chat</a:t>
-            </a:r>
-            <a:endParaRPr lang="en-US" sz="1150" dirty="0"/>
-          </a:p>
-        </p:txBody>
-      </p:sp>
-      <p:sp>
-        <p:nvSpPr>
-          <p:cNvPr id="10" name="Shape 8"/>
-          <p:cNvSpPr/>
-          <p:nvPr/>
-        </p:nvSpPr>
-        <p:spPr>
-          <a:xfrm>
-            <a:off x="502920" y="1892808"/>
-            <a:ext cx="8138160" cy="566928"/>
-          </a:xfrm>
-          <a:prstGeom prst="roundRect">
-            <a:avLst>
-              <a:gd name="adj" fmla="val 8065"/>
-            </a:avLst>
-          </a:prstGeom>
-          <a:solidFill>
-            <a:srgbClr val="FFFDFA"/>
-          </a:solidFill>
-          <a:ln w="9525">
-            <a:solidFill>
-              <a:srgbClr val="DAD9D6"/>
-            </a:solidFill>
-            <a:prstDash val="solid"/>
-          </a:ln>
-        </p:spPr>
-      </p:sp>
-      <p:sp>
-        <p:nvSpPr>
-          <p:cNvPr id="11" name="Text 9"/>
-          <p:cNvSpPr/>
-          <p:nvPr/>
-        </p:nvSpPr>
-        <p:spPr>
-          <a:xfrm>
-            <a:off x="685800" y="1938528"/>
-            <a:ext cx="320040" cy="457200"/>
-          </a:xfrm>
-          <a:prstGeom prst="rect">
-            <a:avLst/>
-          </a:prstGeom>
-          <a:noFill/>
-          <a:ln/>
-        </p:spPr>
-        <p:txBody>
-          <a:bodyPr wrap="square" rtlCol="0" anchor="ctr"/>
-          <a:lstStyle/>
-          <a:p>
-            <a:pPr indent="0" marL="0">
-              <a:buNone/>
-            </a:pPr>
-            <a:r>
-              <a:rPr lang="en-US" sz="1400" dirty="0">
-                <a:solidFill>
-                  <a:srgbClr val="B8923E"/>
-                </a:solidFill>
-                <a:latin typeface="Microsoft JhengHei" pitchFamily="34" charset="0"/>
-                <a:ea typeface="Microsoft JhengHei" pitchFamily="34" charset="-122"/>
-                <a:cs typeface="Microsoft JhengHei" pitchFamily="34" charset="-120"/>
-              </a:rPr>
-              <a:t>→</a:t>
-            </a:r>
-            <a:endParaRPr lang="en-US" sz="1400" dirty="0"/>
-          </a:p>
-        </p:txBody>
-      </p:sp>
-      <p:sp>
-        <p:nvSpPr>
-          <p:cNvPr id="12" name="Text 10"/>
-          <p:cNvSpPr/>
-          <p:nvPr/>
-        </p:nvSpPr>
-        <p:spPr>
-          <a:xfrm>
-            <a:off x="1051560" y="1938528"/>
-            <a:ext cx="7406640" cy="475488"/>
-          </a:xfrm>
-          <a:prstGeom prst="rect">
-            <a:avLst/>
-          </a:prstGeom>
-          <a:noFill/>
-          <a:ln/>
-        </p:spPr>
-        <p:txBody>
-          <a:bodyPr wrap="square" rtlCol="0" anchor="ctr"/>
-          <a:lstStyle/>
-          <a:p>
-            <a:pPr indent="0" marL="0">
-              <a:lnSpc>
-                <a:spcPts val="1300"/>
-              </a:lnSpc>
-              <a:buNone/>
-            </a:pPr>
-            <a:r>
-              <a:rPr lang="en-US" sz="1150" dirty="0">
-                <a:solidFill>
-                  <a:srgbClr val="3D3935"/>
-                </a:solidFill>
-                <a:latin typeface="Microsoft JhengHei" pitchFamily="34" charset="0"/>
-                <a:ea typeface="Microsoft JhengHei" pitchFamily="34" charset="-122"/>
-                <a:cs typeface="Microsoft JhengHei" pitchFamily="34" charset="-120"/>
-              </a:rPr>
-              <a:t>客人的兌換碼查不到，或狀態異常
-</a:t>
-            </a:r>
-            <a:pPr indent="0" marL="0">
-              <a:lnSpc>
-                <a:spcPts val="1300"/>
-              </a:lnSpc>
-              <a:buNone/>
-            </a:pPr>
-            <a:r>
-              <a:rPr lang="en-US" sz="850" dirty="0">
-                <a:solidFill>
-                  <a:srgbClr val="6E6A63"/>
-                </a:solidFill>
-                <a:latin typeface="Microsoft JhengHei" pitchFamily="34" charset="0"/>
-                <a:ea typeface="Microsoft JhengHei" pitchFamily="34" charset="-122"/>
-                <a:cs typeface="Microsoft JhengHei" pitchFamily="34" charset="-120"/>
-              </a:rPr>
-              <a:t>A redemption code cannot be found, or its status looks wrong</a:t>
-            </a:r>
-            <a:endParaRPr lang="en-US" sz="1150" dirty="0"/>
-          </a:p>
-        </p:txBody>
-      </p:sp>
-      <p:sp>
-        <p:nvSpPr>
-          <p:cNvPr id="13" name="Shape 11"/>
-          <p:cNvSpPr/>
-          <p:nvPr/>
-        </p:nvSpPr>
-        <p:spPr>
-          <a:xfrm>
-            <a:off x="502920" y="2551176"/>
-            <a:ext cx="8138160" cy="566928"/>
-          </a:xfrm>
-          <a:prstGeom prst="roundRect">
-            <a:avLst>
-              <a:gd name="adj" fmla="val 8065"/>
-            </a:avLst>
-          </a:prstGeom>
-          <a:solidFill>
-            <a:srgbClr val="FFFDFA"/>
-          </a:solidFill>
-          <a:ln w="9525">
-            <a:solidFill>
-              <a:srgbClr val="DAD9D6"/>
-            </a:solidFill>
-            <a:prstDash val="solid"/>
-          </a:ln>
-        </p:spPr>
-      </p:sp>
-      <p:sp>
-        <p:nvSpPr>
-          <p:cNvPr id="14" name="Text 12"/>
-          <p:cNvSpPr/>
-          <p:nvPr/>
-        </p:nvSpPr>
-        <p:spPr>
-          <a:xfrm>
-            <a:off x="685800" y="2596896"/>
-            <a:ext cx="320040" cy="457200"/>
-          </a:xfrm>
-          <a:prstGeom prst="rect">
-            <a:avLst/>
-          </a:prstGeom>
-          <a:noFill/>
-          <a:ln/>
-        </p:spPr>
-        <p:txBody>
-          <a:bodyPr wrap="square" rtlCol="0" anchor="ctr"/>
-          <a:lstStyle/>
-          <a:p>
-            <a:pPr indent="0" marL="0">
-              <a:buNone/>
-            </a:pPr>
-            <a:r>
-              <a:rPr lang="en-US" sz="1400" dirty="0">
-                <a:solidFill>
-                  <a:srgbClr val="B8923E"/>
-                </a:solidFill>
-                <a:latin typeface="Microsoft JhengHei" pitchFamily="34" charset="0"/>
-                <a:ea typeface="Microsoft JhengHei" pitchFamily="34" charset="-122"/>
-                <a:cs typeface="Microsoft JhengHei" pitchFamily="34" charset="-120"/>
-              </a:rPr>
-              <a:t>→</a:t>
-            </a:r>
-            <a:endParaRPr lang="en-US" sz="1400" dirty="0"/>
-          </a:p>
-        </p:txBody>
-      </p:sp>
-      <p:sp>
-        <p:nvSpPr>
-          <p:cNvPr id="15" name="Text 13"/>
-          <p:cNvSpPr/>
-          <p:nvPr/>
-        </p:nvSpPr>
-        <p:spPr>
-          <a:xfrm>
-            <a:off x="1051560" y="2596896"/>
-            <a:ext cx="7406640" cy="475488"/>
-          </a:xfrm>
-          <a:prstGeom prst="rect">
-            <a:avLst/>
-          </a:prstGeom>
-          <a:noFill/>
-          <a:ln/>
-        </p:spPr>
-        <p:txBody>
-          <a:bodyPr wrap="square" rtlCol="0" anchor="ctr"/>
-          <a:lstStyle/>
-          <a:p>
-            <a:pPr indent="0" marL="0">
-              <a:lnSpc>
-                <a:spcPts val="1300"/>
-              </a:lnSpc>
-              <a:buNone/>
-            </a:pPr>
-            <a:r>
-              <a:rPr lang="en-US" sz="1150" dirty="0">
-                <a:solidFill>
-                  <a:srgbClr val="3D3935"/>
-                </a:solidFill>
-                <a:latin typeface="Microsoft JhengHei" pitchFamily="34" charset="0"/>
-                <a:ea typeface="Microsoft JhengHei" pitchFamily="34" charset="-122"/>
-                <a:cs typeface="Microsoft JhengHei" pitchFamily="34" charset="-120"/>
-              </a:rPr>
-              <a:t>客人拿臺北洲際的兌換碼到高雄要求核銷
-</a:t>
-            </a:r>
-            <a:pPr indent="0" marL="0">
-              <a:lnSpc>
-                <a:spcPts val="1300"/>
-              </a:lnSpc>
-              <a:buNone/>
-            </a:pPr>
-            <a:r>
-              <a:rPr lang="en-US" sz="850" dirty="0">
-                <a:solidFill>
-                  <a:srgbClr val="6E6A63"/>
-                </a:solidFill>
-                <a:latin typeface="Microsoft JhengHei" pitchFamily="34" charset="0"/>
-                <a:ea typeface="Microsoft JhengHei" pitchFamily="34" charset="-122"/>
-                <a:cs typeface="Microsoft JhengHei" pitchFamily="34" charset="-120"/>
-              </a:rPr>
-              <a:t>A guest presents a Taipei redemption code at a Kaohsiung counter</a:t>
-            </a:r>
-            <a:endParaRPr lang="en-US" sz="1150" dirty="0"/>
-          </a:p>
-        </p:txBody>
-      </p:sp>
-      <p:sp>
-        <p:nvSpPr>
-          <p:cNvPr id="16" name="Shape 14"/>
-          <p:cNvSpPr/>
-          <p:nvPr/>
-        </p:nvSpPr>
-        <p:spPr>
-          <a:xfrm>
-            <a:off x="502920" y="3209544"/>
-            <a:ext cx="8138160" cy="566928"/>
-          </a:xfrm>
-          <a:prstGeom prst="roundRect">
-            <a:avLst>
-              <a:gd name="adj" fmla="val 8065"/>
-            </a:avLst>
-          </a:prstGeom>
-          <a:solidFill>
-            <a:srgbClr val="FFFDFA"/>
-          </a:solidFill>
-          <a:ln w="9525">
-            <a:solidFill>
-              <a:srgbClr val="DAD9D6"/>
-            </a:solidFill>
-            <a:prstDash val="solid"/>
-          </a:ln>
-        </p:spPr>
-      </p:sp>
-      <p:sp>
-        <p:nvSpPr>
-          <p:cNvPr id="17" name="Text 15"/>
-          <p:cNvSpPr/>
-          <p:nvPr/>
-        </p:nvSpPr>
-        <p:spPr>
-          <a:xfrm>
-            <a:off x="685800" y="3255264"/>
-            <a:ext cx="320040" cy="457200"/>
-          </a:xfrm>
-          <a:prstGeom prst="rect">
-            <a:avLst/>
-          </a:prstGeom>
-          <a:noFill/>
-          <a:ln/>
-        </p:spPr>
-        <p:txBody>
-          <a:bodyPr wrap="square" rtlCol="0" anchor="ctr"/>
-          <a:lstStyle/>
-          <a:p>
-            <a:pPr indent="0" marL="0">
-              <a:buNone/>
-            </a:pPr>
-            <a:r>
-              <a:rPr lang="en-US" sz="1400" dirty="0">
-                <a:solidFill>
-                  <a:srgbClr val="B8923E"/>
-                </a:solidFill>
-                <a:latin typeface="Microsoft JhengHei" pitchFamily="34" charset="0"/>
-                <a:ea typeface="Microsoft JhengHei" pitchFamily="34" charset="-122"/>
-                <a:cs typeface="Microsoft JhengHei" pitchFamily="34" charset="-120"/>
-              </a:rPr>
-              <a:t>→</a:t>
-            </a:r>
-            <a:endParaRPr lang="en-US" sz="1400" dirty="0"/>
-          </a:p>
-        </p:txBody>
-      </p:sp>
-      <p:sp>
-        <p:nvSpPr>
-          <p:cNvPr id="18" name="Text 16"/>
-          <p:cNvSpPr/>
-          <p:nvPr/>
-        </p:nvSpPr>
-        <p:spPr>
-          <a:xfrm>
-            <a:off x="1051560" y="3255264"/>
-            <a:ext cx="7406640" cy="475488"/>
-          </a:xfrm>
-          <a:prstGeom prst="rect">
-            <a:avLst/>
-          </a:prstGeom>
-          <a:noFill/>
-          <a:ln/>
-        </p:spPr>
-        <p:txBody>
-          <a:bodyPr wrap="square" rtlCol="0" anchor="ctr"/>
-          <a:lstStyle/>
-          <a:p>
-            <a:pPr indent="0" marL="0">
-              <a:lnSpc>
-                <a:spcPts val="1300"/>
-              </a:lnSpc>
-              <a:buNone/>
-            </a:pPr>
-            <a:r>
-              <a:rPr lang="en-US" sz="1150" dirty="0">
-                <a:solidFill>
-                  <a:srgbClr val="3D3935"/>
-                </a:solidFill>
-                <a:latin typeface="Microsoft JhengHei" pitchFamily="34" charset="0"/>
-                <a:ea typeface="Microsoft JhengHei" pitchFamily="34" charset="-122"/>
-                <a:cs typeface="Microsoft JhengHei" pitchFamily="34" charset="-120"/>
-              </a:rPr>
-              <a:t>客人對中獎結果或活動規則提出申訴
-</a:t>
-            </a:r>
-            <a:pPr indent="0" marL="0">
-              <a:lnSpc>
-                <a:spcPts val="1300"/>
-              </a:lnSpc>
-              <a:buNone/>
-            </a:pPr>
-            <a:r>
-              <a:rPr lang="en-US" sz="850" dirty="0">
-                <a:solidFill>
-                  <a:srgbClr val="6E6A63"/>
-                </a:solidFill>
-                <a:latin typeface="Microsoft JhengHei" pitchFamily="34" charset="0"/>
-                <a:ea typeface="Microsoft JhengHei" pitchFamily="34" charset="-122"/>
-                <a:cs typeface="Microsoft JhengHei" pitchFamily="34" charset="-120"/>
-              </a:rPr>
-              <a:t>A guest disputes the result or the campaign rules</a:t>
-            </a:r>
-            <a:endParaRPr lang="en-US" sz="1150" dirty="0"/>
-          </a:p>
-        </p:txBody>
-      </p:sp>
-      <p:sp>
-        <p:nvSpPr>
-          <p:cNvPr id="19" name="Shape 17"/>
-          <p:cNvSpPr/>
-          <p:nvPr/>
-        </p:nvSpPr>
-        <p:spPr>
-          <a:xfrm>
-            <a:off x="502920" y="3867912"/>
-            <a:ext cx="8138160" cy="566928"/>
-          </a:xfrm>
-          <a:prstGeom prst="roundRect">
-            <a:avLst>
-              <a:gd name="adj" fmla="val 8065"/>
-            </a:avLst>
-          </a:prstGeom>
-          <a:solidFill>
-            <a:srgbClr val="FFFDFA"/>
-          </a:solidFill>
-          <a:ln w="9525">
-            <a:solidFill>
-              <a:srgbClr val="DAD9D6"/>
-            </a:solidFill>
-            <a:prstDash val="solid"/>
-          </a:ln>
-        </p:spPr>
-      </p:sp>
-      <p:sp>
-        <p:nvSpPr>
-          <p:cNvPr id="20" name="Text 18"/>
-          <p:cNvSpPr/>
-          <p:nvPr/>
-        </p:nvSpPr>
-        <p:spPr>
-          <a:xfrm>
-            <a:off x="685800" y="3913632"/>
-            <a:ext cx="320040" cy="457200"/>
-          </a:xfrm>
-          <a:prstGeom prst="rect">
-            <a:avLst/>
-          </a:prstGeom>
-          <a:noFill/>
-          <a:ln/>
-        </p:spPr>
-        <p:txBody>
-          <a:bodyPr wrap="square" rtlCol="0" anchor="ctr"/>
-          <a:lstStyle/>
-          <a:p>
-            <a:pPr indent="0" marL="0">
-              <a:buNone/>
-            </a:pPr>
-            <a:r>
-              <a:rPr lang="en-US" sz="1400" dirty="0">
-                <a:solidFill>
-                  <a:srgbClr val="B8923E"/>
-                </a:solidFill>
-                <a:latin typeface="Microsoft JhengHei" pitchFamily="34" charset="0"/>
-                <a:ea typeface="Microsoft JhengHei" pitchFamily="34" charset="-122"/>
-                <a:cs typeface="Microsoft JhengHei" pitchFamily="34" charset="-120"/>
-              </a:rPr>
-              <a:t>→</a:t>
-            </a:r>
-            <a:endParaRPr lang="en-US" sz="1400" dirty="0"/>
-          </a:p>
-        </p:txBody>
-      </p:sp>
-      <p:sp>
-        <p:nvSpPr>
-          <p:cNvPr id="21" name="Text 19"/>
-          <p:cNvSpPr/>
-          <p:nvPr/>
-        </p:nvSpPr>
-        <p:spPr>
-          <a:xfrm>
-            <a:off x="1051560" y="3913632"/>
-            <a:ext cx="7406640" cy="475488"/>
-          </a:xfrm>
-          <a:prstGeom prst="rect">
-            <a:avLst/>
-          </a:prstGeom>
-          <a:noFill/>
-          <a:ln/>
-        </p:spPr>
-        <p:txBody>
-          <a:bodyPr wrap="square" rtlCol="0" anchor="ctr"/>
-          <a:lstStyle/>
-          <a:p>
-            <a:pPr indent="0" marL="0">
-              <a:lnSpc>
-                <a:spcPts val="1300"/>
-              </a:lnSpc>
-              <a:buNone/>
-            </a:pPr>
-            <a:r>
-              <a:rPr lang="en-US" sz="1150" dirty="0">
-                <a:solidFill>
-                  <a:srgbClr val="3D3935"/>
-                </a:solidFill>
-                <a:latin typeface="Microsoft JhengHei" pitchFamily="34" charset="0"/>
-                <a:ea typeface="Microsoft JhengHei" pitchFamily="34" charset="-122"/>
-                <a:cs typeface="Microsoft JhengHei" pitchFamily="34" charset="-120"/>
-              </a:rPr>
-              <a:t>同一位客人短時間內出現大量中獎紀錄
-</a:t>
-            </a:r>
-            <a:pPr indent="0" marL="0">
-              <a:lnSpc>
-                <a:spcPts val="1300"/>
-              </a:lnSpc>
-              <a:buNone/>
-            </a:pPr>
-            <a:r>
-              <a:rPr lang="en-US" sz="850" dirty="0">
-                <a:solidFill>
-                  <a:srgbClr val="6E6A63"/>
-                </a:solidFill>
-                <a:latin typeface="Microsoft JhengHei" pitchFamily="34" charset="0"/>
-                <a:ea typeface="Microsoft JhengHei" pitchFamily="34" charset="-122"/>
-                <a:cs typeface="Microsoft JhengHei" pitchFamily="34" charset="-120"/>
-              </a:rPr>
-              <a:t>One guest shows an unusually high number of wins in a short period</a:t>
-            </a:r>
-            <a:endParaRPr lang="en-US" sz="1150" dirty="0"/>
+                <a:spcPts val="1500"/>
+              </a:lnSpc>
+              <a:buNone/>
+            </a:pPr>
+            <a:r>
+              <a:rPr lang="en-US" sz="950" dirty="0">
+                <a:solidFill>
+                  <a:srgbClr val="9C6212"/>
+                </a:solidFill>
+                <a:latin typeface="Microsoft JhengHei" pitchFamily="34" charset="0"/>
+                <a:ea typeface="Microsoft JhengHei" pitchFamily="34" charset="-122"/>
+                <a:cs typeface="Microsoft JhengHei" pitchFamily="34" charset="-120"/>
+              </a:rPr>
+              <a:t>　　 If you cannot answer, or the guest is upset, escalate to your supervisor — do not make commitments yourself.</a:t>
+            </a:r>
+            <a:endParaRPr lang="en-US" sz="1200" dirty="0"/>
           </a:p>
         </p:txBody>
       </p:sp>
@@ -6261,6 +6212,844 @@
 <file path=ppt/slides/slide15.xml><?xml version="1.0" encoding="utf-8"?>
 <p:sld xmlns:a="http://schemas.openxmlformats.org/drawingml/2006/main" xmlns:r="http://schemas.openxmlformats.org/officeDocument/2006/relationships" xmlns:p="http://schemas.openxmlformats.org/presentationml/2006/main">
   <p:cSld name="Slide 15">
+    <p:bg>
+      <p:bgPr>
+        <a:solidFill>
+          <a:srgbClr val="FAF8F6"/>
+        </a:solidFill>
+      </p:bgPr>
+    </p:bg>
+    <p:spTree>
+      <p:nvGrpSpPr>
+        <p:cNvPr id="1" name=""/>
+        <p:cNvGrpSpPr/>
+        <p:nvPr/>
+      </p:nvGrpSpPr>
+      <p:grpSpPr>
+        <a:xfrm>
+          <a:off x="0" y="0"/>
+          <a:ext cx="0" cy="0"/>
+          <a:chOff x="0" y="0"/>
+          <a:chExt cx="0" cy="0"/>
+        </a:xfrm>
+      </p:grpSpPr>
+      <p:sp>
+        <p:nvSpPr>
+          <p:cNvPr id="2" name="Text 0"/>
+          <p:cNvSpPr/>
+          <p:nvPr/>
+        </p:nvSpPr>
+        <p:spPr>
+          <a:xfrm>
+            <a:off x="502920" y="274320"/>
+            <a:ext cx="8138160" cy="384048"/>
+          </a:xfrm>
+          <a:prstGeom prst="rect">
+            <a:avLst/>
+          </a:prstGeom>
+          <a:noFill/>
+          <a:ln/>
+        </p:spPr>
+        <p:txBody>
+          <a:bodyPr wrap="square" rtlCol="0" anchor="ctr"/>
+          <a:lstStyle/>
+          <a:p>
+            <a:pPr indent="0" marL="0">
+              <a:buNone/>
+            </a:pPr>
+            <a:r>
+              <a:rPr lang="en-US" sz="2200" b="1" dirty="0">
+                <a:solidFill>
+                  <a:srgbClr val="3D3935"/>
+                </a:solidFill>
+                <a:latin typeface="Microsoft JhengHei" pitchFamily="34" charset="0"/>
+                <a:ea typeface="Microsoft JhengHei" pitchFamily="34" charset="-122"/>
+                <a:cs typeface="Microsoft JhengHei" pitchFamily="34" charset="-120"/>
+              </a:rPr>
+              <a:t>九、什麼狀況要往上回報</a:t>
+            </a:r>
+            <a:endParaRPr lang="en-US" sz="2200" dirty="0"/>
+          </a:p>
+        </p:txBody>
+      </p:sp>
+      <p:sp>
+        <p:nvSpPr>
+          <p:cNvPr id="3" name="Text 1"/>
+          <p:cNvSpPr/>
+          <p:nvPr/>
+        </p:nvSpPr>
+        <p:spPr>
+          <a:xfrm>
+            <a:off x="502920" y="658368"/>
+            <a:ext cx="8138160" cy="256032"/>
+          </a:xfrm>
+          <a:prstGeom prst="rect">
+            <a:avLst/>
+          </a:prstGeom>
+          <a:noFill/>
+          <a:ln/>
+        </p:spPr>
+        <p:txBody>
+          <a:bodyPr wrap="square" rtlCol="0" anchor="ctr"/>
+          <a:lstStyle/>
+          <a:p>
+            <a:pPr indent="0" marL="0">
+              <a:buNone/>
+            </a:pPr>
+            <a:r>
+              <a:rPr lang="en-US" sz="1150" dirty="0">
+                <a:solidFill>
+                  <a:srgbClr val="6E6A63"/>
+                </a:solidFill>
+                <a:latin typeface="Microsoft JhengHei" pitchFamily="34" charset="0"/>
+                <a:ea typeface="Microsoft JhengHei" pitchFamily="34" charset="-122"/>
+                <a:cs typeface="Microsoft JhengHei" pitchFamily="34" charset="-120"/>
+              </a:rPr>
+              <a:t>When to Escalate</a:t>
+            </a:r>
+            <a:endParaRPr lang="en-US" sz="1150" dirty="0"/>
+          </a:p>
+        </p:txBody>
+      </p:sp>
+      <p:sp>
+        <p:nvSpPr>
+          <p:cNvPr id="4" name="Shape 2"/>
+          <p:cNvSpPr/>
+          <p:nvPr/>
+        </p:nvSpPr>
+        <p:spPr>
+          <a:xfrm>
+            <a:off x="502920" y="941832"/>
+            <a:ext cx="457200" cy="36576"/>
+          </a:xfrm>
+          <a:prstGeom prst="rect">
+            <a:avLst/>
+          </a:prstGeom>
+          <a:solidFill>
+            <a:srgbClr val="935D08"/>
+          </a:solidFill>
+          <a:ln/>
+        </p:spPr>
+      </p:sp>
+      <p:sp>
+        <p:nvSpPr>
+          <p:cNvPr id="5" name="Text 3"/>
+          <p:cNvSpPr/>
+          <p:nvPr/>
+        </p:nvSpPr>
+        <p:spPr>
+          <a:xfrm>
+            <a:off x="8366760" y="4777740"/>
+            <a:ext cx="365760" cy="237744"/>
+          </a:xfrm>
+          <a:prstGeom prst="rect">
+            <a:avLst/>
+          </a:prstGeom>
+          <a:noFill/>
+          <a:ln/>
+        </p:spPr>
+        <p:txBody>
+          <a:bodyPr wrap="square" rtlCol="0" anchor="ctr"/>
+          <a:lstStyle/>
+          <a:p>
+            <a:pPr algn="r" indent="0" marL="0">
+              <a:buNone/>
+            </a:pPr>
+            <a:r>
+              <a:rPr lang="en-US" sz="950" dirty="0">
+                <a:solidFill>
+                  <a:srgbClr val="DAD9D6"/>
+                </a:solidFill>
+                <a:latin typeface="Microsoft JhengHei" pitchFamily="34" charset="0"/>
+                <a:ea typeface="Microsoft JhengHei" pitchFamily="34" charset="-122"/>
+                <a:cs typeface="Microsoft JhengHei" pitchFamily="34" charset="-120"/>
+              </a:rPr>
+              <a:t>14</a:t>
+            </a:r>
+            <a:endParaRPr lang="en-US" sz="950" dirty="0"/>
+          </a:p>
+        </p:txBody>
+      </p:sp>
+      <p:sp>
+        <p:nvSpPr>
+          <p:cNvPr id="6" name="Text 4"/>
+          <p:cNvSpPr/>
+          <p:nvPr/>
+        </p:nvSpPr>
+        <p:spPr>
+          <a:xfrm>
+            <a:off x="502920" y="4777740"/>
+            <a:ext cx="5486400" cy="237744"/>
+          </a:xfrm>
+          <a:prstGeom prst="rect">
+            <a:avLst/>
+          </a:prstGeom>
+          <a:noFill/>
+          <a:ln/>
+        </p:spPr>
+        <p:txBody>
+          <a:bodyPr wrap="square" rtlCol="0" anchor="ctr"/>
+          <a:lstStyle/>
+          <a:p>
+            <a:pPr indent="0" marL="0">
+              <a:buNone/>
+            </a:pPr>
+            <a:r>
+              <a:rPr lang="en-US" sz="850" dirty="0">
+                <a:solidFill>
+                  <a:srgbClr val="DAD9D6"/>
+                </a:solidFill>
+                <a:latin typeface="Microsoft JhengHei" pitchFamily="34" charset="0"/>
+                <a:ea typeface="Microsoft JhengHei" pitchFamily="34" charset="-122"/>
+                <a:cs typeface="Microsoft JhengHei" pitchFamily="34" charset="-120"/>
+              </a:rPr>
+              <a:t>洲遊幣 Lite 員工手冊 · InterCoins Lite Staff Guide</a:t>
+            </a:r>
+            <a:endParaRPr lang="en-US" sz="850" dirty="0"/>
+          </a:p>
+        </p:txBody>
+      </p:sp>
+      <p:sp>
+        <p:nvSpPr>
+          <p:cNvPr id="7" name="Shape 5"/>
+          <p:cNvSpPr/>
+          <p:nvPr/>
+        </p:nvSpPr>
+        <p:spPr>
+          <a:xfrm>
+            <a:off x="502920" y="1234440"/>
+            <a:ext cx="8138160" cy="566928"/>
+          </a:xfrm>
+          <a:prstGeom prst="roundRect">
+            <a:avLst>
+              <a:gd name="adj" fmla="val 8065"/>
+            </a:avLst>
+          </a:prstGeom>
+          <a:solidFill>
+            <a:srgbClr val="FFFDFA"/>
+          </a:solidFill>
+          <a:ln w="9525">
+            <a:solidFill>
+              <a:srgbClr val="DAD9D6"/>
+            </a:solidFill>
+            <a:prstDash val="solid"/>
+          </a:ln>
+        </p:spPr>
+      </p:sp>
+      <p:sp>
+        <p:nvSpPr>
+          <p:cNvPr id="8" name="Text 6"/>
+          <p:cNvSpPr/>
+          <p:nvPr/>
+        </p:nvSpPr>
+        <p:spPr>
+          <a:xfrm>
+            <a:off x="685800" y="1280160"/>
+            <a:ext cx="320040" cy="457200"/>
+          </a:xfrm>
+          <a:prstGeom prst="rect">
+            <a:avLst/>
+          </a:prstGeom>
+          <a:noFill/>
+          <a:ln/>
+        </p:spPr>
+        <p:txBody>
+          <a:bodyPr wrap="square" rtlCol="0" anchor="ctr"/>
+          <a:lstStyle/>
+          <a:p>
+            <a:pPr indent="0" marL="0">
+              <a:buNone/>
+            </a:pPr>
+            <a:r>
+              <a:rPr lang="en-US" sz="1400" dirty="0">
+                <a:solidFill>
+                  <a:srgbClr val="B8923E"/>
+                </a:solidFill>
+                <a:latin typeface="Microsoft JhengHei" pitchFamily="34" charset="0"/>
+                <a:ea typeface="Microsoft JhengHei" pitchFamily="34" charset="-122"/>
+                <a:cs typeface="Microsoft JhengHei" pitchFamily="34" charset="-120"/>
+              </a:rPr>
+              <a:t>→</a:t>
+            </a:r>
+            <a:endParaRPr lang="en-US" sz="1400" dirty="0"/>
+          </a:p>
+        </p:txBody>
+      </p:sp>
+      <p:sp>
+        <p:nvSpPr>
+          <p:cNvPr id="9" name="Text 7"/>
+          <p:cNvSpPr/>
+          <p:nvPr/>
+        </p:nvSpPr>
+        <p:spPr>
+          <a:xfrm>
+            <a:off x="1051560" y="1280160"/>
+            <a:ext cx="7406640" cy="475488"/>
+          </a:xfrm>
+          <a:prstGeom prst="rect">
+            <a:avLst/>
+          </a:prstGeom>
+          <a:noFill/>
+          <a:ln/>
+        </p:spPr>
+        <p:txBody>
+          <a:bodyPr wrap="square" rtlCol="0" anchor="ctr"/>
+          <a:lstStyle/>
+          <a:p>
+            <a:pPr indent="0" marL="0">
+              <a:lnSpc>
+                <a:spcPts val="1300"/>
+              </a:lnSpc>
+              <a:buNone/>
+            </a:pPr>
+            <a:r>
+              <a:rPr lang="en-US" sz="1150" dirty="0">
+                <a:solidFill>
+                  <a:srgbClr val="3D3935"/>
+                </a:solidFill>
+                <a:latin typeface="Microsoft JhengHei" pitchFamily="34" charset="0"/>
+                <a:ea typeface="Microsoft JhengHei" pitchFamily="34" charset="-122"/>
+                <a:cs typeface="Microsoft JhengHei" pitchFamily="34" charset="-120"/>
+              </a:rPr>
+              <a:t>客人說沒收到券，且在 LINE 對話中確實找不到
+</a:t>
+            </a:r>
+            <a:pPr indent="0" marL="0">
+              <a:lnSpc>
+                <a:spcPts val="1300"/>
+              </a:lnSpc>
+              <a:buNone/>
+            </a:pPr>
+            <a:r>
+              <a:rPr lang="en-US" sz="850" dirty="0">
+                <a:solidFill>
+                  <a:srgbClr val="6E6A63"/>
+                </a:solidFill>
+                <a:latin typeface="Microsoft JhengHei" pitchFamily="34" charset="0"/>
+                <a:ea typeface="Microsoft JhengHei" pitchFamily="34" charset="-122"/>
+                <a:cs typeface="Microsoft JhengHei" pitchFamily="34" charset="-120"/>
+              </a:rPr>
+              <a:t>Guest reports a missing coupon and it is genuinely not in their LINE chat</a:t>
+            </a:r>
+            <a:endParaRPr lang="en-US" sz="1150" dirty="0"/>
+          </a:p>
+        </p:txBody>
+      </p:sp>
+      <p:sp>
+        <p:nvSpPr>
+          <p:cNvPr id="10" name="Shape 8"/>
+          <p:cNvSpPr/>
+          <p:nvPr/>
+        </p:nvSpPr>
+        <p:spPr>
+          <a:xfrm>
+            <a:off x="502920" y="1892808"/>
+            <a:ext cx="8138160" cy="566928"/>
+          </a:xfrm>
+          <a:prstGeom prst="roundRect">
+            <a:avLst>
+              <a:gd name="adj" fmla="val 8065"/>
+            </a:avLst>
+          </a:prstGeom>
+          <a:solidFill>
+            <a:srgbClr val="FFFDFA"/>
+          </a:solidFill>
+          <a:ln w="9525">
+            <a:solidFill>
+              <a:srgbClr val="DAD9D6"/>
+            </a:solidFill>
+            <a:prstDash val="solid"/>
+          </a:ln>
+        </p:spPr>
+      </p:sp>
+      <p:sp>
+        <p:nvSpPr>
+          <p:cNvPr id="11" name="Text 9"/>
+          <p:cNvSpPr/>
+          <p:nvPr/>
+        </p:nvSpPr>
+        <p:spPr>
+          <a:xfrm>
+            <a:off x="685800" y="1938528"/>
+            <a:ext cx="320040" cy="457200"/>
+          </a:xfrm>
+          <a:prstGeom prst="rect">
+            <a:avLst/>
+          </a:prstGeom>
+          <a:noFill/>
+          <a:ln/>
+        </p:spPr>
+        <p:txBody>
+          <a:bodyPr wrap="square" rtlCol="0" anchor="ctr"/>
+          <a:lstStyle/>
+          <a:p>
+            <a:pPr indent="0" marL="0">
+              <a:buNone/>
+            </a:pPr>
+            <a:r>
+              <a:rPr lang="en-US" sz="1400" dirty="0">
+                <a:solidFill>
+                  <a:srgbClr val="B8923E"/>
+                </a:solidFill>
+                <a:latin typeface="Microsoft JhengHei" pitchFamily="34" charset="0"/>
+                <a:ea typeface="Microsoft JhengHei" pitchFamily="34" charset="-122"/>
+                <a:cs typeface="Microsoft JhengHei" pitchFamily="34" charset="-120"/>
+              </a:rPr>
+              <a:t>→</a:t>
+            </a:r>
+            <a:endParaRPr lang="en-US" sz="1400" dirty="0"/>
+          </a:p>
+        </p:txBody>
+      </p:sp>
+      <p:sp>
+        <p:nvSpPr>
+          <p:cNvPr id="12" name="Text 10"/>
+          <p:cNvSpPr/>
+          <p:nvPr/>
+        </p:nvSpPr>
+        <p:spPr>
+          <a:xfrm>
+            <a:off x="1051560" y="1938528"/>
+            <a:ext cx="7406640" cy="475488"/>
+          </a:xfrm>
+          <a:prstGeom prst="rect">
+            <a:avLst/>
+          </a:prstGeom>
+          <a:noFill/>
+          <a:ln/>
+        </p:spPr>
+        <p:txBody>
+          <a:bodyPr wrap="square" rtlCol="0" anchor="ctr"/>
+          <a:lstStyle/>
+          <a:p>
+            <a:pPr indent="0" marL="0">
+              <a:lnSpc>
+                <a:spcPts val="1300"/>
+              </a:lnSpc>
+              <a:buNone/>
+            </a:pPr>
+            <a:r>
+              <a:rPr lang="en-US" sz="1150" dirty="0">
+                <a:solidFill>
+                  <a:srgbClr val="3D3935"/>
+                </a:solidFill>
+                <a:latin typeface="Microsoft JhengHei" pitchFamily="34" charset="0"/>
+                <a:ea typeface="Microsoft JhengHei" pitchFamily="34" charset="-122"/>
+                <a:cs typeface="Microsoft JhengHei" pitchFamily="34" charset="-120"/>
+              </a:rPr>
+              <a:t>客人的兌換碼查不到，或狀態異常
+</a:t>
+            </a:r>
+            <a:pPr indent="0" marL="0">
+              <a:lnSpc>
+                <a:spcPts val="1300"/>
+              </a:lnSpc>
+              <a:buNone/>
+            </a:pPr>
+            <a:r>
+              <a:rPr lang="en-US" sz="850" dirty="0">
+                <a:solidFill>
+                  <a:srgbClr val="6E6A63"/>
+                </a:solidFill>
+                <a:latin typeface="Microsoft JhengHei" pitchFamily="34" charset="0"/>
+                <a:ea typeface="Microsoft JhengHei" pitchFamily="34" charset="-122"/>
+                <a:cs typeface="Microsoft JhengHei" pitchFamily="34" charset="-120"/>
+              </a:rPr>
+              <a:t>A redemption code cannot be found, or its status looks wrong</a:t>
+            </a:r>
+            <a:endParaRPr lang="en-US" sz="1150" dirty="0"/>
+          </a:p>
+        </p:txBody>
+      </p:sp>
+      <p:sp>
+        <p:nvSpPr>
+          <p:cNvPr id="13" name="Shape 11"/>
+          <p:cNvSpPr/>
+          <p:nvPr/>
+        </p:nvSpPr>
+        <p:spPr>
+          <a:xfrm>
+            <a:off x="502920" y="2551176"/>
+            <a:ext cx="8138160" cy="566928"/>
+          </a:xfrm>
+          <a:prstGeom prst="roundRect">
+            <a:avLst>
+              <a:gd name="adj" fmla="val 8065"/>
+            </a:avLst>
+          </a:prstGeom>
+          <a:solidFill>
+            <a:srgbClr val="FFFDFA"/>
+          </a:solidFill>
+          <a:ln w="9525">
+            <a:solidFill>
+              <a:srgbClr val="DAD9D6"/>
+            </a:solidFill>
+            <a:prstDash val="solid"/>
+          </a:ln>
+        </p:spPr>
+      </p:sp>
+      <p:sp>
+        <p:nvSpPr>
+          <p:cNvPr id="14" name="Text 12"/>
+          <p:cNvSpPr/>
+          <p:nvPr/>
+        </p:nvSpPr>
+        <p:spPr>
+          <a:xfrm>
+            <a:off x="685800" y="2596896"/>
+            <a:ext cx="320040" cy="457200"/>
+          </a:xfrm>
+          <a:prstGeom prst="rect">
+            <a:avLst/>
+          </a:prstGeom>
+          <a:noFill/>
+          <a:ln/>
+        </p:spPr>
+        <p:txBody>
+          <a:bodyPr wrap="square" rtlCol="0" anchor="ctr"/>
+          <a:lstStyle/>
+          <a:p>
+            <a:pPr indent="0" marL="0">
+              <a:buNone/>
+            </a:pPr>
+            <a:r>
+              <a:rPr lang="en-US" sz="1400" dirty="0">
+                <a:solidFill>
+                  <a:srgbClr val="B8923E"/>
+                </a:solidFill>
+                <a:latin typeface="Microsoft JhengHei" pitchFamily="34" charset="0"/>
+                <a:ea typeface="Microsoft JhengHei" pitchFamily="34" charset="-122"/>
+                <a:cs typeface="Microsoft JhengHei" pitchFamily="34" charset="-120"/>
+              </a:rPr>
+              <a:t>→</a:t>
+            </a:r>
+            <a:endParaRPr lang="en-US" sz="1400" dirty="0"/>
+          </a:p>
+        </p:txBody>
+      </p:sp>
+      <p:sp>
+        <p:nvSpPr>
+          <p:cNvPr id="15" name="Text 13"/>
+          <p:cNvSpPr/>
+          <p:nvPr/>
+        </p:nvSpPr>
+        <p:spPr>
+          <a:xfrm>
+            <a:off x="1051560" y="2596896"/>
+            <a:ext cx="7406640" cy="475488"/>
+          </a:xfrm>
+          <a:prstGeom prst="rect">
+            <a:avLst/>
+          </a:prstGeom>
+          <a:noFill/>
+          <a:ln/>
+        </p:spPr>
+        <p:txBody>
+          <a:bodyPr wrap="square" rtlCol="0" anchor="ctr"/>
+          <a:lstStyle/>
+          <a:p>
+            <a:pPr indent="0" marL="0">
+              <a:lnSpc>
+                <a:spcPts val="1300"/>
+              </a:lnSpc>
+              <a:buNone/>
+            </a:pPr>
+            <a:r>
+              <a:rPr lang="en-US" sz="1150" dirty="0">
+                <a:solidFill>
+                  <a:srgbClr val="3D3935"/>
+                </a:solidFill>
+                <a:latin typeface="Microsoft JhengHei" pitchFamily="34" charset="0"/>
+                <a:ea typeface="Microsoft JhengHei" pitchFamily="34" charset="-122"/>
+                <a:cs typeface="Microsoft JhengHei" pitchFamily="34" charset="-120"/>
+              </a:rPr>
+              <a:t>客人拿臺北洲際的兌換碼到高雄要求核銷
+</a:t>
+            </a:r>
+            <a:pPr indent="0" marL="0">
+              <a:lnSpc>
+                <a:spcPts val="1300"/>
+              </a:lnSpc>
+              <a:buNone/>
+            </a:pPr>
+            <a:r>
+              <a:rPr lang="en-US" sz="850" dirty="0">
+                <a:solidFill>
+                  <a:srgbClr val="6E6A63"/>
+                </a:solidFill>
+                <a:latin typeface="Microsoft JhengHei" pitchFamily="34" charset="0"/>
+                <a:ea typeface="Microsoft JhengHei" pitchFamily="34" charset="-122"/>
+                <a:cs typeface="Microsoft JhengHei" pitchFamily="34" charset="-120"/>
+              </a:rPr>
+              <a:t>A guest presents a Taipei redemption code at a Kaohsiung counter</a:t>
+            </a:r>
+            <a:endParaRPr lang="en-US" sz="1150" dirty="0"/>
+          </a:p>
+        </p:txBody>
+      </p:sp>
+      <p:sp>
+        <p:nvSpPr>
+          <p:cNvPr id="16" name="Shape 14"/>
+          <p:cNvSpPr/>
+          <p:nvPr/>
+        </p:nvSpPr>
+        <p:spPr>
+          <a:xfrm>
+            <a:off x="502920" y="3209544"/>
+            <a:ext cx="8138160" cy="566928"/>
+          </a:xfrm>
+          <a:prstGeom prst="roundRect">
+            <a:avLst>
+              <a:gd name="adj" fmla="val 8065"/>
+            </a:avLst>
+          </a:prstGeom>
+          <a:solidFill>
+            <a:srgbClr val="FFFDFA"/>
+          </a:solidFill>
+          <a:ln w="9525">
+            <a:solidFill>
+              <a:srgbClr val="DAD9D6"/>
+            </a:solidFill>
+            <a:prstDash val="solid"/>
+          </a:ln>
+        </p:spPr>
+      </p:sp>
+      <p:sp>
+        <p:nvSpPr>
+          <p:cNvPr id="17" name="Text 15"/>
+          <p:cNvSpPr/>
+          <p:nvPr/>
+        </p:nvSpPr>
+        <p:spPr>
+          <a:xfrm>
+            <a:off x="685800" y="3255264"/>
+            <a:ext cx="320040" cy="457200"/>
+          </a:xfrm>
+          <a:prstGeom prst="rect">
+            <a:avLst/>
+          </a:prstGeom>
+          <a:noFill/>
+          <a:ln/>
+        </p:spPr>
+        <p:txBody>
+          <a:bodyPr wrap="square" rtlCol="0" anchor="ctr"/>
+          <a:lstStyle/>
+          <a:p>
+            <a:pPr indent="0" marL="0">
+              <a:buNone/>
+            </a:pPr>
+            <a:r>
+              <a:rPr lang="en-US" sz="1400" dirty="0">
+                <a:solidFill>
+                  <a:srgbClr val="B8923E"/>
+                </a:solidFill>
+                <a:latin typeface="Microsoft JhengHei" pitchFamily="34" charset="0"/>
+                <a:ea typeface="Microsoft JhengHei" pitchFamily="34" charset="-122"/>
+                <a:cs typeface="Microsoft JhengHei" pitchFamily="34" charset="-120"/>
+              </a:rPr>
+              <a:t>→</a:t>
+            </a:r>
+            <a:endParaRPr lang="en-US" sz="1400" dirty="0"/>
+          </a:p>
+        </p:txBody>
+      </p:sp>
+      <p:sp>
+        <p:nvSpPr>
+          <p:cNvPr id="18" name="Text 16"/>
+          <p:cNvSpPr/>
+          <p:nvPr/>
+        </p:nvSpPr>
+        <p:spPr>
+          <a:xfrm>
+            <a:off x="1051560" y="3255264"/>
+            <a:ext cx="7406640" cy="475488"/>
+          </a:xfrm>
+          <a:prstGeom prst="rect">
+            <a:avLst/>
+          </a:prstGeom>
+          <a:noFill/>
+          <a:ln/>
+        </p:spPr>
+        <p:txBody>
+          <a:bodyPr wrap="square" rtlCol="0" anchor="ctr"/>
+          <a:lstStyle/>
+          <a:p>
+            <a:pPr indent="0" marL="0">
+              <a:lnSpc>
+                <a:spcPts val="1300"/>
+              </a:lnSpc>
+              <a:buNone/>
+            </a:pPr>
+            <a:r>
+              <a:rPr lang="en-US" sz="1150" dirty="0">
+                <a:solidFill>
+                  <a:srgbClr val="3D3935"/>
+                </a:solidFill>
+                <a:latin typeface="Microsoft JhengHei" pitchFamily="34" charset="0"/>
+                <a:ea typeface="Microsoft JhengHei" pitchFamily="34" charset="-122"/>
+                <a:cs typeface="Microsoft JhengHei" pitchFamily="34" charset="-120"/>
+              </a:rPr>
+              <a:t>客人對中獎結果或活動規則提出申訴
+</a:t>
+            </a:r>
+            <a:pPr indent="0" marL="0">
+              <a:lnSpc>
+                <a:spcPts val="1300"/>
+              </a:lnSpc>
+              <a:buNone/>
+            </a:pPr>
+            <a:r>
+              <a:rPr lang="en-US" sz="850" dirty="0">
+                <a:solidFill>
+                  <a:srgbClr val="6E6A63"/>
+                </a:solidFill>
+                <a:latin typeface="Microsoft JhengHei" pitchFamily="34" charset="0"/>
+                <a:ea typeface="Microsoft JhengHei" pitchFamily="34" charset="-122"/>
+                <a:cs typeface="Microsoft JhengHei" pitchFamily="34" charset="-120"/>
+              </a:rPr>
+              <a:t>A guest disputes the result or the campaign rules</a:t>
+            </a:r>
+            <a:endParaRPr lang="en-US" sz="1150" dirty="0"/>
+          </a:p>
+        </p:txBody>
+      </p:sp>
+      <p:sp>
+        <p:nvSpPr>
+          <p:cNvPr id="19" name="Shape 17"/>
+          <p:cNvSpPr/>
+          <p:nvPr/>
+        </p:nvSpPr>
+        <p:spPr>
+          <a:xfrm>
+            <a:off x="502920" y="3867912"/>
+            <a:ext cx="8138160" cy="566928"/>
+          </a:xfrm>
+          <a:prstGeom prst="roundRect">
+            <a:avLst>
+              <a:gd name="adj" fmla="val 8065"/>
+            </a:avLst>
+          </a:prstGeom>
+          <a:solidFill>
+            <a:srgbClr val="FFFDFA"/>
+          </a:solidFill>
+          <a:ln w="9525">
+            <a:solidFill>
+              <a:srgbClr val="DAD9D6"/>
+            </a:solidFill>
+            <a:prstDash val="solid"/>
+          </a:ln>
+        </p:spPr>
+      </p:sp>
+      <p:sp>
+        <p:nvSpPr>
+          <p:cNvPr id="20" name="Text 18"/>
+          <p:cNvSpPr/>
+          <p:nvPr/>
+        </p:nvSpPr>
+        <p:spPr>
+          <a:xfrm>
+            <a:off x="685800" y="3913632"/>
+            <a:ext cx="320040" cy="457200"/>
+          </a:xfrm>
+          <a:prstGeom prst="rect">
+            <a:avLst/>
+          </a:prstGeom>
+          <a:noFill/>
+          <a:ln/>
+        </p:spPr>
+        <p:txBody>
+          <a:bodyPr wrap="square" rtlCol="0" anchor="ctr"/>
+          <a:lstStyle/>
+          <a:p>
+            <a:pPr indent="0" marL="0">
+              <a:buNone/>
+            </a:pPr>
+            <a:r>
+              <a:rPr lang="en-US" sz="1400" dirty="0">
+                <a:solidFill>
+                  <a:srgbClr val="B8923E"/>
+                </a:solidFill>
+                <a:latin typeface="Microsoft JhengHei" pitchFamily="34" charset="0"/>
+                <a:ea typeface="Microsoft JhengHei" pitchFamily="34" charset="-122"/>
+                <a:cs typeface="Microsoft JhengHei" pitchFamily="34" charset="-120"/>
+              </a:rPr>
+              <a:t>→</a:t>
+            </a:r>
+            <a:endParaRPr lang="en-US" sz="1400" dirty="0"/>
+          </a:p>
+        </p:txBody>
+      </p:sp>
+      <p:sp>
+        <p:nvSpPr>
+          <p:cNvPr id="21" name="Text 19"/>
+          <p:cNvSpPr/>
+          <p:nvPr/>
+        </p:nvSpPr>
+        <p:spPr>
+          <a:xfrm>
+            <a:off x="1051560" y="3913632"/>
+            <a:ext cx="7406640" cy="475488"/>
+          </a:xfrm>
+          <a:prstGeom prst="rect">
+            <a:avLst/>
+          </a:prstGeom>
+          <a:noFill/>
+          <a:ln/>
+        </p:spPr>
+        <p:txBody>
+          <a:bodyPr wrap="square" rtlCol="0" anchor="ctr"/>
+          <a:lstStyle/>
+          <a:p>
+            <a:pPr indent="0" marL="0">
+              <a:lnSpc>
+                <a:spcPts val="1300"/>
+              </a:lnSpc>
+              <a:buNone/>
+            </a:pPr>
+            <a:r>
+              <a:rPr lang="en-US" sz="1150" dirty="0">
+                <a:solidFill>
+                  <a:srgbClr val="3D3935"/>
+                </a:solidFill>
+                <a:latin typeface="Microsoft JhengHei" pitchFamily="34" charset="0"/>
+                <a:ea typeface="Microsoft JhengHei" pitchFamily="34" charset="-122"/>
+                <a:cs typeface="Microsoft JhengHei" pitchFamily="34" charset="-120"/>
+              </a:rPr>
+              <a:t>同一位客人短時間內出現大量中獎紀錄
+</a:t>
+            </a:r>
+            <a:pPr indent="0" marL="0">
+              <a:lnSpc>
+                <a:spcPts val="1300"/>
+              </a:lnSpc>
+              <a:buNone/>
+            </a:pPr>
+            <a:r>
+              <a:rPr lang="en-US" sz="850" dirty="0">
+                <a:solidFill>
+                  <a:srgbClr val="6E6A63"/>
+                </a:solidFill>
+                <a:latin typeface="Microsoft JhengHei" pitchFamily="34" charset="0"/>
+                <a:ea typeface="Microsoft JhengHei" pitchFamily="34" charset="-122"/>
+                <a:cs typeface="Microsoft JhengHei" pitchFamily="34" charset="-120"/>
+              </a:rPr>
+              <a:t>One guest shows an unusually high number of wins in a short period</a:t>
+            </a:r>
+            <a:endParaRPr lang="en-US" sz="1150" dirty="0"/>
+          </a:p>
+        </p:txBody>
+      </p:sp>
+    </p:spTree>
+  </p:cSld>
+  <p:clrMapOvr>
+    <a:masterClrMapping/>
+  </p:clrMapOvr>
+</p:sld>
+</file>
+
+<file path=ppt/slides/slide16.xml><?xml version="1.0" encoding="utf-8"?>
+<p:sld xmlns:a="http://schemas.openxmlformats.org/drawingml/2006/main" xmlns:r="http://schemas.openxmlformats.org/officeDocument/2006/relationships" xmlns:p="http://schemas.openxmlformats.org/presentationml/2006/main">
+  <p:cSld name="Slide 16">
     <p:bg>
       <p:bgPr>
         <a:solidFill>
@@ -8083,7 +8872,7 @@
                 <a:ea typeface="Microsoft JhengHei" pitchFamily="34" charset="-122"/>
                 <a:cs typeface="Microsoft JhengHei" pitchFamily="34" charset="-120"/>
               </a:rPr>
-              <a:t>常見問題與標準回答</a:t>
+              <a:t>常見問題與標準回答（含櫃檯）</a:t>
             </a:r>
             <a:endParaRPr lang="en-US" sz="1350" dirty="0"/>
           </a:p>

--- a/docs/洲遊幣Lite_員工手冊_一般版_雙語.pptx
+++ b/docs/洲遊幣Lite_員工手冊_一般版_雙語.pptx
@@ -4872,7 +4872,7 @@
                 <a:ea typeface="Microsoft JhengHei" pitchFamily="34" charset="-122"/>
                 <a:cs typeface="Microsoft JhengHei" pitchFamily="34" charset="-120"/>
               </a:rPr>
-              <a:t>為什麼一等獎、二等獎抽到的都是餐飲 85 折？
+              <a:t>為什麼三個等級抽到的都是餐飲 85 折？
 </a:t>
             </a:r>
             <a:pPr indent="0" marL="0">
@@ -4890,7 +4890,7 @@
                 <a:ea typeface="Microsoft JhengHei" pitchFamily="34" charset="-122"/>
                 <a:cs typeface="Microsoft JhengHei" pitchFamily="34" charset="-120"/>
               </a:rPr>
-              <a:t>　  Why do the First and Second Prize tiers only give the dining discount?</a:t>
+              <a:t>　  Why does every tier give the same dining discount?</a:t>
             </a:r>
             <a:endParaRPr lang="en-US" sz="1100" dirty="0"/>
           </a:p>
@@ -4932,7 +4932,7 @@
                 <a:ea typeface="Microsoft JhengHei" pitchFamily="34" charset="-122"/>
                 <a:cs typeface="Microsoft JhengHei" pitchFamily="34" charset="-120"/>
               </a:rPr>
-              <a:t>這兩個等級的獎品已經全部送完，目前抽到的是保底的餐飲 85 折。三等獎還有其他獎品，建議您改抽三等獎。
+              <a:t>各項獎品都有名額限制，目前多數已經送完，所以抽到的是保底的餐飲 85 折優惠禮遇。這張券在館內餐廳都可以使用。
 </a:t>
             </a:r>
             <a:pPr indent="0" marL="0">
@@ -4950,7 +4950,7 @@
                 <a:ea typeface="Microsoft JhengHei" pitchFamily="34" charset="-122"/>
                 <a:cs typeface="Microsoft JhengHei" pitchFamily="34" charset="-120"/>
               </a:rPr>
-              <a:t>All prizes in those two tiers have been claimed, so the guaranteed 15% dining discount is awarded instead. The Third Prize tier still has other prizes available.</a:t>
+              <a:t>Every prize has a limited allocation and most have now been claimed, so the guaranteed 15% dining discount is awarded instead. The voucher can be used at our restaurants.</a:t>
             </a:r>
             <a:endParaRPr lang="en-US" sz="1050" dirty="0"/>
           </a:p>
